--- a/output/財管手收目標訂定原則比較_115vs116方案_EDITED_VER2_加分行表現分析.pptx
+++ b/output/財管手收目標訂定原則比較_115vs116方案_EDITED_VER2_加分行表現分析.pptx
@@ -143,7 +143,7 @@
             <p14:sldId id="263"/>
           </p14:sldIdLst>
         </p14:section>
-        <p14:section name="114→115 分行表現分析" id="{A1AA984D-F9B9-41F6-82C6-2284325D80F1}">
+        <p14:section name="114→115 分行表現分析" id="{E94D4815-4B75-4570-81AA-0A45B34EE70C}">
           <p14:sldIdLst>
             <p14:sldId id="301"/>
             <p14:sldId id="302"/>
@@ -12207,7 +12207,7 @@
                   <a:srgbClr val="7F7F7F"/>
                 </a:solidFill>
               </a:rPr>
-              <a:t>115年年化：全行目標 117.85億 → 實績 124.86億（達成 105.9%）。整體達標掩蓋了 84 家未達成分行 8.2億 的缺口</a:t>
+              <a:t>115年年化：目標 117.85億 → 實績 124.86億（達成 105.9%），整體達標掩蓋了 84 家未達成分行 8.2億 的缺口</a:t>
             </a:r>
             <a:endParaRPr lang="en-US" sz="1300" dirty="0"/>
           </a:p>
@@ -12306,7 +12306,7 @@
         <p:spPr>
           <a:xfrm>
             <a:off x="640080" y="5166360"/>
-            <a:ext cx="1554480" cy="457200"/>
+            <a:ext cx="1554480" cy="548640"/>
           </a:xfrm>
           <a:prstGeom prst="rect">
             <a:avLst/>
@@ -12322,20 +12322,20 @@
               <a:buNone/>
             </a:pPr>
             <a:r>
-              <a:rPr lang="en-US" sz="1100" dirty="0">
+              <a:rPr lang="en-US" sz="1000" dirty="0">
                 <a:solidFill>
                   <a:srgbClr val="000000"/>
                 </a:solidFill>
               </a:rPr>
               <a:t>115年目標</a:t>
             </a:r>
-            <a:endParaRPr lang="en-US" sz="1100" dirty="0"/>
+            <a:endParaRPr lang="en-US" sz="1000" dirty="0"/>
           </a:p>
         </p:txBody>
       </p:sp>
       <p:sp>
         <p:nvSpPr>
-          <p:cNvPr id="8" name="bar 超額分行 (99家)"/>
+          <p:cNvPr id="8" name="bar 115年超額 99家 達標群52＋未達標群47"/>
           <p:cNvSpPr/>
           <p:nvPr/>
         </p:nvSpPr>
@@ -12403,7 +12403,7 @@
         <p:spPr>
           <a:xfrm>
             <a:off x="2240280" y="5166360"/>
-            <a:ext cx="1554480" cy="457200"/>
+            <a:ext cx="1554480" cy="548640"/>
           </a:xfrm>
           <a:prstGeom prst="rect">
             <a:avLst/>
@@ -12419,14 +12419,28 @@
               <a:buNone/>
             </a:pPr>
             <a:r>
-              <a:rPr lang="en-US" sz="1100" dirty="0">
+              <a:rPr lang="en-US" sz="1000" dirty="0">
                 <a:solidFill>
                   <a:srgbClr val="000000"/>
                 </a:solidFill>
               </a:rPr>
-              <a:t>超額分行 (99家)</a:t>
+              <a:t>115年超額 99家</a:t>
             </a:r>
-            <a:endParaRPr lang="en-US" sz="1100" dirty="0"/>
+            <a:endParaRPr lang="en-US" sz="1000" dirty="0"/>
+          </a:p>
+          <a:p>
+            <a:pPr algn="ctr" indent="0" marL="0">
+              <a:buNone/>
+            </a:pPr>
+            <a:r>
+              <a:rPr lang="en-US" sz="1000" dirty="0">
+                <a:solidFill>
+                  <a:srgbClr val="000000"/>
+                </a:solidFill>
+              </a:rPr>
+              <a:t>達標群52＋未達標群47</a:t>
+            </a:r>
+            <a:endParaRPr lang="en-US" sz="1000" dirty="0"/>
           </a:p>
         </p:txBody>
       </p:sp>
@@ -12455,7 +12469,7 @@
       </p:sp>
       <p:sp>
         <p:nvSpPr>
-          <p:cNvPr id="12" name="bar 未達成分行 (84家)"/>
+          <p:cNvPr id="12" name="bar 115年未達成 84家 達標群18＋未達標群66"/>
           <p:cNvSpPr/>
           <p:nvPr/>
         </p:nvSpPr>
@@ -12523,7 +12537,7 @@
         <p:spPr>
           <a:xfrm>
             <a:off x="3840480" y="5166360"/>
-            <a:ext cx="1554480" cy="457200"/>
+            <a:ext cx="1554480" cy="548640"/>
           </a:xfrm>
           <a:prstGeom prst="rect">
             <a:avLst/>
@@ -12539,14 +12553,28 @@
               <a:buNone/>
             </a:pPr>
             <a:r>
-              <a:rPr lang="en-US" sz="1100" dirty="0">
+              <a:rPr lang="en-US" sz="1000" dirty="0">
                 <a:solidFill>
                   <a:srgbClr val="000000"/>
                 </a:solidFill>
               </a:rPr>
-              <a:t>未達成分行 (84家)</a:t>
+              <a:t>115年未達成 84家</a:t>
             </a:r>
-            <a:endParaRPr lang="en-US" sz="1100" dirty="0"/>
+            <a:endParaRPr lang="en-US" sz="1000" dirty="0"/>
+          </a:p>
+          <a:p>
+            <a:pPr algn="ctr" indent="0" marL="0">
+              <a:buNone/>
+            </a:pPr>
+            <a:r>
+              <a:rPr lang="en-US" sz="1000" dirty="0">
+                <a:solidFill>
+                  <a:srgbClr val="000000"/>
+                </a:solidFill>
+              </a:rPr>
+              <a:t>達標群18＋未達標群66</a:t>
+            </a:r>
+            <a:endParaRPr lang="en-US" sz="1000" dirty="0"/>
           </a:p>
         </p:txBody>
       </p:sp>
@@ -12643,7 +12671,7 @@
         <p:spPr>
           <a:xfrm>
             <a:off x="5440680" y="5166360"/>
-            <a:ext cx="1554480" cy="457200"/>
+            <a:ext cx="1554480" cy="548640"/>
           </a:xfrm>
           <a:prstGeom prst="rect">
             <a:avLst/>
@@ -12659,14 +12687,14 @@
               <a:buNone/>
             </a:pPr>
             <a:r>
-              <a:rPr lang="en-US" sz="1100" dirty="0">
+              <a:rPr lang="en-US" sz="1000" dirty="0">
                 <a:solidFill>
                   <a:srgbClr val="000000"/>
                 </a:solidFill>
               </a:rPr>
               <a:t>115年年化實績</a:t>
             </a:r>
-            <a:endParaRPr lang="en-US" sz="1100" dirty="0"/>
+            <a:endParaRPr lang="en-US" sz="1000" dirty="0"/>
           </a:p>
         </p:txBody>
       </p:sp>
@@ -12678,8 +12706,8 @@
         </p:nvSpPr>
         <p:spPr>
           <a:xfrm>
-            <a:off x="822960" y="5623560"/>
-            <a:ext cx="6035040" cy="228600"/>
+            <a:off x="548640" y="5760720"/>
+            <a:ext cx="6309360" cy="502920"/>
           </a:xfrm>
           <a:prstGeom prst="rect">
             <a:avLst/>
@@ -12690,6 +12718,20 @@
         <p:txBody>
           <a:bodyPr wrap="square" lIns="0" tIns="0" rIns="0" bIns="0" rtlCol="0" anchor="ctr"/>
           <a:lstStyle/>
+          <a:p>
+            <a:pPr indent="0" marL="0">
+              <a:buNone/>
+            </a:pPr>
+            <a:r>
+              <a:rPr lang="en-US" sz="950" dirty="0">
+                <a:solidFill>
+                  <a:srgbClr val="7F7F7F"/>
+                </a:solidFill>
+              </a:rPr>
+              <a:t>家數檢核：183家 ＝ 115年超額 99家 ＋ 115年未達成 84家；右表66家為「114年未達標群113家」中115年再次未達成者，其餘47家已超額。</a:t>
+            </a:r>
+            <a:endParaRPr lang="en-US" sz="950" dirty="0"/>
+          </a:p>
           <a:p>
             <a:pPr indent="0" marL="0">
               <a:buNone/>
@@ -12858,10 +12900,10 @@
             <a:tbl>
               <a:tblPr/>
               <a:tblGrid>
-                <a:gridCol w="1828800"/>
-                <a:gridCol w="685800"/>
+                <a:gridCol w="1645920"/>
+                <a:gridCol w="914400"/>
                 <a:gridCol w="1097280"/>
-                <a:gridCol w="914400"/>
+                <a:gridCol w="868680"/>
               </a:tblGrid>
               <a:tr h="301752">
                 <a:tc>
@@ -12873,14 +12915,14 @@
                         <a:buNone/>
                       </a:pPr>
                       <a:r>
-                        <a:rPr lang="en-US" sz="1400" b="1" dirty="0">
+                        <a:rPr lang="en-US" sz="1200" b="1" dirty="0">
                           <a:solidFill>
                             <a:srgbClr val="FFFFFF"/>
                           </a:solidFill>
                         </a:rPr>
                         <a:t>114年分群</a:t>
                       </a:r>
-                      <a:endParaRPr lang="en-US" sz="1400" dirty="0"/>
+                      <a:endParaRPr lang="en-US" sz="1200" dirty="0"/>
                     </a:p>
                   </a:txBody>
                   <a:tcPr marL="36576" marR="36576" marT="36576" marB="36576" anchor="ctr">
@@ -12934,14 +12976,14 @@
                         <a:buNone/>
                       </a:pPr>
                       <a:r>
-                        <a:rPr lang="en-US" sz="1400" b="1" dirty="0">
+                        <a:rPr lang="en-US" sz="1050" b="1" dirty="0">
                           <a:solidFill>
                             <a:srgbClr val="FFFFFF"/>
                           </a:solidFill>
                         </a:rPr>
-                        <a:t>家數</a:t>
+                        <a:t>115年未達成家數</a:t>
                       </a:r>
-                      <a:endParaRPr lang="en-US" sz="1400" dirty="0"/>
+                      <a:endParaRPr lang="en-US" sz="1050" dirty="0"/>
                     </a:p>
                   </a:txBody>
                   <a:tcPr marL="36576" marR="36576" marT="36576" marB="36576" anchor="ctr">
@@ -14597,8 +14639,8 @@
         </p:nvSpPr>
         <p:spPr>
           <a:xfrm>
-            <a:off x="7086600" y="4343400"/>
-            <a:ext cx="4526280" cy="1691640"/>
+            <a:off x="7086600" y="4709160"/>
+            <a:ext cx="4526280" cy="1325880"/>
           </a:xfrm>
           <a:prstGeom prst="rect">
             <a:avLst/>
@@ -14617,14 +14659,14 @@
               <a:buNone/>
             </a:pPr>
             <a:r>
-              <a:rPr lang="en-US" sz="1100" dirty="0">
+              <a:rPr lang="en-US" sz="1050" dirty="0">
                 <a:solidFill>
                   <a:srgbClr val="000000"/>
                 </a:solidFill>
               </a:rPr>
-              <a:t>114年未達標群被加成的目標，實際上有 7.1億 沒有達成，占全行缺口 86%。</a:t>
+              <a:t>114年未達標群113家中，115年有66家再次未達成、缺口 7.1億，占全行缺口 86%；其餘47家超額 6.2億。</a:t>
             </a:r>
-            <a:endParaRPr lang="en-US" sz="1100" dirty="0"/>
+            <a:endParaRPr lang="en-US" sz="1050" dirty="0"/>
           </a:p>
           <a:p>
             <a:pPr indent="0" marL="0">
@@ -14634,14 +14676,14 @@
               <a:buNone/>
             </a:pPr>
             <a:r>
-              <a:rPr lang="en-US" sz="1100" dirty="0">
+              <a:rPr lang="en-US" sz="1050" dirty="0">
                 <a:solidFill>
                   <a:srgbClr val="000000"/>
                 </a:solidFill>
               </a:rPr>
               <a:t>這些缺口由 99 家超額分行（多為績優分行）的 15.2億 填補，全行仍達成 105.9%，使結構問題在總數中被掩蓋。</a:t>
             </a:r>
-            <a:endParaRPr lang="en-US" sz="1100" dirty="0"/>
+            <a:endParaRPr lang="en-US" sz="1050" dirty="0"/>
           </a:p>
           <a:p>
             <a:pPr indent="0" marL="0">
@@ -14651,14 +14693,14 @@
               <a:buNone/>
             </a:pPr>
             <a:r>
-              <a:rPr lang="en-US" sz="1100" b="1" dirty="0">
+              <a:rPr lang="en-US" sz="1050" b="1" dirty="0">
                 <a:solidFill>
                   <a:srgbClr val="C00000"/>
                 </a:solidFill>
               </a:rPr>
               <a:t>目標加成並未換來實績，只是把缺口轉嫁到其他分行。</a:t>
             </a:r>
-            <a:endParaRPr lang="en-US" sz="1100" dirty="0"/>
+            <a:endParaRPr lang="en-US" sz="1050" dirty="0"/>
           </a:p>
         </p:txBody>
       </p:sp>

--- a/output/財管手收目標訂定原則比較_115vs116方案_EDITED_VER2_加分行表現分析.pptx
+++ b/output/財管手收目標訂定原則比較_115vs116方案_EDITED_VER2_加分行表現分析.pptx
@@ -143,7 +143,7 @@
             <p14:sldId id="263"/>
           </p14:sldIdLst>
         </p14:section>
-        <p14:section name="114→115 分行表現分析" id="{E94D4815-4B75-4570-81AA-0A45B34EE70C}">
+        <p14:section name="114→115 分行表現分析" id="{6D4F04D9-665B-495A-95FC-8C4D0E420418}">
           <p14:sldIdLst>
             <p14:sldId id="301"/>
             <p14:sldId id="302"/>
@@ -2261,7 +2261,7 @@
           <a:p>
             <a:r>
               <a:rPr lang="en-US" dirty="0"/>
-              <a:t>瀑布：目標117.85億＋超額15.23億−缺口8.23億＝實績124.86億。缺口86%來自114年未達標群。</a:t>
+              <a:t>瀑布：目標117.85億＋超額15.23億−缺口8.23億＝實績124.86億。超額60%來自114年達標群；缺口86%來自114年未達標群。</a:t>
             </a:r>
             <a:endParaRPr lang="en-US" dirty="0"/>
           </a:p>
@@ -12221,7 +12221,7 @@
         </p:nvSpPr>
         <p:spPr>
           <a:xfrm>
-            <a:off x="822960" y="5120640"/>
+            <a:off x="822960" y="4892040"/>
             <a:ext cx="5989320" cy="0"/>
           </a:xfrm>
           <a:prstGeom prst="line">
@@ -12244,8 +12244,8 @@
         </p:nvSpPr>
         <p:spPr>
           <a:xfrm>
-            <a:off x="822960" y="3488436"/>
-            <a:ext cx="1188720" cy="1632204"/>
+            <a:off x="822960" y="3353105"/>
+            <a:ext cx="1188720" cy="1538935"/>
           </a:xfrm>
           <a:prstGeom prst="rect">
             <a:avLst/>
@@ -12269,7 +12269,7 @@
         </p:nvSpPr>
         <p:spPr>
           <a:xfrm>
-            <a:off x="640080" y="3168396"/>
+            <a:off x="640080" y="3033065"/>
             <a:ext cx="1554480" cy="274320"/>
           </a:xfrm>
           <a:prstGeom prst="rect">
@@ -12305,7 +12305,7 @@
         </p:nvSpPr>
         <p:spPr>
           <a:xfrm>
-            <a:off x="640080" y="5166360"/>
+            <a:off x="640080" y="4937760"/>
             <a:ext cx="1554480" cy="548640"/>
           </a:xfrm>
           <a:prstGeom prst="rect">
@@ -12341,8 +12341,8 @@
         </p:nvSpPr>
         <p:spPr>
           <a:xfrm>
-            <a:off x="2423160" y="2095805"/>
-            <a:ext cx="1188720" cy="1392631"/>
+            <a:off x="2423160" y="2040053"/>
+            <a:ext cx="1188720" cy="1313052"/>
           </a:xfrm>
           <a:prstGeom prst="rect">
             <a:avLst/>
@@ -12366,7 +12366,7 @@
         </p:nvSpPr>
         <p:spPr>
           <a:xfrm>
-            <a:off x="2240280" y="1775765"/>
+            <a:off x="2240280" y="1720013"/>
             <a:ext cx="1554480" cy="274320"/>
           </a:xfrm>
           <a:prstGeom prst="rect">
@@ -12402,7 +12402,7 @@
         </p:nvSpPr>
         <p:spPr>
           <a:xfrm>
-            <a:off x="2240280" y="5166360"/>
+            <a:off x="2240280" y="4937760"/>
             <a:ext cx="1554480" cy="548640"/>
           </a:xfrm>
           <a:prstGeom prst="rect">
@@ -12452,7 +12452,7 @@
         </p:nvSpPr>
         <p:spPr>
           <a:xfrm>
-            <a:off x="2011680" y="3488436"/>
+            <a:off x="2011680" y="3353105"/>
             <a:ext cx="411480" cy="0"/>
           </a:xfrm>
           <a:prstGeom prst="line">
@@ -12475,8 +12475,8 @@
         </p:nvSpPr>
         <p:spPr>
           <a:xfrm>
-            <a:off x="4023360" y="2095805"/>
-            <a:ext cx="1188720" cy="751637"/>
+            <a:off x="4023360" y="2040053"/>
+            <a:ext cx="1188720" cy="708686"/>
           </a:xfrm>
           <a:prstGeom prst="rect">
             <a:avLst/>
@@ -12500,7 +12500,7 @@
         </p:nvSpPr>
         <p:spPr>
           <a:xfrm>
-            <a:off x="3840480" y="1775765"/>
+            <a:off x="3840480" y="1720013"/>
             <a:ext cx="1554480" cy="274320"/>
           </a:xfrm>
           <a:prstGeom prst="rect">
@@ -12536,7 +12536,7 @@
         </p:nvSpPr>
         <p:spPr>
           <a:xfrm>
-            <a:off x="3840480" y="5166360"/>
+            <a:off x="3840480" y="4937760"/>
             <a:ext cx="1554480" cy="548640"/>
           </a:xfrm>
           <a:prstGeom prst="rect">
@@ -12586,7 +12586,7 @@
         </p:nvSpPr>
         <p:spPr>
           <a:xfrm>
-            <a:off x="3611880" y="2095805"/>
+            <a:off x="3611880" y="2040053"/>
             <a:ext cx="411480" cy="0"/>
           </a:xfrm>
           <a:prstGeom prst="line">
@@ -12609,8 +12609,8 @@
         </p:nvSpPr>
         <p:spPr>
           <a:xfrm>
-            <a:off x="5623560" y="2847442"/>
-            <a:ext cx="1188720" cy="2273198"/>
+            <a:off x="5623560" y="2748739"/>
+            <a:ext cx="1188720" cy="2143301"/>
           </a:xfrm>
           <a:prstGeom prst="rect">
             <a:avLst/>
@@ -12634,7 +12634,7 @@
         </p:nvSpPr>
         <p:spPr>
           <a:xfrm>
-            <a:off x="5440680" y="2527402"/>
+            <a:off x="5440680" y="2428699"/>
             <a:ext cx="1554480" cy="274320"/>
           </a:xfrm>
           <a:prstGeom prst="rect">
@@ -12670,7 +12670,7 @@
         </p:nvSpPr>
         <p:spPr>
           <a:xfrm>
-            <a:off x="5440680" y="5166360"/>
+            <a:off x="5440680" y="4937760"/>
             <a:ext cx="1554480" cy="548640"/>
           </a:xfrm>
           <a:prstGeom prst="rect">
@@ -12706,58 +12706,8 @@
         </p:nvSpPr>
         <p:spPr>
           <a:xfrm>
-            <a:off x="548640" y="5760720"/>
-            <a:ext cx="6309360" cy="502920"/>
-          </a:xfrm>
-          <a:prstGeom prst="rect">
-            <a:avLst/>
-          </a:prstGeom>
-          <a:noFill/>
-          <a:ln/>
-        </p:spPr>
-        <p:txBody>
-          <a:bodyPr wrap="square" lIns="0" tIns="0" rIns="0" bIns="0" rtlCol="0" anchor="ctr"/>
-          <a:lstStyle/>
-          <a:p>
-            <a:pPr indent="0" marL="0">
-              <a:buNone/>
-            </a:pPr>
-            <a:r>
-              <a:rPr lang="en-US" sz="950" dirty="0">
-                <a:solidFill>
-                  <a:srgbClr val="7F7F7F"/>
-                </a:solidFill>
-              </a:rPr>
-              <a:t>家數檢核：183家 ＝ 115年超額 99家 ＋ 115年未達成 84家；右表66家為「114年未達標群113家」中115年再次未達成者，其餘47家已超額。</a:t>
-            </a:r>
-            <a:endParaRPr lang="en-US" sz="950" dirty="0"/>
-          </a:p>
-          <a:p>
-            <a:pPr indent="0" marL="0">
-              <a:buNone/>
-            </a:pPr>
-            <a:r>
-              <a:rPr lang="en-US" sz="950" dirty="0">
-                <a:solidFill>
-                  <a:srgbClr val="7F7F7F"/>
-                </a:solidFill>
-              </a:rPr>
-              <a:t>單位：億元；縱軸自100億起</a:t>
-            </a:r>
-            <a:endParaRPr lang="en-US" sz="950" dirty="0"/>
-          </a:p>
-        </p:txBody>
-      </p:sp>
-      <p:sp>
-        <p:nvSpPr>
-          <p:cNvPr id="20" name="Text 18"/>
-          <p:cNvSpPr txBox="1"/>
-          <p:nvPr/>
-        </p:nvSpPr>
-        <p:spPr>
-          <a:xfrm>
-            <a:off x="548640" y="1554480"/>
-            <a:ext cx="2103120" cy="822960"/>
+            <a:off x="548640" y="5532120"/>
+            <a:ext cx="6309360" cy="685800"/>
           </a:xfrm>
           <a:prstGeom prst="rect">
             <a:avLst/>
@@ -12770,20 +12720,26 @@
           <a:lstStyle/>
           <a:p>
             <a:pPr indent="0" marL="0">
+              <a:spcAft>
+                <a:spcPts val="200"/>
+              </a:spcAft>
               <a:buNone/>
             </a:pPr>
             <a:r>
-              <a:rPr lang="en-US" sz="1050" b="1" dirty="0">
+              <a:rPr lang="en-US" sz="950" dirty="0">
                 <a:solidFill>
-                  <a:srgbClr val="2EA9B6"/>
+                  <a:srgbClr val="7F7F7F"/>
                 </a:solidFill>
               </a:rPr>
-              <a:t>超額 15.23億 組成</a:t>
+              <a:t>家數檢核：183家 ＝ 115年超額 99家 ＋ 115年未達成 84家；單位：億元，縱軸自100億起。</a:t>
             </a:r>
             <a:endParaRPr lang="en-US" sz="1050" dirty="0"/>
           </a:p>
           <a:p>
             <a:pPr indent="0" marL="0">
+              <a:spcAft>
+                <a:spcPts val="200"/>
+              </a:spcAft>
               <a:buNone/>
             </a:pPr>
             <a:r>
@@ -12792,21 +12748,24 @@
                   <a:srgbClr val="000000"/>
                 </a:solidFill>
               </a:rPr>
-              <a:t>114達標群 52家：+9.08億</a:t>
+              <a:t>114年未達標群113家中，66家再次未達成、缺口 7.1億（占全行缺口86%）；其餘47家超額 6.2億。這些缺口由 99 家超額分行的 15.2億 填補，全行仍達成 105.9%。</a:t>
             </a:r>
             <a:endParaRPr lang="en-US" sz="1050" dirty="0"/>
           </a:p>
           <a:p>
             <a:pPr indent="0" marL="0">
+              <a:spcAft>
+                <a:spcPts val="200"/>
+              </a:spcAft>
               <a:buNone/>
             </a:pPr>
             <a:r>
-              <a:rPr lang="en-US" sz="1050" dirty="0">
+              <a:rPr lang="en-US" sz="1050" b="1" dirty="0">
                 <a:solidFill>
-                  <a:srgbClr val="000000"/>
+                  <a:srgbClr val="C00000"/>
                 </a:solidFill>
               </a:rPr>
-              <a:t>114未達標群 47家：+6.16億</a:t>
+              <a:t>目標加成並未換來實績，只是把缺口轉嫁到其他分行。</a:t>
             </a:r>
             <a:endParaRPr lang="en-US" sz="1050" dirty="0"/>
           </a:p>
@@ -12814,14 +12773,14 @@
       </p:sp>
       <p:sp>
         <p:nvSpPr>
-          <p:cNvPr id="21" name="gap panel"/>
+          <p:cNvPr id="20" name="breakdown panel"/>
           <p:cNvSpPr/>
           <p:nvPr/>
         </p:nvSpPr>
         <p:spPr>
           <a:xfrm>
             <a:off x="6949440" y="1417320"/>
-            <a:ext cx="4800600" cy="4663440"/>
+            <a:ext cx="4800600" cy="4800600"/>
           </a:xfrm>
           <a:prstGeom prst="rect">
             <a:avLst/>
@@ -12839,22 +12798,22 @@
       </p:sp>
       <p:sp>
         <p:nvSpPr>
-          <p:cNvPr id="22" name="chip 缺口 8.23億 來自誰"/>
+          <p:cNvPr id="21" name="chip surplus"/>
           <p:cNvSpPr txBox="1"/>
           <p:nvPr/>
         </p:nvSpPr>
         <p:spPr>
           <a:xfrm>
-            <a:off x="7086600" y="1554480"/>
-            <a:ext cx="2194560" cy="365760"/>
+            <a:off x="7086600" y="1490472"/>
+            <a:ext cx="2377440" cy="292608"/>
           </a:xfrm>
           <a:prstGeom prst="roundRect">
             <a:avLst>
-              <a:gd name="adj" fmla="val 20000"/>
+              <a:gd name="adj" fmla="val 25000"/>
             </a:avLst>
           </a:prstGeom>
           <a:solidFill>
-            <a:srgbClr val="960A14"/>
+            <a:srgbClr val="2EA9B6"/>
           </a:solidFill>
           <a:ln/>
         </p:spPr>
@@ -12866,14 +12825,14 @@
               <a:buNone/>
             </a:pPr>
             <a:r>
-              <a:rPr lang="en-US" sz="1600" b="1" dirty="0">
+              <a:rPr lang="en-US" sz="1200" b="1" dirty="0">
                 <a:solidFill>
                   <a:srgbClr val="FFFFFF"/>
                 </a:solidFill>
               </a:rPr>
-              <a:t>缺口 8.23億 來自誰</a:t>
+              <a:t>超額 15.23億 來自誰</a:t>
             </a:r>
-            <a:endParaRPr lang="en-US" sz="1600" dirty="0"/>
+            <a:endParaRPr lang="en-US" sz="1200" dirty="0"/>
           </a:p>
         </p:txBody>
       </p:sp>
@@ -12892,7 +12851,7 @@
           </p:nvPr>
         </p:nvGraphicFramePr>
         <p:xfrm>
-          <a:off x="7086600" y="2057400"/>
+          <a:off x="7086600" y="1828800"/>
           <a:ext cx="4526280" cy="914400"/>
         </p:xfrm>
         <a:graphic>
@@ -12900,12 +12859,12 @@
             <a:tbl>
               <a:tblPr/>
               <a:tblGrid>
-                <a:gridCol w="1645920"/>
+                <a:gridCol w="1737360"/>
                 <a:gridCol w="914400"/>
-                <a:gridCol w="1097280"/>
+                <a:gridCol w="1005840"/>
                 <a:gridCol w="868680"/>
               </a:tblGrid>
-              <a:tr h="301752">
+              <a:tr h="228600">
                 <a:tc>
                   <a:txBody>
                     <a:bodyPr/>
@@ -12915,55 +12874,55 @@
                         <a:buNone/>
                       </a:pPr>
                       <a:r>
-                        <a:rPr lang="en-US" sz="1200" b="1" dirty="0">
+                        <a:rPr lang="en-US" sz="1100" b="1" dirty="0">
                           <a:solidFill>
                             <a:srgbClr val="FFFFFF"/>
                           </a:solidFill>
                         </a:rPr>
                         <a:t>114年分群</a:t>
                       </a:r>
-                      <a:endParaRPr lang="en-US" sz="1200" dirty="0"/>
-                    </a:p>
-                  </a:txBody>
-                  <a:tcPr marL="36576" marR="36576" marT="36576" marB="36576" anchor="ctr">
-                    <a:lnL w="9525" cap="flat" cmpd="sng" algn="ctr">
-                      <a:solidFill>
-                        <a:srgbClr val="FFFFFF"/>
-                      </a:solidFill>
-                      <a:prstDash val="solid"/>
-                      <a:round/>
-                      <a:headEnd type="none" w="med" len="med"/>
-                      <a:tailEnd type="none" w="med" len="med"/>
-                    </a:lnL>
-                    <a:lnR w="9525" cap="flat" cmpd="sng" algn="ctr">
-                      <a:solidFill>
-                        <a:srgbClr val="FFFFFF"/>
-                      </a:solidFill>
-                      <a:prstDash val="solid"/>
-                      <a:round/>
-                      <a:headEnd type="none" w="med" len="med"/>
-                      <a:tailEnd type="none" w="med" len="med"/>
-                    </a:lnR>
-                    <a:lnT w="9525" cap="flat" cmpd="sng" algn="ctr">
-                      <a:solidFill>
-                        <a:srgbClr val="FFFFFF"/>
-                      </a:solidFill>
-                      <a:prstDash val="solid"/>
-                      <a:round/>
-                      <a:headEnd type="none" w="med" len="med"/>
-                      <a:tailEnd type="none" w="med" len="med"/>
-                    </a:lnT>
-                    <a:lnB w="9525" cap="flat" cmpd="sng" algn="ctr">
-                      <a:solidFill>
-                        <a:srgbClr val="FFFFFF"/>
-                      </a:solidFill>
-                      <a:prstDash val="solid"/>
-                      <a:round/>
-                      <a:headEnd type="none" w="med" len="med"/>
-                      <a:tailEnd type="none" w="med" len="med"/>
-                    </a:lnB>
-                    <a:solidFill>
-                      <a:srgbClr val="960A14"/>
+                      <a:endParaRPr lang="en-US" sz="1100" dirty="0"/>
+                    </a:p>
+                  </a:txBody>
+                  <a:tcPr marL="36576" marR="36576" marT="36576" marB="36576" anchor="ctr">
+                    <a:lnL w="9525" cap="flat" cmpd="sng" algn="ctr">
+                      <a:solidFill>
+                        <a:srgbClr val="FFFFFF"/>
+                      </a:solidFill>
+                      <a:prstDash val="solid"/>
+                      <a:round/>
+                      <a:headEnd type="none" w="med" len="med"/>
+                      <a:tailEnd type="none" w="med" len="med"/>
+                    </a:lnL>
+                    <a:lnR w="9525" cap="flat" cmpd="sng" algn="ctr">
+                      <a:solidFill>
+                        <a:srgbClr val="FFFFFF"/>
+                      </a:solidFill>
+                      <a:prstDash val="solid"/>
+                      <a:round/>
+                      <a:headEnd type="none" w="med" len="med"/>
+                      <a:tailEnd type="none" w="med" len="med"/>
+                    </a:lnR>
+                    <a:lnT w="9525" cap="flat" cmpd="sng" algn="ctr">
+                      <a:solidFill>
+                        <a:srgbClr val="FFFFFF"/>
+                      </a:solidFill>
+                      <a:prstDash val="solid"/>
+                      <a:round/>
+                      <a:headEnd type="none" w="med" len="med"/>
+                      <a:tailEnd type="none" w="med" len="med"/>
+                    </a:lnT>
+                    <a:lnB w="9525" cap="flat" cmpd="sng" algn="ctr">
+                      <a:solidFill>
+                        <a:srgbClr val="FFFFFF"/>
+                      </a:solidFill>
+                      <a:prstDash val="solid"/>
+                      <a:round/>
+                      <a:headEnd type="none" w="med" len="med"/>
+                      <a:tailEnd type="none" w="med" len="med"/>
+                    </a:lnB>
+                    <a:solidFill>
+                      <a:srgbClr val="2EA9B6"/>
                     </a:solidFill>
                   </a:tcPr>
                 </a:tc>
@@ -12976,12 +12935,211 @@
                         <a:buNone/>
                       </a:pPr>
                       <a:r>
+                        <a:rPr lang="en-US" sz="950" b="1" dirty="0">
+                          <a:solidFill>
+                            <a:srgbClr val="FFFFFF"/>
+                          </a:solidFill>
+                        </a:rPr>
+                        <a:t>115年</a:t>
+                      </a:r>
+                      <a:endParaRPr lang="en-US" sz="950" dirty="0"/>
+                    </a:p>
+                    <a:p>
+                      <a:pPr algn="ctr" indent="0" marL="0">
+                        <a:buNone/>
+                      </a:pPr>
+                      <a:r>
+                        <a:rPr lang="en-US" sz="950" b="1" dirty="0">
+                          <a:solidFill>
+                            <a:srgbClr val="FFFFFF"/>
+                          </a:solidFill>
+                        </a:rPr>
+                        <a:t>超額家數</a:t>
+                      </a:r>
+                      <a:endParaRPr lang="en-US" sz="950" dirty="0"/>
+                    </a:p>
+                  </a:txBody>
+                  <a:tcPr marL="36576" marR="36576" marT="36576" marB="36576" anchor="ctr">
+                    <a:lnL w="9525" cap="flat" cmpd="sng" algn="ctr">
+                      <a:solidFill>
+                        <a:srgbClr val="FFFFFF"/>
+                      </a:solidFill>
+                      <a:prstDash val="solid"/>
+                      <a:round/>
+                      <a:headEnd type="none" w="med" len="med"/>
+                      <a:tailEnd type="none" w="med" len="med"/>
+                    </a:lnL>
+                    <a:lnR w="9525" cap="flat" cmpd="sng" algn="ctr">
+                      <a:solidFill>
+                        <a:srgbClr val="FFFFFF"/>
+                      </a:solidFill>
+                      <a:prstDash val="solid"/>
+                      <a:round/>
+                      <a:headEnd type="none" w="med" len="med"/>
+                      <a:tailEnd type="none" w="med" len="med"/>
+                    </a:lnR>
+                    <a:lnT w="9525" cap="flat" cmpd="sng" algn="ctr">
+                      <a:solidFill>
+                        <a:srgbClr val="FFFFFF"/>
+                      </a:solidFill>
+                      <a:prstDash val="solid"/>
+                      <a:round/>
+                      <a:headEnd type="none" w="med" len="med"/>
+                      <a:tailEnd type="none" w="med" len="med"/>
+                    </a:lnT>
+                    <a:lnB w="9525" cap="flat" cmpd="sng" algn="ctr">
+                      <a:solidFill>
+                        <a:srgbClr val="FFFFFF"/>
+                      </a:solidFill>
+                      <a:prstDash val="solid"/>
+                      <a:round/>
+                      <a:headEnd type="none" w="med" len="med"/>
+                      <a:tailEnd type="none" w="med" len="med"/>
+                    </a:lnB>
+                    <a:solidFill>
+                      <a:srgbClr val="2EA9B6"/>
+                    </a:solidFill>
+                  </a:tcPr>
+                </a:tc>
+                <a:tc>
+                  <a:txBody>
+                    <a:bodyPr/>
+                    <a:lstStyle/>
+                    <a:p>
+                      <a:pPr algn="ctr" indent="0" marL="0">
+                        <a:buNone/>
+                      </a:pPr>
+                      <a:r>
+                        <a:rPr lang="en-US" sz="1100" b="1" dirty="0">
+                          <a:solidFill>
+                            <a:srgbClr val="FFFFFF"/>
+                          </a:solidFill>
+                        </a:rPr>
+                        <a:t>超額金額</a:t>
+                      </a:r>
+                      <a:endParaRPr lang="en-US" sz="1100" dirty="0"/>
+                    </a:p>
+                  </a:txBody>
+                  <a:tcPr marL="36576" marR="36576" marT="36576" marB="36576" anchor="ctr">
+                    <a:lnL w="9525" cap="flat" cmpd="sng" algn="ctr">
+                      <a:solidFill>
+                        <a:srgbClr val="FFFFFF"/>
+                      </a:solidFill>
+                      <a:prstDash val="solid"/>
+                      <a:round/>
+                      <a:headEnd type="none" w="med" len="med"/>
+                      <a:tailEnd type="none" w="med" len="med"/>
+                    </a:lnL>
+                    <a:lnR w="9525" cap="flat" cmpd="sng" algn="ctr">
+                      <a:solidFill>
+                        <a:srgbClr val="FFFFFF"/>
+                      </a:solidFill>
+                      <a:prstDash val="solid"/>
+                      <a:round/>
+                      <a:headEnd type="none" w="med" len="med"/>
+                      <a:tailEnd type="none" w="med" len="med"/>
+                    </a:lnR>
+                    <a:lnT w="9525" cap="flat" cmpd="sng" algn="ctr">
+                      <a:solidFill>
+                        <a:srgbClr val="FFFFFF"/>
+                      </a:solidFill>
+                      <a:prstDash val="solid"/>
+                      <a:round/>
+                      <a:headEnd type="none" w="med" len="med"/>
+                      <a:tailEnd type="none" w="med" len="med"/>
+                    </a:lnT>
+                    <a:lnB w="9525" cap="flat" cmpd="sng" algn="ctr">
+                      <a:solidFill>
+                        <a:srgbClr val="FFFFFF"/>
+                      </a:solidFill>
+                      <a:prstDash val="solid"/>
+                      <a:round/>
+                      <a:headEnd type="none" w="med" len="med"/>
+                      <a:tailEnd type="none" w="med" len="med"/>
+                    </a:lnB>
+                    <a:solidFill>
+                      <a:srgbClr val="2EA9B6"/>
+                    </a:solidFill>
+                  </a:tcPr>
+                </a:tc>
+                <a:tc>
+                  <a:txBody>
+                    <a:bodyPr/>
+                    <a:lstStyle/>
+                    <a:p>
+                      <a:pPr algn="ctr" indent="0" marL="0">
+                        <a:buNone/>
+                      </a:pPr>
+                      <a:r>
+                        <a:rPr lang="en-US" sz="1100" b="1" dirty="0">
+                          <a:solidFill>
+                            <a:srgbClr val="FFFFFF"/>
+                          </a:solidFill>
+                        </a:rPr>
+                        <a:t>占比</a:t>
+                      </a:r>
+                      <a:endParaRPr lang="en-US" sz="1100" dirty="0"/>
+                    </a:p>
+                  </a:txBody>
+                  <a:tcPr marL="36576" marR="36576" marT="36576" marB="36576" anchor="ctr">
+                    <a:lnL w="9525" cap="flat" cmpd="sng" algn="ctr">
+                      <a:solidFill>
+                        <a:srgbClr val="FFFFFF"/>
+                      </a:solidFill>
+                      <a:prstDash val="solid"/>
+                      <a:round/>
+                      <a:headEnd type="none" w="med" len="med"/>
+                      <a:tailEnd type="none" w="med" len="med"/>
+                    </a:lnL>
+                    <a:lnR w="9525" cap="flat" cmpd="sng" algn="ctr">
+                      <a:solidFill>
+                        <a:srgbClr val="FFFFFF"/>
+                      </a:solidFill>
+                      <a:prstDash val="solid"/>
+                      <a:round/>
+                      <a:headEnd type="none" w="med" len="med"/>
+                      <a:tailEnd type="none" w="med" len="med"/>
+                    </a:lnR>
+                    <a:lnT w="9525" cap="flat" cmpd="sng" algn="ctr">
+                      <a:solidFill>
+                        <a:srgbClr val="FFFFFF"/>
+                      </a:solidFill>
+                      <a:prstDash val="solid"/>
+                      <a:round/>
+                      <a:headEnd type="none" w="med" len="med"/>
+                      <a:tailEnd type="none" w="med" len="med"/>
+                    </a:lnT>
+                    <a:lnB w="9525" cap="flat" cmpd="sng" algn="ctr">
+                      <a:solidFill>
+                        <a:srgbClr val="FFFFFF"/>
+                      </a:solidFill>
+                      <a:prstDash val="solid"/>
+                      <a:round/>
+                      <a:headEnd type="none" w="med" len="med"/>
+                      <a:tailEnd type="none" w="med" len="med"/>
+                    </a:lnB>
+                    <a:solidFill>
+                      <a:srgbClr val="2EA9B6"/>
+                    </a:solidFill>
+                  </a:tcPr>
+                </a:tc>
+              </a:tr>
+              <a:tr h="228600">
+                <a:tc>
+                  <a:txBody>
+                    <a:bodyPr/>
+                    <a:lstStyle/>
+                    <a:p>
+                      <a:pPr algn="ctr" indent="0" marL="0">
+                        <a:buNone/>
+                      </a:pPr>
+                      <a:r>
                         <a:rPr lang="en-US" sz="1050" b="1" dirty="0">
                           <a:solidFill>
-                            <a:srgbClr val="FFFFFF"/>
-                          </a:solidFill>
-                        </a:rPr>
-                        <a:t>115年未達成家數</a:t>
+                            <a:srgbClr val="2EA9B6"/>
+                          </a:solidFill>
+                        </a:rPr>
+                        <a:t>達標群（≥100%）</a:t>
                       </a:r>
                       <a:endParaRPr lang="en-US" sz="1050" dirty="0"/>
                     </a:p>
@@ -13024,7 +13182,7 @@
                       <a:tailEnd type="none" w="med" len="med"/>
                     </a:lnB>
                     <a:solidFill>
-                      <a:srgbClr val="960A14"/>
+                      <a:srgbClr val="FFFFFF"/>
                     </a:solidFill>
                   </a:tcPr>
                 </a:tc>
@@ -13037,55 +13195,55 @@
                         <a:buNone/>
                       </a:pPr>
                       <a:r>
-                        <a:rPr lang="en-US" sz="1400" b="1" dirty="0">
-                          <a:solidFill>
-                            <a:srgbClr val="FFFFFF"/>
-                          </a:solidFill>
-                        </a:rPr>
-                        <a:t>未達成缺口</a:t>
-                      </a:r>
-                      <a:endParaRPr lang="en-US" sz="1400" dirty="0"/>
-                    </a:p>
-                  </a:txBody>
-                  <a:tcPr marL="36576" marR="36576" marT="36576" marB="36576" anchor="ctr">
-                    <a:lnL w="9525" cap="flat" cmpd="sng" algn="ctr">
-                      <a:solidFill>
-                        <a:srgbClr val="FFFFFF"/>
-                      </a:solidFill>
-                      <a:prstDash val="solid"/>
-                      <a:round/>
-                      <a:headEnd type="none" w="med" len="med"/>
-                      <a:tailEnd type="none" w="med" len="med"/>
-                    </a:lnL>
-                    <a:lnR w="9525" cap="flat" cmpd="sng" algn="ctr">
-                      <a:solidFill>
-                        <a:srgbClr val="FFFFFF"/>
-                      </a:solidFill>
-                      <a:prstDash val="solid"/>
-                      <a:round/>
-                      <a:headEnd type="none" w="med" len="med"/>
-                      <a:tailEnd type="none" w="med" len="med"/>
-                    </a:lnR>
-                    <a:lnT w="9525" cap="flat" cmpd="sng" algn="ctr">
-                      <a:solidFill>
-                        <a:srgbClr val="FFFFFF"/>
-                      </a:solidFill>
-                      <a:prstDash val="solid"/>
-                      <a:round/>
-                      <a:headEnd type="none" w="med" len="med"/>
-                      <a:tailEnd type="none" w="med" len="med"/>
-                    </a:lnT>
-                    <a:lnB w="9525" cap="flat" cmpd="sng" algn="ctr">
-                      <a:solidFill>
-                        <a:srgbClr val="FFFFFF"/>
-                      </a:solidFill>
-                      <a:prstDash val="solid"/>
-                      <a:round/>
-                      <a:headEnd type="none" w="med" len="med"/>
-                      <a:tailEnd type="none" w="med" len="med"/>
-                    </a:lnB>
-                    <a:solidFill>
-                      <a:srgbClr val="960A14"/>
+                        <a:rPr lang="en-US" sz="1050" b="1" dirty="0">
+                          <a:solidFill>
+                            <a:srgbClr val="2EA9B6"/>
+                          </a:solidFill>
+                        </a:rPr>
+                        <a:t>52家</a:t>
+                      </a:r>
+                      <a:endParaRPr lang="en-US" sz="1050" dirty="0"/>
+                    </a:p>
+                  </a:txBody>
+                  <a:tcPr marL="36576" marR="36576" marT="36576" marB="36576" anchor="ctr">
+                    <a:lnL w="9525" cap="flat" cmpd="sng" algn="ctr">
+                      <a:solidFill>
+                        <a:srgbClr val="FFFFFF"/>
+                      </a:solidFill>
+                      <a:prstDash val="solid"/>
+                      <a:round/>
+                      <a:headEnd type="none" w="med" len="med"/>
+                      <a:tailEnd type="none" w="med" len="med"/>
+                    </a:lnL>
+                    <a:lnR w="9525" cap="flat" cmpd="sng" algn="ctr">
+                      <a:solidFill>
+                        <a:srgbClr val="FFFFFF"/>
+                      </a:solidFill>
+                      <a:prstDash val="solid"/>
+                      <a:round/>
+                      <a:headEnd type="none" w="med" len="med"/>
+                      <a:tailEnd type="none" w="med" len="med"/>
+                    </a:lnR>
+                    <a:lnT w="9525" cap="flat" cmpd="sng" algn="ctr">
+                      <a:solidFill>
+                        <a:srgbClr val="FFFFFF"/>
+                      </a:solidFill>
+                      <a:prstDash val="solid"/>
+                      <a:round/>
+                      <a:headEnd type="none" w="med" len="med"/>
+                      <a:tailEnd type="none" w="med" len="med"/>
+                    </a:lnT>
+                    <a:lnB w="9525" cap="flat" cmpd="sng" algn="ctr">
+                      <a:solidFill>
+                        <a:srgbClr val="FFFFFF"/>
+                      </a:solidFill>
+                      <a:prstDash val="solid"/>
+                      <a:round/>
+                      <a:headEnd type="none" w="med" len="med"/>
+                      <a:tailEnd type="none" w="med" len="med"/>
+                    </a:lnB>
+                    <a:solidFill>
+                      <a:srgbClr val="FFFFFF"/>
                     </a:solidFill>
                   </a:tcPr>
                 </a:tc>
@@ -13098,60 +13256,121 @@
                         <a:buNone/>
                       </a:pPr>
                       <a:r>
-                        <a:rPr lang="en-US" sz="1400" b="1" dirty="0">
-                          <a:solidFill>
-                            <a:srgbClr val="FFFFFF"/>
-                          </a:solidFill>
-                        </a:rPr>
-                        <a:t>占比</a:t>
-                      </a:r>
-                      <a:endParaRPr lang="en-US" sz="1400" dirty="0"/>
-                    </a:p>
-                  </a:txBody>
-                  <a:tcPr marL="36576" marR="36576" marT="36576" marB="36576" anchor="ctr">
-                    <a:lnL w="9525" cap="flat" cmpd="sng" algn="ctr">
-                      <a:solidFill>
-                        <a:srgbClr val="FFFFFF"/>
-                      </a:solidFill>
-                      <a:prstDash val="solid"/>
-                      <a:round/>
-                      <a:headEnd type="none" w="med" len="med"/>
-                      <a:tailEnd type="none" w="med" len="med"/>
-                    </a:lnL>
-                    <a:lnR w="9525" cap="flat" cmpd="sng" algn="ctr">
-                      <a:solidFill>
-                        <a:srgbClr val="FFFFFF"/>
-                      </a:solidFill>
-                      <a:prstDash val="solid"/>
-                      <a:round/>
-                      <a:headEnd type="none" w="med" len="med"/>
-                      <a:tailEnd type="none" w="med" len="med"/>
-                    </a:lnR>
-                    <a:lnT w="9525" cap="flat" cmpd="sng" algn="ctr">
-                      <a:solidFill>
-                        <a:srgbClr val="FFFFFF"/>
-                      </a:solidFill>
-                      <a:prstDash val="solid"/>
-                      <a:round/>
-                      <a:headEnd type="none" w="med" len="med"/>
-                      <a:tailEnd type="none" w="med" len="med"/>
-                    </a:lnT>
-                    <a:lnB w="9525" cap="flat" cmpd="sng" algn="ctr">
-                      <a:solidFill>
-                        <a:srgbClr val="FFFFFF"/>
-                      </a:solidFill>
-                      <a:prstDash val="solid"/>
-                      <a:round/>
-                      <a:headEnd type="none" w="med" len="med"/>
-                      <a:tailEnd type="none" w="med" len="med"/>
-                    </a:lnB>
-                    <a:solidFill>
-                      <a:srgbClr val="960A14"/>
+                        <a:rPr lang="en-US" sz="1050" b="1" dirty="0">
+                          <a:solidFill>
+                            <a:srgbClr val="2EA9B6"/>
+                          </a:solidFill>
+                        </a:rPr>
+                        <a:t>+9.08億</a:t>
+                      </a:r>
+                      <a:endParaRPr lang="en-US" sz="1050" dirty="0"/>
+                    </a:p>
+                  </a:txBody>
+                  <a:tcPr marL="36576" marR="36576" marT="36576" marB="36576" anchor="ctr">
+                    <a:lnL w="9525" cap="flat" cmpd="sng" algn="ctr">
+                      <a:solidFill>
+                        <a:srgbClr val="FFFFFF"/>
+                      </a:solidFill>
+                      <a:prstDash val="solid"/>
+                      <a:round/>
+                      <a:headEnd type="none" w="med" len="med"/>
+                      <a:tailEnd type="none" w="med" len="med"/>
+                    </a:lnL>
+                    <a:lnR w="9525" cap="flat" cmpd="sng" algn="ctr">
+                      <a:solidFill>
+                        <a:srgbClr val="FFFFFF"/>
+                      </a:solidFill>
+                      <a:prstDash val="solid"/>
+                      <a:round/>
+                      <a:headEnd type="none" w="med" len="med"/>
+                      <a:tailEnd type="none" w="med" len="med"/>
+                    </a:lnR>
+                    <a:lnT w="9525" cap="flat" cmpd="sng" algn="ctr">
+                      <a:solidFill>
+                        <a:srgbClr val="FFFFFF"/>
+                      </a:solidFill>
+                      <a:prstDash val="solid"/>
+                      <a:round/>
+                      <a:headEnd type="none" w="med" len="med"/>
+                      <a:tailEnd type="none" w="med" len="med"/>
+                    </a:lnT>
+                    <a:lnB w="9525" cap="flat" cmpd="sng" algn="ctr">
+                      <a:solidFill>
+                        <a:srgbClr val="FFFFFF"/>
+                      </a:solidFill>
+                      <a:prstDash val="solid"/>
+                      <a:round/>
+                      <a:headEnd type="none" w="med" len="med"/>
+                      <a:tailEnd type="none" w="med" len="med"/>
+                    </a:lnB>
+                    <a:solidFill>
+                      <a:srgbClr val="FFFFFF"/>
+                    </a:solidFill>
+                  </a:tcPr>
+                </a:tc>
+                <a:tc>
+                  <a:txBody>
+                    <a:bodyPr/>
+                    <a:lstStyle/>
+                    <a:p>
+                      <a:pPr algn="ctr" indent="0" marL="0">
+                        <a:buNone/>
+                      </a:pPr>
+                      <a:r>
+                        <a:rPr lang="en-US" sz="1050" b="1" dirty="0">
+                          <a:solidFill>
+                            <a:srgbClr val="2EA9B6"/>
+                          </a:solidFill>
+                        </a:rPr>
+                        <a:t>60%</a:t>
+                      </a:r>
+                      <a:endParaRPr lang="en-US" sz="1050" dirty="0"/>
+                    </a:p>
+                  </a:txBody>
+                  <a:tcPr marL="36576" marR="36576" marT="36576" marB="36576" anchor="ctr">
+                    <a:lnL w="9525" cap="flat" cmpd="sng" algn="ctr">
+                      <a:solidFill>
+                        <a:srgbClr val="FFFFFF"/>
+                      </a:solidFill>
+                      <a:prstDash val="solid"/>
+                      <a:round/>
+                      <a:headEnd type="none" w="med" len="med"/>
+                      <a:tailEnd type="none" w="med" len="med"/>
+                    </a:lnL>
+                    <a:lnR w="9525" cap="flat" cmpd="sng" algn="ctr">
+                      <a:solidFill>
+                        <a:srgbClr val="FFFFFF"/>
+                      </a:solidFill>
+                      <a:prstDash val="solid"/>
+                      <a:round/>
+                      <a:headEnd type="none" w="med" len="med"/>
+                      <a:tailEnd type="none" w="med" len="med"/>
+                    </a:lnR>
+                    <a:lnT w="9525" cap="flat" cmpd="sng" algn="ctr">
+                      <a:solidFill>
+                        <a:srgbClr val="FFFFFF"/>
+                      </a:solidFill>
+                      <a:prstDash val="solid"/>
+                      <a:round/>
+                      <a:headEnd type="none" w="med" len="med"/>
+                      <a:tailEnd type="none" w="med" len="med"/>
+                    </a:lnT>
+                    <a:lnB w="9525" cap="flat" cmpd="sng" algn="ctr">
+                      <a:solidFill>
+                        <a:srgbClr val="FFFFFF"/>
+                      </a:solidFill>
+                      <a:prstDash val="solid"/>
+                      <a:round/>
+                      <a:headEnd type="none" w="med" len="med"/>
+                      <a:tailEnd type="none" w="med" len="med"/>
+                    </a:lnB>
+                    <a:solidFill>
+                      <a:srgbClr val="FFFFFF"/>
                     </a:solidFill>
                   </a:tcPr>
                 </a:tc>
               </a:tr>
-              <a:tr h="301752">
+              <a:tr h="228600">
                 <a:tc>
                   <a:txBody>
                     <a:bodyPr/>
@@ -13161,14 +13380,752 @@
                         <a:buNone/>
                       </a:pPr>
                       <a:r>
-                        <a:rPr lang="en-US" sz="1200" dirty="0">
+                        <a:rPr lang="en-US" sz="1000" dirty="0">
+                          <a:solidFill>
+                            <a:srgbClr val="404040"/>
+                          </a:solidFill>
+                        </a:rPr>
+                        <a:t>　其中 績優 130%以上</a:t>
+                      </a:r>
+                      <a:endParaRPr lang="en-US" sz="1000" dirty="0"/>
+                    </a:p>
+                  </a:txBody>
+                  <a:tcPr marL="36576" marR="36576" marT="36576" marB="36576" anchor="ctr">
+                    <a:lnL w="9525" cap="flat" cmpd="sng" algn="ctr">
+                      <a:solidFill>
+                        <a:srgbClr val="FFFFFF"/>
+                      </a:solidFill>
+                      <a:prstDash val="solid"/>
+                      <a:round/>
+                      <a:headEnd type="none" w="med" len="med"/>
+                      <a:tailEnd type="none" w="med" len="med"/>
+                    </a:lnL>
+                    <a:lnR w="9525" cap="flat" cmpd="sng" algn="ctr">
+                      <a:solidFill>
+                        <a:srgbClr val="FFFFFF"/>
+                      </a:solidFill>
+                      <a:prstDash val="solid"/>
+                      <a:round/>
+                      <a:headEnd type="none" w="med" len="med"/>
+                      <a:tailEnd type="none" w="med" len="med"/>
+                    </a:lnR>
+                    <a:lnT w="9525" cap="flat" cmpd="sng" algn="ctr">
+                      <a:solidFill>
+                        <a:srgbClr val="FFFFFF"/>
+                      </a:solidFill>
+                      <a:prstDash val="solid"/>
+                      <a:round/>
+                      <a:headEnd type="none" w="med" len="med"/>
+                      <a:tailEnd type="none" w="med" len="med"/>
+                    </a:lnT>
+                    <a:lnB w="9525" cap="flat" cmpd="sng" algn="ctr">
+                      <a:solidFill>
+                        <a:srgbClr val="FFFFFF"/>
+                      </a:solidFill>
+                      <a:prstDash val="solid"/>
+                      <a:round/>
+                      <a:headEnd type="none" w="med" len="med"/>
+                      <a:tailEnd type="none" w="med" len="med"/>
+                    </a:lnB>
+                    <a:solidFill>
+                      <a:srgbClr val="FDF1E9"/>
+                    </a:solidFill>
+                  </a:tcPr>
+                </a:tc>
+                <a:tc>
+                  <a:txBody>
+                    <a:bodyPr/>
+                    <a:lstStyle/>
+                    <a:p>
+                      <a:pPr algn="ctr" indent="0" marL="0">
+                        <a:buNone/>
+                      </a:pPr>
+                      <a:r>
+                        <a:rPr lang="en-US" sz="1000" dirty="0">
+                          <a:solidFill>
+                            <a:srgbClr val="404040"/>
+                          </a:solidFill>
+                        </a:rPr>
+                        <a:t>16家</a:t>
+                      </a:r>
+                      <a:endParaRPr lang="en-US" sz="1000" dirty="0"/>
+                    </a:p>
+                  </a:txBody>
+                  <a:tcPr marL="36576" marR="36576" marT="36576" marB="36576" anchor="ctr">
+                    <a:lnL w="9525" cap="flat" cmpd="sng" algn="ctr">
+                      <a:solidFill>
+                        <a:srgbClr val="FFFFFF"/>
+                      </a:solidFill>
+                      <a:prstDash val="solid"/>
+                      <a:round/>
+                      <a:headEnd type="none" w="med" len="med"/>
+                      <a:tailEnd type="none" w="med" len="med"/>
+                    </a:lnL>
+                    <a:lnR w="9525" cap="flat" cmpd="sng" algn="ctr">
+                      <a:solidFill>
+                        <a:srgbClr val="FFFFFF"/>
+                      </a:solidFill>
+                      <a:prstDash val="solid"/>
+                      <a:round/>
+                      <a:headEnd type="none" w="med" len="med"/>
+                      <a:tailEnd type="none" w="med" len="med"/>
+                    </a:lnR>
+                    <a:lnT w="9525" cap="flat" cmpd="sng" algn="ctr">
+                      <a:solidFill>
+                        <a:srgbClr val="FFFFFF"/>
+                      </a:solidFill>
+                      <a:prstDash val="solid"/>
+                      <a:round/>
+                      <a:headEnd type="none" w="med" len="med"/>
+                      <a:tailEnd type="none" w="med" len="med"/>
+                    </a:lnT>
+                    <a:lnB w="9525" cap="flat" cmpd="sng" algn="ctr">
+                      <a:solidFill>
+                        <a:srgbClr val="FFFFFF"/>
+                      </a:solidFill>
+                      <a:prstDash val="solid"/>
+                      <a:round/>
+                      <a:headEnd type="none" w="med" len="med"/>
+                      <a:tailEnd type="none" w="med" len="med"/>
+                    </a:lnB>
+                    <a:solidFill>
+                      <a:srgbClr val="FDF1E9"/>
+                    </a:solidFill>
+                  </a:tcPr>
+                </a:tc>
+                <a:tc>
+                  <a:txBody>
+                    <a:bodyPr/>
+                    <a:lstStyle/>
+                    <a:p>
+                      <a:pPr algn="ctr" indent="0" marL="0">
+                        <a:buNone/>
+                      </a:pPr>
+                      <a:r>
+                        <a:rPr lang="en-US" sz="1000" dirty="0">
+                          <a:solidFill>
+                            <a:srgbClr val="404040"/>
+                          </a:solidFill>
+                        </a:rPr>
+                        <a:t>+3.76億</a:t>
+                      </a:r>
+                      <a:endParaRPr lang="en-US" sz="1000" dirty="0"/>
+                    </a:p>
+                  </a:txBody>
+                  <a:tcPr marL="36576" marR="36576" marT="36576" marB="36576" anchor="ctr">
+                    <a:lnL w="9525" cap="flat" cmpd="sng" algn="ctr">
+                      <a:solidFill>
+                        <a:srgbClr val="FFFFFF"/>
+                      </a:solidFill>
+                      <a:prstDash val="solid"/>
+                      <a:round/>
+                      <a:headEnd type="none" w="med" len="med"/>
+                      <a:tailEnd type="none" w="med" len="med"/>
+                    </a:lnL>
+                    <a:lnR w="9525" cap="flat" cmpd="sng" algn="ctr">
+                      <a:solidFill>
+                        <a:srgbClr val="FFFFFF"/>
+                      </a:solidFill>
+                      <a:prstDash val="solid"/>
+                      <a:round/>
+                      <a:headEnd type="none" w="med" len="med"/>
+                      <a:tailEnd type="none" w="med" len="med"/>
+                    </a:lnR>
+                    <a:lnT w="9525" cap="flat" cmpd="sng" algn="ctr">
+                      <a:solidFill>
+                        <a:srgbClr val="FFFFFF"/>
+                      </a:solidFill>
+                      <a:prstDash val="solid"/>
+                      <a:round/>
+                      <a:headEnd type="none" w="med" len="med"/>
+                      <a:tailEnd type="none" w="med" len="med"/>
+                    </a:lnT>
+                    <a:lnB w="9525" cap="flat" cmpd="sng" algn="ctr">
+                      <a:solidFill>
+                        <a:srgbClr val="FFFFFF"/>
+                      </a:solidFill>
+                      <a:prstDash val="solid"/>
+                      <a:round/>
+                      <a:headEnd type="none" w="med" len="med"/>
+                      <a:tailEnd type="none" w="med" len="med"/>
+                    </a:lnB>
+                    <a:solidFill>
+                      <a:srgbClr val="FDF1E9"/>
+                    </a:solidFill>
+                  </a:tcPr>
+                </a:tc>
+                <a:tc>
+                  <a:txBody>
+                    <a:bodyPr/>
+                    <a:lstStyle/>
+                    <a:p>
+                      <a:pPr algn="ctr" indent="0" marL="0">
+                        <a:buNone/>
+                      </a:pPr>
+                      <a:r>
+                        <a:rPr lang="en-US" sz="1000" dirty="0">
+                          <a:solidFill>
+                            <a:srgbClr val="404040"/>
+                          </a:solidFill>
+                        </a:rPr>
+                        <a:t>25%</a:t>
+                      </a:r>
+                      <a:endParaRPr lang="en-US" sz="1000" dirty="0"/>
+                    </a:p>
+                  </a:txBody>
+                  <a:tcPr marL="36576" marR="36576" marT="36576" marB="36576" anchor="ctr">
+                    <a:lnL w="9525" cap="flat" cmpd="sng" algn="ctr">
+                      <a:solidFill>
+                        <a:srgbClr val="FFFFFF"/>
+                      </a:solidFill>
+                      <a:prstDash val="solid"/>
+                      <a:round/>
+                      <a:headEnd type="none" w="med" len="med"/>
+                      <a:tailEnd type="none" w="med" len="med"/>
+                    </a:lnL>
+                    <a:lnR w="9525" cap="flat" cmpd="sng" algn="ctr">
+                      <a:solidFill>
+                        <a:srgbClr val="FFFFFF"/>
+                      </a:solidFill>
+                      <a:prstDash val="solid"/>
+                      <a:round/>
+                      <a:headEnd type="none" w="med" len="med"/>
+                      <a:tailEnd type="none" w="med" len="med"/>
+                    </a:lnR>
+                    <a:lnT w="9525" cap="flat" cmpd="sng" algn="ctr">
+                      <a:solidFill>
+                        <a:srgbClr val="FFFFFF"/>
+                      </a:solidFill>
+                      <a:prstDash val="solid"/>
+                      <a:round/>
+                      <a:headEnd type="none" w="med" len="med"/>
+                      <a:tailEnd type="none" w="med" len="med"/>
+                    </a:lnT>
+                    <a:lnB w="9525" cap="flat" cmpd="sng" algn="ctr">
+                      <a:solidFill>
+                        <a:srgbClr val="FFFFFF"/>
+                      </a:solidFill>
+                      <a:prstDash val="solid"/>
+                      <a:round/>
+                      <a:headEnd type="none" w="med" len="med"/>
+                      <a:tailEnd type="none" w="med" len="med"/>
+                    </a:lnB>
+                    <a:solidFill>
+                      <a:srgbClr val="FDF1E9"/>
+                    </a:solidFill>
+                  </a:tcPr>
+                </a:tc>
+              </a:tr>
+              <a:tr h="228600">
+                <a:tc>
+                  <a:txBody>
+                    <a:bodyPr/>
+                    <a:lstStyle/>
+                    <a:p>
+                      <a:pPr algn="ctr" indent="0" marL="0">
+                        <a:buNone/>
+                      </a:pPr>
+                      <a:r>
+                        <a:rPr lang="en-US" sz="1000" dirty="0">
+                          <a:solidFill>
+                            <a:srgbClr val="404040"/>
+                          </a:solidFill>
+                        </a:rPr>
+                        <a:t>　其中 100～130%</a:t>
+                      </a:r>
+                      <a:endParaRPr lang="en-US" sz="1000" dirty="0"/>
+                    </a:p>
+                  </a:txBody>
+                  <a:tcPr marL="36576" marR="36576" marT="36576" marB="36576" anchor="ctr">
+                    <a:lnL w="9525" cap="flat" cmpd="sng" algn="ctr">
+                      <a:solidFill>
+                        <a:srgbClr val="FFFFFF"/>
+                      </a:solidFill>
+                      <a:prstDash val="solid"/>
+                      <a:round/>
+                      <a:headEnd type="none" w="med" len="med"/>
+                      <a:tailEnd type="none" w="med" len="med"/>
+                    </a:lnL>
+                    <a:lnR w="9525" cap="flat" cmpd="sng" algn="ctr">
+                      <a:solidFill>
+                        <a:srgbClr val="FFFFFF"/>
+                      </a:solidFill>
+                      <a:prstDash val="solid"/>
+                      <a:round/>
+                      <a:headEnd type="none" w="med" len="med"/>
+                      <a:tailEnd type="none" w="med" len="med"/>
+                    </a:lnR>
+                    <a:lnT w="9525" cap="flat" cmpd="sng" algn="ctr">
+                      <a:solidFill>
+                        <a:srgbClr val="FFFFFF"/>
+                      </a:solidFill>
+                      <a:prstDash val="solid"/>
+                      <a:round/>
+                      <a:headEnd type="none" w="med" len="med"/>
+                      <a:tailEnd type="none" w="med" len="med"/>
+                    </a:lnT>
+                    <a:lnB w="9525" cap="flat" cmpd="sng" algn="ctr">
+                      <a:solidFill>
+                        <a:srgbClr val="FFFFFF"/>
+                      </a:solidFill>
+                      <a:prstDash val="solid"/>
+                      <a:round/>
+                      <a:headEnd type="none" w="med" len="med"/>
+                      <a:tailEnd type="none" w="med" len="med"/>
+                    </a:lnB>
+                    <a:solidFill>
+                      <a:srgbClr val="FFFFFF"/>
+                    </a:solidFill>
+                  </a:tcPr>
+                </a:tc>
+                <a:tc>
+                  <a:txBody>
+                    <a:bodyPr/>
+                    <a:lstStyle/>
+                    <a:p>
+                      <a:pPr algn="ctr" indent="0" marL="0">
+                        <a:buNone/>
+                      </a:pPr>
+                      <a:r>
+                        <a:rPr lang="en-US" sz="1000" dirty="0">
+                          <a:solidFill>
+                            <a:srgbClr val="404040"/>
+                          </a:solidFill>
+                        </a:rPr>
+                        <a:t>36家</a:t>
+                      </a:r>
+                      <a:endParaRPr lang="en-US" sz="1000" dirty="0"/>
+                    </a:p>
+                  </a:txBody>
+                  <a:tcPr marL="36576" marR="36576" marT="36576" marB="36576" anchor="ctr">
+                    <a:lnL w="9525" cap="flat" cmpd="sng" algn="ctr">
+                      <a:solidFill>
+                        <a:srgbClr val="FFFFFF"/>
+                      </a:solidFill>
+                      <a:prstDash val="solid"/>
+                      <a:round/>
+                      <a:headEnd type="none" w="med" len="med"/>
+                      <a:tailEnd type="none" w="med" len="med"/>
+                    </a:lnL>
+                    <a:lnR w="9525" cap="flat" cmpd="sng" algn="ctr">
+                      <a:solidFill>
+                        <a:srgbClr val="FFFFFF"/>
+                      </a:solidFill>
+                      <a:prstDash val="solid"/>
+                      <a:round/>
+                      <a:headEnd type="none" w="med" len="med"/>
+                      <a:tailEnd type="none" w="med" len="med"/>
+                    </a:lnR>
+                    <a:lnT w="9525" cap="flat" cmpd="sng" algn="ctr">
+                      <a:solidFill>
+                        <a:srgbClr val="FFFFFF"/>
+                      </a:solidFill>
+                      <a:prstDash val="solid"/>
+                      <a:round/>
+                      <a:headEnd type="none" w="med" len="med"/>
+                      <a:tailEnd type="none" w="med" len="med"/>
+                    </a:lnT>
+                    <a:lnB w="9525" cap="flat" cmpd="sng" algn="ctr">
+                      <a:solidFill>
+                        <a:srgbClr val="FFFFFF"/>
+                      </a:solidFill>
+                      <a:prstDash val="solid"/>
+                      <a:round/>
+                      <a:headEnd type="none" w="med" len="med"/>
+                      <a:tailEnd type="none" w="med" len="med"/>
+                    </a:lnB>
+                    <a:solidFill>
+                      <a:srgbClr val="FFFFFF"/>
+                    </a:solidFill>
+                  </a:tcPr>
+                </a:tc>
+                <a:tc>
+                  <a:txBody>
+                    <a:bodyPr/>
+                    <a:lstStyle/>
+                    <a:p>
+                      <a:pPr algn="ctr" indent="0" marL="0">
+                        <a:buNone/>
+                      </a:pPr>
+                      <a:r>
+                        <a:rPr lang="en-US" sz="1000" dirty="0">
+                          <a:solidFill>
+                            <a:srgbClr val="404040"/>
+                          </a:solidFill>
+                        </a:rPr>
+                        <a:t>+5.32億</a:t>
+                      </a:r>
+                      <a:endParaRPr lang="en-US" sz="1000" dirty="0"/>
+                    </a:p>
+                  </a:txBody>
+                  <a:tcPr marL="36576" marR="36576" marT="36576" marB="36576" anchor="ctr">
+                    <a:lnL w="9525" cap="flat" cmpd="sng" algn="ctr">
+                      <a:solidFill>
+                        <a:srgbClr val="FFFFFF"/>
+                      </a:solidFill>
+                      <a:prstDash val="solid"/>
+                      <a:round/>
+                      <a:headEnd type="none" w="med" len="med"/>
+                      <a:tailEnd type="none" w="med" len="med"/>
+                    </a:lnL>
+                    <a:lnR w="9525" cap="flat" cmpd="sng" algn="ctr">
+                      <a:solidFill>
+                        <a:srgbClr val="FFFFFF"/>
+                      </a:solidFill>
+                      <a:prstDash val="solid"/>
+                      <a:round/>
+                      <a:headEnd type="none" w="med" len="med"/>
+                      <a:tailEnd type="none" w="med" len="med"/>
+                    </a:lnR>
+                    <a:lnT w="9525" cap="flat" cmpd="sng" algn="ctr">
+                      <a:solidFill>
+                        <a:srgbClr val="FFFFFF"/>
+                      </a:solidFill>
+                      <a:prstDash val="solid"/>
+                      <a:round/>
+                      <a:headEnd type="none" w="med" len="med"/>
+                      <a:tailEnd type="none" w="med" len="med"/>
+                    </a:lnT>
+                    <a:lnB w="9525" cap="flat" cmpd="sng" algn="ctr">
+                      <a:solidFill>
+                        <a:srgbClr val="FFFFFF"/>
+                      </a:solidFill>
+                      <a:prstDash val="solid"/>
+                      <a:round/>
+                      <a:headEnd type="none" w="med" len="med"/>
+                      <a:tailEnd type="none" w="med" len="med"/>
+                    </a:lnB>
+                    <a:solidFill>
+                      <a:srgbClr val="FFFFFF"/>
+                    </a:solidFill>
+                  </a:tcPr>
+                </a:tc>
+                <a:tc>
+                  <a:txBody>
+                    <a:bodyPr/>
+                    <a:lstStyle/>
+                    <a:p>
+                      <a:pPr algn="ctr" indent="0" marL="0">
+                        <a:buNone/>
+                      </a:pPr>
+                      <a:r>
+                        <a:rPr lang="en-US" sz="1000" dirty="0">
+                          <a:solidFill>
+                            <a:srgbClr val="404040"/>
+                          </a:solidFill>
+                        </a:rPr>
+                        <a:t>35%</a:t>
+                      </a:r>
+                      <a:endParaRPr lang="en-US" sz="1000" dirty="0"/>
+                    </a:p>
+                  </a:txBody>
+                  <a:tcPr marL="36576" marR="36576" marT="36576" marB="36576" anchor="ctr">
+                    <a:lnL w="9525" cap="flat" cmpd="sng" algn="ctr">
+                      <a:solidFill>
+                        <a:srgbClr val="FFFFFF"/>
+                      </a:solidFill>
+                      <a:prstDash val="solid"/>
+                      <a:round/>
+                      <a:headEnd type="none" w="med" len="med"/>
+                      <a:tailEnd type="none" w="med" len="med"/>
+                    </a:lnL>
+                    <a:lnR w="9525" cap="flat" cmpd="sng" algn="ctr">
+                      <a:solidFill>
+                        <a:srgbClr val="FFFFFF"/>
+                      </a:solidFill>
+                      <a:prstDash val="solid"/>
+                      <a:round/>
+                      <a:headEnd type="none" w="med" len="med"/>
+                      <a:tailEnd type="none" w="med" len="med"/>
+                    </a:lnR>
+                    <a:lnT w="9525" cap="flat" cmpd="sng" algn="ctr">
+                      <a:solidFill>
+                        <a:srgbClr val="FFFFFF"/>
+                      </a:solidFill>
+                      <a:prstDash val="solid"/>
+                      <a:round/>
+                      <a:headEnd type="none" w="med" len="med"/>
+                      <a:tailEnd type="none" w="med" len="med"/>
+                    </a:lnT>
+                    <a:lnB w="9525" cap="flat" cmpd="sng" algn="ctr">
+                      <a:solidFill>
+                        <a:srgbClr val="FFFFFF"/>
+                      </a:solidFill>
+                      <a:prstDash val="solid"/>
+                      <a:round/>
+                      <a:headEnd type="none" w="med" len="med"/>
+                      <a:tailEnd type="none" w="med" len="med"/>
+                    </a:lnB>
+                    <a:solidFill>
+                      <a:srgbClr val="FFFFFF"/>
+                    </a:solidFill>
+                  </a:tcPr>
+                </a:tc>
+              </a:tr>
+              <a:tr h="228600">
+                <a:tc>
+                  <a:txBody>
+                    <a:bodyPr/>
+                    <a:lstStyle/>
+                    <a:p>
+                      <a:pPr algn="ctr" indent="0" marL="0">
+                        <a:buNone/>
+                      </a:pPr>
+                      <a:r>
+                        <a:rPr lang="en-US" sz="1050" b="1" dirty="0">
                           <a:solidFill>
                             <a:srgbClr val="000000"/>
                           </a:solidFill>
                         </a:rPr>
-                        <a:t>達標群（≥100%）</a:t>
-                      </a:r>
-                      <a:endParaRPr lang="en-US" sz="1200" dirty="0"/>
+                        <a:t>未達標群（&lt;100%）</a:t>
+                      </a:r>
+                      <a:endParaRPr lang="en-US" sz="1050" dirty="0"/>
+                    </a:p>
+                  </a:txBody>
+                  <a:tcPr marL="36576" marR="36576" marT="36576" marB="36576" anchor="ctr">
+                    <a:lnL w="9525" cap="flat" cmpd="sng" algn="ctr">
+                      <a:solidFill>
+                        <a:srgbClr val="FFFFFF"/>
+                      </a:solidFill>
+                      <a:prstDash val="solid"/>
+                      <a:round/>
+                      <a:headEnd type="none" w="med" len="med"/>
+                      <a:tailEnd type="none" w="med" len="med"/>
+                    </a:lnL>
+                    <a:lnR w="9525" cap="flat" cmpd="sng" algn="ctr">
+                      <a:solidFill>
+                        <a:srgbClr val="FFFFFF"/>
+                      </a:solidFill>
+                      <a:prstDash val="solid"/>
+                      <a:round/>
+                      <a:headEnd type="none" w="med" len="med"/>
+                      <a:tailEnd type="none" w="med" len="med"/>
+                    </a:lnR>
+                    <a:lnT w="9525" cap="flat" cmpd="sng" algn="ctr">
+                      <a:solidFill>
+                        <a:srgbClr val="FFFFFF"/>
+                      </a:solidFill>
+                      <a:prstDash val="solid"/>
+                      <a:round/>
+                      <a:headEnd type="none" w="med" len="med"/>
+                      <a:tailEnd type="none" w="med" len="med"/>
+                    </a:lnT>
+                    <a:lnB w="9525" cap="flat" cmpd="sng" algn="ctr">
+                      <a:solidFill>
+                        <a:srgbClr val="FFFFFF"/>
+                      </a:solidFill>
+                      <a:prstDash val="solid"/>
+                      <a:round/>
+                      <a:headEnd type="none" w="med" len="med"/>
+                      <a:tailEnd type="none" w="med" len="med"/>
+                    </a:lnB>
+                    <a:solidFill>
+                      <a:srgbClr val="FDF1E9"/>
+                    </a:solidFill>
+                  </a:tcPr>
+                </a:tc>
+                <a:tc>
+                  <a:txBody>
+                    <a:bodyPr/>
+                    <a:lstStyle/>
+                    <a:p>
+                      <a:pPr algn="ctr" indent="0" marL="0">
+                        <a:buNone/>
+                      </a:pPr>
+                      <a:r>
+                        <a:rPr lang="en-US" sz="1050" b="1" dirty="0">
+                          <a:solidFill>
+                            <a:srgbClr val="000000"/>
+                          </a:solidFill>
+                        </a:rPr>
+                        <a:t>47家</a:t>
+                      </a:r>
+                      <a:endParaRPr lang="en-US" sz="1050" dirty="0"/>
+                    </a:p>
+                  </a:txBody>
+                  <a:tcPr marL="36576" marR="36576" marT="36576" marB="36576" anchor="ctr">
+                    <a:lnL w="9525" cap="flat" cmpd="sng" algn="ctr">
+                      <a:solidFill>
+                        <a:srgbClr val="FFFFFF"/>
+                      </a:solidFill>
+                      <a:prstDash val="solid"/>
+                      <a:round/>
+                      <a:headEnd type="none" w="med" len="med"/>
+                      <a:tailEnd type="none" w="med" len="med"/>
+                    </a:lnL>
+                    <a:lnR w="9525" cap="flat" cmpd="sng" algn="ctr">
+                      <a:solidFill>
+                        <a:srgbClr val="FFFFFF"/>
+                      </a:solidFill>
+                      <a:prstDash val="solid"/>
+                      <a:round/>
+                      <a:headEnd type="none" w="med" len="med"/>
+                      <a:tailEnd type="none" w="med" len="med"/>
+                    </a:lnR>
+                    <a:lnT w="9525" cap="flat" cmpd="sng" algn="ctr">
+                      <a:solidFill>
+                        <a:srgbClr val="FFFFFF"/>
+                      </a:solidFill>
+                      <a:prstDash val="solid"/>
+                      <a:round/>
+                      <a:headEnd type="none" w="med" len="med"/>
+                      <a:tailEnd type="none" w="med" len="med"/>
+                    </a:lnT>
+                    <a:lnB w="9525" cap="flat" cmpd="sng" algn="ctr">
+                      <a:solidFill>
+                        <a:srgbClr val="FFFFFF"/>
+                      </a:solidFill>
+                      <a:prstDash val="solid"/>
+                      <a:round/>
+                      <a:headEnd type="none" w="med" len="med"/>
+                      <a:tailEnd type="none" w="med" len="med"/>
+                    </a:lnB>
+                    <a:solidFill>
+                      <a:srgbClr val="FDF1E9"/>
+                    </a:solidFill>
+                  </a:tcPr>
+                </a:tc>
+                <a:tc>
+                  <a:txBody>
+                    <a:bodyPr/>
+                    <a:lstStyle/>
+                    <a:p>
+                      <a:pPr algn="ctr" indent="0" marL="0">
+                        <a:buNone/>
+                      </a:pPr>
+                      <a:r>
+                        <a:rPr lang="en-US" sz="1050" b="1" dirty="0">
+                          <a:solidFill>
+                            <a:srgbClr val="000000"/>
+                          </a:solidFill>
+                        </a:rPr>
+                        <a:t>+6.16億</a:t>
+                      </a:r>
+                      <a:endParaRPr lang="en-US" sz="1050" dirty="0"/>
+                    </a:p>
+                  </a:txBody>
+                  <a:tcPr marL="36576" marR="36576" marT="36576" marB="36576" anchor="ctr">
+                    <a:lnL w="9525" cap="flat" cmpd="sng" algn="ctr">
+                      <a:solidFill>
+                        <a:srgbClr val="FFFFFF"/>
+                      </a:solidFill>
+                      <a:prstDash val="solid"/>
+                      <a:round/>
+                      <a:headEnd type="none" w="med" len="med"/>
+                      <a:tailEnd type="none" w="med" len="med"/>
+                    </a:lnL>
+                    <a:lnR w="9525" cap="flat" cmpd="sng" algn="ctr">
+                      <a:solidFill>
+                        <a:srgbClr val="FFFFFF"/>
+                      </a:solidFill>
+                      <a:prstDash val="solid"/>
+                      <a:round/>
+                      <a:headEnd type="none" w="med" len="med"/>
+                      <a:tailEnd type="none" w="med" len="med"/>
+                    </a:lnR>
+                    <a:lnT w="9525" cap="flat" cmpd="sng" algn="ctr">
+                      <a:solidFill>
+                        <a:srgbClr val="FFFFFF"/>
+                      </a:solidFill>
+                      <a:prstDash val="solid"/>
+                      <a:round/>
+                      <a:headEnd type="none" w="med" len="med"/>
+                      <a:tailEnd type="none" w="med" len="med"/>
+                    </a:lnT>
+                    <a:lnB w="9525" cap="flat" cmpd="sng" algn="ctr">
+                      <a:solidFill>
+                        <a:srgbClr val="FFFFFF"/>
+                      </a:solidFill>
+                      <a:prstDash val="solid"/>
+                      <a:round/>
+                      <a:headEnd type="none" w="med" len="med"/>
+                      <a:tailEnd type="none" w="med" len="med"/>
+                    </a:lnB>
+                    <a:solidFill>
+                      <a:srgbClr val="FDF1E9"/>
+                    </a:solidFill>
+                  </a:tcPr>
+                </a:tc>
+                <a:tc>
+                  <a:txBody>
+                    <a:bodyPr/>
+                    <a:lstStyle/>
+                    <a:p>
+                      <a:pPr algn="ctr" indent="0" marL="0">
+                        <a:buNone/>
+                      </a:pPr>
+                      <a:r>
+                        <a:rPr lang="en-US" sz="1050" b="1" dirty="0">
+                          <a:solidFill>
+                            <a:srgbClr val="000000"/>
+                          </a:solidFill>
+                        </a:rPr>
+                        <a:t>40%</a:t>
+                      </a:r>
+                      <a:endParaRPr lang="en-US" sz="1050" dirty="0"/>
+                    </a:p>
+                  </a:txBody>
+                  <a:tcPr marL="36576" marR="36576" marT="36576" marB="36576" anchor="ctr">
+                    <a:lnL w="9525" cap="flat" cmpd="sng" algn="ctr">
+                      <a:solidFill>
+                        <a:srgbClr val="FFFFFF"/>
+                      </a:solidFill>
+                      <a:prstDash val="solid"/>
+                      <a:round/>
+                      <a:headEnd type="none" w="med" len="med"/>
+                      <a:tailEnd type="none" w="med" len="med"/>
+                    </a:lnL>
+                    <a:lnR w="9525" cap="flat" cmpd="sng" algn="ctr">
+                      <a:solidFill>
+                        <a:srgbClr val="FFFFFF"/>
+                      </a:solidFill>
+                      <a:prstDash val="solid"/>
+                      <a:round/>
+                      <a:headEnd type="none" w="med" len="med"/>
+                      <a:tailEnd type="none" w="med" len="med"/>
+                    </a:lnR>
+                    <a:lnT w="9525" cap="flat" cmpd="sng" algn="ctr">
+                      <a:solidFill>
+                        <a:srgbClr val="FFFFFF"/>
+                      </a:solidFill>
+                      <a:prstDash val="solid"/>
+                      <a:round/>
+                      <a:headEnd type="none" w="med" len="med"/>
+                      <a:tailEnd type="none" w="med" len="med"/>
+                    </a:lnT>
+                    <a:lnB w="9525" cap="flat" cmpd="sng" algn="ctr">
+                      <a:solidFill>
+                        <a:srgbClr val="FFFFFF"/>
+                      </a:solidFill>
+                      <a:prstDash val="solid"/>
+                      <a:round/>
+                      <a:headEnd type="none" w="med" len="med"/>
+                      <a:tailEnd type="none" w="med" len="med"/>
+                    </a:lnB>
+                    <a:solidFill>
+                      <a:srgbClr val="FDF1E9"/>
+                    </a:solidFill>
+                  </a:tcPr>
+                </a:tc>
+              </a:tr>
+              <a:tr h="228600">
+                <a:tc>
+                  <a:txBody>
+                    <a:bodyPr/>
+                    <a:lstStyle/>
+                    <a:p>
+                      <a:pPr algn="ctr" indent="0" marL="0">
+                        <a:buNone/>
+                      </a:pPr>
+                      <a:r>
+                        <a:rPr lang="en-US" sz="1000" dirty="0">
+                          <a:solidFill>
+                            <a:srgbClr val="404040"/>
+                          </a:solidFill>
+                        </a:rPr>
+                        <a:t>　其中 90～100%</a:t>
+                      </a:r>
+                      <a:endParaRPr lang="en-US" sz="1000" dirty="0"/>
                     </a:p>
                   </a:txBody>
                   <a:tcPr marL="36576" marR="36576" marT="36576" marB="36576" anchor="ctr">
@@ -13222,55 +14179,732 @@
                         <a:buNone/>
                       </a:pPr>
                       <a:r>
-                        <a:rPr lang="en-US" sz="1300" dirty="0">
+                        <a:rPr lang="en-US" sz="1000" dirty="0">
+                          <a:solidFill>
+                            <a:srgbClr val="404040"/>
+                          </a:solidFill>
+                        </a:rPr>
+                        <a:t>20家</a:t>
+                      </a:r>
+                      <a:endParaRPr lang="en-US" sz="1000" dirty="0"/>
+                    </a:p>
+                  </a:txBody>
+                  <a:tcPr marL="36576" marR="36576" marT="36576" marB="36576" anchor="ctr">
+                    <a:lnL w="9525" cap="flat" cmpd="sng" algn="ctr">
+                      <a:solidFill>
+                        <a:srgbClr val="FFFFFF"/>
+                      </a:solidFill>
+                      <a:prstDash val="solid"/>
+                      <a:round/>
+                      <a:headEnd type="none" w="med" len="med"/>
+                      <a:tailEnd type="none" w="med" len="med"/>
+                    </a:lnL>
+                    <a:lnR w="9525" cap="flat" cmpd="sng" algn="ctr">
+                      <a:solidFill>
+                        <a:srgbClr val="FFFFFF"/>
+                      </a:solidFill>
+                      <a:prstDash val="solid"/>
+                      <a:round/>
+                      <a:headEnd type="none" w="med" len="med"/>
+                      <a:tailEnd type="none" w="med" len="med"/>
+                    </a:lnR>
+                    <a:lnT w="9525" cap="flat" cmpd="sng" algn="ctr">
+                      <a:solidFill>
+                        <a:srgbClr val="FFFFFF"/>
+                      </a:solidFill>
+                      <a:prstDash val="solid"/>
+                      <a:round/>
+                      <a:headEnd type="none" w="med" len="med"/>
+                      <a:tailEnd type="none" w="med" len="med"/>
+                    </a:lnT>
+                    <a:lnB w="9525" cap="flat" cmpd="sng" algn="ctr">
+                      <a:solidFill>
+                        <a:srgbClr val="FFFFFF"/>
+                      </a:solidFill>
+                      <a:prstDash val="solid"/>
+                      <a:round/>
+                      <a:headEnd type="none" w="med" len="med"/>
+                      <a:tailEnd type="none" w="med" len="med"/>
+                    </a:lnB>
+                    <a:solidFill>
+                      <a:srgbClr val="FFFFFF"/>
+                    </a:solidFill>
+                  </a:tcPr>
+                </a:tc>
+                <a:tc>
+                  <a:txBody>
+                    <a:bodyPr/>
+                    <a:lstStyle/>
+                    <a:p>
+                      <a:pPr algn="ctr" indent="0" marL="0">
+                        <a:buNone/>
+                      </a:pPr>
+                      <a:r>
+                        <a:rPr lang="en-US" sz="1000" dirty="0">
+                          <a:solidFill>
+                            <a:srgbClr val="404040"/>
+                          </a:solidFill>
+                        </a:rPr>
+                        <a:t>+2.80億</a:t>
+                      </a:r>
+                      <a:endParaRPr lang="en-US" sz="1000" dirty="0"/>
+                    </a:p>
+                  </a:txBody>
+                  <a:tcPr marL="36576" marR="36576" marT="36576" marB="36576" anchor="ctr">
+                    <a:lnL w="9525" cap="flat" cmpd="sng" algn="ctr">
+                      <a:solidFill>
+                        <a:srgbClr val="FFFFFF"/>
+                      </a:solidFill>
+                      <a:prstDash val="solid"/>
+                      <a:round/>
+                      <a:headEnd type="none" w="med" len="med"/>
+                      <a:tailEnd type="none" w="med" len="med"/>
+                    </a:lnL>
+                    <a:lnR w="9525" cap="flat" cmpd="sng" algn="ctr">
+                      <a:solidFill>
+                        <a:srgbClr val="FFFFFF"/>
+                      </a:solidFill>
+                      <a:prstDash val="solid"/>
+                      <a:round/>
+                      <a:headEnd type="none" w="med" len="med"/>
+                      <a:tailEnd type="none" w="med" len="med"/>
+                    </a:lnR>
+                    <a:lnT w="9525" cap="flat" cmpd="sng" algn="ctr">
+                      <a:solidFill>
+                        <a:srgbClr val="FFFFFF"/>
+                      </a:solidFill>
+                      <a:prstDash val="solid"/>
+                      <a:round/>
+                      <a:headEnd type="none" w="med" len="med"/>
+                      <a:tailEnd type="none" w="med" len="med"/>
+                    </a:lnT>
+                    <a:lnB w="9525" cap="flat" cmpd="sng" algn="ctr">
+                      <a:solidFill>
+                        <a:srgbClr val="FFFFFF"/>
+                      </a:solidFill>
+                      <a:prstDash val="solid"/>
+                      <a:round/>
+                      <a:headEnd type="none" w="med" len="med"/>
+                      <a:tailEnd type="none" w="med" len="med"/>
+                    </a:lnB>
+                    <a:solidFill>
+                      <a:srgbClr val="FFFFFF"/>
+                    </a:solidFill>
+                  </a:tcPr>
+                </a:tc>
+                <a:tc>
+                  <a:txBody>
+                    <a:bodyPr/>
+                    <a:lstStyle/>
+                    <a:p>
+                      <a:pPr algn="ctr" indent="0" marL="0">
+                        <a:buNone/>
+                      </a:pPr>
+                      <a:r>
+                        <a:rPr lang="en-US" sz="1000" dirty="0">
+                          <a:solidFill>
+                            <a:srgbClr val="404040"/>
+                          </a:solidFill>
+                        </a:rPr>
+                        <a:t>18%</a:t>
+                      </a:r>
+                      <a:endParaRPr lang="en-US" sz="1000" dirty="0"/>
+                    </a:p>
+                  </a:txBody>
+                  <a:tcPr marL="36576" marR="36576" marT="36576" marB="36576" anchor="ctr">
+                    <a:lnL w="9525" cap="flat" cmpd="sng" algn="ctr">
+                      <a:solidFill>
+                        <a:srgbClr val="FFFFFF"/>
+                      </a:solidFill>
+                      <a:prstDash val="solid"/>
+                      <a:round/>
+                      <a:headEnd type="none" w="med" len="med"/>
+                      <a:tailEnd type="none" w="med" len="med"/>
+                    </a:lnL>
+                    <a:lnR w="9525" cap="flat" cmpd="sng" algn="ctr">
+                      <a:solidFill>
+                        <a:srgbClr val="FFFFFF"/>
+                      </a:solidFill>
+                      <a:prstDash val="solid"/>
+                      <a:round/>
+                      <a:headEnd type="none" w="med" len="med"/>
+                      <a:tailEnd type="none" w="med" len="med"/>
+                    </a:lnR>
+                    <a:lnT w="9525" cap="flat" cmpd="sng" algn="ctr">
+                      <a:solidFill>
+                        <a:srgbClr val="FFFFFF"/>
+                      </a:solidFill>
+                      <a:prstDash val="solid"/>
+                      <a:round/>
+                      <a:headEnd type="none" w="med" len="med"/>
+                      <a:tailEnd type="none" w="med" len="med"/>
+                    </a:lnT>
+                    <a:lnB w="9525" cap="flat" cmpd="sng" algn="ctr">
+                      <a:solidFill>
+                        <a:srgbClr val="FFFFFF"/>
+                      </a:solidFill>
+                      <a:prstDash val="solid"/>
+                      <a:round/>
+                      <a:headEnd type="none" w="med" len="med"/>
+                      <a:tailEnd type="none" w="med" len="med"/>
+                    </a:lnB>
+                    <a:solidFill>
+                      <a:srgbClr val="FFFFFF"/>
+                    </a:solidFill>
+                  </a:tcPr>
+                </a:tc>
+              </a:tr>
+              <a:tr h="228600">
+                <a:tc>
+                  <a:txBody>
+                    <a:bodyPr/>
+                    <a:lstStyle/>
+                    <a:p>
+                      <a:pPr algn="ctr" indent="0" marL="0">
+                        <a:buNone/>
+                      </a:pPr>
+                      <a:r>
+                        <a:rPr lang="en-US" sz="1000" dirty="0">
+                          <a:solidFill>
+                            <a:srgbClr val="404040"/>
+                          </a:solidFill>
+                        </a:rPr>
+                        <a:t>　其中 75～90%</a:t>
+                      </a:r>
+                      <a:endParaRPr lang="en-US" sz="1000" dirty="0"/>
+                    </a:p>
+                  </a:txBody>
+                  <a:tcPr marL="36576" marR="36576" marT="36576" marB="36576" anchor="ctr">
+                    <a:lnL w="9525" cap="flat" cmpd="sng" algn="ctr">
+                      <a:solidFill>
+                        <a:srgbClr val="FFFFFF"/>
+                      </a:solidFill>
+                      <a:prstDash val="solid"/>
+                      <a:round/>
+                      <a:headEnd type="none" w="med" len="med"/>
+                      <a:tailEnd type="none" w="med" len="med"/>
+                    </a:lnL>
+                    <a:lnR w="9525" cap="flat" cmpd="sng" algn="ctr">
+                      <a:solidFill>
+                        <a:srgbClr val="FFFFFF"/>
+                      </a:solidFill>
+                      <a:prstDash val="solid"/>
+                      <a:round/>
+                      <a:headEnd type="none" w="med" len="med"/>
+                      <a:tailEnd type="none" w="med" len="med"/>
+                    </a:lnR>
+                    <a:lnT w="9525" cap="flat" cmpd="sng" algn="ctr">
+                      <a:solidFill>
+                        <a:srgbClr val="FFFFFF"/>
+                      </a:solidFill>
+                      <a:prstDash val="solid"/>
+                      <a:round/>
+                      <a:headEnd type="none" w="med" len="med"/>
+                      <a:tailEnd type="none" w="med" len="med"/>
+                    </a:lnT>
+                    <a:lnB w="9525" cap="flat" cmpd="sng" algn="ctr">
+                      <a:solidFill>
+                        <a:srgbClr val="FFFFFF"/>
+                      </a:solidFill>
+                      <a:prstDash val="solid"/>
+                      <a:round/>
+                      <a:headEnd type="none" w="med" len="med"/>
+                      <a:tailEnd type="none" w="med" len="med"/>
+                    </a:lnB>
+                    <a:solidFill>
+                      <a:srgbClr val="FDF1E9"/>
+                    </a:solidFill>
+                  </a:tcPr>
+                </a:tc>
+                <a:tc>
+                  <a:txBody>
+                    <a:bodyPr/>
+                    <a:lstStyle/>
+                    <a:p>
+                      <a:pPr algn="ctr" indent="0" marL="0">
+                        <a:buNone/>
+                      </a:pPr>
+                      <a:r>
+                        <a:rPr lang="en-US" sz="1000" dirty="0">
+                          <a:solidFill>
+                            <a:srgbClr val="404040"/>
+                          </a:solidFill>
+                        </a:rPr>
+                        <a:t>21家</a:t>
+                      </a:r>
+                      <a:endParaRPr lang="en-US" sz="1000" dirty="0"/>
+                    </a:p>
+                  </a:txBody>
+                  <a:tcPr marL="36576" marR="36576" marT="36576" marB="36576" anchor="ctr">
+                    <a:lnL w="9525" cap="flat" cmpd="sng" algn="ctr">
+                      <a:solidFill>
+                        <a:srgbClr val="FFFFFF"/>
+                      </a:solidFill>
+                      <a:prstDash val="solid"/>
+                      <a:round/>
+                      <a:headEnd type="none" w="med" len="med"/>
+                      <a:tailEnd type="none" w="med" len="med"/>
+                    </a:lnL>
+                    <a:lnR w="9525" cap="flat" cmpd="sng" algn="ctr">
+                      <a:solidFill>
+                        <a:srgbClr val="FFFFFF"/>
+                      </a:solidFill>
+                      <a:prstDash val="solid"/>
+                      <a:round/>
+                      <a:headEnd type="none" w="med" len="med"/>
+                      <a:tailEnd type="none" w="med" len="med"/>
+                    </a:lnR>
+                    <a:lnT w="9525" cap="flat" cmpd="sng" algn="ctr">
+                      <a:solidFill>
+                        <a:srgbClr val="FFFFFF"/>
+                      </a:solidFill>
+                      <a:prstDash val="solid"/>
+                      <a:round/>
+                      <a:headEnd type="none" w="med" len="med"/>
+                      <a:tailEnd type="none" w="med" len="med"/>
+                    </a:lnT>
+                    <a:lnB w="9525" cap="flat" cmpd="sng" algn="ctr">
+                      <a:solidFill>
+                        <a:srgbClr val="FFFFFF"/>
+                      </a:solidFill>
+                      <a:prstDash val="solid"/>
+                      <a:round/>
+                      <a:headEnd type="none" w="med" len="med"/>
+                      <a:tailEnd type="none" w="med" len="med"/>
+                    </a:lnB>
+                    <a:solidFill>
+                      <a:srgbClr val="FDF1E9"/>
+                    </a:solidFill>
+                  </a:tcPr>
+                </a:tc>
+                <a:tc>
+                  <a:txBody>
+                    <a:bodyPr/>
+                    <a:lstStyle/>
+                    <a:p>
+                      <a:pPr algn="ctr" indent="0" marL="0">
+                        <a:buNone/>
+                      </a:pPr>
+                      <a:r>
+                        <a:rPr lang="en-US" sz="1000" dirty="0">
+                          <a:solidFill>
+                            <a:srgbClr val="404040"/>
+                          </a:solidFill>
+                        </a:rPr>
+                        <a:t>+2.00億</a:t>
+                      </a:r>
+                      <a:endParaRPr lang="en-US" sz="1000" dirty="0"/>
+                    </a:p>
+                  </a:txBody>
+                  <a:tcPr marL="36576" marR="36576" marT="36576" marB="36576" anchor="ctr">
+                    <a:lnL w="9525" cap="flat" cmpd="sng" algn="ctr">
+                      <a:solidFill>
+                        <a:srgbClr val="FFFFFF"/>
+                      </a:solidFill>
+                      <a:prstDash val="solid"/>
+                      <a:round/>
+                      <a:headEnd type="none" w="med" len="med"/>
+                      <a:tailEnd type="none" w="med" len="med"/>
+                    </a:lnL>
+                    <a:lnR w="9525" cap="flat" cmpd="sng" algn="ctr">
+                      <a:solidFill>
+                        <a:srgbClr val="FFFFFF"/>
+                      </a:solidFill>
+                      <a:prstDash val="solid"/>
+                      <a:round/>
+                      <a:headEnd type="none" w="med" len="med"/>
+                      <a:tailEnd type="none" w="med" len="med"/>
+                    </a:lnR>
+                    <a:lnT w="9525" cap="flat" cmpd="sng" algn="ctr">
+                      <a:solidFill>
+                        <a:srgbClr val="FFFFFF"/>
+                      </a:solidFill>
+                      <a:prstDash val="solid"/>
+                      <a:round/>
+                      <a:headEnd type="none" w="med" len="med"/>
+                      <a:tailEnd type="none" w="med" len="med"/>
+                    </a:lnT>
+                    <a:lnB w="9525" cap="flat" cmpd="sng" algn="ctr">
+                      <a:solidFill>
+                        <a:srgbClr val="FFFFFF"/>
+                      </a:solidFill>
+                      <a:prstDash val="solid"/>
+                      <a:round/>
+                      <a:headEnd type="none" w="med" len="med"/>
+                      <a:tailEnd type="none" w="med" len="med"/>
+                    </a:lnB>
+                    <a:solidFill>
+                      <a:srgbClr val="FDF1E9"/>
+                    </a:solidFill>
+                  </a:tcPr>
+                </a:tc>
+                <a:tc>
+                  <a:txBody>
+                    <a:bodyPr/>
+                    <a:lstStyle/>
+                    <a:p>
+                      <a:pPr algn="ctr" indent="0" marL="0">
+                        <a:buNone/>
+                      </a:pPr>
+                      <a:r>
+                        <a:rPr lang="en-US" sz="1000" dirty="0">
+                          <a:solidFill>
+                            <a:srgbClr val="404040"/>
+                          </a:solidFill>
+                        </a:rPr>
+                        <a:t>13%</a:t>
+                      </a:r>
+                      <a:endParaRPr lang="en-US" sz="1000" dirty="0"/>
+                    </a:p>
+                  </a:txBody>
+                  <a:tcPr marL="36576" marR="36576" marT="36576" marB="36576" anchor="ctr">
+                    <a:lnL w="9525" cap="flat" cmpd="sng" algn="ctr">
+                      <a:solidFill>
+                        <a:srgbClr val="FFFFFF"/>
+                      </a:solidFill>
+                      <a:prstDash val="solid"/>
+                      <a:round/>
+                      <a:headEnd type="none" w="med" len="med"/>
+                      <a:tailEnd type="none" w="med" len="med"/>
+                    </a:lnL>
+                    <a:lnR w="9525" cap="flat" cmpd="sng" algn="ctr">
+                      <a:solidFill>
+                        <a:srgbClr val="FFFFFF"/>
+                      </a:solidFill>
+                      <a:prstDash val="solid"/>
+                      <a:round/>
+                      <a:headEnd type="none" w="med" len="med"/>
+                      <a:tailEnd type="none" w="med" len="med"/>
+                    </a:lnR>
+                    <a:lnT w="9525" cap="flat" cmpd="sng" algn="ctr">
+                      <a:solidFill>
+                        <a:srgbClr val="FFFFFF"/>
+                      </a:solidFill>
+                      <a:prstDash val="solid"/>
+                      <a:round/>
+                      <a:headEnd type="none" w="med" len="med"/>
+                      <a:tailEnd type="none" w="med" len="med"/>
+                    </a:lnT>
+                    <a:lnB w="9525" cap="flat" cmpd="sng" algn="ctr">
+                      <a:solidFill>
+                        <a:srgbClr val="FFFFFF"/>
+                      </a:solidFill>
+                      <a:prstDash val="solid"/>
+                      <a:round/>
+                      <a:headEnd type="none" w="med" len="med"/>
+                      <a:tailEnd type="none" w="med" len="med"/>
+                    </a:lnB>
+                    <a:solidFill>
+                      <a:srgbClr val="FDF1E9"/>
+                    </a:solidFill>
+                  </a:tcPr>
+                </a:tc>
+              </a:tr>
+              <a:tr h="228600">
+                <a:tc>
+                  <a:txBody>
+                    <a:bodyPr/>
+                    <a:lstStyle/>
+                    <a:p>
+                      <a:pPr algn="ctr" indent="0" marL="0">
+                        <a:buNone/>
+                      </a:pPr>
+                      <a:r>
+                        <a:rPr lang="en-US" sz="1000" dirty="0">
+                          <a:solidFill>
+                            <a:srgbClr val="404040"/>
+                          </a:solidFill>
+                        </a:rPr>
+                        <a:t>　其中 未達75%</a:t>
+                      </a:r>
+                      <a:endParaRPr lang="en-US" sz="1000" dirty="0"/>
+                    </a:p>
+                  </a:txBody>
+                  <a:tcPr marL="36576" marR="36576" marT="36576" marB="36576" anchor="ctr">
+                    <a:lnL w="9525" cap="flat" cmpd="sng" algn="ctr">
+                      <a:solidFill>
+                        <a:srgbClr val="FFFFFF"/>
+                      </a:solidFill>
+                      <a:prstDash val="solid"/>
+                      <a:round/>
+                      <a:headEnd type="none" w="med" len="med"/>
+                      <a:tailEnd type="none" w="med" len="med"/>
+                    </a:lnL>
+                    <a:lnR w="9525" cap="flat" cmpd="sng" algn="ctr">
+                      <a:solidFill>
+                        <a:srgbClr val="FFFFFF"/>
+                      </a:solidFill>
+                      <a:prstDash val="solid"/>
+                      <a:round/>
+                      <a:headEnd type="none" w="med" len="med"/>
+                      <a:tailEnd type="none" w="med" len="med"/>
+                    </a:lnR>
+                    <a:lnT w="9525" cap="flat" cmpd="sng" algn="ctr">
+                      <a:solidFill>
+                        <a:srgbClr val="FFFFFF"/>
+                      </a:solidFill>
+                      <a:prstDash val="solid"/>
+                      <a:round/>
+                      <a:headEnd type="none" w="med" len="med"/>
+                      <a:tailEnd type="none" w="med" len="med"/>
+                    </a:lnT>
+                    <a:lnB w="9525" cap="flat" cmpd="sng" algn="ctr">
+                      <a:solidFill>
+                        <a:srgbClr val="FFFFFF"/>
+                      </a:solidFill>
+                      <a:prstDash val="solid"/>
+                      <a:round/>
+                      <a:headEnd type="none" w="med" len="med"/>
+                      <a:tailEnd type="none" w="med" len="med"/>
+                    </a:lnB>
+                    <a:solidFill>
+                      <a:srgbClr val="FFFFFF"/>
+                    </a:solidFill>
+                  </a:tcPr>
+                </a:tc>
+                <a:tc>
+                  <a:txBody>
+                    <a:bodyPr/>
+                    <a:lstStyle/>
+                    <a:p>
+                      <a:pPr algn="ctr" indent="0" marL="0">
+                        <a:buNone/>
+                      </a:pPr>
+                      <a:r>
+                        <a:rPr lang="en-US" sz="1000" dirty="0">
+                          <a:solidFill>
+                            <a:srgbClr val="404040"/>
+                          </a:solidFill>
+                        </a:rPr>
+                        <a:t>6家</a:t>
+                      </a:r>
+                      <a:endParaRPr lang="en-US" sz="1000" dirty="0"/>
+                    </a:p>
+                  </a:txBody>
+                  <a:tcPr marL="36576" marR="36576" marT="36576" marB="36576" anchor="ctr">
+                    <a:lnL w="9525" cap="flat" cmpd="sng" algn="ctr">
+                      <a:solidFill>
+                        <a:srgbClr val="FFFFFF"/>
+                      </a:solidFill>
+                      <a:prstDash val="solid"/>
+                      <a:round/>
+                      <a:headEnd type="none" w="med" len="med"/>
+                      <a:tailEnd type="none" w="med" len="med"/>
+                    </a:lnL>
+                    <a:lnR w="9525" cap="flat" cmpd="sng" algn="ctr">
+                      <a:solidFill>
+                        <a:srgbClr val="FFFFFF"/>
+                      </a:solidFill>
+                      <a:prstDash val="solid"/>
+                      <a:round/>
+                      <a:headEnd type="none" w="med" len="med"/>
+                      <a:tailEnd type="none" w="med" len="med"/>
+                    </a:lnR>
+                    <a:lnT w="9525" cap="flat" cmpd="sng" algn="ctr">
+                      <a:solidFill>
+                        <a:srgbClr val="FFFFFF"/>
+                      </a:solidFill>
+                      <a:prstDash val="solid"/>
+                      <a:round/>
+                      <a:headEnd type="none" w="med" len="med"/>
+                      <a:tailEnd type="none" w="med" len="med"/>
+                    </a:lnT>
+                    <a:lnB w="9525" cap="flat" cmpd="sng" algn="ctr">
+                      <a:solidFill>
+                        <a:srgbClr val="FFFFFF"/>
+                      </a:solidFill>
+                      <a:prstDash val="solid"/>
+                      <a:round/>
+                      <a:headEnd type="none" w="med" len="med"/>
+                      <a:tailEnd type="none" w="med" len="med"/>
+                    </a:lnB>
+                    <a:solidFill>
+                      <a:srgbClr val="FFFFFF"/>
+                    </a:solidFill>
+                  </a:tcPr>
+                </a:tc>
+                <a:tc>
+                  <a:txBody>
+                    <a:bodyPr/>
+                    <a:lstStyle/>
+                    <a:p>
+                      <a:pPr algn="ctr" indent="0" marL="0">
+                        <a:buNone/>
+                      </a:pPr>
+                      <a:r>
+                        <a:rPr lang="en-US" sz="1000" dirty="0">
+                          <a:solidFill>
+                            <a:srgbClr val="404040"/>
+                          </a:solidFill>
+                        </a:rPr>
+                        <a:t>+1.36億</a:t>
+                      </a:r>
+                      <a:endParaRPr lang="en-US" sz="1000" dirty="0"/>
+                    </a:p>
+                  </a:txBody>
+                  <a:tcPr marL="36576" marR="36576" marT="36576" marB="36576" anchor="ctr">
+                    <a:lnL w="9525" cap="flat" cmpd="sng" algn="ctr">
+                      <a:solidFill>
+                        <a:srgbClr val="FFFFFF"/>
+                      </a:solidFill>
+                      <a:prstDash val="solid"/>
+                      <a:round/>
+                      <a:headEnd type="none" w="med" len="med"/>
+                      <a:tailEnd type="none" w="med" len="med"/>
+                    </a:lnL>
+                    <a:lnR w="9525" cap="flat" cmpd="sng" algn="ctr">
+                      <a:solidFill>
+                        <a:srgbClr val="FFFFFF"/>
+                      </a:solidFill>
+                      <a:prstDash val="solid"/>
+                      <a:round/>
+                      <a:headEnd type="none" w="med" len="med"/>
+                      <a:tailEnd type="none" w="med" len="med"/>
+                    </a:lnR>
+                    <a:lnT w="9525" cap="flat" cmpd="sng" algn="ctr">
+                      <a:solidFill>
+                        <a:srgbClr val="FFFFFF"/>
+                      </a:solidFill>
+                      <a:prstDash val="solid"/>
+                      <a:round/>
+                      <a:headEnd type="none" w="med" len="med"/>
+                      <a:tailEnd type="none" w="med" len="med"/>
+                    </a:lnT>
+                    <a:lnB w="9525" cap="flat" cmpd="sng" algn="ctr">
+                      <a:solidFill>
+                        <a:srgbClr val="FFFFFF"/>
+                      </a:solidFill>
+                      <a:prstDash val="solid"/>
+                      <a:round/>
+                      <a:headEnd type="none" w="med" len="med"/>
+                      <a:tailEnd type="none" w="med" len="med"/>
+                    </a:lnB>
+                    <a:solidFill>
+                      <a:srgbClr val="FFFFFF"/>
+                    </a:solidFill>
+                  </a:tcPr>
+                </a:tc>
+                <a:tc>
+                  <a:txBody>
+                    <a:bodyPr/>
+                    <a:lstStyle/>
+                    <a:p>
+                      <a:pPr algn="ctr" indent="0" marL="0">
+                        <a:buNone/>
+                      </a:pPr>
+                      <a:r>
+                        <a:rPr lang="en-US" sz="1000" dirty="0">
+                          <a:solidFill>
+                            <a:srgbClr val="404040"/>
+                          </a:solidFill>
+                        </a:rPr>
+                        <a:t>9%</a:t>
+                      </a:r>
+                      <a:endParaRPr lang="en-US" sz="1000" dirty="0"/>
+                    </a:p>
+                  </a:txBody>
+                  <a:tcPr marL="36576" marR="36576" marT="36576" marB="36576" anchor="ctr">
+                    <a:lnL w="9525" cap="flat" cmpd="sng" algn="ctr">
+                      <a:solidFill>
+                        <a:srgbClr val="FFFFFF"/>
+                      </a:solidFill>
+                      <a:prstDash val="solid"/>
+                      <a:round/>
+                      <a:headEnd type="none" w="med" len="med"/>
+                      <a:tailEnd type="none" w="med" len="med"/>
+                    </a:lnL>
+                    <a:lnR w="9525" cap="flat" cmpd="sng" algn="ctr">
+                      <a:solidFill>
+                        <a:srgbClr val="FFFFFF"/>
+                      </a:solidFill>
+                      <a:prstDash val="solid"/>
+                      <a:round/>
+                      <a:headEnd type="none" w="med" len="med"/>
+                      <a:tailEnd type="none" w="med" len="med"/>
+                    </a:lnR>
+                    <a:lnT w="9525" cap="flat" cmpd="sng" algn="ctr">
+                      <a:solidFill>
+                        <a:srgbClr val="FFFFFF"/>
+                      </a:solidFill>
+                      <a:prstDash val="solid"/>
+                      <a:round/>
+                      <a:headEnd type="none" w="med" len="med"/>
+                      <a:tailEnd type="none" w="med" len="med"/>
+                    </a:lnT>
+                    <a:lnB w="9525" cap="flat" cmpd="sng" algn="ctr">
+                      <a:solidFill>
+                        <a:srgbClr val="FFFFFF"/>
+                      </a:solidFill>
+                      <a:prstDash val="solid"/>
+                      <a:round/>
+                      <a:headEnd type="none" w="med" len="med"/>
+                      <a:tailEnd type="none" w="med" len="med"/>
+                    </a:lnB>
+                    <a:solidFill>
+                      <a:srgbClr val="FFFFFF"/>
+                    </a:solidFill>
+                  </a:tcPr>
+                </a:tc>
+              </a:tr>
+              <a:tr h="228600">
+                <a:tc>
+                  <a:txBody>
+                    <a:bodyPr/>
+                    <a:lstStyle/>
+                    <a:p>
+                      <a:pPr algn="ctr" indent="0" marL="0">
+                        <a:buNone/>
+                      </a:pPr>
+                      <a:r>
+                        <a:rPr lang="en-US" sz="1050" b="1" dirty="0">
                           <a:solidFill>
                             <a:srgbClr val="000000"/>
                           </a:solidFill>
                         </a:rPr>
-                        <a:t>18家</a:t>
-                      </a:r>
-                      <a:endParaRPr lang="en-US" sz="1300" dirty="0"/>
-                    </a:p>
-                  </a:txBody>
-                  <a:tcPr marL="36576" marR="36576" marT="36576" marB="36576" anchor="ctr">
-                    <a:lnL w="9525" cap="flat" cmpd="sng" algn="ctr">
-                      <a:solidFill>
-                        <a:srgbClr val="FFFFFF"/>
-                      </a:solidFill>
-                      <a:prstDash val="solid"/>
-                      <a:round/>
-                      <a:headEnd type="none" w="med" len="med"/>
-                      <a:tailEnd type="none" w="med" len="med"/>
-                    </a:lnL>
-                    <a:lnR w="9525" cap="flat" cmpd="sng" algn="ctr">
-                      <a:solidFill>
-                        <a:srgbClr val="FFFFFF"/>
-                      </a:solidFill>
-                      <a:prstDash val="solid"/>
-                      <a:round/>
-                      <a:headEnd type="none" w="med" len="med"/>
-                      <a:tailEnd type="none" w="med" len="med"/>
-                    </a:lnR>
-                    <a:lnT w="9525" cap="flat" cmpd="sng" algn="ctr">
-                      <a:solidFill>
-                        <a:srgbClr val="FFFFFF"/>
-                      </a:solidFill>
-                      <a:prstDash val="solid"/>
-                      <a:round/>
-                      <a:headEnd type="none" w="med" len="med"/>
-                      <a:tailEnd type="none" w="med" len="med"/>
-                    </a:lnT>
-                    <a:lnB w="9525" cap="flat" cmpd="sng" algn="ctr">
-                      <a:solidFill>
-                        <a:srgbClr val="FFFFFF"/>
-                      </a:solidFill>
-                      <a:prstDash val="solid"/>
-                      <a:round/>
-                      <a:headEnd type="none" w="med" len="med"/>
-                      <a:tailEnd type="none" w="med" len="med"/>
-                    </a:lnB>
-                    <a:solidFill>
-                      <a:srgbClr val="FFFFFF"/>
+                        <a:t>合計</a:t>
+                      </a:r>
+                      <a:endParaRPr lang="en-US" sz="1050" dirty="0"/>
+                    </a:p>
+                  </a:txBody>
+                  <a:tcPr marL="36576" marR="36576" marT="36576" marB="36576" anchor="ctr">
+                    <a:lnL w="9525" cap="flat" cmpd="sng" algn="ctr">
+                      <a:solidFill>
+                        <a:srgbClr val="FFFFFF"/>
+                      </a:solidFill>
+                      <a:prstDash val="solid"/>
+                      <a:round/>
+                      <a:headEnd type="none" w="med" len="med"/>
+                      <a:tailEnd type="none" w="med" len="med"/>
+                    </a:lnL>
+                    <a:lnR w="9525" cap="flat" cmpd="sng" algn="ctr">
+                      <a:solidFill>
+                        <a:srgbClr val="FFFFFF"/>
+                      </a:solidFill>
+                      <a:prstDash val="solid"/>
+                      <a:round/>
+                      <a:headEnd type="none" w="med" len="med"/>
+                      <a:tailEnd type="none" w="med" len="med"/>
+                    </a:lnR>
+                    <a:lnT w="9525" cap="flat" cmpd="sng" algn="ctr">
+                      <a:solidFill>
+                        <a:srgbClr val="FFFFFF"/>
+                      </a:solidFill>
+                      <a:prstDash val="solid"/>
+                      <a:round/>
+                      <a:headEnd type="none" w="med" len="med"/>
+                      <a:tailEnd type="none" w="med" len="med"/>
+                    </a:lnT>
+                    <a:lnB w="9525" cap="flat" cmpd="sng" algn="ctr">
+                      <a:solidFill>
+                        <a:srgbClr val="FFFFFF"/>
+                      </a:solidFill>
+                      <a:prstDash val="solid"/>
+                      <a:round/>
+                      <a:headEnd type="none" w="med" len="med"/>
+                      <a:tailEnd type="none" w="med" len="med"/>
+                    </a:lnB>
+                    <a:solidFill>
+                      <a:srgbClr val="F2F2F2"/>
                     </a:solidFill>
                   </a:tcPr>
                 </a:tc>
@@ -13283,55 +14917,55 @@
                         <a:buNone/>
                       </a:pPr>
                       <a:r>
-                        <a:rPr lang="en-US" sz="1300" dirty="0">
+                        <a:rPr lang="en-US" sz="1050" b="1" dirty="0">
                           <a:solidFill>
                             <a:srgbClr val="000000"/>
                           </a:solidFill>
                         </a:rPr>
-                        <a:t>−1.13億</a:t>
-                      </a:r>
-                      <a:endParaRPr lang="en-US" sz="1300" dirty="0"/>
-                    </a:p>
-                  </a:txBody>
-                  <a:tcPr marL="36576" marR="36576" marT="36576" marB="36576" anchor="ctr">
-                    <a:lnL w="9525" cap="flat" cmpd="sng" algn="ctr">
-                      <a:solidFill>
-                        <a:srgbClr val="FFFFFF"/>
-                      </a:solidFill>
-                      <a:prstDash val="solid"/>
-                      <a:round/>
-                      <a:headEnd type="none" w="med" len="med"/>
-                      <a:tailEnd type="none" w="med" len="med"/>
-                    </a:lnL>
-                    <a:lnR w="9525" cap="flat" cmpd="sng" algn="ctr">
-                      <a:solidFill>
-                        <a:srgbClr val="FFFFFF"/>
-                      </a:solidFill>
-                      <a:prstDash val="solid"/>
-                      <a:round/>
-                      <a:headEnd type="none" w="med" len="med"/>
-                      <a:tailEnd type="none" w="med" len="med"/>
-                    </a:lnR>
-                    <a:lnT w="9525" cap="flat" cmpd="sng" algn="ctr">
-                      <a:solidFill>
-                        <a:srgbClr val="FFFFFF"/>
-                      </a:solidFill>
-                      <a:prstDash val="solid"/>
-                      <a:round/>
-                      <a:headEnd type="none" w="med" len="med"/>
-                      <a:tailEnd type="none" w="med" len="med"/>
-                    </a:lnT>
-                    <a:lnB w="9525" cap="flat" cmpd="sng" algn="ctr">
-                      <a:solidFill>
-                        <a:srgbClr val="FFFFFF"/>
-                      </a:solidFill>
-                      <a:prstDash val="solid"/>
-                      <a:round/>
-                      <a:headEnd type="none" w="med" len="med"/>
-                      <a:tailEnd type="none" w="med" len="med"/>
-                    </a:lnB>
-                    <a:solidFill>
-                      <a:srgbClr val="FFFFFF"/>
+                        <a:t>99家</a:t>
+                      </a:r>
+                      <a:endParaRPr lang="en-US" sz="1050" dirty="0"/>
+                    </a:p>
+                  </a:txBody>
+                  <a:tcPr marL="36576" marR="36576" marT="36576" marB="36576" anchor="ctr">
+                    <a:lnL w="9525" cap="flat" cmpd="sng" algn="ctr">
+                      <a:solidFill>
+                        <a:srgbClr val="FFFFFF"/>
+                      </a:solidFill>
+                      <a:prstDash val="solid"/>
+                      <a:round/>
+                      <a:headEnd type="none" w="med" len="med"/>
+                      <a:tailEnd type="none" w="med" len="med"/>
+                    </a:lnL>
+                    <a:lnR w="9525" cap="flat" cmpd="sng" algn="ctr">
+                      <a:solidFill>
+                        <a:srgbClr val="FFFFFF"/>
+                      </a:solidFill>
+                      <a:prstDash val="solid"/>
+                      <a:round/>
+                      <a:headEnd type="none" w="med" len="med"/>
+                      <a:tailEnd type="none" w="med" len="med"/>
+                    </a:lnR>
+                    <a:lnT w="9525" cap="flat" cmpd="sng" algn="ctr">
+                      <a:solidFill>
+                        <a:srgbClr val="FFFFFF"/>
+                      </a:solidFill>
+                      <a:prstDash val="solid"/>
+                      <a:round/>
+                      <a:headEnd type="none" w="med" len="med"/>
+                      <a:tailEnd type="none" w="med" len="med"/>
+                    </a:lnT>
+                    <a:lnB w="9525" cap="flat" cmpd="sng" algn="ctr">
+                      <a:solidFill>
+                        <a:srgbClr val="FFFFFF"/>
+                      </a:solidFill>
+                      <a:prstDash val="solid"/>
+                      <a:round/>
+                      <a:headEnd type="none" w="med" len="med"/>
+                      <a:tailEnd type="none" w="med" len="med"/>
+                    </a:lnB>
+                    <a:solidFill>
+                      <a:srgbClr val="F2F2F2"/>
                     </a:solidFill>
                   </a:tcPr>
                 </a:tc>
@@ -13344,60 +14978,58 @@
                         <a:buNone/>
                       </a:pPr>
                       <a:r>
-                        <a:rPr lang="en-US" sz="1300" dirty="0">
+                        <a:rPr lang="en-US" sz="1050" b="1" dirty="0">
                           <a:solidFill>
                             <a:srgbClr val="000000"/>
                           </a:solidFill>
                         </a:rPr>
-                        <a:t>14%</a:t>
-                      </a:r>
-                      <a:endParaRPr lang="en-US" sz="1300" dirty="0"/>
-                    </a:p>
-                  </a:txBody>
-                  <a:tcPr marL="36576" marR="36576" marT="36576" marB="36576" anchor="ctr">
-                    <a:lnL w="9525" cap="flat" cmpd="sng" algn="ctr">
-                      <a:solidFill>
-                        <a:srgbClr val="FFFFFF"/>
-                      </a:solidFill>
-                      <a:prstDash val="solid"/>
-                      <a:round/>
-                      <a:headEnd type="none" w="med" len="med"/>
-                      <a:tailEnd type="none" w="med" len="med"/>
-                    </a:lnL>
-                    <a:lnR w="9525" cap="flat" cmpd="sng" algn="ctr">
-                      <a:solidFill>
-                        <a:srgbClr val="FFFFFF"/>
-                      </a:solidFill>
-                      <a:prstDash val="solid"/>
-                      <a:round/>
-                      <a:headEnd type="none" w="med" len="med"/>
-                      <a:tailEnd type="none" w="med" len="med"/>
-                    </a:lnR>
-                    <a:lnT w="9525" cap="flat" cmpd="sng" algn="ctr">
-                      <a:solidFill>
-                        <a:srgbClr val="FFFFFF"/>
-                      </a:solidFill>
-                      <a:prstDash val="solid"/>
-                      <a:round/>
-                      <a:headEnd type="none" w="med" len="med"/>
-                      <a:tailEnd type="none" w="med" len="med"/>
-                    </a:lnT>
-                    <a:lnB w="9525" cap="flat" cmpd="sng" algn="ctr">
-                      <a:solidFill>
-                        <a:srgbClr val="FFFFFF"/>
-                      </a:solidFill>
-                      <a:prstDash val="solid"/>
-                      <a:round/>
-                      <a:headEnd type="none" w="med" len="med"/>
-                      <a:tailEnd type="none" w="med" len="med"/>
-                    </a:lnB>
-                    <a:solidFill>
-                      <a:srgbClr val="FFFFFF"/>
-                    </a:solidFill>
-                  </a:tcPr>
-                </a:tc>
-              </a:tr>
-              <a:tr h="301752">
+                        <a:t>+15.23億</a:t>
+                      </a:r>
+                      <a:endParaRPr lang="en-US" sz="1050" dirty="0"/>
+                    </a:p>
+                  </a:txBody>
+                  <a:tcPr marL="36576" marR="36576" marT="36576" marB="36576" anchor="ctr">
+                    <a:lnL w="9525" cap="flat" cmpd="sng" algn="ctr">
+                      <a:solidFill>
+                        <a:srgbClr val="FFFFFF"/>
+                      </a:solidFill>
+                      <a:prstDash val="solid"/>
+                      <a:round/>
+                      <a:headEnd type="none" w="med" len="med"/>
+                      <a:tailEnd type="none" w="med" len="med"/>
+                    </a:lnL>
+                    <a:lnR w="9525" cap="flat" cmpd="sng" algn="ctr">
+                      <a:solidFill>
+                        <a:srgbClr val="FFFFFF"/>
+                      </a:solidFill>
+                      <a:prstDash val="solid"/>
+                      <a:round/>
+                      <a:headEnd type="none" w="med" len="med"/>
+                      <a:tailEnd type="none" w="med" len="med"/>
+                    </a:lnR>
+                    <a:lnT w="9525" cap="flat" cmpd="sng" algn="ctr">
+                      <a:solidFill>
+                        <a:srgbClr val="FFFFFF"/>
+                      </a:solidFill>
+                      <a:prstDash val="solid"/>
+                      <a:round/>
+                      <a:headEnd type="none" w="med" len="med"/>
+                      <a:tailEnd type="none" w="med" len="med"/>
+                    </a:lnT>
+                    <a:lnB w="9525" cap="flat" cmpd="sng" algn="ctr">
+                      <a:solidFill>
+                        <a:srgbClr val="FFFFFF"/>
+                      </a:solidFill>
+                      <a:prstDash val="solid"/>
+                      <a:round/>
+                      <a:headEnd type="none" w="med" len="med"/>
+                      <a:tailEnd type="none" w="med" len="med"/>
+                    </a:lnB>
+                    <a:solidFill>
+                      <a:srgbClr val="F2F2F2"/>
+                    </a:solidFill>
+                  </a:tcPr>
+                </a:tc>
                 <a:tc>
                   <a:txBody>
                     <a:bodyPr/>
@@ -13407,1181 +15039,14 @@
                         <a:buNone/>
                       </a:pPr>
                       <a:r>
-                        <a:rPr lang="en-US" sz="1200" b="1" dirty="0">
-                          <a:solidFill>
-                            <a:srgbClr val="C00000"/>
-                          </a:solidFill>
-                        </a:rPr>
-                        <a:t>未達標群（&lt;100%）</a:t>
-                      </a:r>
-                      <a:endParaRPr lang="en-US" sz="1200" dirty="0"/>
-                    </a:p>
-                  </a:txBody>
-                  <a:tcPr marL="36576" marR="36576" marT="36576" marB="36576" anchor="ctr">
-                    <a:lnL w="9525" cap="flat" cmpd="sng" algn="ctr">
-                      <a:solidFill>
-                        <a:srgbClr val="FFFFFF"/>
-                      </a:solidFill>
-                      <a:prstDash val="solid"/>
-                      <a:round/>
-                      <a:headEnd type="none" w="med" len="med"/>
-                      <a:tailEnd type="none" w="med" len="med"/>
-                    </a:lnL>
-                    <a:lnR w="9525" cap="flat" cmpd="sng" algn="ctr">
-                      <a:solidFill>
-                        <a:srgbClr val="FFFFFF"/>
-                      </a:solidFill>
-                      <a:prstDash val="solid"/>
-                      <a:round/>
-                      <a:headEnd type="none" w="med" len="med"/>
-                      <a:tailEnd type="none" w="med" len="med"/>
-                    </a:lnR>
-                    <a:lnT w="9525" cap="flat" cmpd="sng" algn="ctr">
-                      <a:solidFill>
-                        <a:srgbClr val="FFFFFF"/>
-                      </a:solidFill>
-                      <a:prstDash val="solid"/>
-                      <a:round/>
-                      <a:headEnd type="none" w="med" len="med"/>
-                      <a:tailEnd type="none" w="med" len="med"/>
-                    </a:lnT>
-                    <a:lnB w="9525" cap="flat" cmpd="sng" algn="ctr">
-                      <a:solidFill>
-                        <a:srgbClr val="FFFFFF"/>
-                      </a:solidFill>
-                      <a:prstDash val="solid"/>
-                      <a:round/>
-                      <a:headEnd type="none" w="med" len="med"/>
-                      <a:tailEnd type="none" w="med" len="med"/>
-                    </a:lnB>
-                    <a:solidFill>
-                      <a:srgbClr val="FDF1E9"/>
-                    </a:solidFill>
-                  </a:tcPr>
-                </a:tc>
-                <a:tc>
-                  <a:txBody>
-                    <a:bodyPr/>
-                    <a:lstStyle/>
-                    <a:p>
-                      <a:pPr algn="ctr" indent="0" marL="0">
-                        <a:buNone/>
-                      </a:pPr>
-                      <a:r>
-                        <a:rPr lang="en-US" sz="1300" b="1" dirty="0">
-                          <a:solidFill>
-                            <a:srgbClr val="C00000"/>
-                          </a:solidFill>
-                        </a:rPr>
-                        <a:t>66家</a:t>
-                      </a:r>
-                      <a:endParaRPr lang="en-US" sz="1300" dirty="0"/>
-                    </a:p>
-                  </a:txBody>
-                  <a:tcPr marL="36576" marR="36576" marT="36576" marB="36576" anchor="ctr">
-                    <a:lnL w="9525" cap="flat" cmpd="sng" algn="ctr">
-                      <a:solidFill>
-                        <a:srgbClr val="FFFFFF"/>
-                      </a:solidFill>
-                      <a:prstDash val="solid"/>
-                      <a:round/>
-                      <a:headEnd type="none" w="med" len="med"/>
-                      <a:tailEnd type="none" w="med" len="med"/>
-                    </a:lnL>
-                    <a:lnR w="9525" cap="flat" cmpd="sng" algn="ctr">
-                      <a:solidFill>
-                        <a:srgbClr val="FFFFFF"/>
-                      </a:solidFill>
-                      <a:prstDash val="solid"/>
-                      <a:round/>
-                      <a:headEnd type="none" w="med" len="med"/>
-                      <a:tailEnd type="none" w="med" len="med"/>
-                    </a:lnR>
-                    <a:lnT w="9525" cap="flat" cmpd="sng" algn="ctr">
-                      <a:solidFill>
-                        <a:srgbClr val="FFFFFF"/>
-                      </a:solidFill>
-                      <a:prstDash val="solid"/>
-                      <a:round/>
-                      <a:headEnd type="none" w="med" len="med"/>
-                      <a:tailEnd type="none" w="med" len="med"/>
-                    </a:lnT>
-                    <a:lnB w="9525" cap="flat" cmpd="sng" algn="ctr">
-                      <a:solidFill>
-                        <a:srgbClr val="FFFFFF"/>
-                      </a:solidFill>
-                      <a:prstDash val="solid"/>
-                      <a:round/>
-                      <a:headEnd type="none" w="med" len="med"/>
-                      <a:tailEnd type="none" w="med" len="med"/>
-                    </a:lnB>
-                    <a:solidFill>
-                      <a:srgbClr val="FDF1E9"/>
-                    </a:solidFill>
-                  </a:tcPr>
-                </a:tc>
-                <a:tc>
-                  <a:txBody>
-                    <a:bodyPr/>
-                    <a:lstStyle/>
-                    <a:p>
-                      <a:pPr algn="ctr" indent="0" marL="0">
-                        <a:buNone/>
-                      </a:pPr>
-                      <a:r>
-                        <a:rPr lang="en-US" sz="1300" b="1" dirty="0">
-                          <a:solidFill>
-                            <a:srgbClr val="C00000"/>
-                          </a:solidFill>
-                        </a:rPr>
-                        <a:t>−7.10億</a:t>
-                      </a:r>
-                      <a:endParaRPr lang="en-US" sz="1300" dirty="0"/>
-                    </a:p>
-                  </a:txBody>
-                  <a:tcPr marL="36576" marR="36576" marT="36576" marB="36576" anchor="ctr">
-                    <a:lnL w="9525" cap="flat" cmpd="sng" algn="ctr">
-                      <a:solidFill>
-                        <a:srgbClr val="FFFFFF"/>
-                      </a:solidFill>
-                      <a:prstDash val="solid"/>
-                      <a:round/>
-                      <a:headEnd type="none" w="med" len="med"/>
-                      <a:tailEnd type="none" w="med" len="med"/>
-                    </a:lnL>
-                    <a:lnR w="9525" cap="flat" cmpd="sng" algn="ctr">
-                      <a:solidFill>
-                        <a:srgbClr val="FFFFFF"/>
-                      </a:solidFill>
-                      <a:prstDash val="solid"/>
-                      <a:round/>
-                      <a:headEnd type="none" w="med" len="med"/>
-                      <a:tailEnd type="none" w="med" len="med"/>
-                    </a:lnR>
-                    <a:lnT w="9525" cap="flat" cmpd="sng" algn="ctr">
-                      <a:solidFill>
-                        <a:srgbClr val="FFFFFF"/>
-                      </a:solidFill>
-                      <a:prstDash val="solid"/>
-                      <a:round/>
-                      <a:headEnd type="none" w="med" len="med"/>
-                      <a:tailEnd type="none" w="med" len="med"/>
-                    </a:lnT>
-                    <a:lnB w="9525" cap="flat" cmpd="sng" algn="ctr">
-                      <a:solidFill>
-                        <a:srgbClr val="FFFFFF"/>
-                      </a:solidFill>
-                      <a:prstDash val="solid"/>
-                      <a:round/>
-                      <a:headEnd type="none" w="med" len="med"/>
-                      <a:tailEnd type="none" w="med" len="med"/>
-                    </a:lnB>
-                    <a:solidFill>
-                      <a:srgbClr val="FDF1E9"/>
-                    </a:solidFill>
-                  </a:tcPr>
-                </a:tc>
-                <a:tc>
-                  <a:txBody>
-                    <a:bodyPr/>
-                    <a:lstStyle/>
-                    <a:p>
-                      <a:pPr algn="ctr" indent="0" marL="0">
-                        <a:buNone/>
-                      </a:pPr>
-                      <a:r>
-                        <a:rPr lang="en-US" sz="1300" b="1" dirty="0">
-                          <a:solidFill>
-                            <a:srgbClr val="C00000"/>
-                          </a:solidFill>
-                        </a:rPr>
-                        <a:t>86%</a:t>
-                      </a:r>
-                      <a:endParaRPr lang="en-US" sz="1300" dirty="0"/>
-                    </a:p>
-                  </a:txBody>
-                  <a:tcPr marL="36576" marR="36576" marT="36576" marB="36576" anchor="ctr">
-                    <a:lnL w="9525" cap="flat" cmpd="sng" algn="ctr">
-                      <a:solidFill>
-                        <a:srgbClr val="FFFFFF"/>
-                      </a:solidFill>
-                      <a:prstDash val="solid"/>
-                      <a:round/>
-                      <a:headEnd type="none" w="med" len="med"/>
-                      <a:tailEnd type="none" w="med" len="med"/>
-                    </a:lnL>
-                    <a:lnR w="9525" cap="flat" cmpd="sng" algn="ctr">
-                      <a:solidFill>
-                        <a:srgbClr val="FFFFFF"/>
-                      </a:solidFill>
-                      <a:prstDash val="solid"/>
-                      <a:round/>
-                      <a:headEnd type="none" w="med" len="med"/>
-                      <a:tailEnd type="none" w="med" len="med"/>
-                    </a:lnR>
-                    <a:lnT w="9525" cap="flat" cmpd="sng" algn="ctr">
-                      <a:solidFill>
-                        <a:srgbClr val="FFFFFF"/>
-                      </a:solidFill>
-                      <a:prstDash val="solid"/>
-                      <a:round/>
-                      <a:headEnd type="none" w="med" len="med"/>
-                      <a:tailEnd type="none" w="med" len="med"/>
-                    </a:lnT>
-                    <a:lnB w="9525" cap="flat" cmpd="sng" algn="ctr">
-                      <a:solidFill>
-                        <a:srgbClr val="FFFFFF"/>
-                      </a:solidFill>
-                      <a:prstDash val="solid"/>
-                      <a:round/>
-                      <a:headEnd type="none" w="med" len="med"/>
-                      <a:tailEnd type="none" w="med" len="med"/>
-                    </a:lnB>
-                    <a:solidFill>
-                      <a:srgbClr val="FDF1E9"/>
-                    </a:solidFill>
-                  </a:tcPr>
-                </a:tc>
-              </a:tr>
-              <a:tr h="301752">
-                <a:tc>
-                  <a:txBody>
-                    <a:bodyPr/>
-                    <a:lstStyle/>
-                    <a:p>
-                      <a:pPr algn="ctr" indent="0" marL="0">
-                        <a:buNone/>
-                      </a:pPr>
-                      <a:r>
-                        <a:rPr lang="en-US" sz="1100" dirty="0">
+                        <a:rPr lang="en-US" sz="1050" b="1" dirty="0">
                           <a:solidFill>
                             <a:srgbClr val="000000"/>
                           </a:solidFill>
                         </a:rPr>
-                        <a:t>　其中 90～100%</a:t>
-                      </a:r>
-                      <a:endParaRPr lang="en-US" sz="1100" dirty="0"/>
-                    </a:p>
-                  </a:txBody>
-                  <a:tcPr marL="36576" marR="36576" marT="36576" marB="36576" anchor="ctr">
-                    <a:lnL w="9525" cap="flat" cmpd="sng" algn="ctr">
-                      <a:solidFill>
-                        <a:srgbClr val="FFFFFF"/>
-                      </a:solidFill>
-                      <a:prstDash val="solid"/>
-                      <a:round/>
-                      <a:headEnd type="none" w="med" len="med"/>
-                      <a:tailEnd type="none" w="med" len="med"/>
-                    </a:lnL>
-                    <a:lnR w="9525" cap="flat" cmpd="sng" algn="ctr">
-                      <a:solidFill>
-                        <a:srgbClr val="FFFFFF"/>
-                      </a:solidFill>
-                      <a:prstDash val="solid"/>
-                      <a:round/>
-                      <a:headEnd type="none" w="med" len="med"/>
-                      <a:tailEnd type="none" w="med" len="med"/>
-                    </a:lnR>
-                    <a:lnT w="9525" cap="flat" cmpd="sng" algn="ctr">
-                      <a:solidFill>
-                        <a:srgbClr val="FFFFFF"/>
-                      </a:solidFill>
-                      <a:prstDash val="solid"/>
-                      <a:round/>
-                      <a:headEnd type="none" w="med" len="med"/>
-                      <a:tailEnd type="none" w="med" len="med"/>
-                    </a:lnT>
-                    <a:lnB w="9525" cap="flat" cmpd="sng" algn="ctr">
-                      <a:solidFill>
-                        <a:srgbClr val="FFFFFF"/>
-                      </a:solidFill>
-                      <a:prstDash val="solid"/>
-                      <a:round/>
-                      <a:headEnd type="none" w="med" len="med"/>
-                      <a:tailEnd type="none" w="med" len="med"/>
-                    </a:lnB>
-                    <a:solidFill>
-                      <a:srgbClr val="FFFFFF"/>
-                    </a:solidFill>
-                  </a:tcPr>
-                </a:tc>
-                <a:tc>
-                  <a:txBody>
-                    <a:bodyPr/>
-                    <a:lstStyle/>
-                    <a:p>
-                      <a:pPr algn="ctr" indent="0" marL="0">
-                        <a:buNone/>
-                      </a:pPr>
-                      <a:r>
-                        <a:rPr lang="en-US" sz="1100" dirty="0">
-                          <a:solidFill>
-                            <a:srgbClr val="000000"/>
-                          </a:solidFill>
-                        </a:rPr>
-                        <a:t>16家</a:t>
-                      </a:r>
-                      <a:endParaRPr lang="en-US" sz="1100" dirty="0"/>
-                    </a:p>
-                  </a:txBody>
-                  <a:tcPr marL="36576" marR="36576" marT="36576" marB="36576" anchor="ctr">
-                    <a:lnL w="9525" cap="flat" cmpd="sng" algn="ctr">
-                      <a:solidFill>
-                        <a:srgbClr val="FFFFFF"/>
-                      </a:solidFill>
-                      <a:prstDash val="solid"/>
-                      <a:round/>
-                      <a:headEnd type="none" w="med" len="med"/>
-                      <a:tailEnd type="none" w="med" len="med"/>
-                    </a:lnL>
-                    <a:lnR w="9525" cap="flat" cmpd="sng" algn="ctr">
-                      <a:solidFill>
-                        <a:srgbClr val="FFFFFF"/>
-                      </a:solidFill>
-                      <a:prstDash val="solid"/>
-                      <a:round/>
-                      <a:headEnd type="none" w="med" len="med"/>
-                      <a:tailEnd type="none" w="med" len="med"/>
-                    </a:lnR>
-                    <a:lnT w="9525" cap="flat" cmpd="sng" algn="ctr">
-                      <a:solidFill>
-                        <a:srgbClr val="FFFFFF"/>
-                      </a:solidFill>
-                      <a:prstDash val="solid"/>
-                      <a:round/>
-                      <a:headEnd type="none" w="med" len="med"/>
-                      <a:tailEnd type="none" w="med" len="med"/>
-                    </a:lnT>
-                    <a:lnB w="9525" cap="flat" cmpd="sng" algn="ctr">
-                      <a:solidFill>
-                        <a:srgbClr val="FFFFFF"/>
-                      </a:solidFill>
-                      <a:prstDash val="solid"/>
-                      <a:round/>
-                      <a:headEnd type="none" w="med" len="med"/>
-                      <a:tailEnd type="none" w="med" len="med"/>
-                    </a:lnB>
-                    <a:solidFill>
-                      <a:srgbClr val="FFFFFF"/>
-                    </a:solidFill>
-                  </a:tcPr>
-                </a:tc>
-                <a:tc>
-                  <a:txBody>
-                    <a:bodyPr/>
-                    <a:lstStyle/>
-                    <a:p>
-                      <a:pPr algn="ctr" indent="0" marL="0">
-                        <a:buNone/>
-                      </a:pPr>
-                      <a:r>
-                        <a:rPr lang="en-US" sz="1100" dirty="0">
-                          <a:solidFill>
-                            <a:srgbClr val="000000"/>
-                          </a:solidFill>
-                        </a:rPr>
-                        <a:t>−1.49億</a:t>
-                      </a:r>
-                      <a:endParaRPr lang="en-US" sz="1100" dirty="0"/>
-                    </a:p>
-                  </a:txBody>
-                  <a:tcPr marL="36576" marR="36576" marT="36576" marB="36576" anchor="ctr">
-                    <a:lnL w="9525" cap="flat" cmpd="sng" algn="ctr">
-                      <a:solidFill>
-                        <a:srgbClr val="FFFFFF"/>
-                      </a:solidFill>
-                      <a:prstDash val="solid"/>
-                      <a:round/>
-                      <a:headEnd type="none" w="med" len="med"/>
-                      <a:tailEnd type="none" w="med" len="med"/>
-                    </a:lnL>
-                    <a:lnR w="9525" cap="flat" cmpd="sng" algn="ctr">
-                      <a:solidFill>
-                        <a:srgbClr val="FFFFFF"/>
-                      </a:solidFill>
-                      <a:prstDash val="solid"/>
-                      <a:round/>
-                      <a:headEnd type="none" w="med" len="med"/>
-                      <a:tailEnd type="none" w="med" len="med"/>
-                    </a:lnR>
-                    <a:lnT w="9525" cap="flat" cmpd="sng" algn="ctr">
-                      <a:solidFill>
-                        <a:srgbClr val="FFFFFF"/>
-                      </a:solidFill>
-                      <a:prstDash val="solid"/>
-                      <a:round/>
-                      <a:headEnd type="none" w="med" len="med"/>
-                      <a:tailEnd type="none" w="med" len="med"/>
-                    </a:lnT>
-                    <a:lnB w="9525" cap="flat" cmpd="sng" algn="ctr">
-                      <a:solidFill>
-                        <a:srgbClr val="FFFFFF"/>
-                      </a:solidFill>
-                      <a:prstDash val="solid"/>
-                      <a:round/>
-                      <a:headEnd type="none" w="med" len="med"/>
-                      <a:tailEnd type="none" w="med" len="med"/>
-                    </a:lnB>
-                    <a:solidFill>
-                      <a:srgbClr val="FFFFFF"/>
-                    </a:solidFill>
-                  </a:tcPr>
-                </a:tc>
-                <a:tc>
-                  <a:txBody>
-                    <a:bodyPr/>
-                    <a:lstStyle/>
-                    <a:p>
-                      <a:pPr algn="ctr" indent="0" marL="0">
-                        <a:buNone/>
-                      </a:pPr>
-                      <a:r>
-                        <a:rPr lang="en-US" sz="1100" dirty="0">
-                          <a:solidFill>
-                            <a:srgbClr val="000000"/>
-                          </a:solidFill>
-                        </a:rPr>
-                        <a:t>18%</a:t>
-                      </a:r>
-                      <a:endParaRPr lang="en-US" sz="1100" dirty="0"/>
-                    </a:p>
-                  </a:txBody>
-                  <a:tcPr marL="36576" marR="36576" marT="36576" marB="36576" anchor="ctr">
-                    <a:lnL w="9525" cap="flat" cmpd="sng" algn="ctr">
-                      <a:solidFill>
-                        <a:srgbClr val="FFFFFF"/>
-                      </a:solidFill>
-                      <a:prstDash val="solid"/>
-                      <a:round/>
-                      <a:headEnd type="none" w="med" len="med"/>
-                      <a:tailEnd type="none" w="med" len="med"/>
-                    </a:lnL>
-                    <a:lnR w="9525" cap="flat" cmpd="sng" algn="ctr">
-                      <a:solidFill>
-                        <a:srgbClr val="FFFFFF"/>
-                      </a:solidFill>
-                      <a:prstDash val="solid"/>
-                      <a:round/>
-                      <a:headEnd type="none" w="med" len="med"/>
-                      <a:tailEnd type="none" w="med" len="med"/>
-                    </a:lnR>
-                    <a:lnT w="9525" cap="flat" cmpd="sng" algn="ctr">
-                      <a:solidFill>
-                        <a:srgbClr val="FFFFFF"/>
-                      </a:solidFill>
-                      <a:prstDash val="solid"/>
-                      <a:round/>
-                      <a:headEnd type="none" w="med" len="med"/>
-                      <a:tailEnd type="none" w="med" len="med"/>
-                    </a:lnT>
-                    <a:lnB w="9525" cap="flat" cmpd="sng" algn="ctr">
-                      <a:solidFill>
-                        <a:srgbClr val="FFFFFF"/>
-                      </a:solidFill>
-                      <a:prstDash val="solid"/>
-                      <a:round/>
-                      <a:headEnd type="none" w="med" len="med"/>
-                      <a:tailEnd type="none" w="med" len="med"/>
-                    </a:lnB>
-                    <a:solidFill>
-                      <a:srgbClr val="FFFFFF"/>
-                    </a:solidFill>
-                  </a:tcPr>
-                </a:tc>
-              </a:tr>
-              <a:tr h="301752">
-                <a:tc>
-                  <a:txBody>
-                    <a:bodyPr/>
-                    <a:lstStyle/>
-                    <a:p>
-                      <a:pPr algn="ctr" indent="0" marL="0">
-                        <a:buNone/>
-                      </a:pPr>
-                      <a:r>
-                        <a:rPr lang="en-US" sz="1100" dirty="0">
-                          <a:solidFill>
-                            <a:srgbClr val="000000"/>
-                          </a:solidFill>
-                        </a:rPr>
-                        <a:t>　其中 75～90%</a:t>
-                      </a:r>
-                      <a:endParaRPr lang="en-US" sz="1100" dirty="0"/>
-                    </a:p>
-                  </a:txBody>
-                  <a:tcPr marL="36576" marR="36576" marT="36576" marB="36576" anchor="ctr">
-                    <a:lnL w="9525" cap="flat" cmpd="sng" algn="ctr">
-                      <a:solidFill>
-                        <a:srgbClr val="FFFFFF"/>
-                      </a:solidFill>
-                      <a:prstDash val="solid"/>
-                      <a:round/>
-                      <a:headEnd type="none" w="med" len="med"/>
-                      <a:tailEnd type="none" w="med" len="med"/>
-                    </a:lnL>
-                    <a:lnR w="9525" cap="flat" cmpd="sng" algn="ctr">
-                      <a:solidFill>
-                        <a:srgbClr val="FFFFFF"/>
-                      </a:solidFill>
-                      <a:prstDash val="solid"/>
-                      <a:round/>
-                      <a:headEnd type="none" w="med" len="med"/>
-                      <a:tailEnd type="none" w="med" len="med"/>
-                    </a:lnR>
-                    <a:lnT w="9525" cap="flat" cmpd="sng" algn="ctr">
-                      <a:solidFill>
-                        <a:srgbClr val="FFFFFF"/>
-                      </a:solidFill>
-                      <a:prstDash val="solid"/>
-                      <a:round/>
-                      <a:headEnd type="none" w="med" len="med"/>
-                      <a:tailEnd type="none" w="med" len="med"/>
-                    </a:lnT>
-                    <a:lnB w="9525" cap="flat" cmpd="sng" algn="ctr">
-                      <a:solidFill>
-                        <a:srgbClr val="FFFFFF"/>
-                      </a:solidFill>
-                      <a:prstDash val="solid"/>
-                      <a:round/>
-                      <a:headEnd type="none" w="med" len="med"/>
-                      <a:tailEnd type="none" w="med" len="med"/>
-                    </a:lnB>
-                    <a:solidFill>
-                      <a:srgbClr val="FDF1E9"/>
-                    </a:solidFill>
-                  </a:tcPr>
-                </a:tc>
-                <a:tc>
-                  <a:txBody>
-                    <a:bodyPr/>
-                    <a:lstStyle/>
-                    <a:p>
-                      <a:pPr algn="ctr" indent="0" marL="0">
-                        <a:buNone/>
-                      </a:pPr>
-                      <a:r>
-                        <a:rPr lang="en-US" sz="1100" dirty="0">
-                          <a:solidFill>
-                            <a:srgbClr val="000000"/>
-                          </a:solidFill>
-                        </a:rPr>
-                        <a:t>32家</a:t>
-                      </a:r>
-                      <a:endParaRPr lang="en-US" sz="1100" dirty="0"/>
-                    </a:p>
-                  </a:txBody>
-                  <a:tcPr marL="36576" marR="36576" marT="36576" marB="36576" anchor="ctr">
-                    <a:lnL w="9525" cap="flat" cmpd="sng" algn="ctr">
-                      <a:solidFill>
-                        <a:srgbClr val="FFFFFF"/>
-                      </a:solidFill>
-                      <a:prstDash val="solid"/>
-                      <a:round/>
-                      <a:headEnd type="none" w="med" len="med"/>
-                      <a:tailEnd type="none" w="med" len="med"/>
-                    </a:lnL>
-                    <a:lnR w="9525" cap="flat" cmpd="sng" algn="ctr">
-                      <a:solidFill>
-                        <a:srgbClr val="FFFFFF"/>
-                      </a:solidFill>
-                      <a:prstDash val="solid"/>
-                      <a:round/>
-                      <a:headEnd type="none" w="med" len="med"/>
-                      <a:tailEnd type="none" w="med" len="med"/>
-                    </a:lnR>
-                    <a:lnT w="9525" cap="flat" cmpd="sng" algn="ctr">
-                      <a:solidFill>
-                        <a:srgbClr val="FFFFFF"/>
-                      </a:solidFill>
-                      <a:prstDash val="solid"/>
-                      <a:round/>
-                      <a:headEnd type="none" w="med" len="med"/>
-                      <a:tailEnd type="none" w="med" len="med"/>
-                    </a:lnT>
-                    <a:lnB w="9525" cap="flat" cmpd="sng" algn="ctr">
-                      <a:solidFill>
-                        <a:srgbClr val="FFFFFF"/>
-                      </a:solidFill>
-                      <a:prstDash val="solid"/>
-                      <a:round/>
-                      <a:headEnd type="none" w="med" len="med"/>
-                      <a:tailEnd type="none" w="med" len="med"/>
-                    </a:lnB>
-                    <a:solidFill>
-                      <a:srgbClr val="FDF1E9"/>
-                    </a:solidFill>
-                  </a:tcPr>
-                </a:tc>
-                <a:tc>
-                  <a:txBody>
-                    <a:bodyPr/>
-                    <a:lstStyle/>
-                    <a:p>
-                      <a:pPr algn="ctr" indent="0" marL="0">
-                        <a:buNone/>
-                      </a:pPr>
-                      <a:r>
-                        <a:rPr lang="en-US" sz="1100" dirty="0">
-                          <a:solidFill>
-                            <a:srgbClr val="000000"/>
-                          </a:solidFill>
-                        </a:rPr>
-                        <a:t>−3.43億</a:t>
-                      </a:r>
-                      <a:endParaRPr lang="en-US" sz="1100" dirty="0"/>
-                    </a:p>
-                  </a:txBody>
-                  <a:tcPr marL="36576" marR="36576" marT="36576" marB="36576" anchor="ctr">
-                    <a:lnL w="9525" cap="flat" cmpd="sng" algn="ctr">
-                      <a:solidFill>
-                        <a:srgbClr val="FFFFFF"/>
-                      </a:solidFill>
-                      <a:prstDash val="solid"/>
-                      <a:round/>
-                      <a:headEnd type="none" w="med" len="med"/>
-                      <a:tailEnd type="none" w="med" len="med"/>
-                    </a:lnL>
-                    <a:lnR w="9525" cap="flat" cmpd="sng" algn="ctr">
-                      <a:solidFill>
-                        <a:srgbClr val="FFFFFF"/>
-                      </a:solidFill>
-                      <a:prstDash val="solid"/>
-                      <a:round/>
-                      <a:headEnd type="none" w="med" len="med"/>
-                      <a:tailEnd type="none" w="med" len="med"/>
-                    </a:lnR>
-                    <a:lnT w="9525" cap="flat" cmpd="sng" algn="ctr">
-                      <a:solidFill>
-                        <a:srgbClr val="FFFFFF"/>
-                      </a:solidFill>
-                      <a:prstDash val="solid"/>
-                      <a:round/>
-                      <a:headEnd type="none" w="med" len="med"/>
-                      <a:tailEnd type="none" w="med" len="med"/>
-                    </a:lnT>
-                    <a:lnB w="9525" cap="flat" cmpd="sng" algn="ctr">
-                      <a:solidFill>
-                        <a:srgbClr val="FFFFFF"/>
-                      </a:solidFill>
-                      <a:prstDash val="solid"/>
-                      <a:round/>
-                      <a:headEnd type="none" w="med" len="med"/>
-                      <a:tailEnd type="none" w="med" len="med"/>
-                    </a:lnB>
-                    <a:solidFill>
-                      <a:srgbClr val="FDF1E9"/>
-                    </a:solidFill>
-                  </a:tcPr>
-                </a:tc>
-                <a:tc>
-                  <a:txBody>
-                    <a:bodyPr/>
-                    <a:lstStyle/>
-                    <a:p>
-                      <a:pPr algn="ctr" indent="0" marL="0">
-                        <a:buNone/>
-                      </a:pPr>
-                      <a:r>
-                        <a:rPr lang="en-US" sz="1100" dirty="0">
-                          <a:solidFill>
-                            <a:srgbClr val="000000"/>
-                          </a:solidFill>
-                        </a:rPr>
-                        <a:t>42%</a:t>
-                      </a:r>
-                      <a:endParaRPr lang="en-US" sz="1100" dirty="0"/>
-                    </a:p>
-                  </a:txBody>
-                  <a:tcPr marL="36576" marR="36576" marT="36576" marB="36576" anchor="ctr">
-                    <a:lnL w="9525" cap="flat" cmpd="sng" algn="ctr">
-                      <a:solidFill>
-                        <a:srgbClr val="FFFFFF"/>
-                      </a:solidFill>
-                      <a:prstDash val="solid"/>
-                      <a:round/>
-                      <a:headEnd type="none" w="med" len="med"/>
-                      <a:tailEnd type="none" w="med" len="med"/>
-                    </a:lnL>
-                    <a:lnR w="9525" cap="flat" cmpd="sng" algn="ctr">
-                      <a:solidFill>
-                        <a:srgbClr val="FFFFFF"/>
-                      </a:solidFill>
-                      <a:prstDash val="solid"/>
-                      <a:round/>
-                      <a:headEnd type="none" w="med" len="med"/>
-                      <a:tailEnd type="none" w="med" len="med"/>
-                    </a:lnR>
-                    <a:lnT w="9525" cap="flat" cmpd="sng" algn="ctr">
-                      <a:solidFill>
-                        <a:srgbClr val="FFFFFF"/>
-                      </a:solidFill>
-                      <a:prstDash val="solid"/>
-                      <a:round/>
-                      <a:headEnd type="none" w="med" len="med"/>
-                      <a:tailEnd type="none" w="med" len="med"/>
-                    </a:lnT>
-                    <a:lnB w="9525" cap="flat" cmpd="sng" algn="ctr">
-                      <a:solidFill>
-                        <a:srgbClr val="FFFFFF"/>
-                      </a:solidFill>
-                      <a:prstDash val="solid"/>
-                      <a:round/>
-                      <a:headEnd type="none" w="med" len="med"/>
-                      <a:tailEnd type="none" w="med" len="med"/>
-                    </a:lnB>
-                    <a:solidFill>
-                      <a:srgbClr val="FDF1E9"/>
-                    </a:solidFill>
-                  </a:tcPr>
-                </a:tc>
-              </a:tr>
-              <a:tr h="301752">
-                <a:tc>
-                  <a:txBody>
-                    <a:bodyPr/>
-                    <a:lstStyle/>
-                    <a:p>
-                      <a:pPr algn="ctr" indent="0" marL="0">
-                        <a:buNone/>
-                      </a:pPr>
-                      <a:r>
-                        <a:rPr lang="en-US" sz="1100" dirty="0">
-                          <a:solidFill>
-                            <a:srgbClr val="000000"/>
-                          </a:solidFill>
-                        </a:rPr>
-                        <a:t>　其中 未達75%</a:t>
-                      </a:r>
-                      <a:endParaRPr lang="en-US" sz="1100" dirty="0"/>
-                    </a:p>
-                  </a:txBody>
-                  <a:tcPr marL="36576" marR="36576" marT="36576" marB="36576" anchor="ctr">
-                    <a:lnL w="9525" cap="flat" cmpd="sng" algn="ctr">
-                      <a:solidFill>
-                        <a:srgbClr val="FFFFFF"/>
-                      </a:solidFill>
-                      <a:prstDash val="solid"/>
-                      <a:round/>
-                      <a:headEnd type="none" w="med" len="med"/>
-                      <a:tailEnd type="none" w="med" len="med"/>
-                    </a:lnL>
-                    <a:lnR w="9525" cap="flat" cmpd="sng" algn="ctr">
-                      <a:solidFill>
-                        <a:srgbClr val="FFFFFF"/>
-                      </a:solidFill>
-                      <a:prstDash val="solid"/>
-                      <a:round/>
-                      <a:headEnd type="none" w="med" len="med"/>
-                      <a:tailEnd type="none" w="med" len="med"/>
-                    </a:lnR>
-                    <a:lnT w="9525" cap="flat" cmpd="sng" algn="ctr">
-                      <a:solidFill>
-                        <a:srgbClr val="FFFFFF"/>
-                      </a:solidFill>
-                      <a:prstDash val="solid"/>
-                      <a:round/>
-                      <a:headEnd type="none" w="med" len="med"/>
-                      <a:tailEnd type="none" w="med" len="med"/>
-                    </a:lnT>
-                    <a:lnB w="9525" cap="flat" cmpd="sng" algn="ctr">
-                      <a:solidFill>
-                        <a:srgbClr val="FFFFFF"/>
-                      </a:solidFill>
-                      <a:prstDash val="solid"/>
-                      <a:round/>
-                      <a:headEnd type="none" w="med" len="med"/>
-                      <a:tailEnd type="none" w="med" len="med"/>
-                    </a:lnB>
-                    <a:solidFill>
-                      <a:srgbClr val="FFFFFF"/>
-                    </a:solidFill>
-                  </a:tcPr>
-                </a:tc>
-                <a:tc>
-                  <a:txBody>
-                    <a:bodyPr/>
-                    <a:lstStyle/>
-                    <a:p>
-                      <a:pPr algn="ctr" indent="0" marL="0">
-                        <a:buNone/>
-                      </a:pPr>
-                      <a:r>
-                        <a:rPr lang="en-US" sz="1100" dirty="0">
-                          <a:solidFill>
-                            <a:srgbClr val="000000"/>
-                          </a:solidFill>
-                        </a:rPr>
-                        <a:t>18家</a:t>
-                      </a:r>
-                      <a:endParaRPr lang="en-US" sz="1100" dirty="0"/>
-                    </a:p>
-                  </a:txBody>
-                  <a:tcPr marL="36576" marR="36576" marT="36576" marB="36576" anchor="ctr">
-                    <a:lnL w="9525" cap="flat" cmpd="sng" algn="ctr">
-                      <a:solidFill>
-                        <a:srgbClr val="FFFFFF"/>
-                      </a:solidFill>
-                      <a:prstDash val="solid"/>
-                      <a:round/>
-                      <a:headEnd type="none" w="med" len="med"/>
-                      <a:tailEnd type="none" w="med" len="med"/>
-                    </a:lnL>
-                    <a:lnR w="9525" cap="flat" cmpd="sng" algn="ctr">
-                      <a:solidFill>
-                        <a:srgbClr val="FFFFFF"/>
-                      </a:solidFill>
-                      <a:prstDash val="solid"/>
-                      <a:round/>
-                      <a:headEnd type="none" w="med" len="med"/>
-                      <a:tailEnd type="none" w="med" len="med"/>
-                    </a:lnR>
-                    <a:lnT w="9525" cap="flat" cmpd="sng" algn="ctr">
-                      <a:solidFill>
-                        <a:srgbClr val="FFFFFF"/>
-                      </a:solidFill>
-                      <a:prstDash val="solid"/>
-                      <a:round/>
-                      <a:headEnd type="none" w="med" len="med"/>
-                      <a:tailEnd type="none" w="med" len="med"/>
-                    </a:lnT>
-                    <a:lnB w="9525" cap="flat" cmpd="sng" algn="ctr">
-                      <a:solidFill>
-                        <a:srgbClr val="FFFFFF"/>
-                      </a:solidFill>
-                      <a:prstDash val="solid"/>
-                      <a:round/>
-                      <a:headEnd type="none" w="med" len="med"/>
-                      <a:tailEnd type="none" w="med" len="med"/>
-                    </a:lnB>
-                    <a:solidFill>
-                      <a:srgbClr val="FFFFFF"/>
-                    </a:solidFill>
-                  </a:tcPr>
-                </a:tc>
-                <a:tc>
-                  <a:txBody>
-                    <a:bodyPr/>
-                    <a:lstStyle/>
-                    <a:p>
-                      <a:pPr algn="ctr" indent="0" marL="0">
-                        <a:buNone/>
-                      </a:pPr>
-                      <a:r>
-                        <a:rPr lang="en-US" sz="1100" dirty="0">
-                          <a:solidFill>
-                            <a:srgbClr val="000000"/>
-                          </a:solidFill>
-                        </a:rPr>
-                        <a:t>−2.18億</a:t>
-                      </a:r>
-                      <a:endParaRPr lang="en-US" sz="1100" dirty="0"/>
-                    </a:p>
-                  </a:txBody>
-                  <a:tcPr marL="36576" marR="36576" marT="36576" marB="36576" anchor="ctr">
-                    <a:lnL w="9525" cap="flat" cmpd="sng" algn="ctr">
-                      <a:solidFill>
-                        <a:srgbClr val="FFFFFF"/>
-                      </a:solidFill>
-                      <a:prstDash val="solid"/>
-                      <a:round/>
-                      <a:headEnd type="none" w="med" len="med"/>
-                      <a:tailEnd type="none" w="med" len="med"/>
-                    </a:lnL>
-                    <a:lnR w="9525" cap="flat" cmpd="sng" algn="ctr">
-                      <a:solidFill>
-                        <a:srgbClr val="FFFFFF"/>
-                      </a:solidFill>
-                      <a:prstDash val="solid"/>
-                      <a:round/>
-                      <a:headEnd type="none" w="med" len="med"/>
-                      <a:tailEnd type="none" w="med" len="med"/>
-                    </a:lnR>
-                    <a:lnT w="9525" cap="flat" cmpd="sng" algn="ctr">
-                      <a:solidFill>
-                        <a:srgbClr val="FFFFFF"/>
-                      </a:solidFill>
-                      <a:prstDash val="solid"/>
-                      <a:round/>
-                      <a:headEnd type="none" w="med" len="med"/>
-                      <a:tailEnd type="none" w="med" len="med"/>
-                    </a:lnT>
-                    <a:lnB w="9525" cap="flat" cmpd="sng" algn="ctr">
-                      <a:solidFill>
-                        <a:srgbClr val="FFFFFF"/>
-                      </a:solidFill>
-                      <a:prstDash val="solid"/>
-                      <a:round/>
-                      <a:headEnd type="none" w="med" len="med"/>
-                      <a:tailEnd type="none" w="med" len="med"/>
-                    </a:lnB>
-                    <a:solidFill>
-                      <a:srgbClr val="FFFFFF"/>
-                    </a:solidFill>
-                  </a:tcPr>
-                </a:tc>
-                <a:tc>
-                  <a:txBody>
-                    <a:bodyPr/>
-                    <a:lstStyle/>
-                    <a:p>
-                      <a:pPr algn="ctr" indent="0" marL="0">
-                        <a:buNone/>
-                      </a:pPr>
-                      <a:r>
-                        <a:rPr lang="en-US" sz="1100" dirty="0">
-                          <a:solidFill>
-                            <a:srgbClr val="000000"/>
-                          </a:solidFill>
-                        </a:rPr>
-                        <a:t>26%</a:t>
-                      </a:r>
-                      <a:endParaRPr lang="en-US" sz="1100" dirty="0"/>
-                    </a:p>
-                  </a:txBody>
-                  <a:tcPr marL="36576" marR="36576" marT="36576" marB="36576" anchor="ctr">
-                    <a:lnL w="9525" cap="flat" cmpd="sng" algn="ctr">
-                      <a:solidFill>
-                        <a:srgbClr val="FFFFFF"/>
-                      </a:solidFill>
-                      <a:prstDash val="solid"/>
-                      <a:round/>
-                      <a:headEnd type="none" w="med" len="med"/>
-                      <a:tailEnd type="none" w="med" len="med"/>
-                    </a:lnL>
-                    <a:lnR w="9525" cap="flat" cmpd="sng" algn="ctr">
-                      <a:solidFill>
-                        <a:srgbClr val="FFFFFF"/>
-                      </a:solidFill>
-                      <a:prstDash val="solid"/>
-                      <a:round/>
-                      <a:headEnd type="none" w="med" len="med"/>
-                      <a:tailEnd type="none" w="med" len="med"/>
-                    </a:lnR>
-                    <a:lnT w="9525" cap="flat" cmpd="sng" algn="ctr">
-                      <a:solidFill>
-                        <a:srgbClr val="FFFFFF"/>
-                      </a:solidFill>
-                      <a:prstDash val="solid"/>
-                      <a:round/>
-                      <a:headEnd type="none" w="med" len="med"/>
-                      <a:tailEnd type="none" w="med" len="med"/>
-                    </a:lnT>
-                    <a:lnB w="9525" cap="flat" cmpd="sng" algn="ctr">
-                      <a:solidFill>
-                        <a:srgbClr val="FFFFFF"/>
-                      </a:solidFill>
-                      <a:prstDash val="solid"/>
-                      <a:round/>
-                      <a:headEnd type="none" w="med" len="med"/>
-                      <a:tailEnd type="none" w="med" len="med"/>
-                    </a:lnB>
-                    <a:solidFill>
-                      <a:srgbClr val="FFFFFF"/>
-                    </a:solidFill>
-                  </a:tcPr>
-                </a:tc>
-              </a:tr>
-              <a:tr h="301752">
-                <a:tc>
-                  <a:txBody>
-                    <a:bodyPr/>
-                    <a:lstStyle/>
-                    <a:p>
-                      <a:pPr algn="ctr" indent="0" marL="0">
-                        <a:buNone/>
-                      </a:pPr>
-                      <a:r>
-                        <a:rPr lang="en-US" sz="1300" b="1" dirty="0">
-                          <a:solidFill>
-                            <a:srgbClr val="000000"/>
-                          </a:solidFill>
-                        </a:rPr>
-                        <a:t>合計</a:t>
-                      </a:r>
-                      <a:endParaRPr lang="en-US" sz="1300" dirty="0"/>
-                    </a:p>
-                  </a:txBody>
-                  <a:tcPr marL="36576" marR="36576" marT="36576" marB="36576" anchor="ctr">
-                    <a:lnL w="9525" cap="flat" cmpd="sng" algn="ctr">
-                      <a:solidFill>
-                        <a:srgbClr val="FFFFFF"/>
-                      </a:solidFill>
-                      <a:prstDash val="solid"/>
-                      <a:round/>
-                      <a:headEnd type="none" w="med" len="med"/>
-                      <a:tailEnd type="none" w="med" len="med"/>
-                    </a:lnL>
-                    <a:lnR w="9525" cap="flat" cmpd="sng" algn="ctr">
-                      <a:solidFill>
-                        <a:srgbClr val="FFFFFF"/>
-                      </a:solidFill>
-                      <a:prstDash val="solid"/>
-                      <a:round/>
-                      <a:headEnd type="none" w="med" len="med"/>
-                      <a:tailEnd type="none" w="med" len="med"/>
-                    </a:lnR>
-                    <a:lnT w="9525" cap="flat" cmpd="sng" algn="ctr">
-                      <a:solidFill>
-                        <a:srgbClr val="FFFFFF"/>
-                      </a:solidFill>
-                      <a:prstDash val="solid"/>
-                      <a:round/>
-                      <a:headEnd type="none" w="med" len="med"/>
-                      <a:tailEnd type="none" w="med" len="med"/>
-                    </a:lnT>
-                    <a:lnB w="9525" cap="flat" cmpd="sng" algn="ctr">
-                      <a:solidFill>
-                        <a:srgbClr val="FFFFFF"/>
-                      </a:solidFill>
-                      <a:prstDash val="solid"/>
-                      <a:round/>
-                      <a:headEnd type="none" w="med" len="med"/>
-                      <a:tailEnd type="none" w="med" len="med"/>
-                    </a:lnB>
-                    <a:solidFill>
-                      <a:srgbClr val="F2F2F2"/>
-                    </a:solidFill>
-                  </a:tcPr>
-                </a:tc>
-                <a:tc>
-                  <a:txBody>
-                    <a:bodyPr/>
-                    <a:lstStyle/>
-                    <a:p>
-                      <a:pPr algn="ctr" indent="0" marL="0">
-                        <a:buNone/>
-                      </a:pPr>
-                      <a:r>
-                        <a:rPr lang="en-US" sz="1300" b="1" dirty="0">
-                          <a:solidFill>
-                            <a:srgbClr val="000000"/>
-                          </a:solidFill>
-                        </a:rPr>
-                        <a:t>84家</a:t>
-                      </a:r>
-                      <a:endParaRPr lang="en-US" sz="1300" dirty="0"/>
-                    </a:p>
-                  </a:txBody>
-                  <a:tcPr marL="36576" marR="36576" marT="36576" marB="36576" anchor="ctr">
-                    <a:lnL w="9525" cap="flat" cmpd="sng" algn="ctr">
-                      <a:solidFill>
-                        <a:srgbClr val="FFFFFF"/>
-                      </a:solidFill>
-                      <a:prstDash val="solid"/>
-                      <a:round/>
-                      <a:headEnd type="none" w="med" len="med"/>
-                      <a:tailEnd type="none" w="med" len="med"/>
-                    </a:lnL>
-                    <a:lnR w="9525" cap="flat" cmpd="sng" algn="ctr">
-                      <a:solidFill>
-                        <a:srgbClr val="FFFFFF"/>
-                      </a:solidFill>
-                      <a:prstDash val="solid"/>
-                      <a:round/>
-                      <a:headEnd type="none" w="med" len="med"/>
-                      <a:tailEnd type="none" w="med" len="med"/>
-                    </a:lnR>
-                    <a:lnT w="9525" cap="flat" cmpd="sng" algn="ctr">
-                      <a:solidFill>
-                        <a:srgbClr val="FFFFFF"/>
-                      </a:solidFill>
-                      <a:prstDash val="solid"/>
-                      <a:round/>
-                      <a:headEnd type="none" w="med" len="med"/>
-                      <a:tailEnd type="none" w="med" len="med"/>
-                    </a:lnT>
-                    <a:lnB w="9525" cap="flat" cmpd="sng" algn="ctr">
-                      <a:solidFill>
-                        <a:srgbClr val="FFFFFF"/>
-                      </a:solidFill>
-                      <a:prstDash val="solid"/>
-                      <a:round/>
-                      <a:headEnd type="none" w="med" len="med"/>
-                      <a:tailEnd type="none" w="med" len="med"/>
-                    </a:lnB>
-                    <a:solidFill>
-                      <a:srgbClr val="F2F2F2"/>
-                    </a:solidFill>
-                  </a:tcPr>
-                </a:tc>
-                <a:tc>
-                  <a:txBody>
-                    <a:bodyPr/>
-                    <a:lstStyle/>
-                    <a:p>
-                      <a:pPr algn="ctr" indent="0" marL="0">
-                        <a:buNone/>
-                      </a:pPr>
-                      <a:r>
-                        <a:rPr lang="en-US" sz="1300" b="1" dirty="0">
-                          <a:solidFill>
-                            <a:srgbClr val="000000"/>
-                          </a:solidFill>
-                        </a:rPr>
-                        <a:t>−8.23億</a:t>
-                      </a:r>
-                      <a:endParaRPr lang="en-US" sz="1300" dirty="0"/>
-                    </a:p>
-                  </a:txBody>
-                  <a:tcPr marL="36576" marR="36576" marT="36576" marB="36576" anchor="ctr">
-                    <a:lnL w="9525" cap="flat" cmpd="sng" algn="ctr">
-                      <a:solidFill>
-                        <a:srgbClr val="FFFFFF"/>
-                      </a:solidFill>
-                      <a:prstDash val="solid"/>
-                      <a:round/>
-                      <a:headEnd type="none" w="med" len="med"/>
-                      <a:tailEnd type="none" w="med" len="med"/>
-                    </a:lnL>
-                    <a:lnR w="9525" cap="flat" cmpd="sng" algn="ctr">
-                      <a:solidFill>
-                        <a:srgbClr val="FFFFFF"/>
-                      </a:solidFill>
-                      <a:prstDash val="solid"/>
-                      <a:round/>
-                      <a:headEnd type="none" w="med" len="med"/>
-                      <a:tailEnd type="none" w="med" len="med"/>
-                    </a:lnR>
-                    <a:lnT w="9525" cap="flat" cmpd="sng" algn="ctr">
-                      <a:solidFill>
-                        <a:srgbClr val="FFFFFF"/>
-                      </a:solidFill>
-                      <a:prstDash val="solid"/>
-                      <a:round/>
-                      <a:headEnd type="none" w="med" len="med"/>
-                      <a:tailEnd type="none" w="med" len="med"/>
-                    </a:lnT>
-                    <a:lnB w="9525" cap="flat" cmpd="sng" algn="ctr">
-                      <a:solidFill>
-                        <a:srgbClr val="FFFFFF"/>
-                      </a:solidFill>
-                      <a:prstDash val="solid"/>
-                      <a:round/>
-                      <a:headEnd type="none" w="med" len="med"/>
-                      <a:tailEnd type="none" w="med" len="med"/>
-                    </a:lnB>
-                    <a:solidFill>
-                      <a:srgbClr val="F2F2F2"/>
-                    </a:solidFill>
-                  </a:tcPr>
-                </a:tc>
-                <a:tc>
-                  <a:txBody>
-                    <a:bodyPr/>
-                    <a:lstStyle/>
-                    <a:p>
-                      <a:pPr algn="ctr" indent="0" marL="0">
-                        <a:buNone/>
-                      </a:pPr>
-                      <a:r>
-                        <a:rPr lang="en-US" sz="1300" b="1" dirty="0">
-                          <a:solidFill>
-                            <a:srgbClr val="000000"/>
-                          </a:solidFill>
-                        </a:rPr>
                         <a:t>100%</a:t>
                       </a:r>
-                      <a:endParaRPr lang="en-US" sz="1300" dirty="0"/>
+                      <a:endParaRPr lang="en-US" sz="1050" dirty="0"/>
                     </a:p>
                   </a:txBody>
                   <a:tcPr marL="36576" marR="36576" marT="36576" marB="36576" anchor="ctr">
@@ -14633,77 +15098,1812 @@
       </p:graphicFrame>
       <p:sp>
         <p:nvSpPr>
-          <p:cNvPr id="24" name="Text 21"/>
+          <p:cNvPr id="23" name="chip gap"/>
           <p:cNvSpPr txBox="1"/>
           <p:nvPr/>
         </p:nvSpPr>
         <p:spPr>
           <a:xfrm>
-            <a:off x="7086600" y="4709160"/>
-            <a:ext cx="4526280" cy="1325880"/>
+            <a:off x="7086600" y="4041648"/>
+            <a:ext cx="2377440" cy="292608"/>
           </a:xfrm>
-          <a:prstGeom prst="rect">
-            <a:avLst/>
+          <a:prstGeom prst="roundRect">
+            <a:avLst>
+              <a:gd name="adj" fmla="val 25000"/>
+            </a:avLst>
           </a:prstGeom>
-          <a:noFill/>
+          <a:solidFill>
+            <a:srgbClr val="960A14"/>
+          </a:solidFill>
           <a:ln/>
         </p:spPr>
         <p:txBody>
-          <a:bodyPr wrap="square" lIns="381" tIns="381" rIns="381" bIns="381" rtlCol="0" anchor="t"/>
+          <a:bodyPr wrap="square" lIns="0" tIns="0" rIns="0" bIns="0" rtlCol="0" anchor="ctr"/>
           <a:lstStyle/>
           <a:p>
-            <a:pPr indent="0" marL="0">
-              <a:spcAft>
-                <a:spcPts val="300"/>
-              </a:spcAft>
+            <a:pPr algn="ctr" indent="0" marL="0">
               <a:buNone/>
             </a:pPr>
             <a:r>
-              <a:rPr lang="en-US" sz="1050" dirty="0">
+              <a:rPr lang="en-US" sz="1200" b="1" dirty="0">
                 <a:solidFill>
-                  <a:srgbClr val="000000"/>
+                  <a:srgbClr val="FFFFFF"/>
                 </a:solidFill>
               </a:rPr>
-              <a:t>114年未達標群113家中，115年有66家再次未達成、缺口 7.1億，占全行缺口 86%；其餘47家超額 6.2億。</a:t>
+              <a:t>缺口 8.23億 來自誰</a:t>
             </a:r>
-            <a:endParaRPr lang="en-US" sz="1050" dirty="0"/>
-          </a:p>
-          <a:p>
-            <a:pPr indent="0" marL="0">
-              <a:spcAft>
-                <a:spcPts val="300"/>
-              </a:spcAft>
-              <a:buNone/>
-            </a:pPr>
-            <a:r>
-              <a:rPr lang="en-US" sz="1050" dirty="0">
-                <a:solidFill>
-                  <a:srgbClr val="000000"/>
-                </a:solidFill>
-              </a:rPr>
-              <a:t>這些缺口由 99 家超額分行（多為績優分行）的 15.2億 填補，全行仍達成 105.9%，使結構問題在總數中被掩蓋。</a:t>
-            </a:r>
-            <a:endParaRPr lang="en-US" sz="1050" dirty="0"/>
-          </a:p>
-          <a:p>
-            <a:pPr indent="0" marL="0">
-              <a:spcAft>
-                <a:spcPts val="300"/>
-              </a:spcAft>
-              <a:buNone/>
-            </a:pPr>
-            <a:r>
-              <a:rPr lang="en-US" sz="1050" b="1" dirty="0">
-                <a:solidFill>
-                  <a:srgbClr val="C00000"/>
-                </a:solidFill>
-              </a:rPr>
-              <a:t>目標加成並未換來實績，只是把缺口轉嫁到其他分行。</a:t>
-            </a:r>
-            <a:endParaRPr lang="en-US" sz="1050" dirty="0"/>
+            <a:endParaRPr lang="en-US" sz="1200" dirty="0"/>
           </a:p>
         </p:txBody>
       </p:sp>
+      <p:graphicFrame>
+        <p:nvGraphicFramePr>
+          <p:cNvPr id="9" name="Table 1"/>
+          <p:cNvGraphicFramePr>
+            <a:graphicFrameLocks noGrp="1"/>
+          </p:cNvGraphicFramePr>
+          <p:nvPr>
+            <p:extLst>
+              <p:ext uri="{D42A27DB-BD31-4B8C-83A1-F6EECF244321}">
+                <p14:modId xmlns:p14="http://schemas.microsoft.com/office/powerpoint/2010/main" val="1579011935"/>
+              </p:ext>
+            </p:extLst>
+          </p:nvPr>
+        </p:nvGraphicFramePr>
+        <p:xfrm>
+          <a:off x="7086600" y="4370832"/>
+          <a:ext cx="4526280" cy="914400"/>
+        </p:xfrm>
+        <a:graphic>
+          <a:graphicData uri="http://schemas.openxmlformats.org/drawingml/2006/table">
+            <a:tbl>
+              <a:tblPr/>
+              <a:tblGrid>
+                <a:gridCol w="1737360"/>
+                <a:gridCol w="914400"/>
+                <a:gridCol w="1005840"/>
+                <a:gridCol w="868680"/>
+              </a:tblGrid>
+              <a:tr h="228600">
+                <a:tc>
+                  <a:txBody>
+                    <a:bodyPr/>
+                    <a:lstStyle/>
+                    <a:p>
+                      <a:pPr algn="ctr" indent="0" marL="0">
+                        <a:buNone/>
+                      </a:pPr>
+                      <a:r>
+                        <a:rPr lang="en-US" sz="1100" b="1" dirty="0">
+                          <a:solidFill>
+                            <a:srgbClr val="FFFFFF"/>
+                          </a:solidFill>
+                        </a:rPr>
+                        <a:t>114年分群</a:t>
+                      </a:r>
+                      <a:endParaRPr lang="en-US" sz="1100" dirty="0"/>
+                    </a:p>
+                  </a:txBody>
+                  <a:tcPr marL="36576" marR="36576" marT="36576" marB="36576" anchor="ctr">
+                    <a:lnL w="9525" cap="flat" cmpd="sng" algn="ctr">
+                      <a:solidFill>
+                        <a:srgbClr val="FFFFFF"/>
+                      </a:solidFill>
+                      <a:prstDash val="solid"/>
+                      <a:round/>
+                      <a:headEnd type="none" w="med" len="med"/>
+                      <a:tailEnd type="none" w="med" len="med"/>
+                    </a:lnL>
+                    <a:lnR w="9525" cap="flat" cmpd="sng" algn="ctr">
+                      <a:solidFill>
+                        <a:srgbClr val="FFFFFF"/>
+                      </a:solidFill>
+                      <a:prstDash val="solid"/>
+                      <a:round/>
+                      <a:headEnd type="none" w="med" len="med"/>
+                      <a:tailEnd type="none" w="med" len="med"/>
+                    </a:lnR>
+                    <a:lnT w="9525" cap="flat" cmpd="sng" algn="ctr">
+                      <a:solidFill>
+                        <a:srgbClr val="FFFFFF"/>
+                      </a:solidFill>
+                      <a:prstDash val="solid"/>
+                      <a:round/>
+                      <a:headEnd type="none" w="med" len="med"/>
+                      <a:tailEnd type="none" w="med" len="med"/>
+                    </a:lnT>
+                    <a:lnB w="9525" cap="flat" cmpd="sng" algn="ctr">
+                      <a:solidFill>
+                        <a:srgbClr val="FFFFFF"/>
+                      </a:solidFill>
+                      <a:prstDash val="solid"/>
+                      <a:round/>
+                      <a:headEnd type="none" w="med" len="med"/>
+                      <a:tailEnd type="none" w="med" len="med"/>
+                    </a:lnB>
+                    <a:solidFill>
+                      <a:srgbClr val="960A14"/>
+                    </a:solidFill>
+                  </a:tcPr>
+                </a:tc>
+                <a:tc>
+                  <a:txBody>
+                    <a:bodyPr/>
+                    <a:lstStyle/>
+                    <a:p>
+                      <a:pPr algn="ctr" indent="0" marL="0">
+                        <a:buNone/>
+                      </a:pPr>
+                      <a:r>
+                        <a:rPr lang="en-US" sz="950" b="1" dirty="0">
+                          <a:solidFill>
+                            <a:srgbClr val="FFFFFF"/>
+                          </a:solidFill>
+                        </a:rPr>
+                        <a:t>115年</a:t>
+                      </a:r>
+                      <a:endParaRPr lang="en-US" sz="950" dirty="0"/>
+                    </a:p>
+                    <a:p>
+                      <a:pPr algn="ctr" indent="0" marL="0">
+                        <a:buNone/>
+                      </a:pPr>
+                      <a:r>
+                        <a:rPr lang="en-US" sz="950" b="1" dirty="0">
+                          <a:solidFill>
+                            <a:srgbClr val="FFFFFF"/>
+                          </a:solidFill>
+                        </a:rPr>
+                        <a:t>未達成家數</a:t>
+                      </a:r>
+                      <a:endParaRPr lang="en-US" sz="950" dirty="0"/>
+                    </a:p>
+                  </a:txBody>
+                  <a:tcPr marL="36576" marR="36576" marT="36576" marB="36576" anchor="ctr">
+                    <a:lnL w="9525" cap="flat" cmpd="sng" algn="ctr">
+                      <a:solidFill>
+                        <a:srgbClr val="FFFFFF"/>
+                      </a:solidFill>
+                      <a:prstDash val="solid"/>
+                      <a:round/>
+                      <a:headEnd type="none" w="med" len="med"/>
+                      <a:tailEnd type="none" w="med" len="med"/>
+                    </a:lnL>
+                    <a:lnR w="9525" cap="flat" cmpd="sng" algn="ctr">
+                      <a:solidFill>
+                        <a:srgbClr val="FFFFFF"/>
+                      </a:solidFill>
+                      <a:prstDash val="solid"/>
+                      <a:round/>
+                      <a:headEnd type="none" w="med" len="med"/>
+                      <a:tailEnd type="none" w="med" len="med"/>
+                    </a:lnR>
+                    <a:lnT w="9525" cap="flat" cmpd="sng" algn="ctr">
+                      <a:solidFill>
+                        <a:srgbClr val="FFFFFF"/>
+                      </a:solidFill>
+                      <a:prstDash val="solid"/>
+                      <a:round/>
+                      <a:headEnd type="none" w="med" len="med"/>
+                      <a:tailEnd type="none" w="med" len="med"/>
+                    </a:lnT>
+                    <a:lnB w="9525" cap="flat" cmpd="sng" algn="ctr">
+                      <a:solidFill>
+                        <a:srgbClr val="FFFFFF"/>
+                      </a:solidFill>
+                      <a:prstDash val="solid"/>
+                      <a:round/>
+                      <a:headEnd type="none" w="med" len="med"/>
+                      <a:tailEnd type="none" w="med" len="med"/>
+                    </a:lnB>
+                    <a:solidFill>
+                      <a:srgbClr val="960A14"/>
+                    </a:solidFill>
+                  </a:tcPr>
+                </a:tc>
+                <a:tc>
+                  <a:txBody>
+                    <a:bodyPr/>
+                    <a:lstStyle/>
+                    <a:p>
+                      <a:pPr algn="ctr" indent="0" marL="0">
+                        <a:buNone/>
+                      </a:pPr>
+                      <a:r>
+                        <a:rPr lang="en-US" sz="1100" b="1" dirty="0">
+                          <a:solidFill>
+                            <a:srgbClr val="FFFFFF"/>
+                          </a:solidFill>
+                        </a:rPr>
+                        <a:t>未達成缺口</a:t>
+                      </a:r>
+                      <a:endParaRPr lang="en-US" sz="1100" dirty="0"/>
+                    </a:p>
+                  </a:txBody>
+                  <a:tcPr marL="36576" marR="36576" marT="36576" marB="36576" anchor="ctr">
+                    <a:lnL w="9525" cap="flat" cmpd="sng" algn="ctr">
+                      <a:solidFill>
+                        <a:srgbClr val="FFFFFF"/>
+                      </a:solidFill>
+                      <a:prstDash val="solid"/>
+                      <a:round/>
+                      <a:headEnd type="none" w="med" len="med"/>
+                      <a:tailEnd type="none" w="med" len="med"/>
+                    </a:lnL>
+                    <a:lnR w="9525" cap="flat" cmpd="sng" algn="ctr">
+                      <a:solidFill>
+                        <a:srgbClr val="FFFFFF"/>
+                      </a:solidFill>
+                      <a:prstDash val="solid"/>
+                      <a:round/>
+                      <a:headEnd type="none" w="med" len="med"/>
+                      <a:tailEnd type="none" w="med" len="med"/>
+                    </a:lnR>
+                    <a:lnT w="9525" cap="flat" cmpd="sng" algn="ctr">
+                      <a:solidFill>
+                        <a:srgbClr val="FFFFFF"/>
+                      </a:solidFill>
+                      <a:prstDash val="solid"/>
+                      <a:round/>
+                      <a:headEnd type="none" w="med" len="med"/>
+                      <a:tailEnd type="none" w="med" len="med"/>
+                    </a:lnT>
+                    <a:lnB w="9525" cap="flat" cmpd="sng" algn="ctr">
+                      <a:solidFill>
+                        <a:srgbClr val="FFFFFF"/>
+                      </a:solidFill>
+                      <a:prstDash val="solid"/>
+                      <a:round/>
+                      <a:headEnd type="none" w="med" len="med"/>
+                      <a:tailEnd type="none" w="med" len="med"/>
+                    </a:lnB>
+                    <a:solidFill>
+                      <a:srgbClr val="960A14"/>
+                    </a:solidFill>
+                  </a:tcPr>
+                </a:tc>
+                <a:tc>
+                  <a:txBody>
+                    <a:bodyPr/>
+                    <a:lstStyle/>
+                    <a:p>
+                      <a:pPr algn="ctr" indent="0" marL="0">
+                        <a:buNone/>
+                      </a:pPr>
+                      <a:r>
+                        <a:rPr lang="en-US" sz="1100" b="1" dirty="0">
+                          <a:solidFill>
+                            <a:srgbClr val="FFFFFF"/>
+                          </a:solidFill>
+                        </a:rPr>
+                        <a:t>占比</a:t>
+                      </a:r>
+                      <a:endParaRPr lang="en-US" sz="1100" dirty="0"/>
+                    </a:p>
+                  </a:txBody>
+                  <a:tcPr marL="36576" marR="36576" marT="36576" marB="36576" anchor="ctr">
+                    <a:lnL w="9525" cap="flat" cmpd="sng" algn="ctr">
+                      <a:solidFill>
+                        <a:srgbClr val="FFFFFF"/>
+                      </a:solidFill>
+                      <a:prstDash val="solid"/>
+                      <a:round/>
+                      <a:headEnd type="none" w="med" len="med"/>
+                      <a:tailEnd type="none" w="med" len="med"/>
+                    </a:lnL>
+                    <a:lnR w="9525" cap="flat" cmpd="sng" algn="ctr">
+                      <a:solidFill>
+                        <a:srgbClr val="FFFFFF"/>
+                      </a:solidFill>
+                      <a:prstDash val="solid"/>
+                      <a:round/>
+                      <a:headEnd type="none" w="med" len="med"/>
+                      <a:tailEnd type="none" w="med" len="med"/>
+                    </a:lnR>
+                    <a:lnT w="9525" cap="flat" cmpd="sng" algn="ctr">
+                      <a:solidFill>
+                        <a:srgbClr val="FFFFFF"/>
+                      </a:solidFill>
+                      <a:prstDash val="solid"/>
+                      <a:round/>
+                      <a:headEnd type="none" w="med" len="med"/>
+                      <a:tailEnd type="none" w="med" len="med"/>
+                    </a:lnT>
+                    <a:lnB w="9525" cap="flat" cmpd="sng" algn="ctr">
+                      <a:solidFill>
+                        <a:srgbClr val="FFFFFF"/>
+                      </a:solidFill>
+                      <a:prstDash val="solid"/>
+                      <a:round/>
+                      <a:headEnd type="none" w="med" len="med"/>
+                      <a:tailEnd type="none" w="med" len="med"/>
+                    </a:lnB>
+                    <a:solidFill>
+                      <a:srgbClr val="960A14"/>
+                    </a:solidFill>
+                  </a:tcPr>
+                </a:tc>
+              </a:tr>
+              <a:tr h="228600">
+                <a:tc>
+                  <a:txBody>
+                    <a:bodyPr/>
+                    <a:lstStyle/>
+                    <a:p>
+                      <a:pPr algn="ctr" indent="0" marL="0">
+                        <a:buNone/>
+                      </a:pPr>
+                      <a:r>
+                        <a:rPr lang="en-US" sz="1050" dirty="0">
+                          <a:solidFill>
+                            <a:srgbClr val="000000"/>
+                          </a:solidFill>
+                        </a:rPr>
+                        <a:t>達標群（≥100%）</a:t>
+                      </a:r>
+                      <a:endParaRPr lang="en-US" sz="1050" dirty="0"/>
+                    </a:p>
+                  </a:txBody>
+                  <a:tcPr marL="36576" marR="36576" marT="36576" marB="36576" anchor="ctr">
+                    <a:lnL w="9525" cap="flat" cmpd="sng" algn="ctr">
+                      <a:solidFill>
+                        <a:srgbClr val="FFFFFF"/>
+                      </a:solidFill>
+                      <a:prstDash val="solid"/>
+                      <a:round/>
+                      <a:headEnd type="none" w="med" len="med"/>
+                      <a:tailEnd type="none" w="med" len="med"/>
+                    </a:lnL>
+                    <a:lnR w="9525" cap="flat" cmpd="sng" algn="ctr">
+                      <a:solidFill>
+                        <a:srgbClr val="FFFFFF"/>
+                      </a:solidFill>
+                      <a:prstDash val="solid"/>
+                      <a:round/>
+                      <a:headEnd type="none" w="med" len="med"/>
+                      <a:tailEnd type="none" w="med" len="med"/>
+                    </a:lnR>
+                    <a:lnT w="9525" cap="flat" cmpd="sng" algn="ctr">
+                      <a:solidFill>
+                        <a:srgbClr val="FFFFFF"/>
+                      </a:solidFill>
+                      <a:prstDash val="solid"/>
+                      <a:round/>
+                      <a:headEnd type="none" w="med" len="med"/>
+                      <a:tailEnd type="none" w="med" len="med"/>
+                    </a:lnT>
+                    <a:lnB w="9525" cap="flat" cmpd="sng" algn="ctr">
+                      <a:solidFill>
+                        <a:srgbClr val="FFFFFF"/>
+                      </a:solidFill>
+                      <a:prstDash val="solid"/>
+                      <a:round/>
+                      <a:headEnd type="none" w="med" len="med"/>
+                      <a:tailEnd type="none" w="med" len="med"/>
+                    </a:lnB>
+                    <a:solidFill>
+                      <a:srgbClr val="FFFFFF"/>
+                    </a:solidFill>
+                  </a:tcPr>
+                </a:tc>
+                <a:tc>
+                  <a:txBody>
+                    <a:bodyPr/>
+                    <a:lstStyle/>
+                    <a:p>
+                      <a:pPr algn="ctr" indent="0" marL="0">
+                        <a:buNone/>
+                      </a:pPr>
+                      <a:r>
+                        <a:rPr lang="en-US" sz="1050" dirty="0">
+                          <a:solidFill>
+                            <a:srgbClr val="000000"/>
+                          </a:solidFill>
+                        </a:rPr>
+                        <a:t>18家</a:t>
+                      </a:r>
+                      <a:endParaRPr lang="en-US" sz="1050" dirty="0"/>
+                    </a:p>
+                  </a:txBody>
+                  <a:tcPr marL="36576" marR="36576" marT="36576" marB="36576" anchor="ctr">
+                    <a:lnL w="9525" cap="flat" cmpd="sng" algn="ctr">
+                      <a:solidFill>
+                        <a:srgbClr val="FFFFFF"/>
+                      </a:solidFill>
+                      <a:prstDash val="solid"/>
+                      <a:round/>
+                      <a:headEnd type="none" w="med" len="med"/>
+                      <a:tailEnd type="none" w="med" len="med"/>
+                    </a:lnL>
+                    <a:lnR w="9525" cap="flat" cmpd="sng" algn="ctr">
+                      <a:solidFill>
+                        <a:srgbClr val="FFFFFF"/>
+                      </a:solidFill>
+                      <a:prstDash val="solid"/>
+                      <a:round/>
+                      <a:headEnd type="none" w="med" len="med"/>
+                      <a:tailEnd type="none" w="med" len="med"/>
+                    </a:lnR>
+                    <a:lnT w="9525" cap="flat" cmpd="sng" algn="ctr">
+                      <a:solidFill>
+                        <a:srgbClr val="FFFFFF"/>
+                      </a:solidFill>
+                      <a:prstDash val="solid"/>
+                      <a:round/>
+                      <a:headEnd type="none" w="med" len="med"/>
+                      <a:tailEnd type="none" w="med" len="med"/>
+                    </a:lnT>
+                    <a:lnB w="9525" cap="flat" cmpd="sng" algn="ctr">
+                      <a:solidFill>
+                        <a:srgbClr val="FFFFFF"/>
+                      </a:solidFill>
+                      <a:prstDash val="solid"/>
+                      <a:round/>
+                      <a:headEnd type="none" w="med" len="med"/>
+                      <a:tailEnd type="none" w="med" len="med"/>
+                    </a:lnB>
+                    <a:solidFill>
+                      <a:srgbClr val="FFFFFF"/>
+                    </a:solidFill>
+                  </a:tcPr>
+                </a:tc>
+                <a:tc>
+                  <a:txBody>
+                    <a:bodyPr/>
+                    <a:lstStyle/>
+                    <a:p>
+                      <a:pPr algn="ctr" indent="0" marL="0">
+                        <a:buNone/>
+                      </a:pPr>
+                      <a:r>
+                        <a:rPr lang="en-US" sz="1050" dirty="0">
+                          <a:solidFill>
+                            <a:srgbClr val="000000"/>
+                          </a:solidFill>
+                        </a:rPr>
+                        <a:t>−1.13億</a:t>
+                      </a:r>
+                      <a:endParaRPr lang="en-US" sz="1050" dirty="0"/>
+                    </a:p>
+                  </a:txBody>
+                  <a:tcPr marL="36576" marR="36576" marT="36576" marB="36576" anchor="ctr">
+                    <a:lnL w="9525" cap="flat" cmpd="sng" algn="ctr">
+                      <a:solidFill>
+                        <a:srgbClr val="FFFFFF"/>
+                      </a:solidFill>
+                      <a:prstDash val="solid"/>
+                      <a:round/>
+                      <a:headEnd type="none" w="med" len="med"/>
+                      <a:tailEnd type="none" w="med" len="med"/>
+                    </a:lnL>
+                    <a:lnR w="9525" cap="flat" cmpd="sng" algn="ctr">
+                      <a:solidFill>
+                        <a:srgbClr val="FFFFFF"/>
+                      </a:solidFill>
+                      <a:prstDash val="solid"/>
+                      <a:round/>
+                      <a:headEnd type="none" w="med" len="med"/>
+                      <a:tailEnd type="none" w="med" len="med"/>
+                    </a:lnR>
+                    <a:lnT w="9525" cap="flat" cmpd="sng" algn="ctr">
+                      <a:solidFill>
+                        <a:srgbClr val="FFFFFF"/>
+                      </a:solidFill>
+                      <a:prstDash val="solid"/>
+                      <a:round/>
+                      <a:headEnd type="none" w="med" len="med"/>
+                      <a:tailEnd type="none" w="med" len="med"/>
+                    </a:lnT>
+                    <a:lnB w="9525" cap="flat" cmpd="sng" algn="ctr">
+                      <a:solidFill>
+                        <a:srgbClr val="FFFFFF"/>
+                      </a:solidFill>
+                      <a:prstDash val="solid"/>
+                      <a:round/>
+                      <a:headEnd type="none" w="med" len="med"/>
+                      <a:tailEnd type="none" w="med" len="med"/>
+                    </a:lnB>
+                    <a:solidFill>
+                      <a:srgbClr val="FFFFFF"/>
+                    </a:solidFill>
+                  </a:tcPr>
+                </a:tc>
+                <a:tc>
+                  <a:txBody>
+                    <a:bodyPr/>
+                    <a:lstStyle/>
+                    <a:p>
+                      <a:pPr algn="ctr" indent="0" marL="0">
+                        <a:buNone/>
+                      </a:pPr>
+                      <a:r>
+                        <a:rPr lang="en-US" sz="1050" dirty="0">
+                          <a:solidFill>
+                            <a:srgbClr val="000000"/>
+                          </a:solidFill>
+                        </a:rPr>
+                        <a:t>14%</a:t>
+                      </a:r>
+                      <a:endParaRPr lang="en-US" sz="1050" dirty="0"/>
+                    </a:p>
+                  </a:txBody>
+                  <a:tcPr marL="36576" marR="36576" marT="36576" marB="36576" anchor="ctr">
+                    <a:lnL w="9525" cap="flat" cmpd="sng" algn="ctr">
+                      <a:solidFill>
+                        <a:srgbClr val="FFFFFF"/>
+                      </a:solidFill>
+                      <a:prstDash val="solid"/>
+                      <a:round/>
+                      <a:headEnd type="none" w="med" len="med"/>
+                      <a:tailEnd type="none" w="med" len="med"/>
+                    </a:lnL>
+                    <a:lnR w="9525" cap="flat" cmpd="sng" algn="ctr">
+                      <a:solidFill>
+                        <a:srgbClr val="FFFFFF"/>
+                      </a:solidFill>
+                      <a:prstDash val="solid"/>
+                      <a:round/>
+                      <a:headEnd type="none" w="med" len="med"/>
+                      <a:tailEnd type="none" w="med" len="med"/>
+                    </a:lnR>
+                    <a:lnT w="9525" cap="flat" cmpd="sng" algn="ctr">
+                      <a:solidFill>
+                        <a:srgbClr val="FFFFFF"/>
+                      </a:solidFill>
+                      <a:prstDash val="solid"/>
+                      <a:round/>
+                      <a:headEnd type="none" w="med" len="med"/>
+                      <a:tailEnd type="none" w="med" len="med"/>
+                    </a:lnT>
+                    <a:lnB w="9525" cap="flat" cmpd="sng" algn="ctr">
+                      <a:solidFill>
+                        <a:srgbClr val="FFFFFF"/>
+                      </a:solidFill>
+                      <a:prstDash val="solid"/>
+                      <a:round/>
+                      <a:headEnd type="none" w="med" len="med"/>
+                      <a:tailEnd type="none" w="med" len="med"/>
+                    </a:lnB>
+                    <a:solidFill>
+                      <a:srgbClr val="FFFFFF"/>
+                    </a:solidFill>
+                  </a:tcPr>
+                </a:tc>
+              </a:tr>
+              <a:tr h="228600">
+                <a:tc>
+                  <a:txBody>
+                    <a:bodyPr/>
+                    <a:lstStyle/>
+                    <a:p>
+                      <a:pPr algn="ctr" indent="0" marL="0">
+                        <a:buNone/>
+                      </a:pPr>
+                      <a:r>
+                        <a:rPr lang="en-US" sz="1050" b="1" dirty="0">
+                          <a:solidFill>
+                            <a:srgbClr val="C00000"/>
+                          </a:solidFill>
+                        </a:rPr>
+                        <a:t>未達標群（&lt;100%）</a:t>
+                      </a:r>
+                      <a:endParaRPr lang="en-US" sz="1050" dirty="0"/>
+                    </a:p>
+                  </a:txBody>
+                  <a:tcPr marL="36576" marR="36576" marT="36576" marB="36576" anchor="ctr">
+                    <a:lnL w="9525" cap="flat" cmpd="sng" algn="ctr">
+                      <a:solidFill>
+                        <a:srgbClr val="FFFFFF"/>
+                      </a:solidFill>
+                      <a:prstDash val="solid"/>
+                      <a:round/>
+                      <a:headEnd type="none" w="med" len="med"/>
+                      <a:tailEnd type="none" w="med" len="med"/>
+                    </a:lnL>
+                    <a:lnR w="9525" cap="flat" cmpd="sng" algn="ctr">
+                      <a:solidFill>
+                        <a:srgbClr val="FFFFFF"/>
+                      </a:solidFill>
+                      <a:prstDash val="solid"/>
+                      <a:round/>
+                      <a:headEnd type="none" w="med" len="med"/>
+                      <a:tailEnd type="none" w="med" len="med"/>
+                    </a:lnR>
+                    <a:lnT w="9525" cap="flat" cmpd="sng" algn="ctr">
+                      <a:solidFill>
+                        <a:srgbClr val="FFFFFF"/>
+                      </a:solidFill>
+                      <a:prstDash val="solid"/>
+                      <a:round/>
+                      <a:headEnd type="none" w="med" len="med"/>
+                      <a:tailEnd type="none" w="med" len="med"/>
+                    </a:lnT>
+                    <a:lnB w="9525" cap="flat" cmpd="sng" algn="ctr">
+                      <a:solidFill>
+                        <a:srgbClr val="FFFFFF"/>
+                      </a:solidFill>
+                      <a:prstDash val="solid"/>
+                      <a:round/>
+                      <a:headEnd type="none" w="med" len="med"/>
+                      <a:tailEnd type="none" w="med" len="med"/>
+                    </a:lnB>
+                    <a:solidFill>
+                      <a:srgbClr val="FDF1E9"/>
+                    </a:solidFill>
+                  </a:tcPr>
+                </a:tc>
+                <a:tc>
+                  <a:txBody>
+                    <a:bodyPr/>
+                    <a:lstStyle/>
+                    <a:p>
+                      <a:pPr algn="ctr" indent="0" marL="0">
+                        <a:buNone/>
+                      </a:pPr>
+                      <a:r>
+                        <a:rPr lang="en-US" sz="1050" b="1" dirty="0">
+                          <a:solidFill>
+                            <a:srgbClr val="C00000"/>
+                          </a:solidFill>
+                        </a:rPr>
+                        <a:t>66家</a:t>
+                      </a:r>
+                      <a:endParaRPr lang="en-US" sz="1050" dirty="0"/>
+                    </a:p>
+                  </a:txBody>
+                  <a:tcPr marL="36576" marR="36576" marT="36576" marB="36576" anchor="ctr">
+                    <a:lnL w="9525" cap="flat" cmpd="sng" algn="ctr">
+                      <a:solidFill>
+                        <a:srgbClr val="FFFFFF"/>
+                      </a:solidFill>
+                      <a:prstDash val="solid"/>
+                      <a:round/>
+                      <a:headEnd type="none" w="med" len="med"/>
+                      <a:tailEnd type="none" w="med" len="med"/>
+                    </a:lnL>
+                    <a:lnR w="9525" cap="flat" cmpd="sng" algn="ctr">
+                      <a:solidFill>
+                        <a:srgbClr val="FFFFFF"/>
+                      </a:solidFill>
+                      <a:prstDash val="solid"/>
+                      <a:round/>
+                      <a:headEnd type="none" w="med" len="med"/>
+                      <a:tailEnd type="none" w="med" len="med"/>
+                    </a:lnR>
+                    <a:lnT w="9525" cap="flat" cmpd="sng" algn="ctr">
+                      <a:solidFill>
+                        <a:srgbClr val="FFFFFF"/>
+                      </a:solidFill>
+                      <a:prstDash val="solid"/>
+                      <a:round/>
+                      <a:headEnd type="none" w="med" len="med"/>
+                      <a:tailEnd type="none" w="med" len="med"/>
+                    </a:lnT>
+                    <a:lnB w="9525" cap="flat" cmpd="sng" algn="ctr">
+                      <a:solidFill>
+                        <a:srgbClr val="FFFFFF"/>
+                      </a:solidFill>
+                      <a:prstDash val="solid"/>
+                      <a:round/>
+                      <a:headEnd type="none" w="med" len="med"/>
+                      <a:tailEnd type="none" w="med" len="med"/>
+                    </a:lnB>
+                    <a:solidFill>
+                      <a:srgbClr val="FDF1E9"/>
+                    </a:solidFill>
+                  </a:tcPr>
+                </a:tc>
+                <a:tc>
+                  <a:txBody>
+                    <a:bodyPr/>
+                    <a:lstStyle/>
+                    <a:p>
+                      <a:pPr algn="ctr" indent="0" marL="0">
+                        <a:buNone/>
+                      </a:pPr>
+                      <a:r>
+                        <a:rPr lang="en-US" sz="1050" b="1" dirty="0">
+                          <a:solidFill>
+                            <a:srgbClr val="C00000"/>
+                          </a:solidFill>
+                        </a:rPr>
+                        <a:t>−7.10億</a:t>
+                      </a:r>
+                      <a:endParaRPr lang="en-US" sz="1050" dirty="0"/>
+                    </a:p>
+                  </a:txBody>
+                  <a:tcPr marL="36576" marR="36576" marT="36576" marB="36576" anchor="ctr">
+                    <a:lnL w="9525" cap="flat" cmpd="sng" algn="ctr">
+                      <a:solidFill>
+                        <a:srgbClr val="FFFFFF"/>
+                      </a:solidFill>
+                      <a:prstDash val="solid"/>
+                      <a:round/>
+                      <a:headEnd type="none" w="med" len="med"/>
+                      <a:tailEnd type="none" w="med" len="med"/>
+                    </a:lnL>
+                    <a:lnR w="9525" cap="flat" cmpd="sng" algn="ctr">
+                      <a:solidFill>
+                        <a:srgbClr val="FFFFFF"/>
+                      </a:solidFill>
+                      <a:prstDash val="solid"/>
+                      <a:round/>
+                      <a:headEnd type="none" w="med" len="med"/>
+                      <a:tailEnd type="none" w="med" len="med"/>
+                    </a:lnR>
+                    <a:lnT w="9525" cap="flat" cmpd="sng" algn="ctr">
+                      <a:solidFill>
+                        <a:srgbClr val="FFFFFF"/>
+                      </a:solidFill>
+                      <a:prstDash val="solid"/>
+                      <a:round/>
+                      <a:headEnd type="none" w="med" len="med"/>
+                      <a:tailEnd type="none" w="med" len="med"/>
+                    </a:lnT>
+                    <a:lnB w="9525" cap="flat" cmpd="sng" algn="ctr">
+                      <a:solidFill>
+                        <a:srgbClr val="FFFFFF"/>
+                      </a:solidFill>
+                      <a:prstDash val="solid"/>
+                      <a:round/>
+                      <a:headEnd type="none" w="med" len="med"/>
+                      <a:tailEnd type="none" w="med" len="med"/>
+                    </a:lnB>
+                    <a:solidFill>
+                      <a:srgbClr val="FDF1E9"/>
+                    </a:solidFill>
+                  </a:tcPr>
+                </a:tc>
+                <a:tc>
+                  <a:txBody>
+                    <a:bodyPr/>
+                    <a:lstStyle/>
+                    <a:p>
+                      <a:pPr algn="ctr" indent="0" marL="0">
+                        <a:buNone/>
+                      </a:pPr>
+                      <a:r>
+                        <a:rPr lang="en-US" sz="1050" b="1" dirty="0">
+                          <a:solidFill>
+                            <a:srgbClr val="C00000"/>
+                          </a:solidFill>
+                        </a:rPr>
+                        <a:t>86%</a:t>
+                      </a:r>
+                      <a:endParaRPr lang="en-US" sz="1050" dirty="0"/>
+                    </a:p>
+                  </a:txBody>
+                  <a:tcPr marL="36576" marR="36576" marT="36576" marB="36576" anchor="ctr">
+                    <a:lnL w="9525" cap="flat" cmpd="sng" algn="ctr">
+                      <a:solidFill>
+                        <a:srgbClr val="FFFFFF"/>
+                      </a:solidFill>
+                      <a:prstDash val="solid"/>
+                      <a:round/>
+                      <a:headEnd type="none" w="med" len="med"/>
+                      <a:tailEnd type="none" w="med" len="med"/>
+                    </a:lnL>
+                    <a:lnR w="9525" cap="flat" cmpd="sng" algn="ctr">
+                      <a:solidFill>
+                        <a:srgbClr val="FFFFFF"/>
+                      </a:solidFill>
+                      <a:prstDash val="solid"/>
+                      <a:round/>
+                      <a:headEnd type="none" w="med" len="med"/>
+                      <a:tailEnd type="none" w="med" len="med"/>
+                    </a:lnR>
+                    <a:lnT w="9525" cap="flat" cmpd="sng" algn="ctr">
+                      <a:solidFill>
+                        <a:srgbClr val="FFFFFF"/>
+                      </a:solidFill>
+                      <a:prstDash val="solid"/>
+                      <a:round/>
+                      <a:headEnd type="none" w="med" len="med"/>
+                      <a:tailEnd type="none" w="med" len="med"/>
+                    </a:lnT>
+                    <a:lnB w="9525" cap="flat" cmpd="sng" algn="ctr">
+                      <a:solidFill>
+                        <a:srgbClr val="FFFFFF"/>
+                      </a:solidFill>
+                      <a:prstDash val="solid"/>
+                      <a:round/>
+                      <a:headEnd type="none" w="med" len="med"/>
+                      <a:tailEnd type="none" w="med" len="med"/>
+                    </a:lnB>
+                    <a:solidFill>
+                      <a:srgbClr val="FDF1E9"/>
+                    </a:solidFill>
+                  </a:tcPr>
+                </a:tc>
+              </a:tr>
+              <a:tr h="228600">
+                <a:tc>
+                  <a:txBody>
+                    <a:bodyPr/>
+                    <a:lstStyle/>
+                    <a:p>
+                      <a:pPr algn="ctr" indent="0" marL="0">
+                        <a:buNone/>
+                      </a:pPr>
+                      <a:r>
+                        <a:rPr lang="en-US" sz="1000" dirty="0">
+                          <a:solidFill>
+                            <a:srgbClr val="404040"/>
+                          </a:solidFill>
+                        </a:rPr>
+                        <a:t>　其中 90～100%</a:t>
+                      </a:r>
+                      <a:endParaRPr lang="en-US" sz="1000" dirty="0"/>
+                    </a:p>
+                  </a:txBody>
+                  <a:tcPr marL="36576" marR="36576" marT="36576" marB="36576" anchor="ctr">
+                    <a:lnL w="9525" cap="flat" cmpd="sng" algn="ctr">
+                      <a:solidFill>
+                        <a:srgbClr val="FFFFFF"/>
+                      </a:solidFill>
+                      <a:prstDash val="solid"/>
+                      <a:round/>
+                      <a:headEnd type="none" w="med" len="med"/>
+                      <a:tailEnd type="none" w="med" len="med"/>
+                    </a:lnL>
+                    <a:lnR w="9525" cap="flat" cmpd="sng" algn="ctr">
+                      <a:solidFill>
+                        <a:srgbClr val="FFFFFF"/>
+                      </a:solidFill>
+                      <a:prstDash val="solid"/>
+                      <a:round/>
+                      <a:headEnd type="none" w="med" len="med"/>
+                      <a:tailEnd type="none" w="med" len="med"/>
+                    </a:lnR>
+                    <a:lnT w="9525" cap="flat" cmpd="sng" algn="ctr">
+                      <a:solidFill>
+                        <a:srgbClr val="FFFFFF"/>
+                      </a:solidFill>
+                      <a:prstDash val="solid"/>
+                      <a:round/>
+                      <a:headEnd type="none" w="med" len="med"/>
+                      <a:tailEnd type="none" w="med" len="med"/>
+                    </a:lnT>
+                    <a:lnB w="9525" cap="flat" cmpd="sng" algn="ctr">
+                      <a:solidFill>
+                        <a:srgbClr val="FFFFFF"/>
+                      </a:solidFill>
+                      <a:prstDash val="solid"/>
+                      <a:round/>
+                      <a:headEnd type="none" w="med" len="med"/>
+                      <a:tailEnd type="none" w="med" len="med"/>
+                    </a:lnB>
+                    <a:solidFill>
+                      <a:srgbClr val="FFFFFF"/>
+                    </a:solidFill>
+                  </a:tcPr>
+                </a:tc>
+                <a:tc>
+                  <a:txBody>
+                    <a:bodyPr/>
+                    <a:lstStyle/>
+                    <a:p>
+                      <a:pPr algn="ctr" indent="0" marL="0">
+                        <a:buNone/>
+                      </a:pPr>
+                      <a:r>
+                        <a:rPr lang="en-US" sz="1000" dirty="0">
+                          <a:solidFill>
+                            <a:srgbClr val="404040"/>
+                          </a:solidFill>
+                        </a:rPr>
+                        <a:t>16家</a:t>
+                      </a:r>
+                      <a:endParaRPr lang="en-US" sz="1000" dirty="0"/>
+                    </a:p>
+                  </a:txBody>
+                  <a:tcPr marL="36576" marR="36576" marT="36576" marB="36576" anchor="ctr">
+                    <a:lnL w="9525" cap="flat" cmpd="sng" algn="ctr">
+                      <a:solidFill>
+                        <a:srgbClr val="FFFFFF"/>
+                      </a:solidFill>
+                      <a:prstDash val="solid"/>
+                      <a:round/>
+                      <a:headEnd type="none" w="med" len="med"/>
+                      <a:tailEnd type="none" w="med" len="med"/>
+                    </a:lnL>
+                    <a:lnR w="9525" cap="flat" cmpd="sng" algn="ctr">
+                      <a:solidFill>
+                        <a:srgbClr val="FFFFFF"/>
+                      </a:solidFill>
+                      <a:prstDash val="solid"/>
+                      <a:round/>
+                      <a:headEnd type="none" w="med" len="med"/>
+                      <a:tailEnd type="none" w="med" len="med"/>
+                    </a:lnR>
+                    <a:lnT w="9525" cap="flat" cmpd="sng" algn="ctr">
+                      <a:solidFill>
+                        <a:srgbClr val="FFFFFF"/>
+                      </a:solidFill>
+                      <a:prstDash val="solid"/>
+                      <a:round/>
+                      <a:headEnd type="none" w="med" len="med"/>
+                      <a:tailEnd type="none" w="med" len="med"/>
+                    </a:lnT>
+                    <a:lnB w="9525" cap="flat" cmpd="sng" algn="ctr">
+                      <a:solidFill>
+                        <a:srgbClr val="FFFFFF"/>
+                      </a:solidFill>
+                      <a:prstDash val="solid"/>
+                      <a:round/>
+                      <a:headEnd type="none" w="med" len="med"/>
+                      <a:tailEnd type="none" w="med" len="med"/>
+                    </a:lnB>
+                    <a:solidFill>
+                      <a:srgbClr val="FFFFFF"/>
+                    </a:solidFill>
+                  </a:tcPr>
+                </a:tc>
+                <a:tc>
+                  <a:txBody>
+                    <a:bodyPr/>
+                    <a:lstStyle/>
+                    <a:p>
+                      <a:pPr algn="ctr" indent="0" marL="0">
+                        <a:buNone/>
+                      </a:pPr>
+                      <a:r>
+                        <a:rPr lang="en-US" sz="1000" dirty="0">
+                          <a:solidFill>
+                            <a:srgbClr val="404040"/>
+                          </a:solidFill>
+                        </a:rPr>
+                        <a:t>−1.49億</a:t>
+                      </a:r>
+                      <a:endParaRPr lang="en-US" sz="1000" dirty="0"/>
+                    </a:p>
+                  </a:txBody>
+                  <a:tcPr marL="36576" marR="36576" marT="36576" marB="36576" anchor="ctr">
+                    <a:lnL w="9525" cap="flat" cmpd="sng" algn="ctr">
+                      <a:solidFill>
+                        <a:srgbClr val="FFFFFF"/>
+                      </a:solidFill>
+                      <a:prstDash val="solid"/>
+                      <a:round/>
+                      <a:headEnd type="none" w="med" len="med"/>
+                      <a:tailEnd type="none" w="med" len="med"/>
+                    </a:lnL>
+                    <a:lnR w="9525" cap="flat" cmpd="sng" algn="ctr">
+                      <a:solidFill>
+                        <a:srgbClr val="FFFFFF"/>
+                      </a:solidFill>
+                      <a:prstDash val="solid"/>
+                      <a:round/>
+                      <a:headEnd type="none" w="med" len="med"/>
+                      <a:tailEnd type="none" w="med" len="med"/>
+                    </a:lnR>
+                    <a:lnT w="9525" cap="flat" cmpd="sng" algn="ctr">
+                      <a:solidFill>
+                        <a:srgbClr val="FFFFFF"/>
+                      </a:solidFill>
+                      <a:prstDash val="solid"/>
+                      <a:round/>
+                      <a:headEnd type="none" w="med" len="med"/>
+                      <a:tailEnd type="none" w="med" len="med"/>
+                    </a:lnT>
+                    <a:lnB w="9525" cap="flat" cmpd="sng" algn="ctr">
+                      <a:solidFill>
+                        <a:srgbClr val="FFFFFF"/>
+                      </a:solidFill>
+                      <a:prstDash val="solid"/>
+                      <a:round/>
+                      <a:headEnd type="none" w="med" len="med"/>
+                      <a:tailEnd type="none" w="med" len="med"/>
+                    </a:lnB>
+                    <a:solidFill>
+                      <a:srgbClr val="FFFFFF"/>
+                    </a:solidFill>
+                  </a:tcPr>
+                </a:tc>
+                <a:tc>
+                  <a:txBody>
+                    <a:bodyPr/>
+                    <a:lstStyle/>
+                    <a:p>
+                      <a:pPr algn="ctr" indent="0" marL="0">
+                        <a:buNone/>
+                      </a:pPr>
+                      <a:r>
+                        <a:rPr lang="en-US" sz="1000" dirty="0">
+                          <a:solidFill>
+                            <a:srgbClr val="404040"/>
+                          </a:solidFill>
+                        </a:rPr>
+                        <a:t>18%</a:t>
+                      </a:r>
+                      <a:endParaRPr lang="en-US" sz="1000" dirty="0"/>
+                    </a:p>
+                  </a:txBody>
+                  <a:tcPr marL="36576" marR="36576" marT="36576" marB="36576" anchor="ctr">
+                    <a:lnL w="9525" cap="flat" cmpd="sng" algn="ctr">
+                      <a:solidFill>
+                        <a:srgbClr val="FFFFFF"/>
+                      </a:solidFill>
+                      <a:prstDash val="solid"/>
+                      <a:round/>
+                      <a:headEnd type="none" w="med" len="med"/>
+                      <a:tailEnd type="none" w="med" len="med"/>
+                    </a:lnL>
+                    <a:lnR w="9525" cap="flat" cmpd="sng" algn="ctr">
+                      <a:solidFill>
+                        <a:srgbClr val="FFFFFF"/>
+                      </a:solidFill>
+                      <a:prstDash val="solid"/>
+                      <a:round/>
+                      <a:headEnd type="none" w="med" len="med"/>
+                      <a:tailEnd type="none" w="med" len="med"/>
+                    </a:lnR>
+                    <a:lnT w="9525" cap="flat" cmpd="sng" algn="ctr">
+                      <a:solidFill>
+                        <a:srgbClr val="FFFFFF"/>
+                      </a:solidFill>
+                      <a:prstDash val="solid"/>
+                      <a:round/>
+                      <a:headEnd type="none" w="med" len="med"/>
+                      <a:tailEnd type="none" w="med" len="med"/>
+                    </a:lnT>
+                    <a:lnB w="9525" cap="flat" cmpd="sng" algn="ctr">
+                      <a:solidFill>
+                        <a:srgbClr val="FFFFFF"/>
+                      </a:solidFill>
+                      <a:prstDash val="solid"/>
+                      <a:round/>
+                      <a:headEnd type="none" w="med" len="med"/>
+                      <a:tailEnd type="none" w="med" len="med"/>
+                    </a:lnB>
+                    <a:solidFill>
+                      <a:srgbClr val="FFFFFF"/>
+                    </a:solidFill>
+                  </a:tcPr>
+                </a:tc>
+              </a:tr>
+              <a:tr h="228600">
+                <a:tc>
+                  <a:txBody>
+                    <a:bodyPr/>
+                    <a:lstStyle/>
+                    <a:p>
+                      <a:pPr algn="ctr" indent="0" marL="0">
+                        <a:buNone/>
+                      </a:pPr>
+                      <a:r>
+                        <a:rPr lang="en-US" sz="1000" dirty="0">
+                          <a:solidFill>
+                            <a:srgbClr val="404040"/>
+                          </a:solidFill>
+                        </a:rPr>
+                        <a:t>　其中 75～90%</a:t>
+                      </a:r>
+                      <a:endParaRPr lang="en-US" sz="1000" dirty="0"/>
+                    </a:p>
+                  </a:txBody>
+                  <a:tcPr marL="36576" marR="36576" marT="36576" marB="36576" anchor="ctr">
+                    <a:lnL w="9525" cap="flat" cmpd="sng" algn="ctr">
+                      <a:solidFill>
+                        <a:srgbClr val="FFFFFF"/>
+                      </a:solidFill>
+                      <a:prstDash val="solid"/>
+                      <a:round/>
+                      <a:headEnd type="none" w="med" len="med"/>
+                      <a:tailEnd type="none" w="med" len="med"/>
+                    </a:lnL>
+                    <a:lnR w="9525" cap="flat" cmpd="sng" algn="ctr">
+                      <a:solidFill>
+                        <a:srgbClr val="FFFFFF"/>
+                      </a:solidFill>
+                      <a:prstDash val="solid"/>
+                      <a:round/>
+                      <a:headEnd type="none" w="med" len="med"/>
+                      <a:tailEnd type="none" w="med" len="med"/>
+                    </a:lnR>
+                    <a:lnT w="9525" cap="flat" cmpd="sng" algn="ctr">
+                      <a:solidFill>
+                        <a:srgbClr val="FFFFFF"/>
+                      </a:solidFill>
+                      <a:prstDash val="solid"/>
+                      <a:round/>
+                      <a:headEnd type="none" w="med" len="med"/>
+                      <a:tailEnd type="none" w="med" len="med"/>
+                    </a:lnT>
+                    <a:lnB w="9525" cap="flat" cmpd="sng" algn="ctr">
+                      <a:solidFill>
+                        <a:srgbClr val="FFFFFF"/>
+                      </a:solidFill>
+                      <a:prstDash val="solid"/>
+                      <a:round/>
+                      <a:headEnd type="none" w="med" len="med"/>
+                      <a:tailEnd type="none" w="med" len="med"/>
+                    </a:lnB>
+                    <a:solidFill>
+                      <a:srgbClr val="FDF1E9"/>
+                    </a:solidFill>
+                  </a:tcPr>
+                </a:tc>
+                <a:tc>
+                  <a:txBody>
+                    <a:bodyPr/>
+                    <a:lstStyle/>
+                    <a:p>
+                      <a:pPr algn="ctr" indent="0" marL="0">
+                        <a:buNone/>
+                      </a:pPr>
+                      <a:r>
+                        <a:rPr lang="en-US" sz="1000" dirty="0">
+                          <a:solidFill>
+                            <a:srgbClr val="404040"/>
+                          </a:solidFill>
+                        </a:rPr>
+                        <a:t>32家</a:t>
+                      </a:r>
+                      <a:endParaRPr lang="en-US" sz="1000" dirty="0"/>
+                    </a:p>
+                  </a:txBody>
+                  <a:tcPr marL="36576" marR="36576" marT="36576" marB="36576" anchor="ctr">
+                    <a:lnL w="9525" cap="flat" cmpd="sng" algn="ctr">
+                      <a:solidFill>
+                        <a:srgbClr val="FFFFFF"/>
+                      </a:solidFill>
+                      <a:prstDash val="solid"/>
+                      <a:round/>
+                      <a:headEnd type="none" w="med" len="med"/>
+                      <a:tailEnd type="none" w="med" len="med"/>
+                    </a:lnL>
+                    <a:lnR w="9525" cap="flat" cmpd="sng" algn="ctr">
+                      <a:solidFill>
+                        <a:srgbClr val="FFFFFF"/>
+                      </a:solidFill>
+                      <a:prstDash val="solid"/>
+                      <a:round/>
+                      <a:headEnd type="none" w="med" len="med"/>
+                      <a:tailEnd type="none" w="med" len="med"/>
+                    </a:lnR>
+                    <a:lnT w="9525" cap="flat" cmpd="sng" algn="ctr">
+                      <a:solidFill>
+                        <a:srgbClr val="FFFFFF"/>
+                      </a:solidFill>
+                      <a:prstDash val="solid"/>
+                      <a:round/>
+                      <a:headEnd type="none" w="med" len="med"/>
+                      <a:tailEnd type="none" w="med" len="med"/>
+                    </a:lnT>
+                    <a:lnB w="9525" cap="flat" cmpd="sng" algn="ctr">
+                      <a:solidFill>
+                        <a:srgbClr val="FFFFFF"/>
+                      </a:solidFill>
+                      <a:prstDash val="solid"/>
+                      <a:round/>
+                      <a:headEnd type="none" w="med" len="med"/>
+                      <a:tailEnd type="none" w="med" len="med"/>
+                    </a:lnB>
+                    <a:solidFill>
+                      <a:srgbClr val="FDF1E9"/>
+                    </a:solidFill>
+                  </a:tcPr>
+                </a:tc>
+                <a:tc>
+                  <a:txBody>
+                    <a:bodyPr/>
+                    <a:lstStyle/>
+                    <a:p>
+                      <a:pPr algn="ctr" indent="0" marL="0">
+                        <a:buNone/>
+                      </a:pPr>
+                      <a:r>
+                        <a:rPr lang="en-US" sz="1000" dirty="0">
+                          <a:solidFill>
+                            <a:srgbClr val="404040"/>
+                          </a:solidFill>
+                        </a:rPr>
+                        <a:t>−3.43億</a:t>
+                      </a:r>
+                      <a:endParaRPr lang="en-US" sz="1000" dirty="0"/>
+                    </a:p>
+                  </a:txBody>
+                  <a:tcPr marL="36576" marR="36576" marT="36576" marB="36576" anchor="ctr">
+                    <a:lnL w="9525" cap="flat" cmpd="sng" algn="ctr">
+                      <a:solidFill>
+                        <a:srgbClr val="FFFFFF"/>
+                      </a:solidFill>
+                      <a:prstDash val="solid"/>
+                      <a:round/>
+                      <a:headEnd type="none" w="med" len="med"/>
+                      <a:tailEnd type="none" w="med" len="med"/>
+                    </a:lnL>
+                    <a:lnR w="9525" cap="flat" cmpd="sng" algn="ctr">
+                      <a:solidFill>
+                        <a:srgbClr val="FFFFFF"/>
+                      </a:solidFill>
+                      <a:prstDash val="solid"/>
+                      <a:round/>
+                      <a:headEnd type="none" w="med" len="med"/>
+                      <a:tailEnd type="none" w="med" len="med"/>
+                    </a:lnR>
+                    <a:lnT w="9525" cap="flat" cmpd="sng" algn="ctr">
+                      <a:solidFill>
+                        <a:srgbClr val="FFFFFF"/>
+                      </a:solidFill>
+                      <a:prstDash val="solid"/>
+                      <a:round/>
+                      <a:headEnd type="none" w="med" len="med"/>
+                      <a:tailEnd type="none" w="med" len="med"/>
+                    </a:lnT>
+                    <a:lnB w="9525" cap="flat" cmpd="sng" algn="ctr">
+                      <a:solidFill>
+                        <a:srgbClr val="FFFFFF"/>
+                      </a:solidFill>
+                      <a:prstDash val="solid"/>
+                      <a:round/>
+                      <a:headEnd type="none" w="med" len="med"/>
+                      <a:tailEnd type="none" w="med" len="med"/>
+                    </a:lnB>
+                    <a:solidFill>
+                      <a:srgbClr val="FDF1E9"/>
+                    </a:solidFill>
+                  </a:tcPr>
+                </a:tc>
+                <a:tc>
+                  <a:txBody>
+                    <a:bodyPr/>
+                    <a:lstStyle/>
+                    <a:p>
+                      <a:pPr algn="ctr" indent="0" marL="0">
+                        <a:buNone/>
+                      </a:pPr>
+                      <a:r>
+                        <a:rPr lang="en-US" sz="1000" dirty="0">
+                          <a:solidFill>
+                            <a:srgbClr val="404040"/>
+                          </a:solidFill>
+                        </a:rPr>
+                        <a:t>42%</a:t>
+                      </a:r>
+                      <a:endParaRPr lang="en-US" sz="1000" dirty="0"/>
+                    </a:p>
+                  </a:txBody>
+                  <a:tcPr marL="36576" marR="36576" marT="36576" marB="36576" anchor="ctr">
+                    <a:lnL w="9525" cap="flat" cmpd="sng" algn="ctr">
+                      <a:solidFill>
+                        <a:srgbClr val="FFFFFF"/>
+                      </a:solidFill>
+                      <a:prstDash val="solid"/>
+                      <a:round/>
+                      <a:headEnd type="none" w="med" len="med"/>
+                      <a:tailEnd type="none" w="med" len="med"/>
+                    </a:lnL>
+                    <a:lnR w="9525" cap="flat" cmpd="sng" algn="ctr">
+                      <a:solidFill>
+                        <a:srgbClr val="FFFFFF"/>
+                      </a:solidFill>
+                      <a:prstDash val="solid"/>
+                      <a:round/>
+                      <a:headEnd type="none" w="med" len="med"/>
+                      <a:tailEnd type="none" w="med" len="med"/>
+                    </a:lnR>
+                    <a:lnT w="9525" cap="flat" cmpd="sng" algn="ctr">
+                      <a:solidFill>
+                        <a:srgbClr val="FFFFFF"/>
+                      </a:solidFill>
+                      <a:prstDash val="solid"/>
+                      <a:round/>
+                      <a:headEnd type="none" w="med" len="med"/>
+                      <a:tailEnd type="none" w="med" len="med"/>
+                    </a:lnT>
+                    <a:lnB w="9525" cap="flat" cmpd="sng" algn="ctr">
+                      <a:solidFill>
+                        <a:srgbClr val="FFFFFF"/>
+                      </a:solidFill>
+                      <a:prstDash val="solid"/>
+                      <a:round/>
+                      <a:headEnd type="none" w="med" len="med"/>
+                      <a:tailEnd type="none" w="med" len="med"/>
+                    </a:lnB>
+                    <a:solidFill>
+                      <a:srgbClr val="FDF1E9"/>
+                    </a:solidFill>
+                  </a:tcPr>
+                </a:tc>
+              </a:tr>
+              <a:tr h="228600">
+                <a:tc>
+                  <a:txBody>
+                    <a:bodyPr/>
+                    <a:lstStyle/>
+                    <a:p>
+                      <a:pPr algn="ctr" indent="0" marL="0">
+                        <a:buNone/>
+                      </a:pPr>
+                      <a:r>
+                        <a:rPr lang="en-US" sz="1000" dirty="0">
+                          <a:solidFill>
+                            <a:srgbClr val="404040"/>
+                          </a:solidFill>
+                        </a:rPr>
+                        <a:t>　其中 未達75%</a:t>
+                      </a:r>
+                      <a:endParaRPr lang="en-US" sz="1000" dirty="0"/>
+                    </a:p>
+                  </a:txBody>
+                  <a:tcPr marL="36576" marR="36576" marT="36576" marB="36576" anchor="ctr">
+                    <a:lnL w="9525" cap="flat" cmpd="sng" algn="ctr">
+                      <a:solidFill>
+                        <a:srgbClr val="FFFFFF"/>
+                      </a:solidFill>
+                      <a:prstDash val="solid"/>
+                      <a:round/>
+                      <a:headEnd type="none" w="med" len="med"/>
+                      <a:tailEnd type="none" w="med" len="med"/>
+                    </a:lnL>
+                    <a:lnR w="9525" cap="flat" cmpd="sng" algn="ctr">
+                      <a:solidFill>
+                        <a:srgbClr val="FFFFFF"/>
+                      </a:solidFill>
+                      <a:prstDash val="solid"/>
+                      <a:round/>
+                      <a:headEnd type="none" w="med" len="med"/>
+                      <a:tailEnd type="none" w="med" len="med"/>
+                    </a:lnR>
+                    <a:lnT w="9525" cap="flat" cmpd="sng" algn="ctr">
+                      <a:solidFill>
+                        <a:srgbClr val="FFFFFF"/>
+                      </a:solidFill>
+                      <a:prstDash val="solid"/>
+                      <a:round/>
+                      <a:headEnd type="none" w="med" len="med"/>
+                      <a:tailEnd type="none" w="med" len="med"/>
+                    </a:lnT>
+                    <a:lnB w="9525" cap="flat" cmpd="sng" algn="ctr">
+                      <a:solidFill>
+                        <a:srgbClr val="FFFFFF"/>
+                      </a:solidFill>
+                      <a:prstDash val="solid"/>
+                      <a:round/>
+                      <a:headEnd type="none" w="med" len="med"/>
+                      <a:tailEnd type="none" w="med" len="med"/>
+                    </a:lnB>
+                    <a:solidFill>
+                      <a:srgbClr val="FFFFFF"/>
+                    </a:solidFill>
+                  </a:tcPr>
+                </a:tc>
+                <a:tc>
+                  <a:txBody>
+                    <a:bodyPr/>
+                    <a:lstStyle/>
+                    <a:p>
+                      <a:pPr algn="ctr" indent="0" marL="0">
+                        <a:buNone/>
+                      </a:pPr>
+                      <a:r>
+                        <a:rPr lang="en-US" sz="1000" dirty="0">
+                          <a:solidFill>
+                            <a:srgbClr val="404040"/>
+                          </a:solidFill>
+                        </a:rPr>
+                        <a:t>18家</a:t>
+                      </a:r>
+                      <a:endParaRPr lang="en-US" sz="1000" dirty="0"/>
+                    </a:p>
+                  </a:txBody>
+                  <a:tcPr marL="36576" marR="36576" marT="36576" marB="36576" anchor="ctr">
+                    <a:lnL w="9525" cap="flat" cmpd="sng" algn="ctr">
+                      <a:solidFill>
+                        <a:srgbClr val="FFFFFF"/>
+                      </a:solidFill>
+                      <a:prstDash val="solid"/>
+                      <a:round/>
+                      <a:headEnd type="none" w="med" len="med"/>
+                      <a:tailEnd type="none" w="med" len="med"/>
+                    </a:lnL>
+                    <a:lnR w="9525" cap="flat" cmpd="sng" algn="ctr">
+                      <a:solidFill>
+                        <a:srgbClr val="FFFFFF"/>
+                      </a:solidFill>
+                      <a:prstDash val="solid"/>
+                      <a:round/>
+                      <a:headEnd type="none" w="med" len="med"/>
+                      <a:tailEnd type="none" w="med" len="med"/>
+                    </a:lnR>
+                    <a:lnT w="9525" cap="flat" cmpd="sng" algn="ctr">
+                      <a:solidFill>
+                        <a:srgbClr val="FFFFFF"/>
+                      </a:solidFill>
+                      <a:prstDash val="solid"/>
+                      <a:round/>
+                      <a:headEnd type="none" w="med" len="med"/>
+                      <a:tailEnd type="none" w="med" len="med"/>
+                    </a:lnT>
+                    <a:lnB w="9525" cap="flat" cmpd="sng" algn="ctr">
+                      <a:solidFill>
+                        <a:srgbClr val="FFFFFF"/>
+                      </a:solidFill>
+                      <a:prstDash val="solid"/>
+                      <a:round/>
+                      <a:headEnd type="none" w="med" len="med"/>
+                      <a:tailEnd type="none" w="med" len="med"/>
+                    </a:lnB>
+                    <a:solidFill>
+                      <a:srgbClr val="FFFFFF"/>
+                    </a:solidFill>
+                  </a:tcPr>
+                </a:tc>
+                <a:tc>
+                  <a:txBody>
+                    <a:bodyPr/>
+                    <a:lstStyle/>
+                    <a:p>
+                      <a:pPr algn="ctr" indent="0" marL="0">
+                        <a:buNone/>
+                      </a:pPr>
+                      <a:r>
+                        <a:rPr lang="en-US" sz="1000" dirty="0">
+                          <a:solidFill>
+                            <a:srgbClr val="404040"/>
+                          </a:solidFill>
+                        </a:rPr>
+                        <a:t>−2.18億</a:t>
+                      </a:r>
+                      <a:endParaRPr lang="en-US" sz="1000" dirty="0"/>
+                    </a:p>
+                  </a:txBody>
+                  <a:tcPr marL="36576" marR="36576" marT="36576" marB="36576" anchor="ctr">
+                    <a:lnL w="9525" cap="flat" cmpd="sng" algn="ctr">
+                      <a:solidFill>
+                        <a:srgbClr val="FFFFFF"/>
+                      </a:solidFill>
+                      <a:prstDash val="solid"/>
+                      <a:round/>
+                      <a:headEnd type="none" w="med" len="med"/>
+                      <a:tailEnd type="none" w="med" len="med"/>
+                    </a:lnL>
+                    <a:lnR w="9525" cap="flat" cmpd="sng" algn="ctr">
+                      <a:solidFill>
+                        <a:srgbClr val="FFFFFF"/>
+                      </a:solidFill>
+                      <a:prstDash val="solid"/>
+                      <a:round/>
+                      <a:headEnd type="none" w="med" len="med"/>
+                      <a:tailEnd type="none" w="med" len="med"/>
+                    </a:lnR>
+                    <a:lnT w="9525" cap="flat" cmpd="sng" algn="ctr">
+                      <a:solidFill>
+                        <a:srgbClr val="FFFFFF"/>
+                      </a:solidFill>
+                      <a:prstDash val="solid"/>
+                      <a:round/>
+                      <a:headEnd type="none" w="med" len="med"/>
+                      <a:tailEnd type="none" w="med" len="med"/>
+                    </a:lnT>
+                    <a:lnB w="9525" cap="flat" cmpd="sng" algn="ctr">
+                      <a:solidFill>
+                        <a:srgbClr val="FFFFFF"/>
+                      </a:solidFill>
+                      <a:prstDash val="solid"/>
+                      <a:round/>
+                      <a:headEnd type="none" w="med" len="med"/>
+                      <a:tailEnd type="none" w="med" len="med"/>
+                    </a:lnB>
+                    <a:solidFill>
+                      <a:srgbClr val="FFFFFF"/>
+                    </a:solidFill>
+                  </a:tcPr>
+                </a:tc>
+                <a:tc>
+                  <a:txBody>
+                    <a:bodyPr/>
+                    <a:lstStyle/>
+                    <a:p>
+                      <a:pPr algn="ctr" indent="0" marL="0">
+                        <a:buNone/>
+                      </a:pPr>
+                      <a:r>
+                        <a:rPr lang="en-US" sz="1000" dirty="0">
+                          <a:solidFill>
+                            <a:srgbClr val="404040"/>
+                          </a:solidFill>
+                        </a:rPr>
+                        <a:t>26%</a:t>
+                      </a:r>
+                      <a:endParaRPr lang="en-US" sz="1000" dirty="0"/>
+                    </a:p>
+                  </a:txBody>
+                  <a:tcPr marL="36576" marR="36576" marT="36576" marB="36576" anchor="ctr">
+                    <a:lnL w="9525" cap="flat" cmpd="sng" algn="ctr">
+                      <a:solidFill>
+                        <a:srgbClr val="FFFFFF"/>
+                      </a:solidFill>
+                      <a:prstDash val="solid"/>
+                      <a:round/>
+                      <a:headEnd type="none" w="med" len="med"/>
+                      <a:tailEnd type="none" w="med" len="med"/>
+                    </a:lnL>
+                    <a:lnR w="9525" cap="flat" cmpd="sng" algn="ctr">
+                      <a:solidFill>
+                        <a:srgbClr val="FFFFFF"/>
+                      </a:solidFill>
+                      <a:prstDash val="solid"/>
+                      <a:round/>
+                      <a:headEnd type="none" w="med" len="med"/>
+                      <a:tailEnd type="none" w="med" len="med"/>
+                    </a:lnR>
+                    <a:lnT w="9525" cap="flat" cmpd="sng" algn="ctr">
+                      <a:solidFill>
+                        <a:srgbClr val="FFFFFF"/>
+                      </a:solidFill>
+                      <a:prstDash val="solid"/>
+                      <a:round/>
+                      <a:headEnd type="none" w="med" len="med"/>
+                      <a:tailEnd type="none" w="med" len="med"/>
+                    </a:lnT>
+                    <a:lnB w="9525" cap="flat" cmpd="sng" algn="ctr">
+                      <a:solidFill>
+                        <a:srgbClr val="FFFFFF"/>
+                      </a:solidFill>
+                      <a:prstDash val="solid"/>
+                      <a:round/>
+                      <a:headEnd type="none" w="med" len="med"/>
+                      <a:tailEnd type="none" w="med" len="med"/>
+                    </a:lnB>
+                    <a:solidFill>
+                      <a:srgbClr val="FFFFFF"/>
+                    </a:solidFill>
+                  </a:tcPr>
+                </a:tc>
+              </a:tr>
+              <a:tr h="228600">
+                <a:tc>
+                  <a:txBody>
+                    <a:bodyPr/>
+                    <a:lstStyle/>
+                    <a:p>
+                      <a:pPr algn="ctr" indent="0" marL="0">
+                        <a:buNone/>
+                      </a:pPr>
+                      <a:r>
+                        <a:rPr lang="en-US" sz="1050" b="1" dirty="0">
+                          <a:solidFill>
+                            <a:srgbClr val="000000"/>
+                          </a:solidFill>
+                        </a:rPr>
+                        <a:t>合計</a:t>
+                      </a:r>
+                      <a:endParaRPr lang="en-US" sz="1050" dirty="0"/>
+                    </a:p>
+                  </a:txBody>
+                  <a:tcPr marL="36576" marR="36576" marT="36576" marB="36576" anchor="ctr">
+                    <a:lnL w="9525" cap="flat" cmpd="sng" algn="ctr">
+                      <a:solidFill>
+                        <a:srgbClr val="FFFFFF"/>
+                      </a:solidFill>
+                      <a:prstDash val="solid"/>
+                      <a:round/>
+                      <a:headEnd type="none" w="med" len="med"/>
+                      <a:tailEnd type="none" w="med" len="med"/>
+                    </a:lnL>
+                    <a:lnR w="9525" cap="flat" cmpd="sng" algn="ctr">
+                      <a:solidFill>
+                        <a:srgbClr val="FFFFFF"/>
+                      </a:solidFill>
+                      <a:prstDash val="solid"/>
+                      <a:round/>
+                      <a:headEnd type="none" w="med" len="med"/>
+                      <a:tailEnd type="none" w="med" len="med"/>
+                    </a:lnR>
+                    <a:lnT w="9525" cap="flat" cmpd="sng" algn="ctr">
+                      <a:solidFill>
+                        <a:srgbClr val="FFFFFF"/>
+                      </a:solidFill>
+                      <a:prstDash val="solid"/>
+                      <a:round/>
+                      <a:headEnd type="none" w="med" len="med"/>
+                      <a:tailEnd type="none" w="med" len="med"/>
+                    </a:lnT>
+                    <a:lnB w="9525" cap="flat" cmpd="sng" algn="ctr">
+                      <a:solidFill>
+                        <a:srgbClr val="FFFFFF"/>
+                      </a:solidFill>
+                      <a:prstDash val="solid"/>
+                      <a:round/>
+                      <a:headEnd type="none" w="med" len="med"/>
+                      <a:tailEnd type="none" w="med" len="med"/>
+                    </a:lnB>
+                    <a:solidFill>
+                      <a:srgbClr val="F2F2F2"/>
+                    </a:solidFill>
+                  </a:tcPr>
+                </a:tc>
+                <a:tc>
+                  <a:txBody>
+                    <a:bodyPr/>
+                    <a:lstStyle/>
+                    <a:p>
+                      <a:pPr algn="ctr" indent="0" marL="0">
+                        <a:buNone/>
+                      </a:pPr>
+                      <a:r>
+                        <a:rPr lang="en-US" sz="1050" b="1" dirty="0">
+                          <a:solidFill>
+                            <a:srgbClr val="000000"/>
+                          </a:solidFill>
+                        </a:rPr>
+                        <a:t>84家</a:t>
+                      </a:r>
+                      <a:endParaRPr lang="en-US" sz="1050" dirty="0"/>
+                    </a:p>
+                  </a:txBody>
+                  <a:tcPr marL="36576" marR="36576" marT="36576" marB="36576" anchor="ctr">
+                    <a:lnL w="9525" cap="flat" cmpd="sng" algn="ctr">
+                      <a:solidFill>
+                        <a:srgbClr val="FFFFFF"/>
+                      </a:solidFill>
+                      <a:prstDash val="solid"/>
+                      <a:round/>
+                      <a:headEnd type="none" w="med" len="med"/>
+                      <a:tailEnd type="none" w="med" len="med"/>
+                    </a:lnL>
+                    <a:lnR w="9525" cap="flat" cmpd="sng" algn="ctr">
+                      <a:solidFill>
+                        <a:srgbClr val="FFFFFF"/>
+                      </a:solidFill>
+                      <a:prstDash val="solid"/>
+                      <a:round/>
+                      <a:headEnd type="none" w="med" len="med"/>
+                      <a:tailEnd type="none" w="med" len="med"/>
+                    </a:lnR>
+                    <a:lnT w="9525" cap="flat" cmpd="sng" algn="ctr">
+                      <a:solidFill>
+                        <a:srgbClr val="FFFFFF"/>
+                      </a:solidFill>
+                      <a:prstDash val="solid"/>
+                      <a:round/>
+                      <a:headEnd type="none" w="med" len="med"/>
+                      <a:tailEnd type="none" w="med" len="med"/>
+                    </a:lnT>
+                    <a:lnB w="9525" cap="flat" cmpd="sng" algn="ctr">
+                      <a:solidFill>
+                        <a:srgbClr val="FFFFFF"/>
+                      </a:solidFill>
+                      <a:prstDash val="solid"/>
+                      <a:round/>
+                      <a:headEnd type="none" w="med" len="med"/>
+                      <a:tailEnd type="none" w="med" len="med"/>
+                    </a:lnB>
+                    <a:solidFill>
+                      <a:srgbClr val="F2F2F2"/>
+                    </a:solidFill>
+                  </a:tcPr>
+                </a:tc>
+                <a:tc>
+                  <a:txBody>
+                    <a:bodyPr/>
+                    <a:lstStyle/>
+                    <a:p>
+                      <a:pPr algn="ctr" indent="0" marL="0">
+                        <a:buNone/>
+                      </a:pPr>
+                      <a:r>
+                        <a:rPr lang="en-US" sz="1050" b="1" dirty="0">
+                          <a:solidFill>
+                            <a:srgbClr val="000000"/>
+                          </a:solidFill>
+                        </a:rPr>
+                        <a:t>−8.23億</a:t>
+                      </a:r>
+                      <a:endParaRPr lang="en-US" sz="1050" dirty="0"/>
+                    </a:p>
+                  </a:txBody>
+                  <a:tcPr marL="36576" marR="36576" marT="36576" marB="36576" anchor="ctr">
+                    <a:lnL w="9525" cap="flat" cmpd="sng" algn="ctr">
+                      <a:solidFill>
+                        <a:srgbClr val="FFFFFF"/>
+                      </a:solidFill>
+                      <a:prstDash val="solid"/>
+                      <a:round/>
+                      <a:headEnd type="none" w="med" len="med"/>
+                      <a:tailEnd type="none" w="med" len="med"/>
+                    </a:lnL>
+                    <a:lnR w="9525" cap="flat" cmpd="sng" algn="ctr">
+                      <a:solidFill>
+                        <a:srgbClr val="FFFFFF"/>
+                      </a:solidFill>
+                      <a:prstDash val="solid"/>
+                      <a:round/>
+                      <a:headEnd type="none" w="med" len="med"/>
+                      <a:tailEnd type="none" w="med" len="med"/>
+                    </a:lnR>
+                    <a:lnT w="9525" cap="flat" cmpd="sng" algn="ctr">
+                      <a:solidFill>
+                        <a:srgbClr val="FFFFFF"/>
+                      </a:solidFill>
+                      <a:prstDash val="solid"/>
+                      <a:round/>
+                      <a:headEnd type="none" w="med" len="med"/>
+                      <a:tailEnd type="none" w="med" len="med"/>
+                    </a:lnT>
+                    <a:lnB w="9525" cap="flat" cmpd="sng" algn="ctr">
+                      <a:solidFill>
+                        <a:srgbClr val="FFFFFF"/>
+                      </a:solidFill>
+                      <a:prstDash val="solid"/>
+                      <a:round/>
+                      <a:headEnd type="none" w="med" len="med"/>
+                      <a:tailEnd type="none" w="med" len="med"/>
+                    </a:lnB>
+                    <a:solidFill>
+                      <a:srgbClr val="F2F2F2"/>
+                    </a:solidFill>
+                  </a:tcPr>
+                </a:tc>
+                <a:tc>
+                  <a:txBody>
+                    <a:bodyPr/>
+                    <a:lstStyle/>
+                    <a:p>
+                      <a:pPr algn="ctr" indent="0" marL="0">
+                        <a:buNone/>
+                      </a:pPr>
+                      <a:r>
+                        <a:rPr lang="en-US" sz="1050" b="1" dirty="0">
+                          <a:solidFill>
+                            <a:srgbClr val="000000"/>
+                          </a:solidFill>
+                        </a:rPr>
+                        <a:t>100%</a:t>
+                      </a:r>
+                      <a:endParaRPr lang="en-US" sz="1050" dirty="0"/>
+                    </a:p>
+                  </a:txBody>
+                  <a:tcPr marL="36576" marR="36576" marT="36576" marB="36576" anchor="ctr">
+                    <a:lnL w="9525" cap="flat" cmpd="sng" algn="ctr">
+                      <a:solidFill>
+                        <a:srgbClr val="FFFFFF"/>
+                      </a:solidFill>
+                      <a:prstDash val="solid"/>
+                      <a:round/>
+                      <a:headEnd type="none" w="med" len="med"/>
+                      <a:tailEnd type="none" w="med" len="med"/>
+                    </a:lnL>
+                    <a:lnR w="9525" cap="flat" cmpd="sng" algn="ctr">
+                      <a:solidFill>
+                        <a:srgbClr val="FFFFFF"/>
+                      </a:solidFill>
+                      <a:prstDash val="solid"/>
+                      <a:round/>
+                      <a:headEnd type="none" w="med" len="med"/>
+                      <a:tailEnd type="none" w="med" len="med"/>
+                    </a:lnR>
+                    <a:lnT w="9525" cap="flat" cmpd="sng" algn="ctr">
+                      <a:solidFill>
+                        <a:srgbClr val="FFFFFF"/>
+                      </a:solidFill>
+                      <a:prstDash val="solid"/>
+                      <a:round/>
+                      <a:headEnd type="none" w="med" len="med"/>
+                      <a:tailEnd type="none" w="med" len="med"/>
+                    </a:lnT>
+                    <a:lnB w="9525" cap="flat" cmpd="sng" algn="ctr">
+                      <a:solidFill>
+                        <a:srgbClr val="FFFFFF"/>
+                      </a:solidFill>
+                      <a:prstDash val="solid"/>
+                      <a:round/>
+                      <a:headEnd type="none" w="med" len="med"/>
+                      <a:tailEnd type="none" w="med" len="med"/>
+                    </a:lnB>
+                    <a:solidFill>
+                      <a:srgbClr val="F2F2F2"/>
+                    </a:solidFill>
+                  </a:tcPr>
+                </a:tc>
+              </a:tr>
+            </a:tbl>
+          </a:graphicData>
+        </a:graphic>
+      </p:graphicFrame>
       <p:sp>
         <p:nvSpPr>
           <p:cNvPr id="25" name="Slide Number Placeholder 0"/>

--- a/output/財管手收目標訂定原則比較_115vs116方案_EDITED_VER2_加分行表現分析.pptx
+++ b/output/財管手收目標訂定原則比較_115vs116方案_EDITED_VER2_加分行表現分析.pptx
@@ -21,6 +21,7 @@
     <p:sldId id="303" r:id="rId103"/>
     <p:sldId id="304" r:id="rId104"/>
     <p:sldId id="305" r:id="rId105"/>
+    <p:sldId id="306" r:id="rId106"/>
   </p:sldIdLst>
   <p:sldSz cx="12192000" cy="6858000"/>
   <p:notesSz cx="6858000" cy="12192000"/>
@@ -143,13 +144,14 @@
             <p14:sldId id="263"/>
           </p14:sldIdLst>
         </p14:section>
-        <p14:section name="114→115 分行表現分析" id="{6D4F04D9-665B-495A-95FC-8C4D0E420418}">
+        <p14:section name="114→115 分行表現分析" id="{A9D20A46-FB7C-49A8-9E55-A863E43001A9}">
           <p14:sldIdLst>
             <p14:sldId id="301"/>
             <p14:sldId id="302"/>
             <p14:sldId id="303"/>
             <p14:sldId id="304"/>
             <p14:sldId id="305"/>
+            <p14:sldId id="306"/>
           </p14:sldIdLst>
         </p14:section>
       </p14:sectionLst>
@@ -603,6 +605,492 @@
                 </a:solidFill>
                 <a:latin typeface="+mn-lt"/>
               </a:rPr>
+              <a:t>115年年化達成率分布（分行家數）</a:t>
+            </a:r>
+          </a:p>
+        </c:rich>
+      </c:tx>
+      <c:layout/>
+      <c:overlay val="0"/>
+    </c:title>
+    <c:autoTitleDeleted val="0"/>
+    <c:plotArea>
+      <c:layout/>
+      <c:barChart>
+        <c:barDir val="col"/>
+        <c:grouping val="stacked"/>
+        <c:varyColors val="0"/>
+        <c:ser>
+          <c:idx val="0"/>
+          <c:order val="0"/>
+          <c:tx>
+            <c:strRef>
+              <c:f>Sheet1!$B$1</c:f>
+              <c:strCache>
+                <c:ptCount val="1"/>
+                <c:pt idx="0">
+                  <c:v>未達標（&lt;100%）84家</c:v>
+                </c:pt>
+              </c:strCache>
+            </c:strRef>
+          </c:tx>
+          <c:spPr>
+            <a:solidFill>
+              <a:srgbClr val="C00000"/>
+            </a:solidFill>
+            <a:effectLst/>
+          </c:spPr>
+          <c:invertIfNegative val="0"/>
+          <c:dLbls>
+            <c:numFmt formatCode="#,##0;;" sourceLinked="0"/>
+            <c:txPr>
+              <a:bodyPr/>
+              <a:lstStyle/>
+              <a:p>
+                <a:pPr>
+                  <a:defRPr b="0" i="0" strike="noStrike" sz="1000" u="none">
+                    <a:solidFill>
+                      <a:srgbClr val="FFFFFF"/>
+                    </a:solidFill>
+                    <a:latin typeface="+mn-lt"/>
+                  </a:defRPr>
+                </a:pPr>
+              </a:p>
+            </c:txPr>
+            <c:dLblPos val="inEnd"/>
+            <c:showLegendKey val="0"/>
+            <c:showVal val="1"/>
+            <c:showCatName val="0"/>
+            <c:showSerName val="0"/>
+            <c:showPercent val="0"/>
+            <c:showBubbleSize val="0"/>
+            <c:showLeaderLines val="0"/>
+          </c:dLbls>
+          <c:cat>
+            <c:multiLvlStrRef>
+              <c:f>Sheet1!$A$2:$A$13</c:f>
+              <c:multiLvlStrCache>
+                <c:ptCount val="12"/>
+                <c:lvl>
+                  <c:pt idx="0">
+                    <c:v>未達60%</c:v>
+                  </c:pt>
+                  <c:pt idx="1">
+                    <c:v>60～70%</c:v>
+                  </c:pt>
+                  <c:pt idx="2">
+                    <c:v>70～75%</c:v>
+                  </c:pt>
+                  <c:pt idx="3">
+                    <c:v>75～80%</c:v>
+                  </c:pt>
+                  <c:pt idx="4">
+                    <c:v>80～90%</c:v>
+                  </c:pt>
+                  <c:pt idx="5">
+                    <c:v>90～100%</c:v>
+                  </c:pt>
+                  <c:pt idx="6">
+                    <c:v>100～110%</c:v>
+                  </c:pt>
+                  <c:pt idx="7">
+                    <c:v>110～120%</c:v>
+                  </c:pt>
+                  <c:pt idx="8">
+                    <c:v>120～130%</c:v>
+                  </c:pt>
+                  <c:pt idx="9">
+                    <c:v>130～150%</c:v>
+                  </c:pt>
+                  <c:pt idx="10">
+                    <c:v>150～180%</c:v>
+                  </c:pt>
+                  <c:pt idx="11">
+                    <c:v>180%以上</c:v>
+                  </c:pt>
+                </c:lvl>
+              </c:multiLvlStrCache>
+            </c:multiLvlStrRef>
+          </c:cat>
+          <c:val>
+            <c:numRef>
+              <c:f>Sheet1!$B$2:$B$13</c:f>
+              <c:numCache>
+                <c:formatCode>General</c:formatCode>
+                <c:ptCount val="12"/>
+                <c:pt idx="0">
+                  <c:v>2</c:v>
+                </c:pt>
+                <c:pt idx="1">
+                  <c:v>7</c:v>
+                </c:pt>
+                <c:pt idx="2">
+                  <c:v>10</c:v>
+                </c:pt>
+                <c:pt idx="3">
+                  <c:v>12</c:v>
+                </c:pt>
+                <c:pt idx="4">
+                  <c:v>24</c:v>
+                </c:pt>
+                <c:pt idx="5">
+                  <c:v>29</c:v>
+                </c:pt>
+                <c:pt idx="6">
+                  <c:v>0</c:v>
+                </c:pt>
+                <c:pt idx="7">
+                  <c:v>0</c:v>
+                </c:pt>
+                <c:pt idx="8">
+                  <c:v>0</c:v>
+                </c:pt>
+                <c:pt idx="9">
+                  <c:v>0</c:v>
+                </c:pt>
+                <c:pt idx="10">
+                  <c:v>0</c:v>
+                </c:pt>
+                <c:pt idx="11">
+                  <c:v>0</c:v>
+                </c:pt>
+              </c:numCache>
+            </c:numRef>
+          </c:val>
+        </c:ser>
+        <c:ser>
+          <c:idx val="1"/>
+          <c:order val="1"/>
+          <c:tx>
+            <c:strRef>
+              <c:f>Sheet1!$C$1</c:f>
+              <c:strCache>
+                <c:ptCount val="1"/>
+                <c:pt idx="0">
+                  <c:v>達標（≥100%）99家</c:v>
+                </c:pt>
+              </c:strCache>
+            </c:strRef>
+          </c:tx>
+          <c:spPr>
+            <a:solidFill>
+              <a:srgbClr val="2EA9B6"/>
+            </a:solidFill>
+            <a:effectLst/>
+          </c:spPr>
+          <c:invertIfNegative val="0"/>
+          <c:dLbls>
+            <c:numFmt formatCode="#,##0;;" sourceLinked="0"/>
+            <c:txPr>
+              <a:bodyPr/>
+              <a:lstStyle/>
+              <a:p>
+                <a:pPr>
+                  <a:defRPr b="0" i="0" strike="noStrike" sz="1000" u="none">
+                    <a:solidFill>
+                      <a:srgbClr val="FFFFFF"/>
+                    </a:solidFill>
+                    <a:latin typeface="+mn-lt"/>
+                  </a:defRPr>
+                </a:pPr>
+              </a:p>
+            </c:txPr>
+            <c:dLblPos val="inEnd"/>
+            <c:showLegendKey val="0"/>
+            <c:showVal val="1"/>
+            <c:showCatName val="0"/>
+            <c:showSerName val="0"/>
+            <c:showPercent val="0"/>
+            <c:showBubbleSize val="0"/>
+            <c:showLeaderLines val="0"/>
+          </c:dLbls>
+          <c:cat>
+            <c:multiLvlStrRef>
+              <c:f>Sheet1!$A$2:$A$13</c:f>
+              <c:multiLvlStrCache>
+                <c:ptCount val="12"/>
+                <c:lvl>
+                  <c:pt idx="0">
+                    <c:v>未達60%</c:v>
+                  </c:pt>
+                  <c:pt idx="1">
+                    <c:v>60～70%</c:v>
+                  </c:pt>
+                  <c:pt idx="2">
+                    <c:v>70～75%</c:v>
+                  </c:pt>
+                  <c:pt idx="3">
+                    <c:v>75～80%</c:v>
+                  </c:pt>
+                  <c:pt idx="4">
+                    <c:v>80～90%</c:v>
+                  </c:pt>
+                  <c:pt idx="5">
+                    <c:v>90～100%</c:v>
+                  </c:pt>
+                  <c:pt idx="6">
+                    <c:v>100～110%</c:v>
+                  </c:pt>
+                  <c:pt idx="7">
+                    <c:v>110～120%</c:v>
+                  </c:pt>
+                  <c:pt idx="8">
+                    <c:v>120～130%</c:v>
+                  </c:pt>
+                  <c:pt idx="9">
+                    <c:v>130～150%</c:v>
+                  </c:pt>
+                  <c:pt idx="10">
+                    <c:v>150～180%</c:v>
+                  </c:pt>
+                  <c:pt idx="11">
+                    <c:v>180%以上</c:v>
+                  </c:pt>
+                </c:lvl>
+              </c:multiLvlStrCache>
+            </c:multiLvlStrRef>
+          </c:cat>
+          <c:val>
+            <c:numRef>
+              <c:f>Sheet1!$C$2:$C$13</c:f>
+              <c:numCache>
+                <c:formatCode>General</c:formatCode>
+                <c:ptCount val="12"/>
+                <c:pt idx="0">
+                  <c:v>0</c:v>
+                </c:pt>
+                <c:pt idx="1">
+                  <c:v>0</c:v>
+                </c:pt>
+                <c:pt idx="2">
+                  <c:v>0</c:v>
+                </c:pt>
+                <c:pt idx="3">
+                  <c:v>0</c:v>
+                </c:pt>
+                <c:pt idx="4">
+                  <c:v>0</c:v>
+                </c:pt>
+                <c:pt idx="5">
+                  <c:v>0</c:v>
+                </c:pt>
+                <c:pt idx="6">
+                  <c:v>25</c:v>
+                </c:pt>
+                <c:pt idx="7">
+                  <c:v>27</c:v>
+                </c:pt>
+                <c:pt idx="8">
+                  <c:v>17</c:v>
+                </c:pt>
+                <c:pt idx="9">
+                  <c:v>23</c:v>
+                </c:pt>
+                <c:pt idx="10">
+                  <c:v>4</c:v>
+                </c:pt>
+                <c:pt idx="11">
+                  <c:v>3</c:v>
+                </c:pt>
+              </c:numCache>
+            </c:numRef>
+          </c:val>
+        </c:ser>
+        <c:dLbls>
+          <c:numFmt formatCode="#,##0;;" sourceLinked="0"/>
+          <c:txPr>
+            <a:bodyPr/>
+            <a:lstStyle/>
+            <a:p>
+              <a:pPr>
+                <a:defRPr b="0" i="0" strike="noStrike" sz="1000" u="none">
+                  <a:solidFill>
+                    <a:srgbClr val="FFFFFF"/>
+                  </a:solidFill>
+                  <a:latin typeface="+mn-lt"/>
+                </a:defRPr>
+              </a:pPr>
+            </a:p>
+          </c:txPr>
+          <c:dLblPos val="inEnd"/>
+          <c:showLegendKey val="0"/>
+          <c:showVal val="1"/>
+          <c:showCatName val="0"/>
+          <c:showSerName val="0"/>
+          <c:showPercent val="0"/>
+          <c:showBubbleSize val="0"/>
+          <c:showLeaderLines val="0"/>
+        </c:dLbls>
+        <c:gapWidth val="30"/>
+        <c:overlap val="100"/>
+        <c:axId val="2094734554"/>
+        <c:axId val="2094734552"/>
+        <c:axId val="2094734556"/>
+      </c:barChart>
+      <c:catAx>
+        <c:axId val="2094734554"/>
+        <c:scaling>
+          <c:orientation val="minMax"/>
+        </c:scaling>
+        <c:delete val="0"/>
+        <c:axPos val="b"/>
+        <c:numFmt formatCode="General" sourceLinked="1"/>
+        <c:majorTickMark val="out"/>
+        <c:minorTickMark val="none"/>
+        <c:tickLblPos val="low"/>
+        <c:spPr>
+          <a:ln w="12700" cap="flat">
+            <a:solidFill>
+              <a:srgbClr val="888888"/>
+            </a:solidFill>
+            <a:prstDash val="solid"/>
+            <a:round/>
+          </a:ln>
+        </c:spPr>
+        <c:txPr>
+          <a:bodyPr/>
+          <a:lstStyle/>
+          <a:p>
+            <a:pPr>
+              <a:defRPr sz="950" b="0" i="0" u="none" strike="noStrike">
+                <a:solidFill>
+                  <a:srgbClr val="000000"/>
+                </a:solidFill>
+                <a:latin typeface="+mn-lt"/>
+              </a:defRPr>
+            </a:pPr>
+            <a:endParaRPr lang="en-US"/>
+          </a:p>
+        </c:txPr>
+        <c:crossAx val="2094734552"/>
+        <c:crosses val="autoZero"/>
+        <c:auto val="1"/>
+        <c:lblAlgn val="ctr"/>
+        <c:noMultiLvlLbl val="1"/>
+      </c:catAx>
+      <c:valAx>
+        <c:axId val="2094734552"/>
+        <c:scaling>
+          <c:orientation val="minMax"/>
+          <c:max val="35"/>
+          <c:min val="0"/>
+        </c:scaling>
+        <c:delete val="0"/>
+        <c:axPos val="l"/>
+        <c:majorGridlines>
+          <c:spPr>
+            <a:ln w="6350" cap="flat">
+              <a:solidFill>
+                <a:srgbClr val="E0E0E0"/>
+              </a:solidFill>
+              <a:prstDash val="solid"/>
+              <a:round/>
+            </a:ln>
+          </c:spPr>
+        </c:majorGridlines>
+        <c:numFmt formatCode="General" sourceLinked="0"/>
+        <c:majorTickMark val="out"/>
+        <c:minorTickMark val="none"/>
+        <c:tickLblPos val="nextTo"/>
+        <c:spPr>
+          <a:ln w="12700" cap="flat">
+            <a:solidFill>
+              <a:srgbClr val="888888"/>
+            </a:solidFill>
+            <a:prstDash val="solid"/>
+            <a:round/>
+          </a:ln>
+        </c:spPr>
+        <c:txPr>
+          <a:bodyPr/>
+          <a:lstStyle/>
+          <a:p>
+            <a:pPr>
+              <a:defRPr sz="900" b="0" i="0" u="none" strike="noStrike">
+                <a:solidFill>
+                  <a:srgbClr val="7F7F7F"/>
+                </a:solidFill>
+                <a:latin typeface="+mn-lt"/>
+              </a:defRPr>
+            </a:pPr>
+            <a:endParaRPr lang="en-US"/>
+          </a:p>
+        </c:txPr>
+        <c:crossAx val="2094734554"/>
+        <c:crosses val="autoZero"/>
+        <c:crossBetween val="between"/>
+        <c:majorUnit val="5"/>
+      </c:valAx>
+      <c:spPr>
+        <a:noFill/>
+        <a:ln>
+          <a:noFill/>
+        </a:ln>
+        <a:effectLst/>
+      </c:spPr>
+    </c:plotArea>
+    <c:legend>
+      <c:legendPos val="t"/>
+      <c:overlay val="0"/>
+      <c:txPr>
+        <a:bodyPr/>
+        <a:lstStyle/>
+        <a:p>
+          <a:pPr>
+            <a:defRPr sz="1100">
+              <a:solidFill>
+                <a:srgbClr val="000000"/>
+              </a:solidFill>
+              <a:latin typeface="+mn-lt"/>
+              <a:cs typeface="+mn-lt"/>
+            </a:defRPr>
+          </a:pPr>
+          <a:endParaRPr lang="en-US"/>
+        </a:p>
+      </c:txPr>
+    </c:legend>
+    <c:plotVisOnly val="1"/>
+    <c:dispBlanksAs val="span"/>
+  </c:chart>
+  <c:spPr>
+    <a:noFill/>
+    <a:ln>
+      <a:noFill/>
+    </a:ln>
+    <a:effectLst/>
+  </c:spPr>
+  <c:externalData r:id="rId1">
+    <c:autoUpdate val="0"/>
+  </c:externalData>
+</c:chartSpace>
+</file>
+
+<file path=ppt/charts/chart3.xml><?xml version="1.0" encoding="utf-8"?>
+<c:chartSpace xmlns:c="http://schemas.openxmlformats.org/drawingml/2006/chart" xmlns:a="http://schemas.openxmlformats.org/drawingml/2006/main" xmlns:r="http://schemas.openxmlformats.org/officeDocument/2006/relationships">
+  <c:date1904 val="0"/>
+  <c:roundedCorners val="1"/>
+  <c:chart>
+    <c:title>
+      <c:tx>
+        <c:rich>
+          <a:bodyPr/>
+          <a:lstStyle/>
+          <a:p>
+            <a:pPr>
+              <a:defRPr sz="1100" b="0" i="0" u="none" strike="noStrike">
+                <a:solidFill>
+                  <a:srgbClr val="000000"/>
+                </a:solidFill>
+                <a:latin typeface="+mn-lt"/>
+              </a:defRPr>
+            </a:pPr>
+            <a:r>
+              <a:rPr sz="1100" b="0" i="0" u="none" strike="noStrike">
+                <a:solidFill>
+                  <a:srgbClr val="000000"/>
+                </a:solidFill>
+                <a:latin typeface="+mn-lt"/>
+              </a:rPr>
               <a:t>115年落入「未達75%」之比例（依114年級距）</a:t>
             </a:r>
           </a:p>
@@ -885,7 +1373,7 @@
 </c:chartSpace>
 </file>
 
-<file path=ppt/charts/chart3.xml><?xml version="1.0" encoding="utf-8"?>
+<file path=ppt/charts/chart4.xml><?xml version="1.0" encoding="utf-8"?>
 <c:chartSpace xmlns:c="http://schemas.openxmlformats.org/drawingml/2006/chart" xmlns:a="http://schemas.openxmlformats.org/drawingml/2006/main" xmlns:r="http://schemas.openxmlformats.org/officeDocument/2006/relationships">
   <c:date1904 val="0"/>
   <c:roundedCorners val="1"/>
@@ -1193,7 +1681,7 @@
 </c:chartSpace>
 </file>
 
-<file path=ppt/charts/chart4.xml><?xml version="1.0" encoding="utf-8"?>
+<file path=ppt/charts/chart5.xml><?xml version="1.0" encoding="utf-8"?>
 <c:chartSpace xmlns:c="http://schemas.openxmlformats.org/drawingml/2006/chart" xmlns:a="http://schemas.openxmlformats.org/drawingml/2006/main" xmlns:r="http://schemas.openxmlformats.org/officeDocument/2006/relationships">
   <c:date1904 val="0"/>
   <c:roundedCorners val="1"/>
@@ -1501,7 +1989,7 @@
 </c:chartSpace>
 </file>
 
-<file path=ppt/charts/chart5.xml><?xml version="1.0" encoding="utf-8"?>
+<file path=ppt/charts/chart6.xml><?xml version="1.0" encoding="utf-8"?>
 <c:chartSpace xmlns:c="http://schemas.openxmlformats.org/drawingml/2006/chart" xmlns:a="http://schemas.openxmlformats.org/drawingml/2006/main" xmlns:r="http://schemas.openxmlformats.org/officeDocument/2006/relationships">
   <c:date1904 val="0"/>
   <c:roundedCorners val="1"/>
@@ -2085,7 +2573,7 @@
           <a:p>
             <a:r>
               <a:rPr lang="en-US" dirty="0"/>
-              <a:t>流向矩陣：115年未達75%的19家全部來自114年未達標群；比例隨114年達成率降低而升高。</a:t>
+              <a:t>115年達成率分布：99家達標（54%）、84家未達標（46%）；中位數101%；75～100%共65家為最大族群。</a:t>
             </a:r>
             <a:endParaRPr lang="en-US" dirty="0"/>
           </a:p>
@@ -2173,7 +2661,7 @@
           <a:p>
             <a:r>
               <a:rPr lang="en-US" dirty="0"/>
-              <a:t>114年未達75%的分行，115年目標較114實績拉高77%，達成率僅95%；績優分行目標低於實績，達成率近190%。</a:t>
+              <a:t>流向矩陣：115年未達75%的19家全部來自114年未達標群；比例隨114年達成率降低而升高。</a:t>
             </a:r>
             <a:endParaRPr lang="en-US" dirty="0"/>
           </a:p>
@@ -2261,7 +2749,7 @@
           <a:p>
             <a:r>
               <a:rPr lang="en-US" dirty="0"/>
-              <a:t>瀑布：目標117.85億＋超額15.23億−缺口8.23億＝實績124.86億。超額60%來自114年達標群；缺口86%來自114年未達標群。</a:t>
+              <a:t>114年未達75%的分行，115年目標較114實績拉高77%，達成率僅95%；績優分行目標低於實績，達成率近190%。</a:t>
             </a:r>
             <a:endParaRPr lang="en-US" dirty="0"/>
           </a:p>
@@ -2349,6 +2837,94 @@
           <a:p>
             <a:r>
               <a:rPr lang="en-US" dirty="0"/>
+              <a:t>瀑布：目標117.85億＋超額15.23億−缺口8.23億＝實績124.86億。超額60%來自114年達標群；缺口86%來自114年未達標群。</a:t>
+            </a:r>
+            <a:endParaRPr lang="en-US" dirty="0"/>
+          </a:p>
+        </p:txBody>
+      </p:sp>
+      <p:sp>
+        <p:nvSpPr>
+          <p:cNvPr id="4" name="Slide Number Placeholder 3"/>
+          <p:cNvSpPr>
+            <a:spLocks noGrp="1"/>
+          </p:cNvSpPr>
+          <p:nvPr>
+            <p:ph type="sldNum" sz="quarter" idx="10"/>
+          </p:nvPr>
+        </p:nvSpPr>
+        <p:spPr/>
+        <p:txBody>
+          <a:bodyPr/>
+          <a:lstStyle/>
+          <a:p>
+            <a:fld id="{F7021451-1387-4CA6-816F-3879F97B5CBC}" type="slidenum">
+              <a:rPr lang="en-US"/>
+              <a:t>5</a:t>
+            </a:fld>
+            <a:endParaRPr lang="en-US"/>
+          </a:p>
+        </p:txBody>
+      </p:sp>
+    </p:spTree>
+    <p:extLst>
+      <p:ext uri="{BB962C8B-B14F-4D97-AF65-F5344CB8AC3E}">
+        <p14:creationId xmlns:p14="http://schemas.microsoft.com/office/powerpoint/2010/main" val="1024086991"/>
+      </p:ext>
+    </p:extLst>
+  </p:cSld>
+  <p:clrMapOvr>
+    <a:masterClrMapping/>
+  </p:clrMapOvr>
+</p:notes>
+</file>
+
+<file path=ppt/notesSlides/notesSlide14.xml><?xml version="1.0" encoding="utf-8"?>
+<p:notes xmlns:a="http://schemas.openxmlformats.org/drawingml/2006/main" xmlns:r="http://schemas.openxmlformats.org/officeDocument/2006/relationships" xmlns:p="http://schemas.openxmlformats.org/presentationml/2006/main">
+  <p:cSld>
+    <p:spTree>
+      <p:nvGrpSpPr>
+        <p:cNvPr id="1" name=""/>
+        <p:cNvGrpSpPr/>
+        <p:nvPr/>
+      </p:nvGrpSpPr>
+      <p:grpSpPr>
+        <a:xfrm>
+          <a:off x="0" y="0"/>
+          <a:ext cx="0" cy="0"/>
+          <a:chOff x="0" y="0"/>
+          <a:chExt cx="0" cy="0"/>
+        </a:xfrm>
+      </p:grpSpPr>
+      <p:sp>
+        <p:nvSpPr>
+          <p:cNvPr id="2" name="Slide Image Placeholder 1"/>
+          <p:cNvSpPr>
+            <a:spLocks noGrp="1" noRot="1" noChangeAspect="1"/>
+          </p:cNvSpPr>
+          <p:nvPr>
+            <p:ph type="sldImg"/>
+          </p:nvPr>
+        </p:nvSpPr>
+        <p:spPr/>
+      </p:sp>
+      <p:sp>
+        <p:nvSpPr>
+          <p:cNvPr id="3" name="Notes Placeholder 2"/>
+          <p:cNvSpPr>
+            <a:spLocks noGrp="1"/>
+          </p:cNvSpPr>
+          <p:nvPr>
+            <p:ph type="body" idx="1"/>
+          </p:nvPr>
+        </p:nvSpPr>
+        <p:spPr/>
+        <p:txBody>
+          <a:bodyPr/>
+          <a:lstStyle/>
+          <a:p>
+            <a:r>
+              <a:rPr lang="en-US" dirty="0"/>
               <a:t>116目標底稿SUMMARY TYPE_6：19家、成長目標7.74億。若沿用115年規則（分行目標×115%）約12.62億。</a:t>
             </a:r>
             <a:endParaRPr lang="en-US" dirty="0"/>
@@ -2372,7 +2948,7 @@
           <a:p>
             <a:fld id="{F7021451-1387-4CA6-816F-3879F97B5CBC}" type="slidenum">
               <a:rPr lang="en-US"/>
-              <a:t>5</a:t>
+              <a:t>6</a:t>
             </a:fld>
             <a:endParaRPr lang="en-US"/>
           </a:p>
@@ -5631,6 +6207,4319 @@
                   <a:schemeClr val="tx1"/>
                 </a:solidFill>
               </a:rPr>
+              <a:t>115年整體達成率分布：183家分行</a:t>
+            </a:r>
+            <a:endParaRPr lang="en-US" sz="3000" dirty="0"/>
+          </a:p>
+        </p:txBody>
+      </p:sp>
+      <p:sp>
+        <p:nvSpPr>
+          <p:cNvPr id="3" name="Text 1"/>
+          <p:cNvSpPr txBox="1"/>
+          <p:nvPr/>
+        </p:nvSpPr>
+        <p:spPr>
+          <a:xfrm>
+            <a:off x="457200" y="1051560"/>
+            <a:ext cx="11247120" cy="365760"/>
+          </a:xfrm>
+          <a:prstGeom prst="rect">
+            <a:avLst/>
+          </a:prstGeom>
+          <a:noFill/>
+          <a:ln/>
+        </p:spPr>
+        <p:txBody>
+          <a:bodyPr wrap="square" lIns="381" tIns="381" rIns="381" bIns="381" rtlCol="0" anchor="ctr"/>
+          <a:lstStyle/>
+          <a:p>
+            <a:pPr indent="0" marL="0">
+              <a:buNone/>
+            </a:pPr>
+            <a:r>
+              <a:rPr lang="en-US" sz="1300" dirty="0">
+                <a:solidFill>
+                  <a:srgbClr val="7F7F7F"/>
+                </a:solidFill>
+              </a:rPr>
+              <a:t>依115年年化達成率（四捨五入至小數2位，與原檔分群一致）分組計算家數；全行達成 105.9%，但分行間差距極大（52%～215%）</a:t>
+            </a:r>
+            <a:endParaRPr lang="en-US" sz="1300" dirty="0"/>
+          </a:p>
+        </p:txBody>
+      </p:sp>
+      <p:graphicFrame>
+        <p:nvGraphicFramePr>
+          <p:cNvPr id="4" name="Chart 0" descr=""/>
+          <p:cNvGraphicFramePr/>
+          <p:nvPr/>
+        </p:nvGraphicFramePr>
+        <p:xfrm>
+          <a:off x="457200" y="1417320"/>
+          <a:ext cx="7315200" cy="3291840"/>
+        </p:xfrm>
+        <a:graphic xmlns:a="http://schemas.openxmlformats.org/drawingml/2006/main">
+          <a:graphicData uri="http://schemas.openxmlformats.org/drawingml/2006/chart">
+            <c:chart xmlns:c="http://schemas.openxmlformats.org/drawingml/2006/chart" r:id="rId1"/>
+          </a:graphicData>
+        </a:graphic>
+      </p:graphicFrame>
+      <p:sp>
+        <p:nvSpPr>
+          <p:cNvPr id="5" name="tile 達標分行"/>
+          <p:cNvSpPr/>
+          <p:nvPr/>
+        </p:nvSpPr>
+        <p:spPr>
+          <a:xfrm>
+            <a:off x="457200" y="4846320"/>
+            <a:ext cx="1737360" cy="1280160"/>
+          </a:xfrm>
+          <a:prstGeom prst="rect">
+            <a:avLst/>
+          </a:prstGeom>
+          <a:solidFill>
+            <a:srgbClr val="FDF1E9"/>
+          </a:solidFill>
+          <a:ln w="12700">
+            <a:solidFill>
+              <a:srgbClr val="FDF1E9"/>
+            </a:solidFill>
+            <a:prstDash val="solid"/>
+          </a:ln>
+        </p:spPr>
+      </p:sp>
+      <p:sp>
+        <p:nvSpPr>
+          <p:cNvPr id="6" name="Text 3"/>
+          <p:cNvSpPr txBox="1"/>
+          <p:nvPr/>
+        </p:nvSpPr>
+        <p:spPr>
+          <a:xfrm>
+            <a:off x="548640" y="4892040"/>
+            <a:ext cx="1554480" cy="274320"/>
+          </a:xfrm>
+          <a:prstGeom prst="rect">
+            <a:avLst/>
+          </a:prstGeom>
+          <a:noFill/>
+          <a:ln/>
+        </p:spPr>
+        <p:txBody>
+          <a:bodyPr wrap="square" lIns="0" tIns="0" rIns="0" bIns="0" rtlCol="0" anchor="ctr"/>
+          <a:lstStyle/>
+          <a:p>
+            <a:pPr algn="ctr" indent="0" marL="0">
+              <a:buNone/>
+            </a:pPr>
+            <a:r>
+              <a:rPr lang="en-US" sz="1100" dirty="0">
+                <a:solidFill>
+                  <a:srgbClr val="7F7F7F"/>
+                </a:solidFill>
+              </a:rPr>
+              <a:t>達標分行</a:t>
+            </a:r>
+            <a:endParaRPr lang="en-US" sz="1100" dirty="0"/>
+          </a:p>
+        </p:txBody>
+      </p:sp>
+      <p:sp>
+        <p:nvSpPr>
+          <p:cNvPr id="7" name="Text 4"/>
+          <p:cNvSpPr txBox="1"/>
+          <p:nvPr/>
+        </p:nvSpPr>
+        <p:spPr>
+          <a:xfrm>
+            <a:off x="548640" y="5166360"/>
+            <a:ext cx="1554480" cy="548640"/>
+          </a:xfrm>
+          <a:prstGeom prst="rect">
+            <a:avLst/>
+          </a:prstGeom>
+          <a:noFill/>
+          <a:ln/>
+        </p:spPr>
+        <p:txBody>
+          <a:bodyPr wrap="square" lIns="0" tIns="0" rIns="0" bIns="0" rtlCol="0" anchor="ctr"/>
+          <a:lstStyle/>
+          <a:p>
+            <a:pPr algn="ctr" indent="0" marL="0">
+              <a:buNone/>
+            </a:pPr>
+            <a:r>
+              <a:rPr lang="en-US" sz="2400" b="1" dirty="0">
+                <a:solidFill>
+                  <a:srgbClr val="2EA9B6"/>
+                </a:solidFill>
+              </a:rPr>
+              <a:t>99家</a:t>
+            </a:r>
+            <a:endParaRPr lang="en-US" sz="2400" dirty="0"/>
+          </a:p>
+        </p:txBody>
+      </p:sp>
+      <p:sp>
+        <p:nvSpPr>
+          <p:cNvPr id="8" name="Text 5"/>
+          <p:cNvSpPr txBox="1"/>
+          <p:nvPr/>
+        </p:nvSpPr>
+        <p:spPr>
+          <a:xfrm>
+            <a:off x="548640" y="5742432"/>
+            <a:ext cx="1554480" cy="274320"/>
+          </a:xfrm>
+          <a:prstGeom prst="rect">
+            <a:avLst/>
+          </a:prstGeom>
+          <a:noFill/>
+          <a:ln/>
+        </p:spPr>
+        <p:txBody>
+          <a:bodyPr wrap="square" lIns="0" tIns="0" rIns="0" bIns="0" rtlCol="0" anchor="ctr"/>
+          <a:lstStyle/>
+          <a:p>
+            <a:pPr algn="ctr" indent="0" marL="0">
+              <a:buNone/>
+            </a:pPr>
+            <a:r>
+              <a:rPr lang="en-US" sz="1050" dirty="0">
+                <a:solidFill>
+                  <a:srgbClr val="7F7F7F"/>
+                </a:solidFill>
+              </a:rPr>
+              <a:t>占54%</a:t>
+            </a:r>
+            <a:endParaRPr lang="en-US" sz="1050" dirty="0"/>
+          </a:p>
+        </p:txBody>
+      </p:sp>
+      <p:sp>
+        <p:nvSpPr>
+          <p:cNvPr id="9" name="tile 未達標分行"/>
+          <p:cNvSpPr/>
+          <p:nvPr/>
+        </p:nvSpPr>
+        <p:spPr>
+          <a:xfrm>
+            <a:off x="2313432" y="4846320"/>
+            <a:ext cx="1737360" cy="1280160"/>
+          </a:xfrm>
+          <a:prstGeom prst="rect">
+            <a:avLst/>
+          </a:prstGeom>
+          <a:solidFill>
+            <a:srgbClr val="FDF1E9"/>
+          </a:solidFill>
+          <a:ln w="12700">
+            <a:solidFill>
+              <a:srgbClr val="FDF1E9"/>
+            </a:solidFill>
+            <a:prstDash val="solid"/>
+          </a:ln>
+        </p:spPr>
+      </p:sp>
+      <p:sp>
+        <p:nvSpPr>
+          <p:cNvPr id="10" name="Text 7"/>
+          <p:cNvSpPr txBox="1"/>
+          <p:nvPr/>
+        </p:nvSpPr>
+        <p:spPr>
+          <a:xfrm>
+            <a:off x="2404872" y="4892040"/>
+            <a:ext cx="1554480" cy="274320"/>
+          </a:xfrm>
+          <a:prstGeom prst="rect">
+            <a:avLst/>
+          </a:prstGeom>
+          <a:noFill/>
+          <a:ln/>
+        </p:spPr>
+        <p:txBody>
+          <a:bodyPr wrap="square" lIns="0" tIns="0" rIns="0" bIns="0" rtlCol="0" anchor="ctr"/>
+          <a:lstStyle/>
+          <a:p>
+            <a:pPr algn="ctr" indent="0" marL="0">
+              <a:buNone/>
+            </a:pPr>
+            <a:r>
+              <a:rPr lang="en-US" sz="1100" dirty="0">
+                <a:solidFill>
+                  <a:srgbClr val="7F7F7F"/>
+                </a:solidFill>
+              </a:rPr>
+              <a:t>未達標分行</a:t>
+            </a:r>
+            <a:endParaRPr lang="en-US" sz="1100" dirty="0"/>
+          </a:p>
+        </p:txBody>
+      </p:sp>
+      <p:sp>
+        <p:nvSpPr>
+          <p:cNvPr id="11" name="Text 8"/>
+          <p:cNvSpPr txBox="1"/>
+          <p:nvPr/>
+        </p:nvSpPr>
+        <p:spPr>
+          <a:xfrm>
+            <a:off x="2404872" y="5166360"/>
+            <a:ext cx="1554480" cy="548640"/>
+          </a:xfrm>
+          <a:prstGeom prst="rect">
+            <a:avLst/>
+          </a:prstGeom>
+          <a:noFill/>
+          <a:ln/>
+        </p:spPr>
+        <p:txBody>
+          <a:bodyPr wrap="square" lIns="0" tIns="0" rIns="0" bIns="0" rtlCol="0" anchor="ctr"/>
+          <a:lstStyle/>
+          <a:p>
+            <a:pPr algn="ctr" indent="0" marL="0">
+              <a:buNone/>
+            </a:pPr>
+            <a:r>
+              <a:rPr lang="en-US" sz="2400" b="1" dirty="0">
+                <a:solidFill>
+                  <a:srgbClr val="C00000"/>
+                </a:solidFill>
+              </a:rPr>
+              <a:t>84家</a:t>
+            </a:r>
+            <a:endParaRPr lang="en-US" sz="2400" dirty="0"/>
+          </a:p>
+        </p:txBody>
+      </p:sp>
+      <p:sp>
+        <p:nvSpPr>
+          <p:cNvPr id="12" name="Text 9"/>
+          <p:cNvSpPr txBox="1"/>
+          <p:nvPr/>
+        </p:nvSpPr>
+        <p:spPr>
+          <a:xfrm>
+            <a:off x="2404872" y="5742432"/>
+            <a:ext cx="1554480" cy="274320"/>
+          </a:xfrm>
+          <a:prstGeom prst="rect">
+            <a:avLst/>
+          </a:prstGeom>
+          <a:noFill/>
+          <a:ln/>
+        </p:spPr>
+        <p:txBody>
+          <a:bodyPr wrap="square" lIns="0" tIns="0" rIns="0" bIns="0" rtlCol="0" anchor="ctr"/>
+          <a:lstStyle/>
+          <a:p>
+            <a:pPr algn="ctr" indent="0" marL="0">
+              <a:buNone/>
+            </a:pPr>
+            <a:r>
+              <a:rPr lang="en-US" sz="1050" dirty="0">
+                <a:solidFill>
+                  <a:srgbClr val="7F7F7F"/>
+                </a:solidFill>
+              </a:rPr>
+              <a:t>占46%</a:t>
+            </a:r>
+            <a:endParaRPr lang="en-US" sz="1050" dirty="0"/>
+          </a:p>
+        </p:txBody>
+      </p:sp>
+      <p:sp>
+        <p:nvSpPr>
+          <p:cNvPr id="13" name="tile 達成率中位數"/>
+          <p:cNvSpPr/>
+          <p:nvPr/>
+        </p:nvSpPr>
+        <p:spPr>
+          <a:xfrm>
+            <a:off x="4169664" y="4846320"/>
+            <a:ext cx="1737360" cy="1280160"/>
+          </a:xfrm>
+          <a:prstGeom prst="rect">
+            <a:avLst/>
+          </a:prstGeom>
+          <a:solidFill>
+            <a:srgbClr val="FDF1E9"/>
+          </a:solidFill>
+          <a:ln w="12700">
+            <a:solidFill>
+              <a:srgbClr val="FDF1E9"/>
+            </a:solidFill>
+            <a:prstDash val="solid"/>
+          </a:ln>
+        </p:spPr>
+      </p:sp>
+      <p:sp>
+        <p:nvSpPr>
+          <p:cNvPr id="14" name="Text 11"/>
+          <p:cNvSpPr txBox="1"/>
+          <p:nvPr/>
+        </p:nvSpPr>
+        <p:spPr>
+          <a:xfrm>
+            <a:off x="4261104" y="4892040"/>
+            <a:ext cx="1554480" cy="274320"/>
+          </a:xfrm>
+          <a:prstGeom prst="rect">
+            <a:avLst/>
+          </a:prstGeom>
+          <a:noFill/>
+          <a:ln/>
+        </p:spPr>
+        <p:txBody>
+          <a:bodyPr wrap="square" lIns="0" tIns="0" rIns="0" bIns="0" rtlCol="0" anchor="ctr"/>
+          <a:lstStyle/>
+          <a:p>
+            <a:pPr algn="ctr" indent="0" marL="0">
+              <a:buNone/>
+            </a:pPr>
+            <a:r>
+              <a:rPr lang="en-US" sz="1100" dirty="0">
+                <a:solidFill>
+                  <a:srgbClr val="7F7F7F"/>
+                </a:solidFill>
+              </a:rPr>
+              <a:t>達成率中位數</a:t>
+            </a:r>
+            <a:endParaRPr lang="en-US" sz="1100" dirty="0"/>
+          </a:p>
+        </p:txBody>
+      </p:sp>
+      <p:sp>
+        <p:nvSpPr>
+          <p:cNvPr id="15" name="Text 12"/>
+          <p:cNvSpPr txBox="1"/>
+          <p:nvPr/>
+        </p:nvSpPr>
+        <p:spPr>
+          <a:xfrm>
+            <a:off x="4261104" y="5166360"/>
+            <a:ext cx="1554480" cy="548640"/>
+          </a:xfrm>
+          <a:prstGeom prst="rect">
+            <a:avLst/>
+          </a:prstGeom>
+          <a:noFill/>
+          <a:ln/>
+        </p:spPr>
+        <p:txBody>
+          <a:bodyPr wrap="square" lIns="0" tIns="0" rIns="0" bIns="0" rtlCol="0" anchor="ctr"/>
+          <a:lstStyle/>
+          <a:p>
+            <a:pPr algn="ctr" indent="0" marL="0">
+              <a:buNone/>
+            </a:pPr>
+            <a:r>
+              <a:rPr lang="en-US" sz="2400" b="1" dirty="0">
+                <a:solidFill>
+                  <a:srgbClr val="000000"/>
+                </a:solidFill>
+              </a:rPr>
+              <a:t>101%</a:t>
+            </a:r>
+            <a:endParaRPr lang="en-US" sz="2400" dirty="0"/>
+          </a:p>
+        </p:txBody>
+      </p:sp>
+      <p:sp>
+        <p:nvSpPr>
+          <p:cNvPr id="16" name="Text 13"/>
+          <p:cNvSpPr txBox="1"/>
+          <p:nvPr/>
+        </p:nvSpPr>
+        <p:spPr>
+          <a:xfrm>
+            <a:off x="4261104" y="5742432"/>
+            <a:ext cx="1554480" cy="274320"/>
+          </a:xfrm>
+          <a:prstGeom prst="rect">
+            <a:avLst/>
+          </a:prstGeom>
+          <a:noFill/>
+          <a:ln/>
+        </p:spPr>
+        <p:txBody>
+          <a:bodyPr wrap="square" lIns="0" tIns="0" rIns="0" bIns="0" rtlCol="0" anchor="ctr"/>
+          <a:lstStyle/>
+          <a:p>
+            <a:pPr algn="ctr" indent="0" marL="0">
+              <a:buNone/>
+            </a:pPr>
+            <a:r>
+              <a:rPr lang="en-US" sz="1050" dirty="0">
+                <a:solidFill>
+                  <a:srgbClr val="7F7F7F"/>
+                </a:solidFill>
+              </a:rPr>
+              <a:t>簡單平均 105%</a:t>
+            </a:r>
+            <a:endParaRPr lang="en-US" sz="1050" dirty="0"/>
+          </a:p>
+        </p:txBody>
+      </p:sp>
+      <p:sp>
+        <p:nvSpPr>
+          <p:cNvPr id="17" name="tile 75%～100% 集中區"/>
+          <p:cNvSpPr/>
+          <p:nvPr/>
+        </p:nvSpPr>
+        <p:spPr>
+          <a:xfrm>
+            <a:off x="6025896" y="4846320"/>
+            <a:ext cx="1737360" cy="1280160"/>
+          </a:xfrm>
+          <a:prstGeom prst="rect">
+            <a:avLst/>
+          </a:prstGeom>
+          <a:solidFill>
+            <a:srgbClr val="FDF1E9"/>
+          </a:solidFill>
+          <a:ln w="12700">
+            <a:solidFill>
+              <a:srgbClr val="FDF1E9"/>
+            </a:solidFill>
+            <a:prstDash val="solid"/>
+          </a:ln>
+        </p:spPr>
+      </p:sp>
+      <p:sp>
+        <p:nvSpPr>
+          <p:cNvPr id="18" name="Text 15"/>
+          <p:cNvSpPr txBox="1"/>
+          <p:nvPr/>
+        </p:nvSpPr>
+        <p:spPr>
+          <a:xfrm>
+            <a:off x="6117336" y="4892040"/>
+            <a:ext cx="1554480" cy="274320"/>
+          </a:xfrm>
+          <a:prstGeom prst="rect">
+            <a:avLst/>
+          </a:prstGeom>
+          <a:noFill/>
+          <a:ln/>
+        </p:spPr>
+        <p:txBody>
+          <a:bodyPr wrap="square" lIns="0" tIns="0" rIns="0" bIns="0" rtlCol="0" anchor="ctr"/>
+          <a:lstStyle/>
+          <a:p>
+            <a:pPr algn="ctr" indent="0" marL="0">
+              <a:buNone/>
+            </a:pPr>
+            <a:r>
+              <a:rPr lang="en-US" sz="1100" dirty="0">
+                <a:solidFill>
+                  <a:srgbClr val="7F7F7F"/>
+                </a:solidFill>
+              </a:rPr>
+              <a:t>75%～100% 集中區</a:t>
+            </a:r>
+            <a:endParaRPr lang="en-US" sz="1100" dirty="0"/>
+          </a:p>
+        </p:txBody>
+      </p:sp>
+      <p:sp>
+        <p:nvSpPr>
+          <p:cNvPr id="19" name="Text 16"/>
+          <p:cNvSpPr txBox="1"/>
+          <p:nvPr/>
+        </p:nvSpPr>
+        <p:spPr>
+          <a:xfrm>
+            <a:off x="6117336" y="5166360"/>
+            <a:ext cx="1554480" cy="548640"/>
+          </a:xfrm>
+          <a:prstGeom prst="rect">
+            <a:avLst/>
+          </a:prstGeom>
+          <a:noFill/>
+          <a:ln/>
+        </p:spPr>
+        <p:txBody>
+          <a:bodyPr wrap="square" lIns="0" tIns="0" rIns="0" bIns="0" rtlCol="0" anchor="ctr"/>
+          <a:lstStyle/>
+          <a:p>
+            <a:pPr algn="ctr" indent="0" marL="0">
+              <a:buNone/>
+            </a:pPr>
+            <a:r>
+              <a:rPr lang="en-US" sz="2400" b="1" dirty="0">
+                <a:solidFill>
+                  <a:srgbClr val="960A14"/>
+                </a:solidFill>
+              </a:rPr>
+              <a:t>65家</a:t>
+            </a:r>
+            <a:endParaRPr lang="en-US" sz="2400" dirty="0"/>
+          </a:p>
+        </p:txBody>
+      </p:sp>
+      <p:sp>
+        <p:nvSpPr>
+          <p:cNvPr id="20" name="Text 17"/>
+          <p:cNvSpPr txBox="1"/>
+          <p:nvPr/>
+        </p:nvSpPr>
+        <p:spPr>
+          <a:xfrm>
+            <a:off x="6117336" y="5742432"/>
+            <a:ext cx="1554480" cy="274320"/>
+          </a:xfrm>
+          <a:prstGeom prst="rect">
+            <a:avLst/>
+          </a:prstGeom>
+          <a:noFill/>
+          <a:ln/>
+        </p:spPr>
+        <p:txBody>
+          <a:bodyPr wrap="square" lIns="0" tIns="0" rIns="0" bIns="0" rtlCol="0" anchor="ctr"/>
+          <a:lstStyle/>
+          <a:p>
+            <a:pPr algn="ctr" indent="0" marL="0">
+              <a:buNone/>
+            </a:pPr>
+            <a:r>
+              <a:rPr lang="en-US" sz="1050" dirty="0">
+                <a:solidFill>
+                  <a:srgbClr val="7F7F7F"/>
+                </a:solidFill>
+              </a:rPr>
+              <a:t>占36%，最大族群</a:t>
+            </a:r>
+            <a:endParaRPr lang="en-US" sz="1050" dirty="0"/>
+          </a:p>
+        </p:txBody>
+      </p:sp>
+      <p:graphicFrame>
+        <p:nvGraphicFramePr>
+          <p:cNvPr id="3" name="Table 0"/>
+          <p:cNvGraphicFramePr>
+            <a:graphicFrameLocks noGrp="1"/>
+          </p:cNvGraphicFramePr>
+          <p:nvPr>
+            <p:extLst>
+              <p:ext uri="{D42A27DB-BD31-4B8C-83A1-F6EECF244321}">
+                <p14:modId xmlns:p14="http://schemas.microsoft.com/office/powerpoint/2010/main" val="1579011935"/>
+              </p:ext>
+            </p:extLst>
+          </p:nvPr>
+        </p:nvGraphicFramePr>
+        <p:xfrm>
+          <a:off x="7863840" y="1417320"/>
+          <a:ext cx="3886200" cy="914400"/>
+        </p:xfrm>
+        <a:graphic>
+          <a:graphicData uri="http://schemas.openxmlformats.org/drawingml/2006/table">
+            <a:tbl>
+              <a:tblPr/>
+              <a:tblGrid>
+                <a:gridCol w="868680"/>
+                <a:gridCol w="411480"/>
+                <a:gridCol w="502920"/>
+                <a:gridCol w="548640"/>
+                <a:gridCol w="548640"/>
+                <a:gridCol w="502920"/>
+                <a:gridCol w="502920"/>
+              </a:tblGrid>
+              <a:tr h="274320">
+                <a:tc>
+                  <a:txBody>
+                    <a:bodyPr/>
+                    <a:lstStyle/>
+                    <a:p>
+                      <a:pPr algn="ctr" indent="0" marL="0">
+                        <a:buNone/>
+                      </a:pPr>
+                      <a:r>
+                        <a:rPr lang="en-US" sz="950" b="1" dirty="0">
+                          <a:solidFill>
+                            <a:srgbClr val="FFFFFF"/>
+                          </a:solidFill>
+                        </a:rPr>
+                        <a:t>115達成率級距</a:t>
+                      </a:r>
+                      <a:endParaRPr lang="en-US" sz="950" dirty="0"/>
+                    </a:p>
+                  </a:txBody>
+                  <a:tcPr marL="36576" marR="36576" marT="36576" marB="36576" anchor="ctr">
+                    <a:lnL w="9525" cap="flat" cmpd="sng" algn="ctr">
+                      <a:solidFill>
+                        <a:srgbClr val="FFFFFF"/>
+                      </a:solidFill>
+                      <a:prstDash val="solid"/>
+                      <a:round/>
+                      <a:headEnd type="none" w="med" len="med"/>
+                      <a:tailEnd type="none" w="med" len="med"/>
+                    </a:lnL>
+                    <a:lnR w="9525" cap="flat" cmpd="sng" algn="ctr">
+                      <a:solidFill>
+                        <a:srgbClr val="FFFFFF"/>
+                      </a:solidFill>
+                      <a:prstDash val="solid"/>
+                      <a:round/>
+                      <a:headEnd type="none" w="med" len="med"/>
+                      <a:tailEnd type="none" w="med" len="med"/>
+                    </a:lnR>
+                    <a:lnT w="9525" cap="flat" cmpd="sng" algn="ctr">
+                      <a:solidFill>
+                        <a:srgbClr val="FFFFFF"/>
+                      </a:solidFill>
+                      <a:prstDash val="solid"/>
+                      <a:round/>
+                      <a:headEnd type="none" w="med" len="med"/>
+                      <a:tailEnd type="none" w="med" len="med"/>
+                    </a:lnT>
+                    <a:lnB w="9525" cap="flat" cmpd="sng" algn="ctr">
+                      <a:solidFill>
+                        <a:srgbClr val="FFFFFF"/>
+                      </a:solidFill>
+                      <a:prstDash val="solid"/>
+                      <a:round/>
+                      <a:headEnd type="none" w="med" len="med"/>
+                      <a:tailEnd type="none" w="med" len="med"/>
+                    </a:lnB>
+                    <a:solidFill>
+                      <a:srgbClr val="7F7F7F"/>
+                    </a:solidFill>
+                  </a:tcPr>
+                </a:tc>
+                <a:tc>
+                  <a:txBody>
+                    <a:bodyPr/>
+                    <a:lstStyle/>
+                    <a:p>
+                      <a:pPr algn="ctr" indent="0" marL="0">
+                        <a:buNone/>
+                      </a:pPr>
+                      <a:r>
+                        <a:rPr lang="en-US" sz="950" b="1" dirty="0">
+                          <a:solidFill>
+                            <a:srgbClr val="FFFFFF"/>
+                          </a:solidFill>
+                        </a:rPr>
+                        <a:t>家數</a:t>
+                      </a:r>
+                      <a:endParaRPr lang="en-US" sz="950" dirty="0"/>
+                    </a:p>
+                  </a:txBody>
+                  <a:tcPr marL="36576" marR="36576" marT="36576" marB="36576" anchor="ctr">
+                    <a:lnL w="9525" cap="flat" cmpd="sng" algn="ctr">
+                      <a:solidFill>
+                        <a:srgbClr val="FFFFFF"/>
+                      </a:solidFill>
+                      <a:prstDash val="solid"/>
+                      <a:round/>
+                      <a:headEnd type="none" w="med" len="med"/>
+                      <a:tailEnd type="none" w="med" len="med"/>
+                    </a:lnL>
+                    <a:lnR w="9525" cap="flat" cmpd="sng" algn="ctr">
+                      <a:solidFill>
+                        <a:srgbClr val="FFFFFF"/>
+                      </a:solidFill>
+                      <a:prstDash val="solid"/>
+                      <a:round/>
+                      <a:headEnd type="none" w="med" len="med"/>
+                      <a:tailEnd type="none" w="med" len="med"/>
+                    </a:lnR>
+                    <a:lnT w="9525" cap="flat" cmpd="sng" algn="ctr">
+                      <a:solidFill>
+                        <a:srgbClr val="FFFFFF"/>
+                      </a:solidFill>
+                      <a:prstDash val="solid"/>
+                      <a:round/>
+                      <a:headEnd type="none" w="med" len="med"/>
+                      <a:tailEnd type="none" w="med" len="med"/>
+                    </a:lnT>
+                    <a:lnB w="9525" cap="flat" cmpd="sng" algn="ctr">
+                      <a:solidFill>
+                        <a:srgbClr val="FFFFFF"/>
+                      </a:solidFill>
+                      <a:prstDash val="solid"/>
+                      <a:round/>
+                      <a:headEnd type="none" w="med" len="med"/>
+                      <a:tailEnd type="none" w="med" len="med"/>
+                    </a:lnB>
+                    <a:solidFill>
+                      <a:srgbClr val="7F7F7F"/>
+                    </a:solidFill>
+                  </a:tcPr>
+                </a:tc>
+                <a:tc>
+                  <a:txBody>
+                    <a:bodyPr/>
+                    <a:lstStyle/>
+                    <a:p>
+                      <a:pPr algn="ctr" indent="0" marL="0">
+                        <a:buNone/>
+                      </a:pPr>
+                      <a:r>
+                        <a:rPr lang="en-US" sz="950" b="1" dirty="0">
+                          <a:solidFill>
+                            <a:srgbClr val="FFFFFF"/>
+                          </a:solidFill>
+                        </a:rPr>
+                        <a:t>占比</a:t>
+                      </a:r>
+                      <a:endParaRPr lang="en-US" sz="950" dirty="0"/>
+                    </a:p>
+                  </a:txBody>
+                  <a:tcPr marL="36576" marR="36576" marT="36576" marB="36576" anchor="ctr">
+                    <a:lnL w="9525" cap="flat" cmpd="sng" algn="ctr">
+                      <a:solidFill>
+                        <a:srgbClr val="FFFFFF"/>
+                      </a:solidFill>
+                      <a:prstDash val="solid"/>
+                      <a:round/>
+                      <a:headEnd type="none" w="med" len="med"/>
+                      <a:tailEnd type="none" w="med" len="med"/>
+                    </a:lnL>
+                    <a:lnR w="9525" cap="flat" cmpd="sng" algn="ctr">
+                      <a:solidFill>
+                        <a:srgbClr val="FFFFFF"/>
+                      </a:solidFill>
+                      <a:prstDash val="solid"/>
+                      <a:round/>
+                      <a:headEnd type="none" w="med" len="med"/>
+                      <a:tailEnd type="none" w="med" len="med"/>
+                    </a:lnR>
+                    <a:lnT w="9525" cap="flat" cmpd="sng" algn="ctr">
+                      <a:solidFill>
+                        <a:srgbClr val="FFFFFF"/>
+                      </a:solidFill>
+                      <a:prstDash val="solid"/>
+                      <a:round/>
+                      <a:headEnd type="none" w="med" len="med"/>
+                      <a:tailEnd type="none" w="med" len="med"/>
+                    </a:lnT>
+                    <a:lnB w="9525" cap="flat" cmpd="sng" algn="ctr">
+                      <a:solidFill>
+                        <a:srgbClr val="FFFFFF"/>
+                      </a:solidFill>
+                      <a:prstDash val="solid"/>
+                      <a:round/>
+                      <a:headEnd type="none" w="med" len="med"/>
+                      <a:tailEnd type="none" w="med" len="med"/>
+                    </a:lnB>
+                    <a:solidFill>
+                      <a:srgbClr val="7F7F7F"/>
+                    </a:solidFill>
+                  </a:tcPr>
+                </a:tc>
+                <a:tc>
+                  <a:txBody>
+                    <a:bodyPr/>
+                    <a:lstStyle/>
+                    <a:p>
+                      <a:pPr algn="ctr" indent="0" marL="0">
+                        <a:buNone/>
+                      </a:pPr>
+                      <a:r>
+                        <a:rPr lang="en-US" sz="950" b="1" dirty="0">
+                          <a:solidFill>
+                            <a:srgbClr val="FFFFFF"/>
+                          </a:solidFill>
+                        </a:rPr>
+                        <a:t>目標</a:t>
+                      </a:r>
+                      <a:endParaRPr lang="en-US" sz="950" dirty="0"/>
+                    </a:p>
+                  </a:txBody>
+                  <a:tcPr marL="36576" marR="36576" marT="36576" marB="36576" anchor="ctr">
+                    <a:lnL w="9525" cap="flat" cmpd="sng" algn="ctr">
+                      <a:solidFill>
+                        <a:srgbClr val="FFFFFF"/>
+                      </a:solidFill>
+                      <a:prstDash val="solid"/>
+                      <a:round/>
+                      <a:headEnd type="none" w="med" len="med"/>
+                      <a:tailEnd type="none" w="med" len="med"/>
+                    </a:lnL>
+                    <a:lnR w="9525" cap="flat" cmpd="sng" algn="ctr">
+                      <a:solidFill>
+                        <a:srgbClr val="FFFFFF"/>
+                      </a:solidFill>
+                      <a:prstDash val="solid"/>
+                      <a:round/>
+                      <a:headEnd type="none" w="med" len="med"/>
+                      <a:tailEnd type="none" w="med" len="med"/>
+                    </a:lnR>
+                    <a:lnT w="9525" cap="flat" cmpd="sng" algn="ctr">
+                      <a:solidFill>
+                        <a:srgbClr val="FFFFFF"/>
+                      </a:solidFill>
+                      <a:prstDash val="solid"/>
+                      <a:round/>
+                      <a:headEnd type="none" w="med" len="med"/>
+                      <a:tailEnd type="none" w="med" len="med"/>
+                    </a:lnT>
+                    <a:lnB w="9525" cap="flat" cmpd="sng" algn="ctr">
+                      <a:solidFill>
+                        <a:srgbClr val="FFFFFF"/>
+                      </a:solidFill>
+                      <a:prstDash val="solid"/>
+                      <a:round/>
+                      <a:headEnd type="none" w="med" len="med"/>
+                      <a:tailEnd type="none" w="med" len="med"/>
+                    </a:lnB>
+                    <a:solidFill>
+                      <a:srgbClr val="7F7F7F"/>
+                    </a:solidFill>
+                  </a:tcPr>
+                </a:tc>
+                <a:tc>
+                  <a:txBody>
+                    <a:bodyPr/>
+                    <a:lstStyle/>
+                    <a:p>
+                      <a:pPr algn="ctr" indent="0" marL="0">
+                        <a:buNone/>
+                      </a:pPr>
+                      <a:r>
+                        <a:rPr lang="en-US" sz="950" b="1" dirty="0">
+                          <a:solidFill>
+                            <a:srgbClr val="FFFFFF"/>
+                          </a:solidFill>
+                        </a:rPr>
+                        <a:t>實績</a:t>
+                      </a:r>
+                      <a:endParaRPr lang="en-US" sz="950" dirty="0"/>
+                    </a:p>
+                  </a:txBody>
+                  <a:tcPr marL="36576" marR="36576" marT="36576" marB="36576" anchor="ctr">
+                    <a:lnL w="9525" cap="flat" cmpd="sng" algn="ctr">
+                      <a:solidFill>
+                        <a:srgbClr val="FFFFFF"/>
+                      </a:solidFill>
+                      <a:prstDash val="solid"/>
+                      <a:round/>
+                      <a:headEnd type="none" w="med" len="med"/>
+                      <a:tailEnd type="none" w="med" len="med"/>
+                    </a:lnL>
+                    <a:lnR w="9525" cap="flat" cmpd="sng" algn="ctr">
+                      <a:solidFill>
+                        <a:srgbClr val="FFFFFF"/>
+                      </a:solidFill>
+                      <a:prstDash val="solid"/>
+                      <a:round/>
+                      <a:headEnd type="none" w="med" len="med"/>
+                      <a:tailEnd type="none" w="med" len="med"/>
+                    </a:lnR>
+                    <a:lnT w="9525" cap="flat" cmpd="sng" algn="ctr">
+                      <a:solidFill>
+                        <a:srgbClr val="FFFFFF"/>
+                      </a:solidFill>
+                      <a:prstDash val="solid"/>
+                      <a:round/>
+                      <a:headEnd type="none" w="med" len="med"/>
+                      <a:tailEnd type="none" w="med" len="med"/>
+                    </a:lnT>
+                    <a:lnB w="9525" cap="flat" cmpd="sng" algn="ctr">
+                      <a:solidFill>
+                        <a:srgbClr val="FFFFFF"/>
+                      </a:solidFill>
+                      <a:prstDash val="solid"/>
+                      <a:round/>
+                      <a:headEnd type="none" w="med" len="med"/>
+                      <a:tailEnd type="none" w="med" len="med"/>
+                    </a:lnB>
+                    <a:solidFill>
+                      <a:srgbClr val="7F7F7F"/>
+                    </a:solidFill>
+                  </a:tcPr>
+                </a:tc>
+                <a:tc>
+                  <a:txBody>
+                    <a:bodyPr/>
+                    <a:lstStyle/>
+                    <a:p>
+                      <a:pPr algn="ctr" indent="0" marL="0">
+                        <a:buNone/>
+                      </a:pPr>
+                      <a:r>
+                        <a:rPr lang="en-US" sz="950" b="1" dirty="0">
+                          <a:solidFill>
+                            <a:srgbClr val="FFFFFF"/>
+                          </a:solidFill>
+                        </a:rPr>
+                        <a:t>達成率</a:t>
+                      </a:r>
+                      <a:endParaRPr lang="en-US" sz="950" dirty="0"/>
+                    </a:p>
+                  </a:txBody>
+                  <a:tcPr marL="36576" marR="36576" marT="36576" marB="36576" anchor="ctr">
+                    <a:lnL w="9525" cap="flat" cmpd="sng" algn="ctr">
+                      <a:solidFill>
+                        <a:srgbClr val="FFFFFF"/>
+                      </a:solidFill>
+                      <a:prstDash val="solid"/>
+                      <a:round/>
+                      <a:headEnd type="none" w="med" len="med"/>
+                      <a:tailEnd type="none" w="med" len="med"/>
+                    </a:lnL>
+                    <a:lnR w="9525" cap="flat" cmpd="sng" algn="ctr">
+                      <a:solidFill>
+                        <a:srgbClr val="FFFFFF"/>
+                      </a:solidFill>
+                      <a:prstDash val="solid"/>
+                      <a:round/>
+                      <a:headEnd type="none" w="med" len="med"/>
+                      <a:tailEnd type="none" w="med" len="med"/>
+                    </a:lnR>
+                    <a:lnT w="9525" cap="flat" cmpd="sng" algn="ctr">
+                      <a:solidFill>
+                        <a:srgbClr val="FFFFFF"/>
+                      </a:solidFill>
+                      <a:prstDash val="solid"/>
+                      <a:round/>
+                      <a:headEnd type="none" w="med" len="med"/>
+                      <a:tailEnd type="none" w="med" len="med"/>
+                    </a:lnT>
+                    <a:lnB w="9525" cap="flat" cmpd="sng" algn="ctr">
+                      <a:solidFill>
+                        <a:srgbClr val="FFFFFF"/>
+                      </a:solidFill>
+                      <a:prstDash val="solid"/>
+                      <a:round/>
+                      <a:headEnd type="none" w="med" len="med"/>
+                      <a:tailEnd type="none" w="med" len="med"/>
+                    </a:lnB>
+                    <a:solidFill>
+                      <a:srgbClr val="7F7F7F"/>
+                    </a:solidFill>
+                  </a:tcPr>
+                </a:tc>
+                <a:tc>
+                  <a:txBody>
+                    <a:bodyPr/>
+                    <a:lstStyle/>
+                    <a:p>
+                      <a:pPr algn="ctr" indent="0" marL="0">
+                        <a:buNone/>
+                      </a:pPr>
+                      <a:r>
+                        <a:rPr lang="en-US" sz="950" b="1" dirty="0">
+                          <a:solidFill>
+                            <a:srgbClr val="FFFFFF"/>
+                          </a:solidFill>
+                        </a:rPr>
+                        <a:t>超額/缺口</a:t>
+                      </a:r>
+                      <a:endParaRPr lang="en-US" sz="950" dirty="0"/>
+                    </a:p>
+                  </a:txBody>
+                  <a:tcPr marL="36576" marR="36576" marT="36576" marB="36576" anchor="ctr">
+                    <a:lnL w="9525" cap="flat" cmpd="sng" algn="ctr">
+                      <a:solidFill>
+                        <a:srgbClr val="FFFFFF"/>
+                      </a:solidFill>
+                      <a:prstDash val="solid"/>
+                      <a:round/>
+                      <a:headEnd type="none" w="med" len="med"/>
+                      <a:tailEnd type="none" w="med" len="med"/>
+                    </a:lnL>
+                    <a:lnR w="9525" cap="flat" cmpd="sng" algn="ctr">
+                      <a:solidFill>
+                        <a:srgbClr val="FFFFFF"/>
+                      </a:solidFill>
+                      <a:prstDash val="solid"/>
+                      <a:round/>
+                      <a:headEnd type="none" w="med" len="med"/>
+                      <a:tailEnd type="none" w="med" len="med"/>
+                    </a:lnR>
+                    <a:lnT w="9525" cap="flat" cmpd="sng" algn="ctr">
+                      <a:solidFill>
+                        <a:srgbClr val="FFFFFF"/>
+                      </a:solidFill>
+                      <a:prstDash val="solid"/>
+                      <a:round/>
+                      <a:headEnd type="none" w="med" len="med"/>
+                      <a:tailEnd type="none" w="med" len="med"/>
+                    </a:lnT>
+                    <a:lnB w="9525" cap="flat" cmpd="sng" algn="ctr">
+                      <a:solidFill>
+                        <a:srgbClr val="FFFFFF"/>
+                      </a:solidFill>
+                      <a:prstDash val="solid"/>
+                      <a:round/>
+                      <a:headEnd type="none" w="med" len="med"/>
+                      <a:tailEnd type="none" w="med" len="med"/>
+                    </a:lnB>
+                    <a:solidFill>
+                      <a:srgbClr val="7F7F7F"/>
+                    </a:solidFill>
+                  </a:tcPr>
+                </a:tc>
+              </a:tr>
+              <a:tr h="274320">
+                <a:tc>
+                  <a:txBody>
+                    <a:bodyPr/>
+                    <a:lstStyle/>
+                    <a:p>
+                      <a:pPr algn="ctr" indent="0" marL="0">
+                        <a:buNone/>
+                      </a:pPr>
+                      <a:r>
+                        <a:rPr lang="en-US" sz="950" b="1" dirty="0">
+                          <a:solidFill>
+                            <a:srgbClr val="000000"/>
+                          </a:solidFill>
+                        </a:rPr>
+                        <a:t>180%以上</a:t>
+                      </a:r>
+                      <a:endParaRPr lang="en-US" sz="950" dirty="0"/>
+                    </a:p>
+                  </a:txBody>
+                  <a:tcPr marL="36576" marR="36576" marT="36576" marB="36576" anchor="ctr">
+                    <a:lnL w="9525" cap="flat" cmpd="sng" algn="ctr">
+                      <a:solidFill>
+                        <a:srgbClr val="FFFFFF"/>
+                      </a:solidFill>
+                      <a:prstDash val="solid"/>
+                      <a:round/>
+                      <a:headEnd type="none" w="med" len="med"/>
+                      <a:tailEnd type="none" w="med" len="med"/>
+                    </a:lnL>
+                    <a:lnR w="9525" cap="flat" cmpd="sng" algn="ctr">
+                      <a:solidFill>
+                        <a:srgbClr val="FFFFFF"/>
+                      </a:solidFill>
+                      <a:prstDash val="solid"/>
+                      <a:round/>
+                      <a:headEnd type="none" w="med" len="med"/>
+                      <a:tailEnd type="none" w="med" len="med"/>
+                    </a:lnR>
+                    <a:lnT w="9525" cap="flat" cmpd="sng" algn="ctr">
+                      <a:solidFill>
+                        <a:srgbClr val="FFFFFF"/>
+                      </a:solidFill>
+                      <a:prstDash val="solid"/>
+                      <a:round/>
+                      <a:headEnd type="none" w="med" len="med"/>
+                      <a:tailEnd type="none" w="med" len="med"/>
+                    </a:lnT>
+                    <a:lnB w="9525" cap="flat" cmpd="sng" algn="ctr">
+                      <a:solidFill>
+                        <a:srgbClr val="FFFFFF"/>
+                      </a:solidFill>
+                      <a:prstDash val="solid"/>
+                      <a:round/>
+                      <a:headEnd type="none" w="med" len="med"/>
+                      <a:tailEnd type="none" w="med" len="med"/>
+                    </a:lnB>
+                    <a:solidFill>
+                      <a:srgbClr val="FFFFFF"/>
+                    </a:solidFill>
+                  </a:tcPr>
+                </a:tc>
+                <a:tc>
+                  <a:txBody>
+                    <a:bodyPr/>
+                    <a:lstStyle/>
+                    <a:p>
+                      <a:pPr algn="ctr" indent="0" marL="0">
+                        <a:buNone/>
+                      </a:pPr>
+                      <a:r>
+                        <a:rPr lang="en-US" sz="950" dirty="0">
+                          <a:solidFill>
+                            <a:srgbClr val="000000"/>
+                          </a:solidFill>
+                        </a:rPr>
+                        <a:t>3</a:t>
+                      </a:r>
+                      <a:endParaRPr lang="en-US" sz="950" dirty="0"/>
+                    </a:p>
+                  </a:txBody>
+                  <a:tcPr marL="36576" marR="36576" marT="36576" marB="36576" anchor="ctr">
+                    <a:lnL w="9525" cap="flat" cmpd="sng" algn="ctr">
+                      <a:solidFill>
+                        <a:srgbClr val="FFFFFF"/>
+                      </a:solidFill>
+                      <a:prstDash val="solid"/>
+                      <a:round/>
+                      <a:headEnd type="none" w="med" len="med"/>
+                      <a:tailEnd type="none" w="med" len="med"/>
+                    </a:lnL>
+                    <a:lnR w="9525" cap="flat" cmpd="sng" algn="ctr">
+                      <a:solidFill>
+                        <a:srgbClr val="FFFFFF"/>
+                      </a:solidFill>
+                      <a:prstDash val="solid"/>
+                      <a:round/>
+                      <a:headEnd type="none" w="med" len="med"/>
+                      <a:tailEnd type="none" w="med" len="med"/>
+                    </a:lnR>
+                    <a:lnT w="9525" cap="flat" cmpd="sng" algn="ctr">
+                      <a:solidFill>
+                        <a:srgbClr val="FFFFFF"/>
+                      </a:solidFill>
+                      <a:prstDash val="solid"/>
+                      <a:round/>
+                      <a:headEnd type="none" w="med" len="med"/>
+                      <a:tailEnd type="none" w="med" len="med"/>
+                    </a:lnT>
+                    <a:lnB w="9525" cap="flat" cmpd="sng" algn="ctr">
+                      <a:solidFill>
+                        <a:srgbClr val="FFFFFF"/>
+                      </a:solidFill>
+                      <a:prstDash val="solid"/>
+                      <a:round/>
+                      <a:headEnd type="none" w="med" len="med"/>
+                      <a:tailEnd type="none" w="med" len="med"/>
+                    </a:lnB>
+                    <a:solidFill>
+                      <a:srgbClr val="FFFFFF"/>
+                    </a:solidFill>
+                  </a:tcPr>
+                </a:tc>
+                <a:tc>
+                  <a:txBody>
+                    <a:bodyPr/>
+                    <a:lstStyle/>
+                    <a:p>
+                      <a:pPr algn="ctr" indent="0" marL="0">
+                        <a:buNone/>
+                      </a:pPr>
+                      <a:r>
+                        <a:rPr lang="en-US" sz="950" dirty="0">
+                          <a:solidFill>
+                            <a:srgbClr val="000000"/>
+                          </a:solidFill>
+                        </a:rPr>
+                        <a:t>1.6%</a:t>
+                      </a:r>
+                      <a:endParaRPr lang="en-US" sz="950" dirty="0"/>
+                    </a:p>
+                  </a:txBody>
+                  <a:tcPr marL="36576" marR="36576" marT="36576" marB="36576" anchor="ctr">
+                    <a:lnL w="9525" cap="flat" cmpd="sng" algn="ctr">
+                      <a:solidFill>
+                        <a:srgbClr val="FFFFFF"/>
+                      </a:solidFill>
+                      <a:prstDash val="solid"/>
+                      <a:round/>
+                      <a:headEnd type="none" w="med" len="med"/>
+                      <a:tailEnd type="none" w="med" len="med"/>
+                    </a:lnL>
+                    <a:lnR w="9525" cap="flat" cmpd="sng" algn="ctr">
+                      <a:solidFill>
+                        <a:srgbClr val="FFFFFF"/>
+                      </a:solidFill>
+                      <a:prstDash val="solid"/>
+                      <a:round/>
+                      <a:headEnd type="none" w="med" len="med"/>
+                      <a:tailEnd type="none" w="med" len="med"/>
+                    </a:lnR>
+                    <a:lnT w="9525" cap="flat" cmpd="sng" algn="ctr">
+                      <a:solidFill>
+                        <a:srgbClr val="FFFFFF"/>
+                      </a:solidFill>
+                      <a:prstDash val="solid"/>
+                      <a:round/>
+                      <a:headEnd type="none" w="med" len="med"/>
+                      <a:tailEnd type="none" w="med" len="med"/>
+                    </a:lnT>
+                    <a:lnB w="9525" cap="flat" cmpd="sng" algn="ctr">
+                      <a:solidFill>
+                        <a:srgbClr val="FFFFFF"/>
+                      </a:solidFill>
+                      <a:prstDash val="solid"/>
+                      <a:round/>
+                      <a:headEnd type="none" w="med" len="med"/>
+                      <a:tailEnd type="none" w="med" len="med"/>
+                    </a:lnB>
+                    <a:solidFill>
+                      <a:srgbClr val="FFFFFF"/>
+                    </a:solidFill>
+                  </a:tcPr>
+                </a:tc>
+                <a:tc>
+                  <a:txBody>
+                    <a:bodyPr/>
+                    <a:lstStyle/>
+                    <a:p>
+                      <a:pPr algn="ctr" indent="0" marL="0">
+                        <a:buNone/>
+                      </a:pPr>
+                      <a:r>
+                        <a:rPr lang="en-US" sz="950" dirty="0">
+                          <a:solidFill>
+                            <a:srgbClr val="000000"/>
+                          </a:solidFill>
+                        </a:rPr>
+                        <a:t>1.58</a:t>
+                      </a:r>
+                      <a:endParaRPr lang="en-US" sz="950" dirty="0"/>
+                    </a:p>
+                  </a:txBody>
+                  <a:tcPr marL="36576" marR="36576" marT="36576" marB="36576" anchor="ctr">
+                    <a:lnL w="9525" cap="flat" cmpd="sng" algn="ctr">
+                      <a:solidFill>
+                        <a:srgbClr val="FFFFFF"/>
+                      </a:solidFill>
+                      <a:prstDash val="solid"/>
+                      <a:round/>
+                      <a:headEnd type="none" w="med" len="med"/>
+                      <a:tailEnd type="none" w="med" len="med"/>
+                    </a:lnL>
+                    <a:lnR w="9525" cap="flat" cmpd="sng" algn="ctr">
+                      <a:solidFill>
+                        <a:srgbClr val="FFFFFF"/>
+                      </a:solidFill>
+                      <a:prstDash val="solid"/>
+                      <a:round/>
+                      <a:headEnd type="none" w="med" len="med"/>
+                      <a:tailEnd type="none" w="med" len="med"/>
+                    </a:lnR>
+                    <a:lnT w="9525" cap="flat" cmpd="sng" algn="ctr">
+                      <a:solidFill>
+                        <a:srgbClr val="FFFFFF"/>
+                      </a:solidFill>
+                      <a:prstDash val="solid"/>
+                      <a:round/>
+                      <a:headEnd type="none" w="med" len="med"/>
+                      <a:tailEnd type="none" w="med" len="med"/>
+                    </a:lnT>
+                    <a:lnB w="9525" cap="flat" cmpd="sng" algn="ctr">
+                      <a:solidFill>
+                        <a:srgbClr val="FFFFFF"/>
+                      </a:solidFill>
+                      <a:prstDash val="solid"/>
+                      <a:round/>
+                      <a:headEnd type="none" w="med" len="med"/>
+                      <a:tailEnd type="none" w="med" len="med"/>
+                    </a:lnB>
+                    <a:solidFill>
+                      <a:srgbClr val="FFFFFF"/>
+                    </a:solidFill>
+                  </a:tcPr>
+                </a:tc>
+                <a:tc>
+                  <a:txBody>
+                    <a:bodyPr/>
+                    <a:lstStyle/>
+                    <a:p>
+                      <a:pPr algn="ctr" indent="0" marL="0">
+                        <a:buNone/>
+                      </a:pPr>
+                      <a:r>
+                        <a:rPr lang="en-US" sz="950" dirty="0">
+                          <a:solidFill>
+                            <a:srgbClr val="000000"/>
+                          </a:solidFill>
+                        </a:rPr>
+                        <a:t>3.16</a:t>
+                      </a:r>
+                      <a:endParaRPr lang="en-US" sz="950" dirty="0"/>
+                    </a:p>
+                  </a:txBody>
+                  <a:tcPr marL="36576" marR="36576" marT="36576" marB="36576" anchor="ctr">
+                    <a:lnL w="9525" cap="flat" cmpd="sng" algn="ctr">
+                      <a:solidFill>
+                        <a:srgbClr val="FFFFFF"/>
+                      </a:solidFill>
+                      <a:prstDash val="solid"/>
+                      <a:round/>
+                      <a:headEnd type="none" w="med" len="med"/>
+                      <a:tailEnd type="none" w="med" len="med"/>
+                    </a:lnL>
+                    <a:lnR w="9525" cap="flat" cmpd="sng" algn="ctr">
+                      <a:solidFill>
+                        <a:srgbClr val="FFFFFF"/>
+                      </a:solidFill>
+                      <a:prstDash val="solid"/>
+                      <a:round/>
+                      <a:headEnd type="none" w="med" len="med"/>
+                      <a:tailEnd type="none" w="med" len="med"/>
+                    </a:lnR>
+                    <a:lnT w="9525" cap="flat" cmpd="sng" algn="ctr">
+                      <a:solidFill>
+                        <a:srgbClr val="FFFFFF"/>
+                      </a:solidFill>
+                      <a:prstDash val="solid"/>
+                      <a:round/>
+                      <a:headEnd type="none" w="med" len="med"/>
+                      <a:tailEnd type="none" w="med" len="med"/>
+                    </a:lnT>
+                    <a:lnB w="9525" cap="flat" cmpd="sng" algn="ctr">
+                      <a:solidFill>
+                        <a:srgbClr val="FFFFFF"/>
+                      </a:solidFill>
+                      <a:prstDash val="solid"/>
+                      <a:round/>
+                      <a:headEnd type="none" w="med" len="med"/>
+                      <a:tailEnd type="none" w="med" len="med"/>
+                    </a:lnB>
+                    <a:solidFill>
+                      <a:srgbClr val="FFFFFF"/>
+                    </a:solidFill>
+                  </a:tcPr>
+                </a:tc>
+                <a:tc>
+                  <a:txBody>
+                    <a:bodyPr/>
+                    <a:lstStyle/>
+                    <a:p>
+                      <a:pPr algn="ctr" indent="0" marL="0">
+                        <a:buNone/>
+                      </a:pPr>
+                      <a:r>
+                        <a:rPr lang="en-US" sz="950" b="1" dirty="0">
+                          <a:solidFill>
+                            <a:srgbClr val="2EA9B6"/>
+                          </a:solidFill>
+                        </a:rPr>
+                        <a:t>200%</a:t>
+                      </a:r>
+                      <a:endParaRPr lang="en-US" sz="950" dirty="0"/>
+                    </a:p>
+                  </a:txBody>
+                  <a:tcPr marL="36576" marR="36576" marT="36576" marB="36576" anchor="ctr">
+                    <a:lnL w="9525" cap="flat" cmpd="sng" algn="ctr">
+                      <a:solidFill>
+                        <a:srgbClr val="FFFFFF"/>
+                      </a:solidFill>
+                      <a:prstDash val="solid"/>
+                      <a:round/>
+                      <a:headEnd type="none" w="med" len="med"/>
+                      <a:tailEnd type="none" w="med" len="med"/>
+                    </a:lnL>
+                    <a:lnR w="9525" cap="flat" cmpd="sng" algn="ctr">
+                      <a:solidFill>
+                        <a:srgbClr val="FFFFFF"/>
+                      </a:solidFill>
+                      <a:prstDash val="solid"/>
+                      <a:round/>
+                      <a:headEnd type="none" w="med" len="med"/>
+                      <a:tailEnd type="none" w="med" len="med"/>
+                    </a:lnR>
+                    <a:lnT w="9525" cap="flat" cmpd="sng" algn="ctr">
+                      <a:solidFill>
+                        <a:srgbClr val="FFFFFF"/>
+                      </a:solidFill>
+                      <a:prstDash val="solid"/>
+                      <a:round/>
+                      <a:headEnd type="none" w="med" len="med"/>
+                      <a:tailEnd type="none" w="med" len="med"/>
+                    </a:lnT>
+                    <a:lnB w="9525" cap="flat" cmpd="sng" algn="ctr">
+                      <a:solidFill>
+                        <a:srgbClr val="FFFFFF"/>
+                      </a:solidFill>
+                      <a:prstDash val="solid"/>
+                      <a:round/>
+                      <a:headEnd type="none" w="med" len="med"/>
+                      <a:tailEnd type="none" w="med" len="med"/>
+                    </a:lnB>
+                    <a:solidFill>
+                      <a:srgbClr val="FFFFFF"/>
+                    </a:solidFill>
+                  </a:tcPr>
+                </a:tc>
+                <a:tc>
+                  <a:txBody>
+                    <a:bodyPr/>
+                    <a:lstStyle/>
+                    <a:p>
+                      <a:pPr algn="ctr" indent="0" marL="0">
+                        <a:buNone/>
+                      </a:pPr>
+                      <a:r>
+                        <a:rPr lang="en-US" sz="950" b="1" dirty="0">
+                          <a:solidFill>
+                            <a:srgbClr val="2EA9B6"/>
+                          </a:solidFill>
+                        </a:rPr>
+                        <a:t>+1.58</a:t>
+                      </a:r>
+                      <a:endParaRPr lang="en-US" sz="950" dirty="0"/>
+                    </a:p>
+                  </a:txBody>
+                  <a:tcPr marL="36576" marR="36576" marT="36576" marB="36576" anchor="ctr">
+                    <a:lnL w="9525" cap="flat" cmpd="sng" algn="ctr">
+                      <a:solidFill>
+                        <a:srgbClr val="FFFFFF"/>
+                      </a:solidFill>
+                      <a:prstDash val="solid"/>
+                      <a:round/>
+                      <a:headEnd type="none" w="med" len="med"/>
+                      <a:tailEnd type="none" w="med" len="med"/>
+                    </a:lnL>
+                    <a:lnR w="9525" cap="flat" cmpd="sng" algn="ctr">
+                      <a:solidFill>
+                        <a:srgbClr val="FFFFFF"/>
+                      </a:solidFill>
+                      <a:prstDash val="solid"/>
+                      <a:round/>
+                      <a:headEnd type="none" w="med" len="med"/>
+                      <a:tailEnd type="none" w="med" len="med"/>
+                    </a:lnR>
+                    <a:lnT w="9525" cap="flat" cmpd="sng" algn="ctr">
+                      <a:solidFill>
+                        <a:srgbClr val="FFFFFF"/>
+                      </a:solidFill>
+                      <a:prstDash val="solid"/>
+                      <a:round/>
+                      <a:headEnd type="none" w="med" len="med"/>
+                      <a:tailEnd type="none" w="med" len="med"/>
+                    </a:lnT>
+                    <a:lnB w="9525" cap="flat" cmpd="sng" algn="ctr">
+                      <a:solidFill>
+                        <a:srgbClr val="FFFFFF"/>
+                      </a:solidFill>
+                      <a:prstDash val="solid"/>
+                      <a:round/>
+                      <a:headEnd type="none" w="med" len="med"/>
+                      <a:tailEnd type="none" w="med" len="med"/>
+                    </a:lnB>
+                    <a:solidFill>
+                      <a:srgbClr val="FFFFFF"/>
+                    </a:solidFill>
+                  </a:tcPr>
+                </a:tc>
+              </a:tr>
+              <a:tr h="274320">
+                <a:tc>
+                  <a:txBody>
+                    <a:bodyPr/>
+                    <a:lstStyle/>
+                    <a:p>
+                      <a:pPr algn="ctr" indent="0" marL="0">
+                        <a:buNone/>
+                      </a:pPr>
+                      <a:r>
+                        <a:rPr lang="en-US" sz="950" b="1" dirty="0">
+                          <a:solidFill>
+                            <a:srgbClr val="000000"/>
+                          </a:solidFill>
+                        </a:rPr>
+                        <a:t>150～180%</a:t>
+                      </a:r>
+                      <a:endParaRPr lang="en-US" sz="950" dirty="0"/>
+                    </a:p>
+                  </a:txBody>
+                  <a:tcPr marL="36576" marR="36576" marT="36576" marB="36576" anchor="ctr">
+                    <a:lnL w="9525" cap="flat" cmpd="sng" algn="ctr">
+                      <a:solidFill>
+                        <a:srgbClr val="FFFFFF"/>
+                      </a:solidFill>
+                      <a:prstDash val="solid"/>
+                      <a:round/>
+                      <a:headEnd type="none" w="med" len="med"/>
+                      <a:tailEnd type="none" w="med" len="med"/>
+                    </a:lnL>
+                    <a:lnR w="9525" cap="flat" cmpd="sng" algn="ctr">
+                      <a:solidFill>
+                        <a:srgbClr val="FFFFFF"/>
+                      </a:solidFill>
+                      <a:prstDash val="solid"/>
+                      <a:round/>
+                      <a:headEnd type="none" w="med" len="med"/>
+                      <a:tailEnd type="none" w="med" len="med"/>
+                    </a:lnR>
+                    <a:lnT w="9525" cap="flat" cmpd="sng" algn="ctr">
+                      <a:solidFill>
+                        <a:srgbClr val="FFFFFF"/>
+                      </a:solidFill>
+                      <a:prstDash val="solid"/>
+                      <a:round/>
+                      <a:headEnd type="none" w="med" len="med"/>
+                      <a:tailEnd type="none" w="med" len="med"/>
+                    </a:lnT>
+                    <a:lnB w="9525" cap="flat" cmpd="sng" algn="ctr">
+                      <a:solidFill>
+                        <a:srgbClr val="FFFFFF"/>
+                      </a:solidFill>
+                      <a:prstDash val="solid"/>
+                      <a:round/>
+                      <a:headEnd type="none" w="med" len="med"/>
+                      <a:tailEnd type="none" w="med" len="med"/>
+                    </a:lnB>
+                    <a:solidFill>
+                      <a:srgbClr val="FDF1E9"/>
+                    </a:solidFill>
+                  </a:tcPr>
+                </a:tc>
+                <a:tc>
+                  <a:txBody>
+                    <a:bodyPr/>
+                    <a:lstStyle/>
+                    <a:p>
+                      <a:pPr algn="ctr" indent="0" marL="0">
+                        <a:buNone/>
+                      </a:pPr>
+                      <a:r>
+                        <a:rPr lang="en-US" sz="950" dirty="0">
+                          <a:solidFill>
+                            <a:srgbClr val="000000"/>
+                          </a:solidFill>
+                        </a:rPr>
+                        <a:t>4</a:t>
+                      </a:r>
+                      <a:endParaRPr lang="en-US" sz="950" dirty="0"/>
+                    </a:p>
+                  </a:txBody>
+                  <a:tcPr marL="36576" marR="36576" marT="36576" marB="36576" anchor="ctr">
+                    <a:lnL w="9525" cap="flat" cmpd="sng" algn="ctr">
+                      <a:solidFill>
+                        <a:srgbClr val="FFFFFF"/>
+                      </a:solidFill>
+                      <a:prstDash val="solid"/>
+                      <a:round/>
+                      <a:headEnd type="none" w="med" len="med"/>
+                      <a:tailEnd type="none" w="med" len="med"/>
+                    </a:lnL>
+                    <a:lnR w="9525" cap="flat" cmpd="sng" algn="ctr">
+                      <a:solidFill>
+                        <a:srgbClr val="FFFFFF"/>
+                      </a:solidFill>
+                      <a:prstDash val="solid"/>
+                      <a:round/>
+                      <a:headEnd type="none" w="med" len="med"/>
+                      <a:tailEnd type="none" w="med" len="med"/>
+                    </a:lnR>
+                    <a:lnT w="9525" cap="flat" cmpd="sng" algn="ctr">
+                      <a:solidFill>
+                        <a:srgbClr val="FFFFFF"/>
+                      </a:solidFill>
+                      <a:prstDash val="solid"/>
+                      <a:round/>
+                      <a:headEnd type="none" w="med" len="med"/>
+                      <a:tailEnd type="none" w="med" len="med"/>
+                    </a:lnT>
+                    <a:lnB w="9525" cap="flat" cmpd="sng" algn="ctr">
+                      <a:solidFill>
+                        <a:srgbClr val="FFFFFF"/>
+                      </a:solidFill>
+                      <a:prstDash val="solid"/>
+                      <a:round/>
+                      <a:headEnd type="none" w="med" len="med"/>
+                      <a:tailEnd type="none" w="med" len="med"/>
+                    </a:lnB>
+                    <a:solidFill>
+                      <a:srgbClr val="FDF1E9"/>
+                    </a:solidFill>
+                  </a:tcPr>
+                </a:tc>
+                <a:tc>
+                  <a:txBody>
+                    <a:bodyPr/>
+                    <a:lstStyle/>
+                    <a:p>
+                      <a:pPr algn="ctr" indent="0" marL="0">
+                        <a:buNone/>
+                      </a:pPr>
+                      <a:r>
+                        <a:rPr lang="en-US" sz="950" dirty="0">
+                          <a:solidFill>
+                            <a:srgbClr val="000000"/>
+                          </a:solidFill>
+                        </a:rPr>
+                        <a:t>2.2%</a:t>
+                      </a:r>
+                      <a:endParaRPr lang="en-US" sz="950" dirty="0"/>
+                    </a:p>
+                  </a:txBody>
+                  <a:tcPr marL="36576" marR="36576" marT="36576" marB="36576" anchor="ctr">
+                    <a:lnL w="9525" cap="flat" cmpd="sng" algn="ctr">
+                      <a:solidFill>
+                        <a:srgbClr val="FFFFFF"/>
+                      </a:solidFill>
+                      <a:prstDash val="solid"/>
+                      <a:round/>
+                      <a:headEnd type="none" w="med" len="med"/>
+                      <a:tailEnd type="none" w="med" len="med"/>
+                    </a:lnL>
+                    <a:lnR w="9525" cap="flat" cmpd="sng" algn="ctr">
+                      <a:solidFill>
+                        <a:srgbClr val="FFFFFF"/>
+                      </a:solidFill>
+                      <a:prstDash val="solid"/>
+                      <a:round/>
+                      <a:headEnd type="none" w="med" len="med"/>
+                      <a:tailEnd type="none" w="med" len="med"/>
+                    </a:lnR>
+                    <a:lnT w="9525" cap="flat" cmpd="sng" algn="ctr">
+                      <a:solidFill>
+                        <a:srgbClr val="FFFFFF"/>
+                      </a:solidFill>
+                      <a:prstDash val="solid"/>
+                      <a:round/>
+                      <a:headEnd type="none" w="med" len="med"/>
+                      <a:tailEnd type="none" w="med" len="med"/>
+                    </a:lnT>
+                    <a:lnB w="9525" cap="flat" cmpd="sng" algn="ctr">
+                      <a:solidFill>
+                        <a:srgbClr val="FFFFFF"/>
+                      </a:solidFill>
+                      <a:prstDash val="solid"/>
+                      <a:round/>
+                      <a:headEnd type="none" w="med" len="med"/>
+                      <a:tailEnd type="none" w="med" len="med"/>
+                    </a:lnB>
+                    <a:solidFill>
+                      <a:srgbClr val="FDF1E9"/>
+                    </a:solidFill>
+                  </a:tcPr>
+                </a:tc>
+                <a:tc>
+                  <a:txBody>
+                    <a:bodyPr/>
+                    <a:lstStyle/>
+                    <a:p>
+                      <a:pPr algn="ctr" indent="0" marL="0">
+                        <a:buNone/>
+                      </a:pPr>
+                      <a:r>
+                        <a:rPr lang="en-US" sz="950" dirty="0">
+                          <a:solidFill>
+                            <a:srgbClr val="000000"/>
+                          </a:solidFill>
+                        </a:rPr>
+                        <a:t>3.80</a:t>
+                      </a:r>
+                      <a:endParaRPr lang="en-US" sz="950" dirty="0"/>
+                    </a:p>
+                  </a:txBody>
+                  <a:tcPr marL="36576" marR="36576" marT="36576" marB="36576" anchor="ctr">
+                    <a:lnL w="9525" cap="flat" cmpd="sng" algn="ctr">
+                      <a:solidFill>
+                        <a:srgbClr val="FFFFFF"/>
+                      </a:solidFill>
+                      <a:prstDash val="solid"/>
+                      <a:round/>
+                      <a:headEnd type="none" w="med" len="med"/>
+                      <a:tailEnd type="none" w="med" len="med"/>
+                    </a:lnL>
+                    <a:lnR w="9525" cap="flat" cmpd="sng" algn="ctr">
+                      <a:solidFill>
+                        <a:srgbClr val="FFFFFF"/>
+                      </a:solidFill>
+                      <a:prstDash val="solid"/>
+                      <a:round/>
+                      <a:headEnd type="none" w="med" len="med"/>
+                      <a:tailEnd type="none" w="med" len="med"/>
+                    </a:lnR>
+                    <a:lnT w="9525" cap="flat" cmpd="sng" algn="ctr">
+                      <a:solidFill>
+                        <a:srgbClr val="FFFFFF"/>
+                      </a:solidFill>
+                      <a:prstDash val="solid"/>
+                      <a:round/>
+                      <a:headEnd type="none" w="med" len="med"/>
+                      <a:tailEnd type="none" w="med" len="med"/>
+                    </a:lnT>
+                    <a:lnB w="9525" cap="flat" cmpd="sng" algn="ctr">
+                      <a:solidFill>
+                        <a:srgbClr val="FFFFFF"/>
+                      </a:solidFill>
+                      <a:prstDash val="solid"/>
+                      <a:round/>
+                      <a:headEnd type="none" w="med" len="med"/>
+                      <a:tailEnd type="none" w="med" len="med"/>
+                    </a:lnB>
+                    <a:solidFill>
+                      <a:srgbClr val="FDF1E9"/>
+                    </a:solidFill>
+                  </a:tcPr>
+                </a:tc>
+                <a:tc>
+                  <a:txBody>
+                    <a:bodyPr/>
+                    <a:lstStyle/>
+                    <a:p>
+                      <a:pPr algn="ctr" indent="0" marL="0">
+                        <a:buNone/>
+                      </a:pPr>
+                      <a:r>
+                        <a:rPr lang="en-US" sz="950" dirty="0">
+                          <a:solidFill>
+                            <a:srgbClr val="000000"/>
+                          </a:solidFill>
+                        </a:rPr>
+                        <a:t>6.00</a:t>
+                      </a:r>
+                      <a:endParaRPr lang="en-US" sz="950" dirty="0"/>
+                    </a:p>
+                  </a:txBody>
+                  <a:tcPr marL="36576" marR="36576" marT="36576" marB="36576" anchor="ctr">
+                    <a:lnL w="9525" cap="flat" cmpd="sng" algn="ctr">
+                      <a:solidFill>
+                        <a:srgbClr val="FFFFFF"/>
+                      </a:solidFill>
+                      <a:prstDash val="solid"/>
+                      <a:round/>
+                      <a:headEnd type="none" w="med" len="med"/>
+                      <a:tailEnd type="none" w="med" len="med"/>
+                    </a:lnL>
+                    <a:lnR w="9525" cap="flat" cmpd="sng" algn="ctr">
+                      <a:solidFill>
+                        <a:srgbClr val="FFFFFF"/>
+                      </a:solidFill>
+                      <a:prstDash val="solid"/>
+                      <a:round/>
+                      <a:headEnd type="none" w="med" len="med"/>
+                      <a:tailEnd type="none" w="med" len="med"/>
+                    </a:lnR>
+                    <a:lnT w="9525" cap="flat" cmpd="sng" algn="ctr">
+                      <a:solidFill>
+                        <a:srgbClr val="FFFFFF"/>
+                      </a:solidFill>
+                      <a:prstDash val="solid"/>
+                      <a:round/>
+                      <a:headEnd type="none" w="med" len="med"/>
+                      <a:tailEnd type="none" w="med" len="med"/>
+                    </a:lnT>
+                    <a:lnB w="9525" cap="flat" cmpd="sng" algn="ctr">
+                      <a:solidFill>
+                        <a:srgbClr val="FFFFFF"/>
+                      </a:solidFill>
+                      <a:prstDash val="solid"/>
+                      <a:round/>
+                      <a:headEnd type="none" w="med" len="med"/>
+                      <a:tailEnd type="none" w="med" len="med"/>
+                    </a:lnB>
+                    <a:solidFill>
+                      <a:srgbClr val="FDF1E9"/>
+                    </a:solidFill>
+                  </a:tcPr>
+                </a:tc>
+                <a:tc>
+                  <a:txBody>
+                    <a:bodyPr/>
+                    <a:lstStyle/>
+                    <a:p>
+                      <a:pPr algn="ctr" indent="0" marL="0">
+                        <a:buNone/>
+                      </a:pPr>
+                      <a:r>
+                        <a:rPr lang="en-US" sz="950" b="1" dirty="0">
+                          <a:solidFill>
+                            <a:srgbClr val="2EA9B6"/>
+                          </a:solidFill>
+                        </a:rPr>
+                        <a:t>158%</a:t>
+                      </a:r>
+                      <a:endParaRPr lang="en-US" sz="950" dirty="0"/>
+                    </a:p>
+                  </a:txBody>
+                  <a:tcPr marL="36576" marR="36576" marT="36576" marB="36576" anchor="ctr">
+                    <a:lnL w="9525" cap="flat" cmpd="sng" algn="ctr">
+                      <a:solidFill>
+                        <a:srgbClr val="FFFFFF"/>
+                      </a:solidFill>
+                      <a:prstDash val="solid"/>
+                      <a:round/>
+                      <a:headEnd type="none" w="med" len="med"/>
+                      <a:tailEnd type="none" w="med" len="med"/>
+                    </a:lnL>
+                    <a:lnR w="9525" cap="flat" cmpd="sng" algn="ctr">
+                      <a:solidFill>
+                        <a:srgbClr val="FFFFFF"/>
+                      </a:solidFill>
+                      <a:prstDash val="solid"/>
+                      <a:round/>
+                      <a:headEnd type="none" w="med" len="med"/>
+                      <a:tailEnd type="none" w="med" len="med"/>
+                    </a:lnR>
+                    <a:lnT w="9525" cap="flat" cmpd="sng" algn="ctr">
+                      <a:solidFill>
+                        <a:srgbClr val="FFFFFF"/>
+                      </a:solidFill>
+                      <a:prstDash val="solid"/>
+                      <a:round/>
+                      <a:headEnd type="none" w="med" len="med"/>
+                      <a:tailEnd type="none" w="med" len="med"/>
+                    </a:lnT>
+                    <a:lnB w="9525" cap="flat" cmpd="sng" algn="ctr">
+                      <a:solidFill>
+                        <a:srgbClr val="FFFFFF"/>
+                      </a:solidFill>
+                      <a:prstDash val="solid"/>
+                      <a:round/>
+                      <a:headEnd type="none" w="med" len="med"/>
+                      <a:tailEnd type="none" w="med" len="med"/>
+                    </a:lnB>
+                    <a:solidFill>
+                      <a:srgbClr val="FDF1E9"/>
+                    </a:solidFill>
+                  </a:tcPr>
+                </a:tc>
+                <a:tc>
+                  <a:txBody>
+                    <a:bodyPr/>
+                    <a:lstStyle/>
+                    <a:p>
+                      <a:pPr algn="ctr" indent="0" marL="0">
+                        <a:buNone/>
+                      </a:pPr>
+                      <a:r>
+                        <a:rPr lang="en-US" sz="950" b="1" dirty="0">
+                          <a:solidFill>
+                            <a:srgbClr val="2EA9B6"/>
+                          </a:solidFill>
+                        </a:rPr>
+                        <a:t>+2.20</a:t>
+                      </a:r>
+                      <a:endParaRPr lang="en-US" sz="950" dirty="0"/>
+                    </a:p>
+                  </a:txBody>
+                  <a:tcPr marL="36576" marR="36576" marT="36576" marB="36576" anchor="ctr">
+                    <a:lnL w="9525" cap="flat" cmpd="sng" algn="ctr">
+                      <a:solidFill>
+                        <a:srgbClr val="FFFFFF"/>
+                      </a:solidFill>
+                      <a:prstDash val="solid"/>
+                      <a:round/>
+                      <a:headEnd type="none" w="med" len="med"/>
+                      <a:tailEnd type="none" w="med" len="med"/>
+                    </a:lnL>
+                    <a:lnR w="9525" cap="flat" cmpd="sng" algn="ctr">
+                      <a:solidFill>
+                        <a:srgbClr val="FFFFFF"/>
+                      </a:solidFill>
+                      <a:prstDash val="solid"/>
+                      <a:round/>
+                      <a:headEnd type="none" w="med" len="med"/>
+                      <a:tailEnd type="none" w="med" len="med"/>
+                    </a:lnR>
+                    <a:lnT w="9525" cap="flat" cmpd="sng" algn="ctr">
+                      <a:solidFill>
+                        <a:srgbClr val="FFFFFF"/>
+                      </a:solidFill>
+                      <a:prstDash val="solid"/>
+                      <a:round/>
+                      <a:headEnd type="none" w="med" len="med"/>
+                      <a:tailEnd type="none" w="med" len="med"/>
+                    </a:lnT>
+                    <a:lnB w="9525" cap="flat" cmpd="sng" algn="ctr">
+                      <a:solidFill>
+                        <a:srgbClr val="FFFFFF"/>
+                      </a:solidFill>
+                      <a:prstDash val="solid"/>
+                      <a:round/>
+                      <a:headEnd type="none" w="med" len="med"/>
+                      <a:tailEnd type="none" w="med" len="med"/>
+                    </a:lnB>
+                    <a:solidFill>
+                      <a:srgbClr val="FDF1E9"/>
+                    </a:solidFill>
+                  </a:tcPr>
+                </a:tc>
+              </a:tr>
+              <a:tr h="274320">
+                <a:tc>
+                  <a:txBody>
+                    <a:bodyPr/>
+                    <a:lstStyle/>
+                    <a:p>
+                      <a:pPr algn="ctr" indent="0" marL="0">
+                        <a:buNone/>
+                      </a:pPr>
+                      <a:r>
+                        <a:rPr lang="en-US" sz="950" b="1" dirty="0">
+                          <a:solidFill>
+                            <a:srgbClr val="000000"/>
+                          </a:solidFill>
+                        </a:rPr>
+                        <a:t>120～150%</a:t>
+                      </a:r>
+                      <a:endParaRPr lang="en-US" sz="950" dirty="0"/>
+                    </a:p>
+                  </a:txBody>
+                  <a:tcPr marL="36576" marR="36576" marT="36576" marB="36576" anchor="ctr">
+                    <a:lnL w="9525" cap="flat" cmpd="sng" algn="ctr">
+                      <a:solidFill>
+                        <a:srgbClr val="FFFFFF"/>
+                      </a:solidFill>
+                      <a:prstDash val="solid"/>
+                      <a:round/>
+                      <a:headEnd type="none" w="med" len="med"/>
+                      <a:tailEnd type="none" w="med" len="med"/>
+                    </a:lnL>
+                    <a:lnR w="9525" cap="flat" cmpd="sng" algn="ctr">
+                      <a:solidFill>
+                        <a:srgbClr val="FFFFFF"/>
+                      </a:solidFill>
+                      <a:prstDash val="solid"/>
+                      <a:round/>
+                      <a:headEnd type="none" w="med" len="med"/>
+                      <a:tailEnd type="none" w="med" len="med"/>
+                    </a:lnR>
+                    <a:lnT w="9525" cap="flat" cmpd="sng" algn="ctr">
+                      <a:solidFill>
+                        <a:srgbClr val="FFFFFF"/>
+                      </a:solidFill>
+                      <a:prstDash val="solid"/>
+                      <a:round/>
+                      <a:headEnd type="none" w="med" len="med"/>
+                      <a:tailEnd type="none" w="med" len="med"/>
+                    </a:lnT>
+                    <a:lnB w="9525" cap="flat" cmpd="sng" algn="ctr">
+                      <a:solidFill>
+                        <a:srgbClr val="FFFFFF"/>
+                      </a:solidFill>
+                      <a:prstDash val="solid"/>
+                      <a:round/>
+                      <a:headEnd type="none" w="med" len="med"/>
+                      <a:tailEnd type="none" w="med" len="med"/>
+                    </a:lnB>
+                    <a:solidFill>
+                      <a:srgbClr val="FFFFFF"/>
+                    </a:solidFill>
+                  </a:tcPr>
+                </a:tc>
+                <a:tc>
+                  <a:txBody>
+                    <a:bodyPr/>
+                    <a:lstStyle/>
+                    <a:p>
+                      <a:pPr algn="ctr" indent="0" marL="0">
+                        <a:buNone/>
+                      </a:pPr>
+                      <a:r>
+                        <a:rPr lang="en-US" sz="950" dirty="0">
+                          <a:solidFill>
+                            <a:srgbClr val="000000"/>
+                          </a:solidFill>
+                        </a:rPr>
+                        <a:t>40</a:t>
+                      </a:r>
+                      <a:endParaRPr lang="en-US" sz="950" dirty="0"/>
+                    </a:p>
+                  </a:txBody>
+                  <a:tcPr marL="36576" marR="36576" marT="36576" marB="36576" anchor="ctr">
+                    <a:lnL w="9525" cap="flat" cmpd="sng" algn="ctr">
+                      <a:solidFill>
+                        <a:srgbClr val="FFFFFF"/>
+                      </a:solidFill>
+                      <a:prstDash val="solid"/>
+                      <a:round/>
+                      <a:headEnd type="none" w="med" len="med"/>
+                      <a:tailEnd type="none" w="med" len="med"/>
+                    </a:lnL>
+                    <a:lnR w="9525" cap="flat" cmpd="sng" algn="ctr">
+                      <a:solidFill>
+                        <a:srgbClr val="FFFFFF"/>
+                      </a:solidFill>
+                      <a:prstDash val="solid"/>
+                      <a:round/>
+                      <a:headEnd type="none" w="med" len="med"/>
+                      <a:tailEnd type="none" w="med" len="med"/>
+                    </a:lnR>
+                    <a:lnT w="9525" cap="flat" cmpd="sng" algn="ctr">
+                      <a:solidFill>
+                        <a:srgbClr val="FFFFFF"/>
+                      </a:solidFill>
+                      <a:prstDash val="solid"/>
+                      <a:round/>
+                      <a:headEnd type="none" w="med" len="med"/>
+                      <a:tailEnd type="none" w="med" len="med"/>
+                    </a:lnT>
+                    <a:lnB w="9525" cap="flat" cmpd="sng" algn="ctr">
+                      <a:solidFill>
+                        <a:srgbClr val="FFFFFF"/>
+                      </a:solidFill>
+                      <a:prstDash val="solid"/>
+                      <a:round/>
+                      <a:headEnd type="none" w="med" len="med"/>
+                      <a:tailEnd type="none" w="med" len="med"/>
+                    </a:lnB>
+                    <a:solidFill>
+                      <a:srgbClr val="FFFFFF"/>
+                    </a:solidFill>
+                  </a:tcPr>
+                </a:tc>
+                <a:tc>
+                  <a:txBody>
+                    <a:bodyPr/>
+                    <a:lstStyle/>
+                    <a:p>
+                      <a:pPr algn="ctr" indent="0" marL="0">
+                        <a:buNone/>
+                      </a:pPr>
+                      <a:r>
+                        <a:rPr lang="en-US" sz="950" dirty="0">
+                          <a:solidFill>
+                            <a:srgbClr val="000000"/>
+                          </a:solidFill>
+                        </a:rPr>
+                        <a:t>21.9%</a:t>
+                      </a:r>
+                      <a:endParaRPr lang="en-US" sz="950" dirty="0"/>
+                    </a:p>
+                  </a:txBody>
+                  <a:tcPr marL="36576" marR="36576" marT="36576" marB="36576" anchor="ctr">
+                    <a:lnL w="9525" cap="flat" cmpd="sng" algn="ctr">
+                      <a:solidFill>
+                        <a:srgbClr val="FFFFFF"/>
+                      </a:solidFill>
+                      <a:prstDash val="solid"/>
+                      <a:round/>
+                      <a:headEnd type="none" w="med" len="med"/>
+                      <a:tailEnd type="none" w="med" len="med"/>
+                    </a:lnL>
+                    <a:lnR w="9525" cap="flat" cmpd="sng" algn="ctr">
+                      <a:solidFill>
+                        <a:srgbClr val="FFFFFF"/>
+                      </a:solidFill>
+                      <a:prstDash val="solid"/>
+                      <a:round/>
+                      <a:headEnd type="none" w="med" len="med"/>
+                      <a:tailEnd type="none" w="med" len="med"/>
+                    </a:lnR>
+                    <a:lnT w="9525" cap="flat" cmpd="sng" algn="ctr">
+                      <a:solidFill>
+                        <a:srgbClr val="FFFFFF"/>
+                      </a:solidFill>
+                      <a:prstDash val="solid"/>
+                      <a:round/>
+                      <a:headEnd type="none" w="med" len="med"/>
+                      <a:tailEnd type="none" w="med" len="med"/>
+                    </a:lnT>
+                    <a:lnB w="9525" cap="flat" cmpd="sng" algn="ctr">
+                      <a:solidFill>
+                        <a:srgbClr val="FFFFFF"/>
+                      </a:solidFill>
+                      <a:prstDash val="solid"/>
+                      <a:round/>
+                      <a:headEnd type="none" w="med" len="med"/>
+                      <a:tailEnd type="none" w="med" len="med"/>
+                    </a:lnB>
+                    <a:solidFill>
+                      <a:srgbClr val="FFFFFF"/>
+                    </a:solidFill>
+                  </a:tcPr>
+                </a:tc>
+                <a:tc>
+                  <a:txBody>
+                    <a:bodyPr/>
+                    <a:lstStyle/>
+                    <a:p>
+                      <a:pPr algn="ctr" indent="0" marL="0">
+                        <a:buNone/>
+                      </a:pPr>
+                      <a:r>
+                        <a:rPr lang="en-US" sz="950" dirty="0">
+                          <a:solidFill>
+                            <a:srgbClr val="000000"/>
+                          </a:solidFill>
+                        </a:rPr>
+                        <a:t>26.52</a:t>
+                      </a:r>
+                      <a:endParaRPr lang="en-US" sz="950" dirty="0"/>
+                    </a:p>
+                  </a:txBody>
+                  <a:tcPr marL="36576" marR="36576" marT="36576" marB="36576" anchor="ctr">
+                    <a:lnL w="9525" cap="flat" cmpd="sng" algn="ctr">
+                      <a:solidFill>
+                        <a:srgbClr val="FFFFFF"/>
+                      </a:solidFill>
+                      <a:prstDash val="solid"/>
+                      <a:round/>
+                      <a:headEnd type="none" w="med" len="med"/>
+                      <a:tailEnd type="none" w="med" len="med"/>
+                    </a:lnL>
+                    <a:lnR w="9525" cap="flat" cmpd="sng" algn="ctr">
+                      <a:solidFill>
+                        <a:srgbClr val="FFFFFF"/>
+                      </a:solidFill>
+                      <a:prstDash val="solid"/>
+                      <a:round/>
+                      <a:headEnd type="none" w="med" len="med"/>
+                      <a:tailEnd type="none" w="med" len="med"/>
+                    </a:lnR>
+                    <a:lnT w="9525" cap="flat" cmpd="sng" algn="ctr">
+                      <a:solidFill>
+                        <a:srgbClr val="FFFFFF"/>
+                      </a:solidFill>
+                      <a:prstDash val="solid"/>
+                      <a:round/>
+                      <a:headEnd type="none" w="med" len="med"/>
+                      <a:tailEnd type="none" w="med" len="med"/>
+                    </a:lnT>
+                    <a:lnB w="9525" cap="flat" cmpd="sng" algn="ctr">
+                      <a:solidFill>
+                        <a:srgbClr val="FFFFFF"/>
+                      </a:solidFill>
+                      <a:prstDash val="solid"/>
+                      <a:round/>
+                      <a:headEnd type="none" w="med" len="med"/>
+                      <a:tailEnd type="none" w="med" len="med"/>
+                    </a:lnB>
+                    <a:solidFill>
+                      <a:srgbClr val="FFFFFF"/>
+                    </a:solidFill>
+                  </a:tcPr>
+                </a:tc>
+                <a:tc>
+                  <a:txBody>
+                    <a:bodyPr/>
+                    <a:lstStyle/>
+                    <a:p>
+                      <a:pPr algn="ctr" indent="0" marL="0">
+                        <a:buNone/>
+                      </a:pPr>
+                      <a:r>
+                        <a:rPr lang="en-US" sz="950" dirty="0">
+                          <a:solidFill>
+                            <a:srgbClr val="000000"/>
+                          </a:solidFill>
+                        </a:rPr>
+                        <a:t>34.38</a:t>
+                      </a:r>
+                      <a:endParaRPr lang="en-US" sz="950" dirty="0"/>
+                    </a:p>
+                  </a:txBody>
+                  <a:tcPr marL="36576" marR="36576" marT="36576" marB="36576" anchor="ctr">
+                    <a:lnL w="9525" cap="flat" cmpd="sng" algn="ctr">
+                      <a:solidFill>
+                        <a:srgbClr val="FFFFFF"/>
+                      </a:solidFill>
+                      <a:prstDash val="solid"/>
+                      <a:round/>
+                      <a:headEnd type="none" w="med" len="med"/>
+                      <a:tailEnd type="none" w="med" len="med"/>
+                    </a:lnL>
+                    <a:lnR w="9525" cap="flat" cmpd="sng" algn="ctr">
+                      <a:solidFill>
+                        <a:srgbClr val="FFFFFF"/>
+                      </a:solidFill>
+                      <a:prstDash val="solid"/>
+                      <a:round/>
+                      <a:headEnd type="none" w="med" len="med"/>
+                      <a:tailEnd type="none" w="med" len="med"/>
+                    </a:lnR>
+                    <a:lnT w="9525" cap="flat" cmpd="sng" algn="ctr">
+                      <a:solidFill>
+                        <a:srgbClr val="FFFFFF"/>
+                      </a:solidFill>
+                      <a:prstDash val="solid"/>
+                      <a:round/>
+                      <a:headEnd type="none" w="med" len="med"/>
+                      <a:tailEnd type="none" w="med" len="med"/>
+                    </a:lnT>
+                    <a:lnB w="9525" cap="flat" cmpd="sng" algn="ctr">
+                      <a:solidFill>
+                        <a:srgbClr val="FFFFFF"/>
+                      </a:solidFill>
+                      <a:prstDash val="solid"/>
+                      <a:round/>
+                      <a:headEnd type="none" w="med" len="med"/>
+                      <a:tailEnd type="none" w="med" len="med"/>
+                    </a:lnB>
+                    <a:solidFill>
+                      <a:srgbClr val="FFFFFF"/>
+                    </a:solidFill>
+                  </a:tcPr>
+                </a:tc>
+                <a:tc>
+                  <a:txBody>
+                    <a:bodyPr/>
+                    <a:lstStyle/>
+                    <a:p>
+                      <a:pPr algn="ctr" indent="0" marL="0">
+                        <a:buNone/>
+                      </a:pPr>
+                      <a:r>
+                        <a:rPr lang="en-US" sz="950" b="1" dirty="0">
+                          <a:solidFill>
+                            <a:srgbClr val="2EA9B6"/>
+                          </a:solidFill>
+                        </a:rPr>
+                        <a:t>130%</a:t>
+                      </a:r>
+                      <a:endParaRPr lang="en-US" sz="950" dirty="0"/>
+                    </a:p>
+                  </a:txBody>
+                  <a:tcPr marL="36576" marR="36576" marT="36576" marB="36576" anchor="ctr">
+                    <a:lnL w="9525" cap="flat" cmpd="sng" algn="ctr">
+                      <a:solidFill>
+                        <a:srgbClr val="FFFFFF"/>
+                      </a:solidFill>
+                      <a:prstDash val="solid"/>
+                      <a:round/>
+                      <a:headEnd type="none" w="med" len="med"/>
+                      <a:tailEnd type="none" w="med" len="med"/>
+                    </a:lnL>
+                    <a:lnR w="9525" cap="flat" cmpd="sng" algn="ctr">
+                      <a:solidFill>
+                        <a:srgbClr val="FFFFFF"/>
+                      </a:solidFill>
+                      <a:prstDash val="solid"/>
+                      <a:round/>
+                      <a:headEnd type="none" w="med" len="med"/>
+                      <a:tailEnd type="none" w="med" len="med"/>
+                    </a:lnR>
+                    <a:lnT w="9525" cap="flat" cmpd="sng" algn="ctr">
+                      <a:solidFill>
+                        <a:srgbClr val="FFFFFF"/>
+                      </a:solidFill>
+                      <a:prstDash val="solid"/>
+                      <a:round/>
+                      <a:headEnd type="none" w="med" len="med"/>
+                      <a:tailEnd type="none" w="med" len="med"/>
+                    </a:lnT>
+                    <a:lnB w="9525" cap="flat" cmpd="sng" algn="ctr">
+                      <a:solidFill>
+                        <a:srgbClr val="FFFFFF"/>
+                      </a:solidFill>
+                      <a:prstDash val="solid"/>
+                      <a:round/>
+                      <a:headEnd type="none" w="med" len="med"/>
+                      <a:tailEnd type="none" w="med" len="med"/>
+                    </a:lnB>
+                    <a:solidFill>
+                      <a:srgbClr val="FFFFFF"/>
+                    </a:solidFill>
+                  </a:tcPr>
+                </a:tc>
+                <a:tc>
+                  <a:txBody>
+                    <a:bodyPr/>
+                    <a:lstStyle/>
+                    <a:p>
+                      <a:pPr algn="ctr" indent="0" marL="0">
+                        <a:buNone/>
+                      </a:pPr>
+                      <a:r>
+                        <a:rPr lang="en-US" sz="950" b="1" dirty="0">
+                          <a:solidFill>
+                            <a:srgbClr val="2EA9B6"/>
+                          </a:solidFill>
+                        </a:rPr>
+                        <a:t>+7.87</a:t>
+                      </a:r>
+                      <a:endParaRPr lang="en-US" sz="950" dirty="0"/>
+                    </a:p>
+                  </a:txBody>
+                  <a:tcPr marL="36576" marR="36576" marT="36576" marB="36576" anchor="ctr">
+                    <a:lnL w="9525" cap="flat" cmpd="sng" algn="ctr">
+                      <a:solidFill>
+                        <a:srgbClr val="FFFFFF"/>
+                      </a:solidFill>
+                      <a:prstDash val="solid"/>
+                      <a:round/>
+                      <a:headEnd type="none" w="med" len="med"/>
+                      <a:tailEnd type="none" w="med" len="med"/>
+                    </a:lnL>
+                    <a:lnR w="9525" cap="flat" cmpd="sng" algn="ctr">
+                      <a:solidFill>
+                        <a:srgbClr val="FFFFFF"/>
+                      </a:solidFill>
+                      <a:prstDash val="solid"/>
+                      <a:round/>
+                      <a:headEnd type="none" w="med" len="med"/>
+                      <a:tailEnd type="none" w="med" len="med"/>
+                    </a:lnR>
+                    <a:lnT w="9525" cap="flat" cmpd="sng" algn="ctr">
+                      <a:solidFill>
+                        <a:srgbClr val="FFFFFF"/>
+                      </a:solidFill>
+                      <a:prstDash val="solid"/>
+                      <a:round/>
+                      <a:headEnd type="none" w="med" len="med"/>
+                      <a:tailEnd type="none" w="med" len="med"/>
+                    </a:lnT>
+                    <a:lnB w="9525" cap="flat" cmpd="sng" algn="ctr">
+                      <a:solidFill>
+                        <a:srgbClr val="FFFFFF"/>
+                      </a:solidFill>
+                      <a:prstDash val="solid"/>
+                      <a:round/>
+                      <a:headEnd type="none" w="med" len="med"/>
+                      <a:tailEnd type="none" w="med" len="med"/>
+                    </a:lnB>
+                    <a:solidFill>
+                      <a:srgbClr val="FFFFFF"/>
+                    </a:solidFill>
+                  </a:tcPr>
+                </a:tc>
+              </a:tr>
+              <a:tr h="274320">
+                <a:tc>
+                  <a:txBody>
+                    <a:bodyPr/>
+                    <a:lstStyle/>
+                    <a:p>
+                      <a:pPr algn="ctr" indent="0" marL="0">
+                        <a:buNone/>
+                      </a:pPr>
+                      <a:r>
+                        <a:rPr lang="en-US" sz="950" b="1" dirty="0">
+                          <a:solidFill>
+                            <a:srgbClr val="000000"/>
+                          </a:solidFill>
+                        </a:rPr>
+                        <a:t>100～120%</a:t>
+                      </a:r>
+                      <a:endParaRPr lang="en-US" sz="950" dirty="0"/>
+                    </a:p>
+                  </a:txBody>
+                  <a:tcPr marL="36576" marR="36576" marT="36576" marB="36576" anchor="ctr">
+                    <a:lnL w="9525" cap="flat" cmpd="sng" algn="ctr">
+                      <a:solidFill>
+                        <a:srgbClr val="FFFFFF"/>
+                      </a:solidFill>
+                      <a:prstDash val="solid"/>
+                      <a:round/>
+                      <a:headEnd type="none" w="med" len="med"/>
+                      <a:tailEnd type="none" w="med" len="med"/>
+                    </a:lnL>
+                    <a:lnR w="9525" cap="flat" cmpd="sng" algn="ctr">
+                      <a:solidFill>
+                        <a:srgbClr val="FFFFFF"/>
+                      </a:solidFill>
+                      <a:prstDash val="solid"/>
+                      <a:round/>
+                      <a:headEnd type="none" w="med" len="med"/>
+                      <a:tailEnd type="none" w="med" len="med"/>
+                    </a:lnR>
+                    <a:lnT w="9525" cap="flat" cmpd="sng" algn="ctr">
+                      <a:solidFill>
+                        <a:srgbClr val="FFFFFF"/>
+                      </a:solidFill>
+                      <a:prstDash val="solid"/>
+                      <a:round/>
+                      <a:headEnd type="none" w="med" len="med"/>
+                      <a:tailEnd type="none" w="med" len="med"/>
+                    </a:lnT>
+                    <a:lnB w="9525" cap="flat" cmpd="sng" algn="ctr">
+                      <a:solidFill>
+                        <a:srgbClr val="FFFFFF"/>
+                      </a:solidFill>
+                      <a:prstDash val="solid"/>
+                      <a:round/>
+                      <a:headEnd type="none" w="med" len="med"/>
+                      <a:tailEnd type="none" w="med" len="med"/>
+                    </a:lnB>
+                    <a:solidFill>
+                      <a:srgbClr val="FDF1E9"/>
+                    </a:solidFill>
+                  </a:tcPr>
+                </a:tc>
+                <a:tc>
+                  <a:txBody>
+                    <a:bodyPr/>
+                    <a:lstStyle/>
+                    <a:p>
+                      <a:pPr algn="ctr" indent="0" marL="0">
+                        <a:buNone/>
+                      </a:pPr>
+                      <a:r>
+                        <a:rPr lang="en-US" sz="950" dirty="0">
+                          <a:solidFill>
+                            <a:srgbClr val="000000"/>
+                          </a:solidFill>
+                        </a:rPr>
+                        <a:t>52</a:t>
+                      </a:r>
+                      <a:endParaRPr lang="en-US" sz="950" dirty="0"/>
+                    </a:p>
+                  </a:txBody>
+                  <a:tcPr marL="36576" marR="36576" marT="36576" marB="36576" anchor="ctr">
+                    <a:lnL w="9525" cap="flat" cmpd="sng" algn="ctr">
+                      <a:solidFill>
+                        <a:srgbClr val="FFFFFF"/>
+                      </a:solidFill>
+                      <a:prstDash val="solid"/>
+                      <a:round/>
+                      <a:headEnd type="none" w="med" len="med"/>
+                      <a:tailEnd type="none" w="med" len="med"/>
+                    </a:lnL>
+                    <a:lnR w="9525" cap="flat" cmpd="sng" algn="ctr">
+                      <a:solidFill>
+                        <a:srgbClr val="FFFFFF"/>
+                      </a:solidFill>
+                      <a:prstDash val="solid"/>
+                      <a:round/>
+                      <a:headEnd type="none" w="med" len="med"/>
+                      <a:tailEnd type="none" w="med" len="med"/>
+                    </a:lnR>
+                    <a:lnT w="9525" cap="flat" cmpd="sng" algn="ctr">
+                      <a:solidFill>
+                        <a:srgbClr val="FFFFFF"/>
+                      </a:solidFill>
+                      <a:prstDash val="solid"/>
+                      <a:round/>
+                      <a:headEnd type="none" w="med" len="med"/>
+                      <a:tailEnd type="none" w="med" len="med"/>
+                    </a:lnT>
+                    <a:lnB w="9525" cap="flat" cmpd="sng" algn="ctr">
+                      <a:solidFill>
+                        <a:srgbClr val="FFFFFF"/>
+                      </a:solidFill>
+                      <a:prstDash val="solid"/>
+                      <a:round/>
+                      <a:headEnd type="none" w="med" len="med"/>
+                      <a:tailEnd type="none" w="med" len="med"/>
+                    </a:lnB>
+                    <a:solidFill>
+                      <a:srgbClr val="FDF1E9"/>
+                    </a:solidFill>
+                  </a:tcPr>
+                </a:tc>
+                <a:tc>
+                  <a:txBody>
+                    <a:bodyPr/>
+                    <a:lstStyle/>
+                    <a:p>
+                      <a:pPr algn="ctr" indent="0" marL="0">
+                        <a:buNone/>
+                      </a:pPr>
+                      <a:r>
+                        <a:rPr lang="en-US" sz="950" dirty="0">
+                          <a:solidFill>
+                            <a:srgbClr val="000000"/>
+                          </a:solidFill>
+                        </a:rPr>
+                        <a:t>28.4%</a:t>
+                      </a:r>
+                      <a:endParaRPr lang="en-US" sz="950" dirty="0"/>
+                    </a:p>
+                  </a:txBody>
+                  <a:tcPr marL="36576" marR="36576" marT="36576" marB="36576" anchor="ctr">
+                    <a:lnL w="9525" cap="flat" cmpd="sng" algn="ctr">
+                      <a:solidFill>
+                        <a:srgbClr val="FFFFFF"/>
+                      </a:solidFill>
+                      <a:prstDash val="solid"/>
+                      <a:round/>
+                      <a:headEnd type="none" w="med" len="med"/>
+                      <a:tailEnd type="none" w="med" len="med"/>
+                    </a:lnL>
+                    <a:lnR w="9525" cap="flat" cmpd="sng" algn="ctr">
+                      <a:solidFill>
+                        <a:srgbClr val="FFFFFF"/>
+                      </a:solidFill>
+                      <a:prstDash val="solid"/>
+                      <a:round/>
+                      <a:headEnd type="none" w="med" len="med"/>
+                      <a:tailEnd type="none" w="med" len="med"/>
+                    </a:lnR>
+                    <a:lnT w="9525" cap="flat" cmpd="sng" algn="ctr">
+                      <a:solidFill>
+                        <a:srgbClr val="FFFFFF"/>
+                      </a:solidFill>
+                      <a:prstDash val="solid"/>
+                      <a:round/>
+                      <a:headEnd type="none" w="med" len="med"/>
+                      <a:tailEnd type="none" w="med" len="med"/>
+                    </a:lnT>
+                    <a:lnB w="9525" cap="flat" cmpd="sng" algn="ctr">
+                      <a:solidFill>
+                        <a:srgbClr val="FFFFFF"/>
+                      </a:solidFill>
+                      <a:prstDash val="solid"/>
+                      <a:round/>
+                      <a:headEnd type="none" w="med" len="med"/>
+                      <a:tailEnd type="none" w="med" len="med"/>
+                    </a:lnB>
+                    <a:solidFill>
+                      <a:srgbClr val="FDF1E9"/>
+                    </a:solidFill>
+                  </a:tcPr>
+                </a:tc>
+                <a:tc>
+                  <a:txBody>
+                    <a:bodyPr/>
+                    <a:lstStyle/>
+                    <a:p>
+                      <a:pPr algn="ctr" indent="0" marL="0">
+                        <a:buNone/>
+                      </a:pPr>
+                      <a:r>
+                        <a:rPr lang="en-US" sz="950" dirty="0">
+                          <a:solidFill>
+                            <a:srgbClr val="000000"/>
+                          </a:solidFill>
+                        </a:rPr>
+                        <a:t>35.89</a:t>
+                      </a:r>
+                      <a:endParaRPr lang="en-US" sz="950" dirty="0"/>
+                    </a:p>
+                  </a:txBody>
+                  <a:tcPr marL="36576" marR="36576" marT="36576" marB="36576" anchor="ctr">
+                    <a:lnL w="9525" cap="flat" cmpd="sng" algn="ctr">
+                      <a:solidFill>
+                        <a:srgbClr val="FFFFFF"/>
+                      </a:solidFill>
+                      <a:prstDash val="solid"/>
+                      <a:round/>
+                      <a:headEnd type="none" w="med" len="med"/>
+                      <a:tailEnd type="none" w="med" len="med"/>
+                    </a:lnL>
+                    <a:lnR w="9525" cap="flat" cmpd="sng" algn="ctr">
+                      <a:solidFill>
+                        <a:srgbClr val="FFFFFF"/>
+                      </a:solidFill>
+                      <a:prstDash val="solid"/>
+                      <a:round/>
+                      <a:headEnd type="none" w="med" len="med"/>
+                      <a:tailEnd type="none" w="med" len="med"/>
+                    </a:lnR>
+                    <a:lnT w="9525" cap="flat" cmpd="sng" algn="ctr">
+                      <a:solidFill>
+                        <a:srgbClr val="FFFFFF"/>
+                      </a:solidFill>
+                      <a:prstDash val="solid"/>
+                      <a:round/>
+                      <a:headEnd type="none" w="med" len="med"/>
+                      <a:tailEnd type="none" w="med" len="med"/>
+                    </a:lnT>
+                    <a:lnB w="9525" cap="flat" cmpd="sng" algn="ctr">
+                      <a:solidFill>
+                        <a:srgbClr val="FFFFFF"/>
+                      </a:solidFill>
+                      <a:prstDash val="solid"/>
+                      <a:round/>
+                      <a:headEnd type="none" w="med" len="med"/>
+                      <a:tailEnd type="none" w="med" len="med"/>
+                    </a:lnB>
+                    <a:solidFill>
+                      <a:srgbClr val="FDF1E9"/>
+                    </a:solidFill>
+                  </a:tcPr>
+                </a:tc>
+                <a:tc>
+                  <a:txBody>
+                    <a:bodyPr/>
+                    <a:lstStyle/>
+                    <a:p>
+                      <a:pPr algn="ctr" indent="0" marL="0">
+                        <a:buNone/>
+                      </a:pPr>
+                      <a:r>
+                        <a:rPr lang="en-US" sz="950" dirty="0">
+                          <a:solidFill>
+                            <a:srgbClr val="000000"/>
+                          </a:solidFill>
+                        </a:rPr>
+                        <a:t>39.47</a:t>
+                      </a:r>
+                      <a:endParaRPr lang="en-US" sz="950" dirty="0"/>
+                    </a:p>
+                  </a:txBody>
+                  <a:tcPr marL="36576" marR="36576" marT="36576" marB="36576" anchor="ctr">
+                    <a:lnL w="9525" cap="flat" cmpd="sng" algn="ctr">
+                      <a:solidFill>
+                        <a:srgbClr val="FFFFFF"/>
+                      </a:solidFill>
+                      <a:prstDash val="solid"/>
+                      <a:round/>
+                      <a:headEnd type="none" w="med" len="med"/>
+                      <a:tailEnd type="none" w="med" len="med"/>
+                    </a:lnL>
+                    <a:lnR w="9525" cap="flat" cmpd="sng" algn="ctr">
+                      <a:solidFill>
+                        <a:srgbClr val="FFFFFF"/>
+                      </a:solidFill>
+                      <a:prstDash val="solid"/>
+                      <a:round/>
+                      <a:headEnd type="none" w="med" len="med"/>
+                      <a:tailEnd type="none" w="med" len="med"/>
+                    </a:lnR>
+                    <a:lnT w="9525" cap="flat" cmpd="sng" algn="ctr">
+                      <a:solidFill>
+                        <a:srgbClr val="FFFFFF"/>
+                      </a:solidFill>
+                      <a:prstDash val="solid"/>
+                      <a:round/>
+                      <a:headEnd type="none" w="med" len="med"/>
+                      <a:tailEnd type="none" w="med" len="med"/>
+                    </a:lnT>
+                    <a:lnB w="9525" cap="flat" cmpd="sng" algn="ctr">
+                      <a:solidFill>
+                        <a:srgbClr val="FFFFFF"/>
+                      </a:solidFill>
+                      <a:prstDash val="solid"/>
+                      <a:round/>
+                      <a:headEnd type="none" w="med" len="med"/>
+                      <a:tailEnd type="none" w="med" len="med"/>
+                    </a:lnB>
+                    <a:solidFill>
+                      <a:srgbClr val="FDF1E9"/>
+                    </a:solidFill>
+                  </a:tcPr>
+                </a:tc>
+                <a:tc>
+                  <a:txBody>
+                    <a:bodyPr/>
+                    <a:lstStyle/>
+                    <a:p>
+                      <a:pPr algn="ctr" indent="0" marL="0">
+                        <a:buNone/>
+                      </a:pPr>
+                      <a:r>
+                        <a:rPr lang="en-US" sz="950" b="1" dirty="0">
+                          <a:solidFill>
+                            <a:srgbClr val="2EA9B6"/>
+                          </a:solidFill>
+                        </a:rPr>
+                        <a:t>110%</a:t>
+                      </a:r>
+                      <a:endParaRPr lang="en-US" sz="950" dirty="0"/>
+                    </a:p>
+                  </a:txBody>
+                  <a:tcPr marL="36576" marR="36576" marT="36576" marB="36576" anchor="ctr">
+                    <a:lnL w="9525" cap="flat" cmpd="sng" algn="ctr">
+                      <a:solidFill>
+                        <a:srgbClr val="FFFFFF"/>
+                      </a:solidFill>
+                      <a:prstDash val="solid"/>
+                      <a:round/>
+                      <a:headEnd type="none" w="med" len="med"/>
+                      <a:tailEnd type="none" w="med" len="med"/>
+                    </a:lnL>
+                    <a:lnR w="9525" cap="flat" cmpd="sng" algn="ctr">
+                      <a:solidFill>
+                        <a:srgbClr val="FFFFFF"/>
+                      </a:solidFill>
+                      <a:prstDash val="solid"/>
+                      <a:round/>
+                      <a:headEnd type="none" w="med" len="med"/>
+                      <a:tailEnd type="none" w="med" len="med"/>
+                    </a:lnR>
+                    <a:lnT w="9525" cap="flat" cmpd="sng" algn="ctr">
+                      <a:solidFill>
+                        <a:srgbClr val="FFFFFF"/>
+                      </a:solidFill>
+                      <a:prstDash val="solid"/>
+                      <a:round/>
+                      <a:headEnd type="none" w="med" len="med"/>
+                      <a:tailEnd type="none" w="med" len="med"/>
+                    </a:lnT>
+                    <a:lnB w="9525" cap="flat" cmpd="sng" algn="ctr">
+                      <a:solidFill>
+                        <a:srgbClr val="FFFFFF"/>
+                      </a:solidFill>
+                      <a:prstDash val="solid"/>
+                      <a:round/>
+                      <a:headEnd type="none" w="med" len="med"/>
+                      <a:tailEnd type="none" w="med" len="med"/>
+                    </a:lnB>
+                    <a:solidFill>
+                      <a:srgbClr val="FDF1E9"/>
+                    </a:solidFill>
+                  </a:tcPr>
+                </a:tc>
+                <a:tc>
+                  <a:txBody>
+                    <a:bodyPr/>
+                    <a:lstStyle/>
+                    <a:p>
+                      <a:pPr algn="ctr" indent="0" marL="0">
+                        <a:buNone/>
+                      </a:pPr>
+                      <a:r>
+                        <a:rPr lang="en-US" sz="950" b="1" dirty="0">
+                          <a:solidFill>
+                            <a:srgbClr val="2EA9B6"/>
+                          </a:solidFill>
+                        </a:rPr>
+                        <a:t>+3.58</a:t>
+                      </a:r>
+                      <a:endParaRPr lang="en-US" sz="950" dirty="0"/>
+                    </a:p>
+                  </a:txBody>
+                  <a:tcPr marL="36576" marR="36576" marT="36576" marB="36576" anchor="ctr">
+                    <a:lnL w="9525" cap="flat" cmpd="sng" algn="ctr">
+                      <a:solidFill>
+                        <a:srgbClr val="FFFFFF"/>
+                      </a:solidFill>
+                      <a:prstDash val="solid"/>
+                      <a:round/>
+                      <a:headEnd type="none" w="med" len="med"/>
+                      <a:tailEnd type="none" w="med" len="med"/>
+                    </a:lnL>
+                    <a:lnR w="9525" cap="flat" cmpd="sng" algn="ctr">
+                      <a:solidFill>
+                        <a:srgbClr val="FFFFFF"/>
+                      </a:solidFill>
+                      <a:prstDash val="solid"/>
+                      <a:round/>
+                      <a:headEnd type="none" w="med" len="med"/>
+                      <a:tailEnd type="none" w="med" len="med"/>
+                    </a:lnR>
+                    <a:lnT w="9525" cap="flat" cmpd="sng" algn="ctr">
+                      <a:solidFill>
+                        <a:srgbClr val="FFFFFF"/>
+                      </a:solidFill>
+                      <a:prstDash val="solid"/>
+                      <a:round/>
+                      <a:headEnd type="none" w="med" len="med"/>
+                      <a:tailEnd type="none" w="med" len="med"/>
+                    </a:lnT>
+                    <a:lnB w="9525" cap="flat" cmpd="sng" algn="ctr">
+                      <a:solidFill>
+                        <a:srgbClr val="FFFFFF"/>
+                      </a:solidFill>
+                      <a:prstDash val="solid"/>
+                      <a:round/>
+                      <a:headEnd type="none" w="med" len="med"/>
+                      <a:tailEnd type="none" w="med" len="med"/>
+                    </a:lnB>
+                    <a:solidFill>
+                      <a:srgbClr val="FDF1E9"/>
+                    </a:solidFill>
+                  </a:tcPr>
+                </a:tc>
+              </a:tr>
+              <a:tr h="274320">
+                <a:tc>
+                  <a:txBody>
+                    <a:bodyPr/>
+                    <a:lstStyle/>
+                    <a:p>
+                      <a:pPr algn="ctr" indent="0" marL="0">
+                        <a:buNone/>
+                      </a:pPr>
+                      <a:r>
+                        <a:rPr lang="en-US" sz="950" b="1" dirty="0">
+                          <a:solidFill>
+                            <a:srgbClr val="000000"/>
+                          </a:solidFill>
+                        </a:rPr>
+                        <a:t>75～100%</a:t>
+                      </a:r>
+                      <a:endParaRPr lang="en-US" sz="950" dirty="0"/>
+                    </a:p>
+                  </a:txBody>
+                  <a:tcPr marL="36576" marR="36576" marT="36576" marB="36576" anchor="ctr">
+                    <a:lnL w="9525" cap="flat" cmpd="sng" algn="ctr">
+                      <a:solidFill>
+                        <a:srgbClr val="FFFFFF"/>
+                      </a:solidFill>
+                      <a:prstDash val="solid"/>
+                      <a:round/>
+                      <a:headEnd type="none" w="med" len="med"/>
+                      <a:tailEnd type="none" w="med" len="med"/>
+                    </a:lnL>
+                    <a:lnR w="9525" cap="flat" cmpd="sng" algn="ctr">
+                      <a:solidFill>
+                        <a:srgbClr val="FFFFFF"/>
+                      </a:solidFill>
+                      <a:prstDash val="solid"/>
+                      <a:round/>
+                      <a:headEnd type="none" w="med" len="med"/>
+                      <a:tailEnd type="none" w="med" len="med"/>
+                    </a:lnR>
+                    <a:lnT w="9525" cap="flat" cmpd="sng" algn="ctr">
+                      <a:solidFill>
+                        <a:srgbClr val="FFFFFF"/>
+                      </a:solidFill>
+                      <a:prstDash val="solid"/>
+                      <a:round/>
+                      <a:headEnd type="none" w="med" len="med"/>
+                      <a:tailEnd type="none" w="med" len="med"/>
+                    </a:lnT>
+                    <a:lnB w="9525" cap="flat" cmpd="sng" algn="ctr">
+                      <a:solidFill>
+                        <a:srgbClr val="FFFFFF"/>
+                      </a:solidFill>
+                      <a:prstDash val="solid"/>
+                      <a:round/>
+                      <a:headEnd type="none" w="med" len="med"/>
+                      <a:tailEnd type="none" w="med" len="med"/>
+                    </a:lnB>
+                    <a:solidFill>
+                      <a:srgbClr val="FFFFFF"/>
+                    </a:solidFill>
+                  </a:tcPr>
+                </a:tc>
+                <a:tc>
+                  <a:txBody>
+                    <a:bodyPr/>
+                    <a:lstStyle/>
+                    <a:p>
+                      <a:pPr algn="ctr" indent="0" marL="0">
+                        <a:buNone/>
+                      </a:pPr>
+                      <a:r>
+                        <a:rPr lang="en-US" sz="950" dirty="0">
+                          <a:solidFill>
+                            <a:srgbClr val="000000"/>
+                          </a:solidFill>
+                        </a:rPr>
+                        <a:t>65</a:t>
+                      </a:r>
+                      <a:endParaRPr lang="en-US" sz="950" dirty="0"/>
+                    </a:p>
+                  </a:txBody>
+                  <a:tcPr marL="36576" marR="36576" marT="36576" marB="36576" anchor="ctr">
+                    <a:lnL w="9525" cap="flat" cmpd="sng" algn="ctr">
+                      <a:solidFill>
+                        <a:srgbClr val="FFFFFF"/>
+                      </a:solidFill>
+                      <a:prstDash val="solid"/>
+                      <a:round/>
+                      <a:headEnd type="none" w="med" len="med"/>
+                      <a:tailEnd type="none" w="med" len="med"/>
+                    </a:lnL>
+                    <a:lnR w="9525" cap="flat" cmpd="sng" algn="ctr">
+                      <a:solidFill>
+                        <a:srgbClr val="FFFFFF"/>
+                      </a:solidFill>
+                      <a:prstDash val="solid"/>
+                      <a:round/>
+                      <a:headEnd type="none" w="med" len="med"/>
+                      <a:tailEnd type="none" w="med" len="med"/>
+                    </a:lnR>
+                    <a:lnT w="9525" cap="flat" cmpd="sng" algn="ctr">
+                      <a:solidFill>
+                        <a:srgbClr val="FFFFFF"/>
+                      </a:solidFill>
+                      <a:prstDash val="solid"/>
+                      <a:round/>
+                      <a:headEnd type="none" w="med" len="med"/>
+                      <a:tailEnd type="none" w="med" len="med"/>
+                    </a:lnT>
+                    <a:lnB w="9525" cap="flat" cmpd="sng" algn="ctr">
+                      <a:solidFill>
+                        <a:srgbClr val="FFFFFF"/>
+                      </a:solidFill>
+                      <a:prstDash val="solid"/>
+                      <a:round/>
+                      <a:headEnd type="none" w="med" len="med"/>
+                      <a:tailEnd type="none" w="med" len="med"/>
+                    </a:lnB>
+                    <a:solidFill>
+                      <a:srgbClr val="FFFFFF"/>
+                    </a:solidFill>
+                  </a:tcPr>
+                </a:tc>
+                <a:tc>
+                  <a:txBody>
+                    <a:bodyPr/>
+                    <a:lstStyle/>
+                    <a:p>
+                      <a:pPr algn="ctr" indent="0" marL="0">
+                        <a:buNone/>
+                      </a:pPr>
+                      <a:r>
+                        <a:rPr lang="en-US" sz="950" dirty="0">
+                          <a:solidFill>
+                            <a:srgbClr val="000000"/>
+                          </a:solidFill>
+                        </a:rPr>
+                        <a:t>35.5%</a:t>
+                      </a:r>
+                      <a:endParaRPr lang="en-US" sz="950" dirty="0"/>
+                    </a:p>
+                  </a:txBody>
+                  <a:tcPr marL="36576" marR="36576" marT="36576" marB="36576" anchor="ctr">
+                    <a:lnL w="9525" cap="flat" cmpd="sng" algn="ctr">
+                      <a:solidFill>
+                        <a:srgbClr val="FFFFFF"/>
+                      </a:solidFill>
+                      <a:prstDash val="solid"/>
+                      <a:round/>
+                      <a:headEnd type="none" w="med" len="med"/>
+                      <a:tailEnd type="none" w="med" len="med"/>
+                    </a:lnL>
+                    <a:lnR w="9525" cap="flat" cmpd="sng" algn="ctr">
+                      <a:solidFill>
+                        <a:srgbClr val="FFFFFF"/>
+                      </a:solidFill>
+                      <a:prstDash val="solid"/>
+                      <a:round/>
+                      <a:headEnd type="none" w="med" len="med"/>
+                      <a:tailEnd type="none" w="med" len="med"/>
+                    </a:lnR>
+                    <a:lnT w="9525" cap="flat" cmpd="sng" algn="ctr">
+                      <a:solidFill>
+                        <a:srgbClr val="FFFFFF"/>
+                      </a:solidFill>
+                      <a:prstDash val="solid"/>
+                      <a:round/>
+                      <a:headEnd type="none" w="med" len="med"/>
+                      <a:tailEnd type="none" w="med" len="med"/>
+                    </a:lnT>
+                    <a:lnB w="9525" cap="flat" cmpd="sng" algn="ctr">
+                      <a:solidFill>
+                        <a:srgbClr val="FFFFFF"/>
+                      </a:solidFill>
+                      <a:prstDash val="solid"/>
+                      <a:round/>
+                      <a:headEnd type="none" w="med" len="med"/>
+                      <a:tailEnd type="none" w="med" len="med"/>
+                    </a:lnB>
+                    <a:solidFill>
+                      <a:srgbClr val="FFFFFF"/>
+                    </a:solidFill>
+                  </a:tcPr>
+                </a:tc>
+                <a:tc>
+                  <a:txBody>
+                    <a:bodyPr/>
+                    <a:lstStyle/>
+                    <a:p>
+                      <a:pPr algn="ctr" indent="0" marL="0">
+                        <a:buNone/>
+                      </a:pPr>
+                      <a:r>
+                        <a:rPr lang="en-US" sz="950" dirty="0">
+                          <a:solidFill>
+                            <a:srgbClr val="000000"/>
+                          </a:solidFill>
+                        </a:rPr>
+                        <a:t>39.08</a:t>
+                      </a:r>
+                      <a:endParaRPr lang="en-US" sz="950" dirty="0"/>
+                    </a:p>
+                  </a:txBody>
+                  <a:tcPr marL="36576" marR="36576" marT="36576" marB="36576" anchor="ctr">
+                    <a:lnL w="9525" cap="flat" cmpd="sng" algn="ctr">
+                      <a:solidFill>
+                        <a:srgbClr val="FFFFFF"/>
+                      </a:solidFill>
+                      <a:prstDash val="solid"/>
+                      <a:round/>
+                      <a:headEnd type="none" w="med" len="med"/>
+                      <a:tailEnd type="none" w="med" len="med"/>
+                    </a:lnL>
+                    <a:lnR w="9525" cap="flat" cmpd="sng" algn="ctr">
+                      <a:solidFill>
+                        <a:srgbClr val="FFFFFF"/>
+                      </a:solidFill>
+                      <a:prstDash val="solid"/>
+                      <a:round/>
+                      <a:headEnd type="none" w="med" len="med"/>
+                      <a:tailEnd type="none" w="med" len="med"/>
+                    </a:lnR>
+                    <a:lnT w="9525" cap="flat" cmpd="sng" algn="ctr">
+                      <a:solidFill>
+                        <a:srgbClr val="FFFFFF"/>
+                      </a:solidFill>
+                      <a:prstDash val="solid"/>
+                      <a:round/>
+                      <a:headEnd type="none" w="med" len="med"/>
+                      <a:tailEnd type="none" w="med" len="med"/>
+                    </a:lnT>
+                    <a:lnB w="9525" cap="flat" cmpd="sng" algn="ctr">
+                      <a:solidFill>
+                        <a:srgbClr val="FFFFFF"/>
+                      </a:solidFill>
+                      <a:prstDash val="solid"/>
+                      <a:round/>
+                      <a:headEnd type="none" w="med" len="med"/>
+                      <a:tailEnd type="none" w="med" len="med"/>
+                    </a:lnB>
+                    <a:solidFill>
+                      <a:srgbClr val="FFFFFF"/>
+                    </a:solidFill>
+                  </a:tcPr>
+                </a:tc>
+                <a:tc>
+                  <a:txBody>
+                    <a:bodyPr/>
+                    <a:lstStyle/>
+                    <a:p>
+                      <a:pPr algn="ctr" indent="0" marL="0">
+                        <a:buNone/>
+                      </a:pPr>
+                      <a:r>
+                        <a:rPr lang="en-US" sz="950" dirty="0">
+                          <a:solidFill>
+                            <a:srgbClr val="000000"/>
+                          </a:solidFill>
+                        </a:rPr>
+                        <a:t>34.32</a:t>
+                      </a:r>
+                      <a:endParaRPr lang="en-US" sz="950" dirty="0"/>
+                    </a:p>
+                  </a:txBody>
+                  <a:tcPr marL="36576" marR="36576" marT="36576" marB="36576" anchor="ctr">
+                    <a:lnL w="9525" cap="flat" cmpd="sng" algn="ctr">
+                      <a:solidFill>
+                        <a:srgbClr val="FFFFFF"/>
+                      </a:solidFill>
+                      <a:prstDash val="solid"/>
+                      <a:round/>
+                      <a:headEnd type="none" w="med" len="med"/>
+                      <a:tailEnd type="none" w="med" len="med"/>
+                    </a:lnL>
+                    <a:lnR w="9525" cap="flat" cmpd="sng" algn="ctr">
+                      <a:solidFill>
+                        <a:srgbClr val="FFFFFF"/>
+                      </a:solidFill>
+                      <a:prstDash val="solid"/>
+                      <a:round/>
+                      <a:headEnd type="none" w="med" len="med"/>
+                      <a:tailEnd type="none" w="med" len="med"/>
+                    </a:lnR>
+                    <a:lnT w="9525" cap="flat" cmpd="sng" algn="ctr">
+                      <a:solidFill>
+                        <a:srgbClr val="FFFFFF"/>
+                      </a:solidFill>
+                      <a:prstDash val="solid"/>
+                      <a:round/>
+                      <a:headEnd type="none" w="med" len="med"/>
+                      <a:tailEnd type="none" w="med" len="med"/>
+                    </a:lnT>
+                    <a:lnB w="9525" cap="flat" cmpd="sng" algn="ctr">
+                      <a:solidFill>
+                        <a:srgbClr val="FFFFFF"/>
+                      </a:solidFill>
+                      <a:prstDash val="solid"/>
+                      <a:round/>
+                      <a:headEnd type="none" w="med" len="med"/>
+                      <a:tailEnd type="none" w="med" len="med"/>
+                    </a:lnB>
+                    <a:solidFill>
+                      <a:srgbClr val="FFFFFF"/>
+                    </a:solidFill>
+                  </a:tcPr>
+                </a:tc>
+                <a:tc>
+                  <a:txBody>
+                    <a:bodyPr/>
+                    <a:lstStyle/>
+                    <a:p>
+                      <a:pPr algn="ctr" indent="0" marL="0">
+                        <a:buNone/>
+                      </a:pPr>
+                      <a:r>
+                        <a:rPr lang="en-US" sz="950" b="1" dirty="0">
+                          <a:solidFill>
+                            <a:srgbClr val="C00000"/>
+                          </a:solidFill>
+                        </a:rPr>
+                        <a:t>88%</a:t>
+                      </a:r>
+                      <a:endParaRPr lang="en-US" sz="950" dirty="0"/>
+                    </a:p>
+                  </a:txBody>
+                  <a:tcPr marL="36576" marR="36576" marT="36576" marB="36576" anchor="ctr">
+                    <a:lnL w="9525" cap="flat" cmpd="sng" algn="ctr">
+                      <a:solidFill>
+                        <a:srgbClr val="FFFFFF"/>
+                      </a:solidFill>
+                      <a:prstDash val="solid"/>
+                      <a:round/>
+                      <a:headEnd type="none" w="med" len="med"/>
+                      <a:tailEnd type="none" w="med" len="med"/>
+                    </a:lnL>
+                    <a:lnR w="9525" cap="flat" cmpd="sng" algn="ctr">
+                      <a:solidFill>
+                        <a:srgbClr val="FFFFFF"/>
+                      </a:solidFill>
+                      <a:prstDash val="solid"/>
+                      <a:round/>
+                      <a:headEnd type="none" w="med" len="med"/>
+                      <a:tailEnd type="none" w="med" len="med"/>
+                    </a:lnR>
+                    <a:lnT w="9525" cap="flat" cmpd="sng" algn="ctr">
+                      <a:solidFill>
+                        <a:srgbClr val="FFFFFF"/>
+                      </a:solidFill>
+                      <a:prstDash val="solid"/>
+                      <a:round/>
+                      <a:headEnd type="none" w="med" len="med"/>
+                      <a:tailEnd type="none" w="med" len="med"/>
+                    </a:lnT>
+                    <a:lnB w="9525" cap="flat" cmpd="sng" algn="ctr">
+                      <a:solidFill>
+                        <a:srgbClr val="FFFFFF"/>
+                      </a:solidFill>
+                      <a:prstDash val="solid"/>
+                      <a:round/>
+                      <a:headEnd type="none" w="med" len="med"/>
+                      <a:tailEnd type="none" w="med" len="med"/>
+                    </a:lnB>
+                    <a:solidFill>
+                      <a:srgbClr val="FFFFFF"/>
+                    </a:solidFill>
+                  </a:tcPr>
+                </a:tc>
+                <a:tc>
+                  <a:txBody>
+                    <a:bodyPr/>
+                    <a:lstStyle/>
+                    <a:p>
+                      <a:pPr algn="ctr" indent="0" marL="0">
+                        <a:buNone/>
+                      </a:pPr>
+                      <a:r>
+                        <a:rPr lang="en-US" sz="950" b="1" dirty="0">
+                          <a:solidFill>
+                            <a:srgbClr val="C00000"/>
+                          </a:solidFill>
+                        </a:rPr>
+                        <a:t>−4.76</a:t>
+                      </a:r>
+                      <a:endParaRPr lang="en-US" sz="950" dirty="0"/>
+                    </a:p>
+                  </a:txBody>
+                  <a:tcPr marL="36576" marR="36576" marT="36576" marB="36576" anchor="ctr">
+                    <a:lnL w="9525" cap="flat" cmpd="sng" algn="ctr">
+                      <a:solidFill>
+                        <a:srgbClr val="FFFFFF"/>
+                      </a:solidFill>
+                      <a:prstDash val="solid"/>
+                      <a:round/>
+                      <a:headEnd type="none" w="med" len="med"/>
+                      <a:tailEnd type="none" w="med" len="med"/>
+                    </a:lnL>
+                    <a:lnR w="9525" cap="flat" cmpd="sng" algn="ctr">
+                      <a:solidFill>
+                        <a:srgbClr val="FFFFFF"/>
+                      </a:solidFill>
+                      <a:prstDash val="solid"/>
+                      <a:round/>
+                      <a:headEnd type="none" w="med" len="med"/>
+                      <a:tailEnd type="none" w="med" len="med"/>
+                    </a:lnR>
+                    <a:lnT w="9525" cap="flat" cmpd="sng" algn="ctr">
+                      <a:solidFill>
+                        <a:srgbClr val="FFFFFF"/>
+                      </a:solidFill>
+                      <a:prstDash val="solid"/>
+                      <a:round/>
+                      <a:headEnd type="none" w="med" len="med"/>
+                      <a:tailEnd type="none" w="med" len="med"/>
+                    </a:lnT>
+                    <a:lnB w="9525" cap="flat" cmpd="sng" algn="ctr">
+                      <a:solidFill>
+                        <a:srgbClr val="FFFFFF"/>
+                      </a:solidFill>
+                      <a:prstDash val="solid"/>
+                      <a:round/>
+                      <a:headEnd type="none" w="med" len="med"/>
+                      <a:tailEnd type="none" w="med" len="med"/>
+                    </a:lnB>
+                    <a:solidFill>
+                      <a:srgbClr val="FFFFFF"/>
+                    </a:solidFill>
+                  </a:tcPr>
+                </a:tc>
+              </a:tr>
+              <a:tr h="274320">
+                <a:tc>
+                  <a:txBody>
+                    <a:bodyPr/>
+                    <a:lstStyle/>
+                    <a:p>
+                      <a:pPr algn="ctr" indent="0" marL="0">
+                        <a:buNone/>
+                      </a:pPr>
+                      <a:r>
+                        <a:rPr lang="en-US" sz="950" b="1" dirty="0">
+                          <a:solidFill>
+                            <a:srgbClr val="000000"/>
+                          </a:solidFill>
+                        </a:rPr>
+                        <a:t>未達75%</a:t>
+                      </a:r>
+                      <a:endParaRPr lang="en-US" sz="950" dirty="0"/>
+                    </a:p>
+                  </a:txBody>
+                  <a:tcPr marL="36576" marR="36576" marT="36576" marB="36576" anchor="ctr">
+                    <a:lnL w="9525" cap="flat" cmpd="sng" algn="ctr">
+                      <a:solidFill>
+                        <a:srgbClr val="FFFFFF"/>
+                      </a:solidFill>
+                      <a:prstDash val="solid"/>
+                      <a:round/>
+                      <a:headEnd type="none" w="med" len="med"/>
+                      <a:tailEnd type="none" w="med" len="med"/>
+                    </a:lnL>
+                    <a:lnR w="9525" cap="flat" cmpd="sng" algn="ctr">
+                      <a:solidFill>
+                        <a:srgbClr val="FFFFFF"/>
+                      </a:solidFill>
+                      <a:prstDash val="solid"/>
+                      <a:round/>
+                      <a:headEnd type="none" w="med" len="med"/>
+                      <a:tailEnd type="none" w="med" len="med"/>
+                    </a:lnR>
+                    <a:lnT w="9525" cap="flat" cmpd="sng" algn="ctr">
+                      <a:solidFill>
+                        <a:srgbClr val="FFFFFF"/>
+                      </a:solidFill>
+                      <a:prstDash val="solid"/>
+                      <a:round/>
+                      <a:headEnd type="none" w="med" len="med"/>
+                      <a:tailEnd type="none" w="med" len="med"/>
+                    </a:lnT>
+                    <a:lnB w="9525" cap="flat" cmpd="sng" algn="ctr">
+                      <a:solidFill>
+                        <a:srgbClr val="FFFFFF"/>
+                      </a:solidFill>
+                      <a:prstDash val="solid"/>
+                      <a:round/>
+                      <a:headEnd type="none" w="med" len="med"/>
+                      <a:tailEnd type="none" w="med" len="med"/>
+                    </a:lnB>
+                    <a:solidFill>
+                      <a:srgbClr val="FDF1E9"/>
+                    </a:solidFill>
+                  </a:tcPr>
+                </a:tc>
+                <a:tc>
+                  <a:txBody>
+                    <a:bodyPr/>
+                    <a:lstStyle/>
+                    <a:p>
+                      <a:pPr algn="ctr" indent="0" marL="0">
+                        <a:buNone/>
+                      </a:pPr>
+                      <a:r>
+                        <a:rPr lang="en-US" sz="950" dirty="0">
+                          <a:solidFill>
+                            <a:srgbClr val="000000"/>
+                          </a:solidFill>
+                        </a:rPr>
+                        <a:t>19</a:t>
+                      </a:r>
+                      <a:endParaRPr lang="en-US" sz="950" dirty="0"/>
+                    </a:p>
+                  </a:txBody>
+                  <a:tcPr marL="36576" marR="36576" marT="36576" marB="36576" anchor="ctr">
+                    <a:lnL w="9525" cap="flat" cmpd="sng" algn="ctr">
+                      <a:solidFill>
+                        <a:srgbClr val="FFFFFF"/>
+                      </a:solidFill>
+                      <a:prstDash val="solid"/>
+                      <a:round/>
+                      <a:headEnd type="none" w="med" len="med"/>
+                      <a:tailEnd type="none" w="med" len="med"/>
+                    </a:lnL>
+                    <a:lnR w="9525" cap="flat" cmpd="sng" algn="ctr">
+                      <a:solidFill>
+                        <a:srgbClr val="FFFFFF"/>
+                      </a:solidFill>
+                      <a:prstDash val="solid"/>
+                      <a:round/>
+                      <a:headEnd type="none" w="med" len="med"/>
+                      <a:tailEnd type="none" w="med" len="med"/>
+                    </a:lnR>
+                    <a:lnT w="9525" cap="flat" cmpd="sng" algn="ctr">
+                      <a:solidFill>
+                        <a:srgbClr val="FFFFFF"/>
+                      </a:solidFill>
+                      <a:prstDash val="solid"/>
+                      <a:round/>
+                      <a:headEnd type="none" w="med" len="med"/>
+                      <a:tailEnd type="none" w="med" len="med"/>
+                    </a:lnT>
+                    <a:lnB w="9525" cap="flat" cmpd="sng" algn="ctr">
+                      <a:solidFill>
+                        <a:srgbClr val="FFFFFF"/>
+                      </a:solidFill>
+                      <a:prstDash val="solid"/>
+                      <a:round/>
+                      <a:headEnd type="none" w="med" len="med"/>
+                      <a:tailEnd type="none" w="med" len="med"/>
+                    </a:lnB>
+                    <a:solidFill>
+                      <a:srgbClr val="FDF1E9"/>
+                    </a:solidFill>
+                  </a:tcPr>
+                </a:tc>
+                <a:tc>
+                  <a:txBody>
+                    <a:bodyPr/>
+                    <a:lstStyle/>
+                    <a:p>
+                      <a:pPr algn="ctr" indent="0" marL="0">
+                        <a:buNone/>
+                      </a:pPr>
+                      <a:r>
+                        <a:rPr lang="en-US" sz="950" dirty="0">
+                          <a:solidFill>
+                            <a:srgbClr val="000000"/>
+                          </a:solidFill>
+                        </a:rPr>
+                        <a:t>10.4%</a:t>
+                      </a:r>
+                      <a:endParaRPr lang="en-US" sz="950" dirty="0"/>
+                    </a:p>
+                  </a:txBody>
+                  <a:tcPr marL="36576" marR="36576" marT="36576" marB="36576" anchor="ctr">
+                    <a:lnL w="9525" cap="flat" cmpd="sng" algn="ctr">
+                      <a:solidFill>
+                        <a:srgbClr val="FFFFFF"/>
+                      </a:solidFill>
+                      <a:prstDash val="solid"/>
+                      <a:round/>
+                      <a:headEnd type="none" w="med" len="med"/>
+                      <a:tailEnd type="none" w="med" len="med"/>
+                    </a:lnL>
+                    <a:lnR w="9525" cap="flat" cmpd="sng" algn="ctr">
+                      <a:solidFill>
+                        <a:srgbClr val="FFFFFF"/>
+                      </a:solidFill>
+                      <a:prstDash val="solid"/>
+                      <a:round/>
+                      <a:headEnd type="none" w="med" len="med"/>
+                      <a:tailEnd type="none" w="med" len="med"/>
+                    </a:lnR>
+                    <a:lnT w="9525" cap="flat" cmpd="sng" algn="ctr">
+                      <a:solidFill>
+                        <a:srgbClr val="FFFFFF"/>
+                      </a:solidFill>
+                      <a:prstDash val="solid"/>
+                      <a:round/>
+                      <a:headEnd type="none" w="med" len="med"/>
+                      <a:tailEnd type="none" w="med" len="med"/>
+                    </a:lnT>
+                    <a:lnB w="9525" cap="flat" cmpd="sng" algn="ctr">
+                      <a:solidFill>
+                        <a:srgbClr val="FFFFFF"/>
+                      </a:solidFill>
+                      <a:prstDash val="solid"/>
+                      <a:round/>
+                      <a:headEnd type="none" w="med" len="med"/>
+                      <a:tailEnd type="none" w="med" len="med"/>
+                    </a:lnB>
+                    <a:solidFill>
+                      <a:srgbClr val="FDF1E9"/>
+                    </a:solidFill>
+                  </a:tcPr>
+                </a:tc>
+                <a:tc>
+                  <a:txBody>
+                    <a:bodyPr/>
+                    <a:lstStyle/>
+                    <a:p>
+                      <a:pPr algn="ctr" indent="0" marL="0">
+                        <a:buNone/>
+                      </a:pPr>
+                      <a:r>
+                        <a:rPr lang="en-US" sz="950" dirty="0">
+                          <a:solidFill>
+                            <a:srgbClr val="000000"/>
+                          </a:solidFill>
+                        </a:rPr>
+                        <a:t>10.98</a:t>
+                      </a:r>
+                      <a:endParaRPr lang="en-US" sz="950" dirty="0"/>
+                    </a:p>
+                  </a:txBody>
+                  <a:tcPr marL="36576" marR="36576" marT="36576" marB="36576" anchor="ctr">
+                    <a:lnL w="9525" cap="flat" cmpd="sng" algn="ctr">
+                      <a:solidFill>
+                        <a:srgbClr val="FFFFFF"/>
+                      </a:solidFill>
+                      <a:prstDash val="solid"/>
+                      <a:round/>
+                      <a:headEnd type="none" w="med" len="med"/>
+                      <a:tailEnd type="none" w="med" len="med"/>
+                    </a:lnL>
+                    <a:lnR w="9525" cap="flat" cmpd="sng" algn="ctr">
+                      <a:solidFill>
+                        <a:srgbClr val="FFFFFF"/>
+                      </a:solidFill>
+                      <a:prstDash val="solid"/>
+                      <a:round/>
+                      <a:headEnd type="none" w="med" len="med"/>
+                      <a:tailEnd type="none" w="med" len="med"/>
+                    </a:lnR>
+                    <a:lnT w="9525" cap="flat" cmpd="sng" algn="ctr">
+                      <a:solidFill>
+                        <a:srgbClr val="FFFFFF"/>
+                      </a:solidFill>
+                      <a:prstDash val="solid"/>
+                      <a:round/>
+                      <a:headEnd type="none" w="med" len="med"/>
+                      <a:tailEnd type="none" w="med" len="med"/>
+                    </a:lnT>
+                    <a:lnB w="9525" cap="flat" cmpd="sng" algn="ctr">
+                      <a:solidFill>
+                        <a:srgbClr val="FFFFFF"/>
+                      </a:solidFill>
+                      <a:prstDash val="solid"/>
+                      <a:round/>
+                      <a:headEnd type="none" w="med" len="med"/>
+                      <a:tailEnd type="none" w="med" len="med"/>
+                    </a:lnB>
+                    <a:solidFill>
+                      <a:srgbClr val="FDF1E9"/>
+                    </a:solidFill>
+                  </a:tcPr>
+                </a:tc>
+                <a:tc>
+                  <a:txBody>
+                    <a:bodyPr/>
+                    <a:lstStyle/>
+                    <a:p>
+                      <a:pPr algn="ctr" indent="0" marL="0">
+                        <a:buNone/>
+                      </a:pPr>
+                      <a:r>
+                        <a:rPr lang="en-US" sz="950" dirty="0">
+                          <a:solidFill>
+                            <a:srgbClr val="000000"/>
+                          </a:solidFill>
+                        </a:rPr>
+                        <a:t>7.51</a:t>
+                      </a:r>
+                      <a:endParaRPr lang="en-US" sz="950" dirty="0"/>
+                    </a:p>
+                  </a:txBody>
+                  <a:tcPr marL="36576" marR="36576" marT="36576" marB="36576" anchor="ctr">
+                    <a:lnL w="9525" cap="flat" cmpd="sng" algn="ctr">
+                      <a:solidFill>
+                        <a:srgbClr val="FFFFFF"/>
+                      </a:solidFill>
+                      <a:prstDash val="solid"/>
+                      <a:round/>
+                      <a:headEnd type="none" w="med" len="med"/>
+                      <a:tailEnd type="none" w="med" len="med"/>
+                    </a:lnL>
+                    <a:lnR w="9525" cap="flat" cmpd="sng" algn="ctr">
+                      <a:solidFill>
+                        <a:srgbClr val="FFFFFF"/>
+                      </a:solidFill>
+                      <a:prstDash val="solid"/>
+                      <a:round/>
+                      <a:headEnd type="none" w="med" len="med"/>
+                      <a:tailEnd type="none" w="med" len="med"/>
+                    </a:lnR>
+                    <a:lnT w="9525" cap="flat" cmpd="sng" algn="ctr">
+                      <a:solidFill>
+                        <a:srgbClr val="FFFFFF"/>
+                      </a:solidFill>
+                      <a:prstDash val="solid"/>
+                      <a:round/>
+                      <a:headEnd type="none" w="med" len="med"/>
+                      <a:tailEnd type="none" w="med" len="med"/>
+                    </a:lnT>
+                    <a:lnB w="9525" cap="flat" cmpd="sng" algn="ctr">
+                      <a:solidFill>
+                        <a:srgbClr val="FFFFFF"/>
+                      </a:solidFill>
+                      <a:prstDash val="solid"/>
+                      <a:round/>
+                      <a:headEnd type="none" w="med" len="med"/>
+                      <a:tailEnd type="none" w="med" len="med"/>
+                    </a:lnB>
+                    <a:solidFill>
+                      <a:srgbClr val="FDF1E9"/>
+                    </a:solidFill>
+                  </a:tcPr>
+                </a:tc>
+                <a:tc>
+                  <a:txBody>
+                    <a:bodyPr/>
+                    <a:lstStyle/>
+                    <a:p>
+                      <a:pPr algn="ctr" indent="0" marL="0">
+                        <a:buNone/>
+                      </a:pPr>
+                      <a:r>
+                        <a:rPr lang="en-US" sz="950" b="1" dirty="0">
+                          <a:solidFill>
+                            <a:srgbClr val="C00000"/>
+                          </a:solidFill>
+                        </a:rPr>
+                        <a:t>68%</a:t>
+                      </a:r>
+                      <a:endParaRPr lang="en-US" sz="950" dirty="0"/>
+                    </a:p>
+                  </a:txBody>
+                  <a:tcPr marL="36576" marR="36576" marT="36576" marB="36576" anchor="ctr">
+                    <a:lnL w="9525" cap="flat" cmpd="sng" algn="ctr">
+                      <a:solidFill>
+                        <a:srgbClr val="FFFFFF"/>
+                      </a:solidFill>
+                      <a:prstDash val="solid"/>
+                      <a:round/>
+                      <a:headEnd type="none" w="med" len="med"/>
+                      <a:tailEnd type="none" w="med" len="med"/>
+                    </a:lnL>
+                    <a:lnR w="9525" cap="flat" cmpd="sng" algn="ctr">
+                      <a:solidFill>
+                        <a:srgbClr val="FFFFFF"/>
+                      </a:solidFill>
+                      <a:prstDash val="solid"/>
+                      <a:round/>
+                      <a:headEnd type="none" w="med" len="med"/>
+                      <a:tailEnd type="none" w="med" len="med"/>
+                    </a:lnR>
+                    <a:lnT w="9525" cap="flat" cmpd="sng" algn="ctr">
+                      <a:solidFill>
+                        <a:srgbClr val="FFFFFF"/>
+                      </a:solidFill>
+                      <a:prstDash val="solid"/>
+                      <a:round/>
+                      <a:headEnd type="none" w="med" len="med"/>
+                      <a:tailEnd type="none" w="med" len="med"/>
+                    </a:lnT>
+                    <a:lnB w="9525" cap="flat" cmpd="sng" algn="ctr">
+                      <a:solidFill>
+                        <a:srgbClr val="FFFFFF"/>
+                      </a:solidFill>
+                      <a:prstDash val="solid"/>
+                      <a:round/>
+                      <a:headEnd type="none" w="med" len="med"/>
+                      <a:tailEnd type="none" w="med" len="med"/>
+                    </a:lnB>
+                    <a:solidFill>
+                      <a:srgbClr val="FDF1E9"/>
+                    </a:solidFill>
+                  </a:tcPr>
+                </a:tc>
+                <a:tc>
+                  <a:txBody>
+                    <a:bodyPr/>
+                    <a:lstStyle/>
+                    <a:p>
+                      <a:pPr algn="ctr" indent="0" marL="0">
+                        <a:buNone/>
+                      </a:pPr>
+                      <a:r>
+                        <a:rPr lang="en-US" sz="950" b="1" dirty="0">
+                          <a:solidFill>
+                            <a:srgbClr val="C00000"/>
+                          </a:solidFill>
+                        </a:rPr>
+                        <a:t>−3.47</a:t>
+                      </a:r>
+                      <a:endParaRPr lang="en-US" sz="950" dirty="0"/>
+                    </a:p>
+                  </a:txBody>
+                  <a:tcPr marL="36576" marR="36576" marT="36576" marB="36576" anchor="ctr">
+                    <a:lnL w="9525" cap="flat" cmpd="sng" algn="ctr">
+                      <a:solidFill>
+                        <a:srgbClr val="FFFFFF"/>
+                      </a:solidFill>
+                      <a:prstDash val="solid"/>
+                      <a:round/>
+                      <a:headEnd type="none" w="med" len="med"/>
+                      <a:tailEnd type="none" w="med" len="med"/>
+                    </a:lnL>
+                    <a:lnR w="9525" cap="flat" cmpd="sng" algn="ctr">
+                      <a:solidFill>
+                        <a:srgbClr val="FFFFFF"/>
+                      </a:solidFill>
+                      <a:prstDash val="solid"/>
+                      <a:round/>
+                      <a:headEnd type="none" w="med" len="med"/>
+                      <a:tailEnd type="none" w="med" len="med"/>
+                    </a:lnR>
+                    <a:lnT w="9525" cap="flat" cmpd="sng" algn="ctr">
+                      <a:solidFill>
+                        <a:srgbClr val="FFFFFF"/>
+                      </a:solidFill>
+                      <a:prstDash val="solid"/>
+                      <a:round/>
+                      <a:headEnd type="none" w="med" len="med"/>
+                      <a:tailEnd type="none" w="med" len="med"/>
+                    </a:lnT>
+                    <a:lnB w="9525" cap="flat" cmpd="sng" algn="ctr">
+                      <a:solidFill>
+                        <a:srgbClr val="FFFFFF"/>
+                      </a:solidFill>
+                      <a:prstDash val="solid"/>
+                      <a:round/>
+                      <a:headEnd type="none" w="med" len="med"/>
+                      <a:tailEnd type="none" w="med" len="med"/>
+                    </a:lnB>
+                    <a:solidFill>
+                      <a:srgbClr val="FDF1E9"/>
+                    </a:solidFill>
+                  </a:tcPr>
+                </a:tc>
+              </a:tr>
+              <a:tr h="274320">
+                <a:tc>
+                  <a:txBody>
+                    <a:bodyPr/>
+                    <a:lstStyle/>
+                    <a:p>
+                      <a:pPr algn="ctr" indent="0" marL="0">
+                        <a:buNone/>
+                      </a:pPr>
+                      <a:r>
+                        <a:rPr lang="en-US" sz="950" b="1" dirty="0">
+                          <a:solidFill>
+                            <a:srgbClr val="000000"/>
+                          </a:solidFill>
+                        </a:rPr>
+                        <a:t>合計</a:t>
+                      </a:r>
+                      <a:endParaRPr lang="en-US" sz="950" dirty="0"/>
+                    </a:p>
+                  </a:txBody>
+                  <a:tcPr marL="36576" marR="36576" marT="36576" marB="36576" anchor="ctr">
+                    <a:lnL w="9525" cap="flat" cmpd="sng" algn="ctr">
+                      <a:solidFill>
+                        <a:srgbClr val="FFFFFF"/>
+                      </a:solidFill>
+                      <a:prstDash val="solid"/>
+                      <a:round/>
+                      <a:headEnd type="none" w="med" len="med"/>
+                      <a:tailEnd type="none" w="med" len="med"/>
+                    </a:lnL>
+                    <a:lnR w="9525" cap="flat" cmpd="sng" algn="ctr">
+                      <a:solidFill>
+                        <a:srgbClr val="FFFFFF"/>
+                      </a:solidFill>
+                      <a:prstDash val="solid"/>
+                      <a:round/>
+                      <a:headEnd type="none" w="med" len="med"/>
+                      <a:tailEnd type="none" w="med" len="med"/>
+                    </a:lnR>
+                    <a:lnT w="9525" cap="flat" cmpd="sng" algn="ctr">
+                      <a:solidFill>
+                        <a:srgbClr val="FFFFFF"/>
+                      </a:solidFill>
+                      <a:prstDash val="solid"/>
+                      <a:round/>
+                      <a:headEnd type="none" w="med" len="med"/>
+                      <a:tailEnd type="none" w="med" len="med"/>
+                    </a:lnT>
+                    <a:lnB w="9525" cap="flat" cmpd="sng" algn="ctr">
+                      <a:solidFill>
+                        <a:srgbClr val="FFFFFF"/>
+                      </a:solidFill>
+                      <a:prstDash val="solid"/>
+                      <a:round/>
+                      <a:headEnd type="none" w="med" len="med"/>
+                      <a:tailEnd type="none" w="med" len="med"/>
+                    </a:lnB>
+                    <a:solidFill>
+                      <a:srgbClr val="F2F2F2"/>
+                    </a:solidFill>
+                  </a:tcPr>
+                </a:tc>
+                <a:tc>
+                  <a:txBody>
+                    <a:bodyPr/>
+                    <a:lstStyle/>
+                    <a:p>
+                      <a:pPr algn="ctr" indent="0" marL="0">
+                        <a:buNone/>
+                      </a:pPr>
+                      <a:r>
+                        <a:rPr lang="en-US" sz="950" b="1" dirty="0">
+                          <a:solidFill>
+                            <a:srgbClr val="000000"/>
+                          </a:solidFill>
+                        </a:rPr>
+                        <a:t>183</a:t>
+                      </a:r>
+                      <a:endParaRPr lang="en-US" sz="950" dirty="0"/>
+                    </a:p>
+                  </a:txBody>
+                  <a:tcPr marL="36576" marR="36576" marT="36576" marB="36576" anchor="ctr">
+                    <a:lnL w="9525" cap="flat" cmpd="sng" algn="ctr">
+                      <a:solidFill>
+                        <a:srgbClr val="FFFFFF"/>
+                      </a:solidFill>
+                      <a:prstDash val="solid"/>
+                      <a:round/>
+                      <a:headEnd type="none" w="med" len="med"/>
+                      <a:tailEnd type="none" w="med" len="med"/>
+                    </a:lnL>
+                    <a:lnR w="9525" cap="flat" cmpd="sng" algn="ctr">
+                      <a:solidFill>
+                        <a:srgbClr val="FFFFFF"/>
+                      </a:solidFill>
+                      <a:prstDash val="solid"/>
+                      <a:round/>
+                      <a:headEnd type="none" w="med" len="med"/>
+                      <a:tailEnd type="none" w="med" len="med"/>
+                    </a:lnR>
+                    <a:lnT w="9525" cap="flat" cmpd="sng" algn="ctr">
+                      <a:solidFill>
+                        <a:srgbClr val="FFFFFF"/>
+                      </a:solidFill>
+                      <a:prstDash val="solid"/>
+                      <a:round/>
+                      <a:headEnd type="none" w="med" len="med"/>
+                      <a:tailEnd type="none" w="med" len="med"/>
+                    </a:lnT>
+                    <a:lnB w="9525" cap="flat" cmpd="sng" algn="ctr">
+                      <a:solidFill>
+                        <a:srgbClr val="FFFFFF"/>
+                      </a:solidFill>
+                      <a:prstDash val="solid"/>
+                      <a:round/>
+                      <a:headEnd type="none" w="med" len="med"/>
+                      <a:tailEnd type="none" w="med" len="med"/>
+                    </a:lnB>
+                    <a:solidFill>
+                      <a:srgbClr val="F2F2F2"/>
+                    </a:solidFill>
+                  </a:tcPr>
+                </a:tc>
+                <a:tc>
+                  <a:txBody>
+                    <a:bodyPr/>
+                    <a:lstStyle/>
+                    <a:p>
+                      <a:pPr algn="ctr" indent="0" marL="0">
+                        <a:buNone/>
+                      </a:pPr>
+                      <a:r>
+                        <a:rPr lang="en-US" sz="950" b="1" dirty="0">
+                          <a:solidFill>
+                            <a:srgbClr val="000000"/>
+                          </a:solidFill>
+                        </a:rPr>
+                        <a:t>100%</a:t>
+                      </a:r>
+                      <a:endParaRPr lang="en-US" sz="950" dirty="0"/>
+                    </a:p>
+                  </a:txBody>
+                  <a:tcPr marL="36576" marR="36576" marT="36576" marB="36576" anchor="ctr">
+                    <a:lnL w="9525" cap="flat" cmpd="sng" algn="ctr">
+                      <a:solidFill>
+                        <a:srgbClr val="FFFFFF"/>
+                      </a:solidFill>
+                      <a:prstDash val="solid"/>
+                      <a:round/>
+                      <a:headEnd type="none" w="med" len="med"/>
+                      <a:tailEnd type="none" w="med" len="med"/>
+                    </a:lnL>
+                    <a:lnR w="9525" cap="flat" cmpd="sng" algn="ctr">
+                      <a:solidFill>
+                        <a:srgbClr val="FFFFFF"/>
+                      </a:solidFill>
+                      <a:prstDash val="solid"/>
+                      <a:round/>
+                      <a:headEnd type="none" w="med" len="med"/>
+                      <a:tailEnd type="none" w="med" len="med"/>
+                    </a:lnR>
+                    <a:lnT w="9525" cap="flat" cmpd="sng" algn="ctr">
+                      <a:solidFill>
+                        <a:srgbClr val="FFFFFF"/>
+                      </a:solidFill>
+                      <a:prstDash val="solid"/>
+                      <a:round/>
+                      <a:headEnd type="none" w="med" len="med"/>
+                      <a:tailEnd type="none" w="med" len="med"/>
+                    </a:lnT>
+                    <a:lnB w="9525" cap="flat" cmpd="sng" algn="ctr">
+                      <a:solidFill>
+                        <a:srgbClr val="FFFFFF"/>
+                      </a:solidFill>
+                      <a:prstDash val="solid"/>
+                      <a:round/>
+                      <a:headEnd type="none" w="med" len="med"/>
+                      <a:tailEnd type="none" w="med" len="med"/>
+                    </a:lnB>
+                    <a:solidFill>
+                      <a:srgbClr val="F2F2F2"/>
+                    </a:solidFill>
+                  </a:tcPr>
+                </a:tc>
+                <a:tc>
+                  <a:txBody>
+                    <a:bodyPr/>
+                    <a:lstStyle/>
+                    <a:p>
+                      <a:pPr algn="ctr" indent="0" marL="0">
+                        <a:buNone/>
+                      </a:pPr>
+                      <a:r>
+                        <a:rPr lang="en-US" sz="950" b="1" dirty="0">
+                          <a:solidFill>
+                            <a:srgbClr val="000000"/>
+                          </a:solidFill>
+                        </a:rPr>
+                        <a:t>117.85</a:t>
+                      </a:r>
+                      <a:endParaRPr lang="en-US" sz="950" dirty="0"/>
+                    </a:p>
+                  </a:txBody>
+                  <a:tcPr marL="36576" marR="36576" marT="36576" marB="36576" anchor="ctr">
+                    <a:lnL w="9525" cap="flat" cmpd="sng" algn="ctr">
+                      <a:solidFill>
+                        <a:srgbClr val="FFFFFF"/>
+                      </a:solidFill>
+                      <a:prstDash val="solid"/>
+                      <a:round/>
+                      <a:headEnd type="none" w="med" len="med"/>
+                      <a:tailEnd type="none" w="med" len="med"/>
+                    </a:lnL>
+                    <a:lnR w="9525" cap="flat" cmpd="sng" algn="ctr">
+                      <a:solidFill>
+                        <a:srgbClr val="FFFFFF"/>
+                      </a:solidFill>
+                      <a:prstDash val="solid"/>
+                      <a:round/>
+                      <a:headEnd type="none" w="med" len="med"/>
+                      <a:tailEnd type="none" w="med" len="med"/>
+                    </a:lnR>
+                    <a:lnT w="9525" cap="flat" cmpd="sng" algn="ctr">
+                      <a:solidFill>
+                        <a:srgbClr val="FFFFFF"/>
+                      </a:solidFill>
+                      <a:prstDash val="solid"/>
+                      <a:round/>
+                      <a:headEnd type="none" w="med" len="med"/>
+                      <a:tailEnd type="none" w="med" len="med"/>
+                    </a:lnT>
+                    <a:lnB w="9525" cap="flat" cmpd="sng" algn="ctr">
+                      <a:solidFill>
+                        <a:srgbClr val="FFFFFF"/>
+                      </a:solidFill>
+                      <a:prstDash val="solid"/>
+                      <a:round/>
+                      <a:headEnd type="none" w="med" len="med"/>
+                      <a:tailEnd type="none" w="med" len="med"/>
+                    </a:lnB>
+                    <a:solidFill>
+                      <a:srgbClr val="F2F2F2"/>
+                    </a:solidFill>
+                  </a:tcPr>
+                </a:tc>
+                <a:tc>
+                  <a:txBody>
+                    <a:bodyPr/>
+                    <a:lstStyle/>
+                    <a:p>
+                      <a:pPr algn="ctr" indent="0" marL="0">
+                        <a:buNone/>
+                      </a:pPr>
+                      <a:r>
+                        <a:rPr lang="en-US" sz="950" b="1" dirty="0">
+                          <a:solidFill>
+                            <a:srgbClr val="000000"/>
+                          </a:solidFill>
+                        </a:rPr>
+                        <a:t>124.86</a:t>
+                      </a:r>
+                      <a:endParaRPr lang="en-US" sz="950" dirty="0"/>
+                    </a:p>
+                  </a:txBody>
+                  <a:tcPr marL="36576" marR="36576" marT="36576" marB="36576" anchor="ctr">
+                    <a:lnL w="9525" cap="flat" cmpd="sng" algn="ctr">
+                      <a:solidFill>
+                        <a:srgbClr val="FFFFFF"/>
+                      </a:solidFill>
+                      <a:prstDash val="solid"/>
+                      <a:round/>
+                      <a:headEnd type="none" w="med" len="med"/>
+                      <a:tailEnd type="none" w="med" len="med"/>
+                    </a:lnL>
+                    <a:lnR w="9525" cap="flat" cmpd="sng" algn="ctr">
+                      <a:solidFill>
+                        <a:srgbClr val="FFFFFF"/>
+                      </a:solidFill>
+                      <a:prstDash val="solid"/>
+                      <a:round/>
+                      <a:headEnd type="none" w="med" len="med"/>
+                      <a:tailEnd type="none" w="med" len="med"/>
+                    </a:lnR>
+                    <a:lnT w="9525" cap="flat" cmpd="sng" algn="ctr">
+                      <a:solidFill>
+                        <a:srgbClr val="FFFFFF"/>
+                      </a:solidFill>
+                      <a:prstDash val="solid"/>
+                      <a:round/>
+                      <a:headEnd type="none" w="med" len="med"/>
+                      <a:tailEnd type="none" w="med" len="med"/>
+                    </a:lnT>
+                    <a:lnB w="9525" cap="flat" cmpd="sng" algn="ctr">
+                      <a:solidFill>
+                        <a:srgbClr val="FFFFFF"/>
+                      </a:solidFill>
+                      <a:prstDash val="solid"/>
+                      <a:round/>
+                      <a:headEnd type="none" w="med" len="med"/>
+                      <a:tailEnd type="none" w="med" len="med"/>
+                    </a:lnB>
+                    <a:solidFill>
+                      <a:srgbClr val="F2F2F2"/>
+                    </a:solidFill>
+                  </a:tcPr>
+                </a:tc>
+                <a:tc>
+                  <a:txBody>
+                    <a:bodyPr/>
+                    <a:lstStyle/>
+                    <a:p>
+                      <a:pPr algn="ctr" indent="0" marL="0">
+                        <a:buNone/>
+                      </a:pPr>
+                      <a:r>
+                        <a:rPr lang="en-US" sz="950" b="1" dirty="0">
+                          <a:solidFill>
+                            <a:srgbClr val="000000"/>
+                          </a:solidFill>
+                        </a:rPr>
+                        <a:t>106%</a:t>
+                      </a:r>
+                      <a:endParaRPr lang="en-US" sz="950" dirty="0"/>
+                    </a:p>
+                  </a:txBody>
+                  <a:tcPr marL="36576" marR="36576" marT="36576" marB="36576" anchor="ctr">
+                    <a:lnL w="9525" cap="flat" cmpd="sng" algn="ctr">
+                      <a:solidFill>
+                        <a:srgbClr val="FFFFFF"/>
+                      </a:solidFill>
+                      <a:prstDash val="solid"/>
+                      <a:round/>
+                      <a:headEnd type="none" w="med" len="med"/>
+                      <a:tailEnd type="none" w="med" len="med"/>
+                    </a:lnL>
+                    <a:lnR w="9525" cap="flat" cmpd="sng" algn="ctr">
+                      <a:solidFill>
+                        <a:srgbClr val="FFFFFF"/>
+                      </a:solidFill>
+                      <a:prstDash val="solid"/>
+                      <a:round/>
+                      <a:headEnd type="none" w="med" len="med"/>
+                      <a:tailEnd type="none" w="med" len="med"/>
+                    </a:lnR>
+                    <a:lnT w="9525" cap="flat" cmpd="sng" algn="ctr">
+                      <a:solidFill>
+                        <a:srgbClr val="FFFFFF"/>
+                      </a:solidFill>
+                      <a:prstDash val="solid"/>
+                      <a:round/>
+                      <a:headEnd type="none" w="med" len="med"/>
+                      <a:tailEnd type="none" w="med" len="med"/>
+                    </a:lnT>
+                    <a:lnB w="9525" cap="flat" cmpd="sng" algn="ctr">
+                      <a:solidFill>
+                        <a:srgbClr val="FFFFFF"/>
+                      </a:solidFill>
+                      <a:prstDash val="solid"/>
+                      <a:round/>
+                      <a:headEnd type="none" w="med" len="med"/>
+                      <a:tailEnd type="none" w="med" len="med"/>
+                    </a:lnB>
+                    <a:solidFill>
+                      <a:srgbClr val="F2F2F2"/>
+                    </a:solidFill>
+                  </a:tcPr>
+                </a:tc>
+                <a:tc>
+                  <a:txBody>
+                    <a:bodyPr/>
+                    <a:lstStyle/>
+                    <a:p>
+                      <a:pPr algn="ctr" indent="0" marL="0">
+                        <a:buNone/>
+                      </a:pPr>
+                      <a:r>
+                        <a:rPr lang="en-US" sz="950" b="1" dirty="0">
+                          <a:solidFill>
+                            <a:srgbClr val="000000"/>
+                          </a:solidFill>
+                        </a:rPr>
+                        <a:t>+7.00</a:t>
+                      </a:r>
+                      <a:endParaRPr lang="en-US" sz="950" dirty="0"/>
+                    </a:p>
+                  </a:txBody>
+                  <a:tcPr marL="36576" marR="36576" marT="36576" marB="36576" anchor="ctr">
+                    <a:lnL w="9525" cap="flat" cmpd="sng" algn="ctr">
+                      <a:solidFill>
+                        <a:srgbClr val="FFFFFF"/>
+                      </a:solidFill>
+                      <a:prstDash val="solid"/>
+                      <a:round/>
+                      <a:headEnd type="none" w="med" len="med"/>
+                      <a:tailEnd type="none" w="med" len="med"/>
+                    </a:lnL>
+                    <a:lnR w="9525" cap="flat" cmpd="sng" algn="ctr">
+                      <a:solidFill>
+                        <a:srgbClr val="FFFFFF"/>
+                      </a:solidFill>
+                      <a:prstDash val="solid"/>
+                      <a:round/>
+                      <a:headEnd type="none" w="med" len="med"/>
+                      <a:tailEnd type="none" w="med" len="med"/>
+                    </a:lnR>
+                    <a:lnT w="9525" cap="flat" cmpd="sng" algn="ctr">
+                      <a:solidFill>
+                        <a:srgbClr val="FFFFFF"/>
+                      </a:solidFill>
+                      <a:prstDash val="solid"/>
+                      <a:round/>
+                      <a:headEnd type="none" w="med" len="med"/>
+                      <a:tailEnd type="none" w="med" len="med"/>
+                    </a:lnT>
+                    <a:lnB w="9525" cap="flat" cmpd="sng" algn="ctr">
+                      <a:solidFill>
+                        <a:srgbClr val="FFFFFF"/>
+                      </a:solidFill>
+                      <a:prstDash val="solid"/>
+                      <a:round/>
+                      <a:headEnd type="none" w="med" len="med"/>
+                      <a:tailEnd type="none" w="med" len="med"/>
+                    </a:lnB>
+                    <a:solidFill>
+                      <a:srgbClr val="F2F2F2"/>
+                    </a:solidFill>
+                  </a:tcPr>
+                </a:tc>
+              </a:tr>
+            </a:tbl>
+          </a:graphicData>
+        </a:graphic>
+      </p:graphicFrame>
+      <p:sp>
+        <p:nvSpPr>
+          <p:cNvPr id="22" name="Text 18"/>
+          <p:cNvSpPr txBox="1"/>
+          <p:nvPr/>
+        </p:nvSpPr>
+        <p:spPr>
+          <a:xfrm>
+            <a:off x="7863840" y="3858768"/>
+            <a:ext cx="3886200" cy="201168"/>
+          </a:xfrm>
+          <a:prstGeom prst="rect">
+            <a:avLst/>
+          </a:prstGeom>
+          <a:noFill/>
+          <a:ln/>
+        </p:spPr>
+        <p:txBody>
+          <a:bodyPr wrap="square" lIns="0" tIns="0" rIns="0" bIns="0" rtlCol="0" anchor="ctr"/>
+          <a:lstStyle/>
+          <a:p>
+            <a:pPr indent="0" marL="0">
+              <a:buNone/>
+            </a:pPr>
+            <a:r>
+              <a:rPr lang="en-US" sz="850" dirty="0">
+                <a:solidFill>
+                  <a:srgbClr val="7F7F7F"/>
+                </a:solidFill>
+              </a:rPr>
+              <a:t>單位：億元；級距同116年方案1之115年年化達成率分類</a:t>
+            </a:r>
+            <a:endParaRPr lang="en-US" sz="850" dirty="0"/>
+          </a:p>
+        </p:txBody>
+      </p:sp>
+      <p:sp>
+        <p:nvSpPr>
+          <p:cNvPr id="23" name="insight"/>
+          <p:cNvSpPr/>
+          <p:nvPr/>
+        </p:nvSpPr>
+        <p:spPr>
+          <a:xfrm>
+            <a:off x="7863840" y="4069080"/>
+            <a:ext cx="3886200" cy="2057400"/>
+          </a:xfrm>
+          <a:prstGeom prst="rect">
+            <a:avLst/>
+          </a:prstGeom>
+          <a:solidFill>
+            <a:srgbClr val="FDF1E9"/>
+          </a:solidFill>
+          <a:ln w="12700">
+            <a:solidFill>
+              <a:srgbClr val="FDF1E9"/>
+            </a:solidFill>
+            <a:prstDash val="solid"/>
+          </a:ln>
+        </p:spPr>
+      </p:sp>
+      <p:sp>
+        <p:nvSpPr>
+          <p:cNvPr id="24" name="Text 20"/>
+          <p:cNvSpPr txBox="1"/>
+          <p:nvPr/>
+        </p:nvSpPr>
+        <p:spPr>
+          <a:xfrm>
+            <a:off x="7955280" y="4114800"/>
+            <a:ext cx="3703320" cy="1965960"/>
+          </a:xfrm>
+          <a:prstGeom prst="rect">
+            <a:avLst/>
+          </a:prstGeom>
+          <a:noFill/>
+          <a:ln/>
+        </p:spPr>
+        <p:txBody>
+          <a:bodyPr wrap="square" lIns="381" tIns="381" rIns="381" bIns="381" rtlCol="0" anchor="t"/>
+          <a:lstStyle/>
+          <a:p>
+            <a:pPr indent="0" marL="0">
+              <a:spcAft>
+                <a:spcPts val="300"/>
+              </a:spcAft>
+              <a:buNone/>
+            </a:pPr>
+            <a:r>
+              <a:rPr lang="en-US" sz="1050" b="1" dirty="0">
+                <a:solidFill>
+                  <a:srgbClr val="C00000"/>
+                </a:solidFill>
+              </a:rPr>
+              <a:t>解讀</a:t>
+            </a:r>
+            <a:endParaRPr lang="en-US" sz="1050" dirty="0"/>
+          </a:p>
+          <a:p>
+            <a:pPr marL="342900" indent="-342900">
+              <a:spcAft>
+                <a:spcPts val="300"/>
+              </a:spcAft>
+              <a:buSzPct val="100000"/>
+              <a:buChar char="•"/>
+            </a:pPr>
+            <a:r>
+              <a:rPr lang="en-US" sz="1050" dirty="0">
+                <a:solidFill>
+                  <a:srgbClr val="000000"/>
+                </a:solidFill>
+              </a:rPr>
+              <a:t>分布呈右偏：半數分行達成率在101%以下，但120%以上有47家（26%）大幅超額，拉高全行至105.9%。</a:t>
+            </a:r>
+            <a:endParaRPr lang="en-US" sz="1050" dirty="0"/>
+          </a:p>
+          <a:p>
+            <a:pPr marL="342900" indent="-342900">
+              <a:spcAft>
+                <a:spcPts val="300"/>
+              </a:spcAft>
+              <a:buSzPct val="100000"/>
+              <a:buChar char="•"/>
+            </a:pPr>
+            <a:r>
+              <a:rPr lang="en-US" sz="1050" dirty="0">
+                <a:solidFill>
+                  <a:srgbClr val="000000"/>
+                </a:solidFill>
+              </a:rPr>
+              <a:t>75%～100%是最大族群（65家、36%），這群「差一點達標」的分行缺口4.76億，是116年規則最該關照的對象。</a:t>
+            </a:r>
+            <a:endParaRPr lang="en-US" sz="1050" dirty="0"/>
+          </a:p>
+          <a:p>
+            <a:pPr marL="342900" indent="-342900">
+              <a:spcAft>
+                <a:spcPts val="300"/>
+              </a:spcAft>
+              <a:buSzPct val="100000"/>
+              <a:buChar char="•"/>
+            </a:pPr>
+            <a:r>
+              <a:rPr lang="en-US" sz="1050" dirty="0">
+                <a:solidFill>
+                  <a:srgbClr val="000000"/>
+                </a:solidFill>
+              </a:rPr>
+              <a:t>未達75%的19家缺口3.47億，達成率僅68%。</a:t>
+            </a:r>
+            <a:endParaRPr lang="en-US" sz="1050" dirty="0"/>
+          </a:p>
+        </p:txBody>
+      </p:sp>
+      <p:sp>
+        <p:nvSpPr>
+          <p:cNvPr id="25" name="Slide Number Placeholder 0"/>
+          <p:cNvSpPr>
+            <a:spLocks noGrp="1"/>
+          </p:cNvSpPr>
+          <p:nvPr>
+            <p:ph type="sldNum" sz="quarter" idx="4294967295"/>
+          </p:nvPr>
+        </p:nvSpPr>
+        <p:spPr>
+          <a:xfrm>
+            <a:off x="10972800" y="6309360"/>
+            <a:ext cx="822960" cy="365760"/>
+          </a:xfrm>
+          <a:prstGeom prst="rect">
+            <a:avLst/>
+          </a:prstGeom>
+          <a:extLst>
+            <a:ext uri="{C572A759-6A51-4108-AA02-DFA0A04FC94B}">
+              <ma14:wrappingTextBoxFlag xmlns:ma14="http://schemas.microsoft.com/office/mac/drawingml/2011/main" val="0"/>
+            </a:ext>
+          </a:extLst>
+        </p:spPr>
+        <p:txBody>
+          <a:bodyPr/>
+          <a:lstStyle>
+            <a:lvl1pPr>
+              <a:defRPr sz="1400">
+                <a:solidFill>
+                  <a:schemeClr val="tx1"/>
+                </a:solidFill>
+              </a:defRPr>
+            </a:lvl1pPr>
+          </a:lstStyle>
+          <a:p>
+            <a:pPr algn="r"/>
+            <a:fld id="{F7021451-1387-4CA6-816F-3879F97B5CBC}" type="slidenum">
+              <a:rPr b="1" lang="en-US"/>
+              <a:t>2</a:t>
+            </a:fld>
+            <a:endParaRPr lang="en-US"/>
+          </a:p>
+        </p:txBody>
+      </p:sp>
+    </p:spTree>
+  </p:cSld>
+  <p:clrMapOvr>
+    <a:masterClrMapping/>
+  </p:clrMapOvr>
+</p:sld>
+</file>
+
+<file path=ppt/slides/slide11.xml><?xml version="1.0" encoding="utf-8"?>
+<p:sld xmlns:a="http://schemas.openxmlformats.org/drawingml/2006/main" xmlns:r="http://schemas.openxmlformats.org/officeDocument/2006/relationships" xmlns:p="http://schemas.openxmlformats.org/presentationml/2006/main">
+  <p:cSld name="Slide 3">
+    <p:spTree>
+      <p:nvGrpSpPr>
+        <p:cNvPr id="1" name=""/>
+        <p:cNvGrpSpPr/>
+        <p:nvPr/>
+      </p:nvGrpSpPr>
+      <p:grpSpPr>
+        <a:xfrm>
+          <a:off x="0" y="0"/>
+          <a:ext cx="0" cy="0"/>
+          <a:chOff x="0" y="0"/>
+          <a:chExt cx="0" cy="0"/>
+        </a:xfrm>
+      </p:grpSpPr>
+      <p:sp>
+        <p:nvSpPr>
+          <p:cNvPr id="2" name="Text 1"/>
+          <p:cNvSpPr/>
+          <p:nvPr>
+            <p:ph idx="102" type="title" hasCustomPrompt="1"/>
+          </p:nvPr>
+        </p:nvSpPr>
+        <p:spPr>
+          <a:xfrm>
+            <a:off x="1645920" y="274320"/>
+            <a:ext cx="8869680" cy="777240"/>
+          </a:xfrm>
+          <a:prstGeom prst="rect">
+            <a:avLst/>
+          </a:prstGeom>
+          <a:noFill/>
+          <a:ln/>
+        </p:spPr>
+        <p:txBody>
+          <a:bodyPr wrap="square" lIns="0" tIns="0" rIns="0" bIns="0" rtlCol="0" anchor="ctr"/>
+          <a:lstStyle/>
+          <a:p>
+            <a:pPr algn="ctr" indent="0" marL="0">
+              <a:buNone/>
+            </a:pPr>
+            <a:r>
+              <a:rPr lang="en-US" sz="3000" b="1" dirty="0">
+                <a:solidFill>
+                  <a:schemeClr val="tx1"/>
+                </a:solidFill>
+              </a:rPr>
               <a:t>114年 → 115年 分行達成率流向矩陣</a:t>
             </a:r>
             <a:endParaRPr lang="en-US" sz="3000" dirty="0"/>
@@ -5675,7 +10564,7 @@
       </p:sp>
       <p:graphicFrame>
         <p:nvGraphicFramePr>
-          <p:cNvPr id="3" name="Table 0"/>
+          <p:cNvPr id="4" name="Table 0"/>
           <p:cNvGraphicFramePr>
             <a:graphicFrameLocks noGrp="1"/>
           </p:cNvGraphicFramePr>
@@ -11755,7 +16644,7 @@
             <a:pPr algn="r"/>
             <a:fld id="{F7021451-1387-4CA6-816F-3879F97B5CBC}" type="slidenum">
               <a:rPr b="1" lang="en-US"/>
-              <a:t>2</a:t>
+              <a:t>3</a:t>
             </a:fld>
             <a:endParaRPr lang="en-US"/>
           </a:p>
@@ -11769,9 +16658,9 @@
 </p:sld>
 </file>
 
-<file path=ppt/slides/slide11.xml><?xml version="1.0" encoding="utf-8"?>
+<file path=ppt/slides/slide12.xml><?xml version="1.0" encoding="utf-8"?>
 <p:sld xmlns:a="http://schemas.openxmlformats.org/drawingml/2006/main" xmlns:r="http://schemas.openxmlformats.org/officeDocument/2006/relationships" xmlns:p="http://schemas.openxmlformats.org/presentationml/2006/main">
-  <p:cSld name="Slide 3">
+  <p:cSld name="Slide 4">
     <p:spTree>
       <p:nvGrpSpPr>
         <p:cNvPr id="1" name=""/>
@@ -12108,7 +16997,7 @@
             <a:pPr algn="r"/>
             <a:fld id="{F7021451-1387-4CA6-816F-3879F97B5CBC}" type="slidenum">
               <a:rPr b="1" lang="en-US"/>
-              <a:t>3</a:t>
+              <a:t>4</a:t>
             </a:fld>
             <a:endParaRPr lang="en-US"/>
           </a:p>
@@ -12122,9 +17011,9 @@
 </p:sld>
 </file>
 
-<file path=ppt/slides/slide12.xml><?xml version="1.0" encoding="utf-8"?>
+<file path=ppt/slides/slide13.xml><?xml version="1.0" encoding="utf-8"?>
 <p:sld xmlns:a="http://schemas.openxmlformats.org/drawingml/2006/main" xmlns:r="http://schemas.openxmlformats.org/officeDocument/2006/relationships" xmlns:p="http://schemas.openxmlformats.org/presentationml/2006/main">
-  <p:cSld name="Slide 4">
+  <p:cSld name="Slide 5">
     <p:spTree>
       <p:nvGrpSpPr>
         <p:cNvPr id="1" name=""/>
@@ -12838,7 +17727,7 @@
       </p:sp>
       <p:graphicFrame>
         <p:nvGraphicFramePr>
-          <p:cNvPr id="5" name="Table 0"/>
+          <p:cNvPr id="6" name="Table 0"/>
           <p:cNvGraphicFramePr>
             <a:graphicFrameLocks noGrp="1"/>
           </p:cNvGraphicFramePr>
@@ -15138,7 +20027,7 @@
       </p:sp>
       <p:graphicFrame>
         <p:nvGraphicFramePr>
-          <p:cNvPr id="9" name="Table 1"/>
+          <p:cNvPr id="11" name="Table 1"/>
           <p:cNvGraphicFramePr>
             <a:graphicFrameLocks noGrp="1"/>
           </p:cNvGraphicFramePr>
@@ -16943,7 +21832,7 @@
             <a:pPr algn="r"/>
             <a:fld id="{F7021451-1387-4CA6-816F-3879F97B5CBC}" type="slidenum">
               <a:rPr b="1" lang="en-US"/>
-              <a:t>4</a:t>
+              <a:t>5</a:t>
             </a:fld>
             <a:endParaRPr lang="en-US"/>
           </a:p>
@@ -16957,9 +21846,9 @@
 </p:sld>
 </file>
 
-<file path=ppt/slides/slide13.xml><?xml version="1.0" encoding="utf-8"?>
+<file path=ppt/slides/slide14.xml><?xml version="1.0" encoding="utf-8"?>
 <p:sld xmlns:a="http://schemas.openxmlformats.org/drawingml/2006/main" xmlns:r="http://schemas.openxmlformats.org/officeDocument/2006/relationships" xmlns:p="http://schemas.openxmlformats.org/presentationml/2006/main">
-  <p:cSld name="Slide 5">
+  <p:cSld name="Slide 6">
     <p:spTree>
       <p:nvGrpSpPr>
         <p:cNvPr id="1" name=""/>
@@ -17463,7 +22352,7 @@
             <a:pPr algn="r"/>
             <a:fld id="{F7021451-1387-4CA6-816F-3879F97B5CBC}" type="slidenum">
               <a:rPr b="1" lang="en-US"/>
-              <a:t>5</a:t>
+              <a:t>6</a:t>
             </a:fld>
             <a:endParaRPr lang="en-US"/>
           </a:p>

--- a/output/財管手收目標訂定原則比較_115vs116方案_EDITED_VER2_加分行表現分析.pptx
+++ b/output/財管手收目標訂定原則比較_115vs116方案_EDITED_VER2_加分行表現分析.pptx
@@ -22,6 +22,7 @@
     <p:sldId id="304" r:id="rId104"/>
     <p:sldId id="305" r:id="rId105"/>
     <p:sldId id="306" r:id="rId106"/>
+    <p:sldId id="307" r:id="rId107"/>
   </p:sldIdLst>
   <p:sldSz cx="12192000" cy="6858000"/>
   <p:notesSz cx="6858000" cy="12192000"/>
@@ -144,7 +145,7 @@
             <p14:sldId id="263"/>
           </p14:sldIdLst>
         </p14:section>
-        <p14:section name="114→115 分行表現分析" id="{A9D20A46-FB7C-49A8-9E55-A863E43001A9}">
+        <p14:section name="114→115 分行表現分析" id="{06D81E1A-27C0-4AEB-A698-55C16EF25A90}">
           <p14:sldIdLst>
             <p14:sldId id="301"/>
             <p14:sldId id="302"/>
@@ -152,6 +153,7 @@
             <p14:sldId id="304"/>
             <p14:sldId id="305"/>
             <p14:sldId id="306"/>
+            <p14:sldId id="307"/>
           </p14:sldIdLst>
         </p14:section>
       </p14:sectionLst>
@@ -580,6 +582,405 @@
 </file>
 
 <file path=ppt/charts/chart2.xml><?xml version="1.0" encoding="utf-8"?>
+<c:chartSpace xmlns:c="http://schemas.openxmlformats.org/drawingml/2006/chart" xmlns:a="http://schemas.openxmlformats.org/drawingml/2006/main" xmlns:r="http://schemas.openxmlformats.org/officeDocument/2006/relationships">
+  <c:date1904 val="0"/>
+  <c:roundedCorners val="1"/>
+  <c:chart>
+    <c:title>
+      <c:tx>
+        <c:rich>
+          <a:bodyPr/>
+          <a:lstStyle/>
+          <a:p>
+            <a:pPr>
+              <a:defRPr sz="1100" b="0" i="0" u="none" strike="noStrike">
+                <a:solidFill>
+                  <a:srgbClr val="000000"/>
+                </a:solidFill>
+                <a:latin typeface="+mn-lt"/>
+              </a:defRPr>
+            </a:pPr>
+            <a:r>
+              <a:rPr sz="1100" b="0" i="0" u="none" strike="noStrike">
+                <a:solidFill>
+                  <a:srgbClr val="000000"/>
+                </a:solidFill>
+                <a:latin typeface="+mn-lt"/>
+              </a:rPr>
+              <a:t>各通路區達成率：115年 vs 114年</a:t>
+            </a:r>
+          </a:p>
+        </c:rich>
+      </c:tx>
+      <c:layout/>
+      <c:overlay val="0"/>
+    </c:title>
+    <c:autoTitleDeleted val="0"/>
+    <c:plotArea>
+      <c:layout/>
+      <c:barChart>
+        <c:barDir val="bar"/>
+        <c:grouping val="clustered"/>
+        <c:varyColors val="0"/>
+        <c:ser>
+          <c:idx val="0"/>
+          <c:order val="0"/>
+          <c:tx>
+            <c:strRef>
+              <c:f>Sheet1!$B$1</c:f>
+              <c:strCache>
+                <c:ptCount val="1"/>
+                <c:pt idx="0">
+                  <c:v>115年達成率</c:v>
+                </c:pt>
+              </c:strCache>
+            </c:strRef>
+          </c:tx>
+          <c:spPr>
+            <a:solidFill>
+              <a:srgbClr val="C00000"/>
+            </a:solidFill>
+            <a:effectLst/>
+          </c:spPr>
+          <c:invertIfNegative val="0"/>
+          <c:dLbls>
+            <c:numFmt formatCode="0.0&quot;%&quot;" sourceLinked="0"/>
+            <c:txPr>
+              <a:bodyPr/>
+              <a:lstStyle/>
+              <a:p>
+                <a:pPr>
+                  <a:defRPr b="0" i="0" strike="noStrike" sz="950" u="none">
+                    <a:solidFill>
+                      <a:srgbClr val="000000"/>
+                    </a:solidFill>
+                    <a:latin typeface="+mn-lt"/>
+                  </a:defRPr>
+                </a:pPr>
+              </a:p>
+            </c:txPr>
+            <c:showLegendKey val="0"/>
+            <c:showVal val="1"/>
+            <c:showCatName val="0"/>
+            <c:showSerName val="0"/>
+            <c:showPercent val="0"/>
+            <c:showBubbleSize val="0"/>
+            <c:showLeaderLines val="0"/>
+          </c:dLbls>
+          <c:cat>
+            <c:multiLvlStrRef>
+              <c:f>Sheet1!$A$2:$A$6</c:f>
+              <c:multiLvlStrCache>
+                <c:ptCount val="5"/>
+                <c:lvl>
+                  <c:pt idx="0">
+                    <c:v>北二區</c:v>
+                  </c:pt>
+                  <c:pt idx="1">
+                    <c:v>北一區</c:v>
+                  </c:pt>
+                  <c:pt idx="2">
+                    <c:v>北三區</c:v>
+                  </c:pt>
+                  <c:pt idx="3">
+                    <c:v>中區</c:v>
+                  </c:pt>
+                  <c:pt idx="4">
+                    <c:v>南區</c:v>
+                  </c:pt>
+                </c:lvl>
+              </c:multiLvlStrCache>
+            </c:multiLvlStrRef>
+          </c:cat>
+          <c:val>
+            <c:numRef>
+              <c:f>Sheet1!$B$2:$B$6</c:f>
+              <c:numCache>
+                <c:formatCode>General</c:formatCode>
+                <c:ptCount val="5"/>
+                <c:pt idx="0">
+                  <c:v>113.9</c:v>
+                </c:pt>
+                <c:pt idx="1">
+                  <c:v>107</c:v>
+                </c:pt>
+                <c:pt idx="2">
+                  <c:v>102.8</c:v>
+                </c:pt>
+                <c:pt idx="3">
+                  <c:v>102.7</c:v>
+                </c:pt>
+                <c:pt idx="4">
+                  <c:v>101.8</c:v>
+                </c:pt>
+              </c:numCache>
+            </c:numRef>
+          </c:val>
+        </c:ser>
+        <c:ser>
+          <c:idx val="1"/>
+          <c:order val="1"/>
+          <c:tx>
+            <c:strRef>
+              <c:f>Sheet1!$C$1</c:f>
+              <c:strCache>
+                <c:ptCount val="1"/>
+                <c:pt idx="0">
+                  <c:v>114年達成率</c:v>
+                </c:pt>
+              </c:strCache>
+            </c:strRef>
+          </c:tx>
+          <c:spPr>
+            <a:solidFill>
+              <a:srgbClr val="C5C5C5"/>
+            </a:solidFill>
+            <a:effectLst/>
+          </c:spPr>
+          <c:invertIfNegative val="0"/>
+          <c:dLbls>
+            <c:numFmt formatCode="0.0&quot;%&quot;" sourceLinked="0"/>
+            <c:txPr>
+              <a:bodyPr/>
+              <a:lstStyle/>
+              <a:p>
+                <a:pPr>
+                  <a:defRPr b="0" i="0" strike="noStrike" sz="950" u="none">
+                    <a:solidFill>
+                      <a:srgbClr val="000000"/>
+                    </a:solidFill>
+                    <a:latin typeface="+mn-lt"/>
+                  </a:defRPr>
+                </a:pPr>
+              </a:p>
+            </c:txPr>
+            <c:showLegendKey val="0"/>
+            <c:showVal val="1"/>
+            <c:showCatName val="0"/>
+            <c:showSerName val="0"/>
+            <c:showPercent val="0"/>
+            <c:showBubbleSize val="0"/>
+            <c:showLeaderLines val="0"/>
+          </c:dLbls>
+          <c:cat>
+            <c:multiLvlStrRef>
+              <c:f>Sheet1!$A$2:$A$6</c:f>
+              <c:multiLvlStrCache>
+                <c:ptCount val="5"/>
+                <c:lvl>
+                  <c:pt idx="0">
+                    <c:v>北二區</c:v>
+                  </c:pt>
+                  <c:pt idx="1">
+                    <c:v>北一區</c:v>
+                  </c:pt>
+                  <c:pt idx="2">
+                    <c:v>北三區</c:v>
+                  </c:pt>
+                  <c:pt idx="3">
+                    <c:v>中區</c:v>
+                  </c:pt>
+                  <c:pt idx="4">
+                    <c:v>南區</c:v>
+                  </c:pt>
+                </c:lvl>
+              </c:multiLvlStrCache>
+            </c:multiLvlStrRef>
+          </c:cat>
+          <c:val>
+            <c:numRef>
+              <c:f>Sheet1!$C$2:$C$6</c:f>
+              <c:numCache>
+                <c:formatCode>General</c:formatCode>
+                <c:ptCount val="5"/>
+                <c:pt idx="0">
+                  <c:v>97.5</c:v>
+                </c:pt>
+                <c:pt idx="1">
+                  <c:v>88.9</c:v>
+                </c:pt>
+                <c:pt idx="2">
+                  <c:v>96.4</c:v>
+                </c:pt>
+                <c:pt idx="3">
+                  <c:v>105.3</c:v>
+                </c:pt>
+                <c:pt idx="4">
+                  <c:v>102.4</c:v>
+                </c:pt>
+              </c:numCache>
+            </c:numRef>
+          </c:val>
+        </c:ser>
+        <c:dLbls>
+          <c:numFmt formatCode="0.0&quot;%&quot;" sourceLinked="0"/>
+          <c:txPr>
+            <a:bodyPr/>
+            <a:lstStyle/>
+            <a:p>
+              <a:pPr>
+                <a:defRPr b="0" i="0" strike="noStrike" sz="950" u="none">
+                  <a:solidFill>
+                    <a:srgbClr val="000000"/>
+                  </a:solidFill>
+                  <a:latin typeface="+mn-lt"/>
+                </a:defRPr>
+              </a:pPr>
+            </a:p>
+          </c:txPr>
+          <c:showLegendKey val="0"/>
+          <c:showVal val="1"/>
+          <c:showCatName val="0"/>
+          <c:showSerName val="0"/>
+          <c:showPercent val="0"/>
+          <c:showBubbleSize val="0"/>
+          <c:showLeaderLines val="0"/>
+        </c:dLbls>
+        <c:gapWidth val="40"/>
+        <c:overlap val="0"/>
+        <c:axId val="2094734554"/>
+        <c:axId val="2094734552"/>
+        <c:axId val="2094734556"/>
+      </c:barChart>
+      <c:catAx>
+        <c:axId val="2094734554"/>
+        <c:scaling>
+          <c:orientation val="maxMin"/>
+        </c:scaling>
+        <c:delete val="0"/>
+        <c:axPos val="l"/>
+        <c:numFmt formatCode="General" sourceLinked="1"/>
+        <c:majorTickMark val="out"/>
+        <c:minorTickMark val="none"/>
+        <c:tickLblPos val="nextTo"/>
+        <c:spPr>
+          <a:ln w="12700" cap="flat">
+            <a:solidFill>
+              <a:srgbClr val="888888"/>
+            </a:solidFill>
+            <a:prstDash val="solid"/>
+            <a:round/>
+          </a:ln>
+        </c:spPr>
+        <c:txPr>
+          <a:bodyPr/>
+          <a:lstStyle/>
+          <a:p>
+            <a:pPr>
+              <a:defRPr sz="1000" b="0" i="0" u="none" strike="noStrike">
+                <a:solidFill>
+                  <a:srgbClr val="000000"/>
+                </a:solidFill>
+                <a:latin typeface="+mn-lt"/>
+              </a:defRPr>
+            </a:pPr>
+            <a:endParaRPr lang="en-US"/>
+          </a:p>
+        </c:txPr>
+        <c:crossAx val="2094734552"/>
+        <c:crosses val="autoZero"/>
+        <c:auto val="1"/>
+        <c:lblAlgn val="ctr"/>
+        <c:noMultiLvlLbl val="1"/>
+      </c:catAx>
+      <c:valAx>
+        <c:axId val="2094734552"/>
+        <c:scaling>
+          <c:orientation val="minMax"/>
+          <c:max val="120"/>
+          <c:min val="80"/>
+        </c:scaling>
+        <c:delete val="0"/>
+        <c:axPos val="b"/>
+        <c:majorGridlines>
+          <c:spPr>
+            <a:ln w="6350" cap="flat">
+              <a:solidFill>
+                <a:srgbClr val="E0E0E0"/>
+              </a:solidFill>
+              <a:prstDash val="solid"/>
+              <a:round/>
+            </a:ln>
+          </c:spPr>
+        </c:majorGridlines>
+        <c:numFmt formatCode="0&quot;%&quot;" sourceLinked="0"/>
+        <c:majorTickMark val="out"/>
+        <c:minorTickMark val="none"/>
+        <c:tickLblPos val="low"/>
+        <c:spPr>
+          <a:ln w="12700" cap="flat">
+            <a:solidFill>
+              <a:srgbClr val="888888"/>
+            </a:solidFill>
+            <a:prstDash val="solid"/>
+            <a:round/>
+          </a:ln>
+        </c:spPr>
+        <c:txPr>
+          <a:bodyPr/>
+          <a:lstStyle/>
+          <a:p>
+            <a:pPr>
+              <a:defRPr sz="900" b="0" i="0" u="none" strike="noStrike">
+                <a:solidFill>
+                  <a:srgbClr val="7F7F7F"/>
+                </a:solidFill>
+                <a:latin typeface="+mn-lt"/>
+              </a:defRPr>
+            </a:pPr>
+            <a:endParaRPr lang="en-US"/>
+          </a:p>
+        </c:txPr>
+        <c:crossAx val="2094734554"/>
+        <c:crosses val="autoZero"/>
+        <c:crossBetween val="between"/>
+        <c:majorUnit val="10"/>
+      </c:valAx>
+      <c:spPr>
+        <a:noFill/>
+        <a:ln>
+          <a:noFill/>
+        </a:ln>
+        <a:effectLst/>
+      </c:spPr>
+    </c:plotArea>
+    <c:legend>
+      <c:legendPos val="b"/>
+      <c:overlay val="0"/>
+      <c:txPr>
+        <a:bodyPr/>
+        <a:lstStyle/>
+        <a:p>
+          <a:pPr>
+            <a:defRPr sz="1000">
+              <a:solidFill>
+                <a:srgbClr val="000000"/>
+              </a:solidFill>
+              <a:latin typeface="+mn-lt"/>
+              <a:cs typeface="+mn-lt"/>
+            </a:defRPr>
+          </a:pPr>
+          <a:endParaRPr lang="en-US"/>
+        </a:p>
+      </c:txPr>
+    </c:legend>
+    <c:plotVisOnly val="1"/>
+    <c:dispBlanksAs val="span"/>
+  </c:chart>
+  <c:spPr>
+    <a:noFill/>
+    <a:ln>
+      <a:noFill/>
+    </a:ln>
+    <a:effectLst/>
+  </c:spPr>
+  <c:externalData r:id="rId1">
+    <c:autoUpdate val="0"/>
+  </c:externalData>
+</c:chartSpace>
+</file>
+
+<file path=ppt/charts/chart3.xml><?xml version="1.0" encoding="utf-8"?>
 <c:chartSpace xmlns:c="http://schemas.openxmlformats.org/drawingml/2006/chart" xmlns:a="http://schemas.openxmlformats.org/drawingml/2006/main" xmlns:r="http://schemas.openxmlformats.org/officeDocument/2006/relationships">
   <c:date1904 val="0"/>
   <c:roundedCorners val="1"/>
@@ -1065,7 +1466,7 @@
 </c:chartSpace>
 </file>
 
-<file path=ppt/charts/chart3.xml><?xml version="1.0" encoding="utf-8"?>
+<file path=ppt/charts/chart4.xml><?xml version="1.0" encoding="utf-8"?>
 <c:chartSpace xmlns:c="http://schemas.openxmlformats.org/drawingml/2006/chart" xmlns:a="http://schemas.openxmlformats.org/drawingml/2006/main" xmlns:r="http://schemas.openxmlformats.org/officeDocument/2006/relationships">
   <c:date1904 val="0"/>
   <c:roundedCorners val="1"/>
@@ -1373,7 +1774,7 @@
 </c:chartSpace>
 </file>
 
-<file path=ppt/charts/chart4.xml><?xml version="1.0" encoding="utf-8"?>
+<file path=ppt/charts/chart5.xml><?xml version="1.0" encoding="utf-8"?>
 <c:chartSpace xmlns:c="http://schemas.openxmlformats.org/drawingml/2006/chart" xmlns:a="http://schemas.openxmlformats.org/drawingml/2006/main" xmlns:r="http://schemas.openxmlformats.org/officeDocument/2006/relationships">
   <c:date1904 val="0"/>
   <c:roundedCorners val="1"/>
@@ -1681,7 +2082,7 @@
 </c:chartSpace>
 </file>
 
-<file path=ppt/charts/chart5.xml><?xml version="1.0" encoding="utf-8"?>
+<file path=ppt/charts/chart6.xml><?xml version="1.0" encoding="utf-8"?>
 <c:chartSpace xmlns:c="http://schemas.openxmlformats.org/drawingml/2006/chart" xmlns:a="http://schemas.openxmlformats.org/drawingml/2006/main" xmlns:r="http://schemas.openxmlformats.org/officeDocument/2006/relationships">
   <c:date1904 val="0"/>
   <c:roundedCorners val="1"/>
@@ -1989,7 +2390,7 @@
 </c:chartSpace>
 </file>
 
-<file path=ppt/charts/chart6.xml><?xml version="1.0" encoding="utf-8"?>
+<file path=ppt/charts/chart7.xml><?xml version="1.0" encoding="utf-8"?>
 <c:chartSpace xmlns:c="http://schemas.openxmlformats.org/drawingml/2006/chart" xmlns:a="http://schemas.openxmlformats.org/drawingml/2006/main" xmlns:r="http://schemas.openxmlformats.org/officeDocument/2006/relationships">
   <c:date1904 val="0"/>
   <c:roundedCorners val="1"/>
@@ -2573,7 +2974,7 @@
           <a:p>
             <a:r>
               <a:rPr lang="en-US" dirty="0"/>
-              <a:t>115年達成率分布：99家達標（54%）、84家未達標（46%）；中位數101%；75～100%共65家為最大族群。</a:t>
+              <a:t>114年未達標113家，115年目標以114分行目標加成，較114實績平均拉高41%，115年仍有66家未達標、19家未達75%。</a:t>
             </a:r>
             <a:endParaRPr lang="en-US" dirty="0"/>
           </a:p>
@@ -2661,7 +3062,7 @@
           <a:p>
             <a:r>
               <a:rPr lang="en-US" dirty="0"/>
-              <a:t>流向矩陣：115年未達75%的19家全部來自114年未達標群；比例隨114年達成率降低而升高。</a:t>
+              <a:t>115年達成率分布：99家達標（54%）、84家未達標（46%）；中位數101%；75～100%共65家為最大族群。</a:t>
             </a:r>
             <a:endParaRPr lang="en-US" dirty="0"/>
           </a:p>
@@ -2749,7 +3150,7 @@
           <a:p>
             <a:r>
               <a:rPr lang="en-US" dirty="0"/>
-              <a:t>114年未達75%的分行，115年目標較114實績拉高77%，達成率僅95%；績優分行目標低於實績，達成率近190%。</a:t>
+              <a:t>流向矩陣：115年未達75%的19家全部來自114年未達標群；比例隨114年達成率降低而升高。</a:t>
             </a:r>
             <a:endParaRPr lang="en-US" dirty="0"/>
           </a:p>
@@ -2837,7 +3238,7 @@
           <a:p>
             <a:r>
               <a:rPr lang="en-US" dirty="0"/>
-              <a:t>瀑布：目標117.85億＋超額15.23億−缺口8.23億＝實績124.86億。超額60%來自114年達標群；缺口86%來自114年未達標群。</a:t>
+              <a:t>114年未達75%的分行，115年目標較114實績拉高77%，達成率僅95%；績優分行目標低於實績，達成率近190%。</a:t>
             </a:r>
             <a:endParaRPr lang="en-US" dirty="0"/>
           </a:p>
@@ -2925,6 +3326,94 @@
           <a:p>
             <a:r>
               <a:rPr lang="en-US" dirty="0"/>
+              <a:t>瀑布：目標117.85億＋超額15.23億−缺口8.23億＝實績124.86億。超額60%來自114年達標群；缺口86%來自114年未達標群。</a:t>
+            </a:r>
+            <a:endParaRPr lang="en-US" dirty="0"/>
+          </a:p>
+        </p:txBody>
+      </p:sp>
+      <p:sp>
+        <p:nvSpPr>
+          <p:cNvPr id="4" name="Slide Number Placeholder 3"/>
+          <p:cNvSpPr>
+            <a:spLocks noGrp="1"/>
+          </p:cNvSpPr>
+          <p:nvPr>
+            <p:ph type="sldNum" sz="quarter" idx="10"/>
+          </p:nvPr>
+        </p:nvSpPr>
+        <p:spPr/>
+        <p:txBody>
+          <a:bodyPr/>
+          <a:lstStyle/>
+          <a:p>
+            <a:fld id="{F7021451-1387-4CA6-816F-3879F97B5CBC}" type="slidenum">
+              <a:rPr lang="en-US"/>
+              <a:t>6</a:t>
+            </a:fld>
+            <a:endParaRPr lang="en-US"/>
+          </a:p>
+        </p:txBody>
+      </p:sp>
+    </p:spTree>
+    <p:extLst>
+      <p:ext uri="{BB962C8B-B14F-4D97-AF65-F5344CB8AC3E}">
+        <p14:creationId xmlns:p14="http://schemas.microsoft.com/office/powerpoint/2010/main" val="1024086991"/>
+      </p:ext>
+    </p:extLst>
+  </p:cSld>
+  <p:clrMapOvr>
+    <a:masterClrMapping/>
+  </p:clrMapOvr>
+</p:notes>
+</file>
+
+<file path=ppt/notesSlides/notesSlide15.xml><?xml version="1.0" encoding="utf-8"?>
+<p:notes xmlns:a="http://schemas.openxmlformats.org/drawingml/2006/main" xmlns:r="http://schemas.openxmlformats.org/officeDocument/2006/relationships" xmlns:p="http://schemas.openxmlformats.org/presentationml/2006/main">
+  <p:cSld>
+    <p:spTree>
+      <p:nvGrpSpPr>
+        <p:cNvPr id="1" name=""/>
+        <p:cNvGrpSpPr/>
+        <p:nvPr/>
+      </p:nvGrpSpPr>
+      <p:grpSpPr>
+        <a:xfrm>
+          <a:off x="0" y="0"/>
+          <a:ext cx="0" cy="0"/>
+          <a:chOff x="0" y="0"/>
+          <a:chExt cx="0" cy="0"/>
+        </a:xfrm>
+      </p:grpSpPr>
+      <p:sp>
+        <p:nvSpPr>
+          <p:cNvPr id="2" name="Slide Image Placeholder 1"/>
+          <p:cNvSpPr>
+            <a:spLocks noGrp="1" noRot="1" noChangeAspect="1"/>
+          </p:cNvSpPr>
+          <p:nvPr>
+            <p:ph type="sldImg"/>
+          </p:nvPr>
+        </p:nvSpPr>
+        <p:spPr/>
+      </p:sp>
+      <p:sp>
+        <p:nvSpPr>
+          <p:cNvPr id="3" name="Notes Placeholder 2"/>
+          <p:cNvSpPr>
+            <a:spLocks noGrp="1"/>
+          </p:cNvSpPr>
+          <p:nvPr>
+            <p:ph type="body" idx="1"/>
+          </p:nvPr>
+        </p:nvSpPr>
+        <p:spPr/>
+        <p:txBody>
+          <a:bodyPr/>
+          <a:lstStyle/>
+          <a:p>
+            <a:r>
+              <a:rPr lang="en-US" dirty="0"/>
               <a:t>116目標底稿SUMMARY TYPE_6：19家、成長目標7.74億。若沿用115年規則（分行目標×115%）約12.62億。</a:t>
             </a:r>
             <a:endParaRPr lang="en-US" dirty="0"/>
@@ -2948,7 +3437,7 @@
           <a:p>
             <a:fld id="{F7021451-1387-4CA6-816F-3879F97B5CBC}" type="slidenum">
               <a:rPr lang="en-US"/>
-              <a:t>6</a:t>
+              <a:t>7</a:t>
             </a:fld>
             <a:endParaRPr lang="en-US"/>
           </a:p>
@@ -3622,7 +4111,7 @@
           <a:p>
             <a:r>
               <a:rPr lang="en-US" dirty="0"/>
-              <a:t>114年未達標113家，115年目標以114分行目標加成，較114實績平均拉高41%，115年仍有66家未達標、19家未達75%。</a:t>
+              <a:t>115年達成說明：目標117.85億、年化實績124.86億、達成105.9%；達標99家（54%）；北二區113.9%最高。</a:t>
             </a:r>
             <a:endParaRPr lang="en-US" dirty="0"/>
           </a:p>
@@ -6207,6 +6696,1895 @@
                   <a:schemeClr val="tx1"/>
                 </a:solidFill>
               </a:rPr>
+              <a:t>114年未達標分行的「目標懲罰循環」</a:t>
+            </a:r>
+            <a:endParaRPr lang="en-US" sz="3000" dirty="0"/>
+          </a:p>
+        </p:txBody>
+      </p:sp>
+      <p:sp>
+        <p:nvSpPr>
+          <p:cNvPr id="3" name="Text 1"/>
+          <p:cNvSpPr txBox="1"/>
+          <p:nvPr/>
+        </p:nvSpPr>
+        <p:spPr>
+          <a:xfrm>
+            <a:off x="457200" y="1051560"/>
+            <a:ext cx="11247120" cy="365760"/>
+          </a:xfrm>
+          <a:prstGeom prst="rect">
+            <a:avLst/>
+          </a:prstGeom>
+          <a:noFill/>
+          <a:ln/>
+        </p:spPr>
+        <p:txBody>
+          <a:bodyPr wrap="square" lIns="381" tIns="381" rIns="381" bIns="381" rtlCol="0" anchor="ctr"/>
+          <a:lstStyle/>
+          <a:p>
+            <a:pPr indent="0" marL="0">
+              <a:buNone/>
+            </a:pPr>
+            <a:r>
+              <a:rPr lang="en-US" sz="1300" dirty="0">
+                <a:solidFill>
+                  <a:srgbClr val="7F7F7F"/>
+                </a:solidFill>
+              </a:rPr>
+              <a:t>以 114 年達成率分群，追蹤 183 家分行在 115 年規則下的目標與實績（資料：COMPARE114／財管手收比較表）</a:t>
+            </a:r>
+            <a:endParaRPr lang="en-US" sz="1300" dirty="0"/>
+          </a:p>
+        </p:txBody>
+      </p:sp>
+      <p:sp>
+        <p:nvSpPr>
+          <p:cNvPr id="4" name="step 1"/>
+          <p:cNvSpPr/>
+          <p:nvPr/>
+        </p:nvSpPr>
+        <p:spPr>
+          <a:xfrm>
+            <a:off x="457200" y="1508760"/>
+            <a:ext cx="2697480" cy="457200"/>
+          </a:xfrm>
+          <a:prstGeom prst="homePlate">
+            <a:avLst/>
+          </a:prstGeom>
+          <a:solidFill>
+            <a:srgbClr val="7F7F7F"/>
+          </a:solidFill>
+          <a:ln w="12700">
+            <a:solidFill>
+              <a:srgbClr val="7F7F7F"/>
+            </a:solidFill>
+            <a:prstDash val="solid"/>
+          </a:ln>
+        </p:spPr>
+      </p:sp>
+      <p:sp>
+        <p:nvSpPr>
+          <p:cNvPr id="5" name="Text 3"/>
+          <p:cNvSpPr txBox="1"/>
+          <p:nvPr/>
+        </p:nvSpPr>
+        <p:spPr>
+          <a:xfrm>
+            <a:off x="685800" y="1508760"/>
+            <a:ext cx="2240280" cy="457200"/>
+          </a:xfrm>
+          <a:prstGeom prst="rect">
+            <a:avLst/>
+          </a:prstGeom>
+          <a:noFill/>
+          <a:ln/>
+        </p:spPr>
+        <p:txBody>
+          <a:bodyPr wrap="square" lIns="0" tIns="0" rIns="0" bIns="0" rtlCol="0" anchor="ctr"/>
+          <a:lstStyle/>
+          <a:p>
+            <a:pPr indent="0" marL="0">
+              <a:buNone/>
+            </a:pPr>
+            <a:r>
+              <a:rPr lang="en-US" sz="1400" b="1" dirty="0">
+                <a:solidFill>
+                  <a:srgbClr val="FFFFFF"/>
+                </a:solidFill>
+              </a:rPr>
+              <a:t>1  114年未達標</a:t>
+            </a:r>
+            <a:endParaRPr lang="en-US" sz="1400" dirty="0"/>
+          </a:p>
+        </p:txBody>
+      </p:sp>
+      <p:sp>
+        <p:nvSpPr>
+          <p:cNvPr id="6" name="card 1"/>
+          <p:cNvSpPr/>
+          <p:nvPr/>
+        </p:nvSpPr>
+        <p:spPr>
+          <a:xfrm>
+            <a:off x="457200" y="2057400"/>
+            <a:ext cx="2697480" cy="1691640"/>
+          </a:xfrm>
+          <a:prstGeom prst="rect">
+            <a:avLst/>
+          </a:prstGeom>
+          <a:solidFill>
+            <a:srgbClr val="FDF1E9"/>
+          </a:solidFill>
+          <a:ln w="12700">
+            <a:solidFill>
+              <a:srgbClr val="FDF1E9"/>
+            </a:solidFill>
+            <a:prstDash val="solid"/>
+          </a:ln>
+        </p:spPr>
+      </p:sp>
+      <p:sp>
+        <p:nvSpPr>
+          <p:cNvPr id="7" name="Text 5"/>
+          <p:cNvSpPr txBox="1"/>
+          <p:nvPr/>
+        </p:nvSpPr>
+        <p:spPr>
+          <a:xfrm>
+            <a:off x="548640" y="2103120"/>
+            <a:ext cx="2514600" cy="685800"/>
+          </a:xfrm>
+          <a:prstGeom prst="rect">
+            <a:avLst/>
+          </a:prstGeom>
+          <a:noFill/>
+          <a:ln/>
+        </p:spPr>
+        <p:txBody>
+          <a:bodyPr wrap="square" lIns="0" tIns="0" rIns="0" bIns="0" rtlCol="0" anchor="ctr"/>
+          <a:lstStyle/>
+          <a:p>
+            <a:pPr algn="ctr" indent="0" marL="0">
+              <a:buNone/>
+            </a:pPr>
+            <a:r>
+              <a:rPr lang="en-US" sz="3200" b="1" dirty="0">
+                <a:solidFill>
+                  <a:srgbClr val="7F7F7F"/>
+                </a:solidFill>
+              </a:rPr>
+              <a:t>113家</a:t>
+            </a:r>
+            <a:endParaRPr lang="en-US" sz="3200" dirty="0"/>
+          </a:p>
+        </p:txBody>
+      </p:sp>
+      <p:sp>
+        <p:nvSpPr>
+          <p:cNvPr id="8" name="Text 6"/>
+          <p:cNvSpPr txBox="1"/>
+          <p:nvPr/>
+        </p:nvSpPr>
+        <p:spPr>
+          <a:xfrm>
+            <a:off x="594360" y="2788920"/>
+            <a:ext cx="2423160" cy="914400"/>
+          </a:xfrm>
+          <a:prstGeom prst="rect">
+            <a:avLst/>
+          </a:prstGeom>
+          <a:noFill/>
+          <a:ln/>
+        </p:spPr>
+        <p:txBody>
+          <a:bodyPr wrap="square" lIns="0" tIns="0" rIns="0" bIns="0" rtlCol="0" anchor="t"/>
+          <a:lstStyle/>
+          <a:p>
+            <a:pPr algn="ctr" indent="0" marL="0">
+              <a:buNone/>
+            </a:pPr>
+            <a:r>
+              <a:rPr lang="en-US" sz="1150" dirty="0">
+                <a:solidFill>
+                  <a:srgbClr val="000000"/>
+                </a:solidFill>
+              </a:rPr>
+              <a:t>達成率未達100%</a:t>
+            </a:r>
+            <a:endParaRPr lang="en-US" sz="1150" dirty="0"/>
+          </a:p>
+          <a:p>
+            <a:pPr algn="ctr" indent="0" marL="0">
+              <a:buNone/>
+            </a:pPr>
+            <a:r>
+              <a:rPr lang="en-US" sz="1150" dirty="0">
+                <a:solidFill>
+                  <a:srgbClr val="000000"/>
+                </a:solidFill>
+              </a:rPr>
+              <a:t>占全行 62%</a:t>
+            </a:r>
+            <a:endParaRPr lang="en-US" sz="1150" dirty="0"/>
+          </a:p>
+        </p:txBody>
+      </p:sp>
+      <p:sp>
+        <p:nvSpPr>
+          <p:cNvPr id="9" name="step 2"/>
+          <p:cNvSpPr/>
+          <p:nvPr/>
+        </p:nvSpPr>
+        <p:spPr>
+          <a:xfrm>
+            <a:off x="3310128" y="1508760"/>
+            <a:ext cx="2697480" cy="457200"/>
+          </a:xfrm>
+          <a:prstGeom prst="chevron">
+            <a:avLst/>
+          </a:prstGeom>
+          <a:solidFill>
+            <a:srgbClr val="D96C6C"/>
+          </a:solidFill>
+          <a:ln w="12700">
+            <a:solidFill>
+              <a:srgbClr val="D96C6C"/>
+            </a:solidFill>
+            <a:prstDash val="solid"/>
+          </a:ln>
+        </p:spPr>
+      </p:sp>
+      <p:sp>
+        <p:nvSpPr>
+          <p:cNvPr id="10" name="Text 8"/>
+          <p:cNvSpPr txBox="1"/>
+          <p:nvPr/>
+        </p:nvSpPr>
+        <p:spPr>
+          <a:xfrm>
+            <a:off x="3538728" y="1508760"/>
+            <a:ext cx="2240280" cy="457200"/>
+          </a:xfrm>
+          <a:prstGeom prst="rect">
+            <a:avLst/>
+          </a:prstGeom>
+          <a:noFill/>
+          <a:ln/>
+        </p:spPr>
+        <p:txBody>
+          <a:bodyPr wrap="square" lIns="0" tIns="0" rIns="0" bIns="0" rtlCol="0" anchor="ctr"/>
+          <a:lstStyle/>
+          <a:p>
+            <a:pPr indent="0" marL="0">
+              <a:buNone/>
+            </a:pPr>
+            <a:r>
+              <a:rPr lang="en-US" sz="1400" b="1" dirty="0">
+                <a:solidFill>
+                  <a:srgbClr val="FFFFFF"/>
+                </a:solidFill>
+              </a:rPr>
+              <a:t>2  115年目標被拉高</a:t>
+            </a:r>
+            <a:endParaRPr lang="en-US" sz="1400" dirty="0"/>
+          </a:p>
+        </p:txBody>
+      </p:sp>
+      <p:sp>
+        <p:nvSpPr>
+          <p:cNvPr id="11" name="card 2"/>
+          <p:cNvSpPr/>
+          <p:nvPr/>
+        </p:nvSpPr>
+        <p:spPr>
+          <a:xfrm>
+            <a:off x="3310128" y="2057400"/>
+            <a:ext cx="2697480" cy="1691640"/>
+          </a:xfrm>
+          <a:prstGeom prst="rect">
+            <a:avLst/>
+          </a:prstGeom>
+          <a:solidFill>
+            <a:srgbClr val="FDF1E9"/>
+          </a:solidFill>
+          <a:ln w="12700">
+            <a:solidFill>
+              <a:srgbClr val="FDF1E9"/>
+            </a:solidFill>
+            <a:prstDash val="solid"/>
+          </a:ln>
+        </p:spPr>
+      </p:sp>
+      <p:sp>
+        <p:nvSpPr>
+          <p:cNvPr id="12" name="Text 10"/>
+          <p:cNvSpPr txBox="1"/>
+          <p:nvPr/>
+        </p:nvSpPr>
+        <p:spPr>
+          <a:xfrm>
+            <a:off x="3401568" y="2103120"/>
+            <a:ext cx="2514600" cy="685800"/>
+          </a:xfrm>
+          <a:prstGeom prst="rect">
+            <a:avLst/>
+          </a:prstGeom>
+          <a:noFill/>
+          <a:ln/>
+        </p:spPr>
+        <p:txBody>
+          <a:bodyPr wrap="square" lIns="0" tIns="0" rIns="0" bIns="0" rtlCol="0" anchor="ctr"/>
+          <a:lstStyle/>
+          <a:p>
+            <a:pPr algn="ctr" indent="0" marL="0">
+              <a:buNone/>
+            </a:pPr>
+            <a:r>
+              <a:rPr lang="en-US" sz="3200" b="1" dirty="0">
+                <a:solidFill>
+                  <a:srgbClr val="C00000"/>
+                </a:solidFill>
+              </a:rPr>
+              <a:t>+41%</a:t>
+            </a:r>
+            <a:endParaRPr lang="en-US" sz="3200" dirty="0"/>
+          </a:p>
+        </p:txBody>
+      </p:sp>
+      <p:sp>
+        <p:nvSpPr>
+          <p:cNvPr id="13" name="Text 11"/>
+          <p:cNvSpPr txBox="1"/>
+          <p:nvPr/>
+        </p:nvSpPr>
+        <p:spPr>
+          <a:xfrm>
+            <a:off x="3447288" y="2788920"/>
+            <a:ext cx="2423160" cy="914400"/>
+          </a:xfrm>
+          <a:prstGeom prst="rect">
+            <a:avLst/>
+          </a:prstGeom>
+          <a:noFill/>
+          <a:ln/>
+        </p:spPr>
+        <p:txBody>
+          <a:bodyPr wrap="square" lIns="0" tIns="0" rIns="0" bIns="0" rtlCol="0" anchor="t"/>
+          <a:lstStyle/>
+          <a:p>
+            <a:pPr algn="ctr" indent="0" marL="0">
+              <a:buNone/>
+            </a:pPr>
+            <a:r>
+              <a:rPr lang="en-US" sz="1150" dirty="0">
+                <a:solidFill>
+                  <a:srgbClr val="000000"/>
+                </a:solidFill>
+              </a:rPr>
+              <a:t>115目標＝114分行目標×105～115%</a:t>
+            </a:r>
+            <a:endParaRPr lang="en-US" sz="1150" dirty="0"/>
+          </a:p>
+          <a:p>
+            <a:pPr algn="ctr" indent="0" marL="0">
+              <a:buNone/>
+            </a:pPr>
+            <a:r>
+              <a:rPr lang="en-US" sz="1150" dirty="0">
+                <a:solidFill>
+                  <a:srgbClr val="000000"/>
+                </a:solidFill>
+              </a:rPr>
+              <a:t>較114年實績平均拉高41%</a:t>
+            </a:r>
+            <a:endParaRPr lang="en-US" sz="1150" dirty="0"/>
+          </a:p>
+        </p:txBody>
+      </p:sp>
+      <p:sp>
+        <p:nvSpPr>
+          <p:cNvPr id="14" name="step 3"/>
+          <p:cNvSpPr/>
+          <p:nvPr/>
+        </p:nvSpPr>
+        <p:spPr>
+          <a:xfrm>
+            <a:off x="6163056" y="1508760"/>
+            <a:ext cx="2697480" cy="457200"/>
+          </a:xfrm>
+          <a:prstGeom prst="chevron">
+            <a:avLst/>
+          </a:prstGeom>
+          <a:solidFill>
+            <a:srgbClr val="C00000"/>
+          </a:solidFill>
+          <a:ln w="12700">
+            <a:solidFill>
+              <a:srgbClr val="C00000"/>
+            </a:solidFill>
+            <a:prstDash val="solid"/>
+          </a:ln>
+        </p:spPr>
+      </p:sp>
+      <p:sp>
+        <p:nvSpPr>
+          <p:cNvPr id="15" name="Text 13"/>
+          <p:cNvSpPr txBox="1"/>
+          <p:nvPr/>
+        </p:nvSpPr>
+        <p:spPr>
+          <a:xfrm>
+            <a:off x="6391656" y="1508760"/>
+            <a:ext cx="2240280" cy="457200"/>
+          </a:xfrm>
+          <a:prstGeom prst="rect">
+            <a:avLst/>
+          </a:prstGeom>
+          <a:noFill/>
+          <a:ln/>
+        </p:spPr>
+        <p:txBody>
+          <a:bodyPr wrap="square" lIns="0" tIns="0" rIns="0" bIns="0" rtlCol="0" anchor="ctr"/>
+          <a:lstStyle/>
+          <a:p>
+            <a:pPr indent="0" marL="0">
+              <a:buNone/>
+            </a:pPr>
+            <a:r>
+              <a:rPr lang="en-US" sz="1400" b="1" dirty="0">
+                <a:solidFill>
+                  <a:srgbClr val="FFFFFF"/>
+                </a:solidFill>
+              </a:rPr>
+              <a:t>3  115年持續未達標</a:t>
+            </a:r>
+            <a:endParaRPr lang="en-US" sz="1400" dirty="0"/>
+          </a:p>
+        </p:txBody>
+      </p:sp>
+      <p:sp>
+        <p:nvSpPr>
+          <p:cNvPr id="16" name="card 3"/>
+          <p:cNvSpPr/>
+          <p:nvPr/>
+        </p:nvSpPr>
+        <p:spPr>
+          <a:xfrm>
+            <a:off x="6163056" y="2057400"/>
+            <a:ext cx="2697480" cy="1691640"/>
+          </a:xfrm>
+          <a:prstGeom prst="rect">
+            <a:avLst/>
+          </a:prstGeom>
+          <a:solidFill>
+            <a:srgbClr val="FDF1E9"/>
+          </a:solidFill>
+          <a:ln w="12700">
+            <a:solidFill>
+              <a:srgbClr val="FDF1E9"/>
+            </a:solidFill>
+            <a:prstDash val="solid"/>
+          </a:ln>
+        </p:spPr>
+      </p:sp>
+      <p:sp>
+        <p:nvSpPr>
+          <p:cNvPr id="17" name="Text 15"/>
+          <p:cNvSpPr txBox="1"/>
+          <p:nvPr/>
+        </p:nvSpPr>
+        <p:spPr>
+          <a:xfrm>
+            <a:off x="6254496" y="2103120"/>
+            <a:ext cx="2514600" cy="685800"/>
+          </a:xfrm>
+          <a:prstGeom prst="rect">
+            <a:avLst/>
+          </a:prstGeom>
+          <a:noFill/>
+          <a:ln/>
+        </p:spPr>
+        <p:txBody>
+          <a:bodyPr wrap="square" lIns="0" tIns="0" rIns="0" bIns="0" rtlCol="0" anchor="ctr"/>
+          <a:lstStyle/>
+          <a:p>
+            <a:pPr algn="ctr" indent="0" marL="0">
+              <a:buNone/>
+            </a:pPr>
+            <a:r>
+              <a:rPr lang="en-US" sz="3200" b="1" dirty="0">
+                <a:solidFill>
+                  <a:srgbClr val="C00000"/>
+                </a:solidFill>
+              </a:rPr>
+              <a:t>66家</a:t>
+            </a:r>
+            <a:endParaRPr lang="en-US" sz="3200" dirty="0"/>
+          </a:p>
+        </p:txBody>
+      </p:sp>
+      <p:sp>
+        <p:nvSpPr>
+          <p:cNvPr id="18" name="Text 16"/>
+          <p:cNvSpPr txBox="1"/>
+          <p:nvPr/>
+        </p:nvSpPr>
+        <p:spPr>
+          <a:xfrm>
+            <a:off x="6300216" y="2788920"/>
+            <a:ext cx="2423160" cy="914400"/>
+          </a:xfrm>
+          <a:prstGeom prst="rect">
+            <a:avLst/>
+          </a:prstGeom>
+          <a:noFill/>
+          <a:ln/>
+        </p:spPr>
+        <p:txBody>
+          <a:bodyPr wrap="square" lIns="0" tIns="0" rIns="0" bIns="0" rtlCol="0" anchor="t"/>
+          <a:lstStyle/>
+          <a:p>
+            <a:pPr algn="ctr" indent="0" marL="0">
+              <a:buNone/>
+            </a:pPr>
+            <a:r>
+              <a:rPr lang="en-US" sz="1150" dirty="0">
+                <a:solidFill>
+                  <a:srgbClr val="000000"/>
+                </a:solidFill>
+              </a:rPr>
+              <a:t>達成率 98.7%；66家（58%）仍未達標</a:t>
+            </a:r>
+            <a:endParaRPr lang="en-US" sz="1150" dirty="0"/>
+          </a:p>
+          <a:p>
+            <a:pPr algn="ctr" indent="0" marL="0">
+              <a:buNone/>
+            </a:pPr>
+            <a:r>
+              <a:rPr lang="en-US" sz="1150" dirty="0">
+                <a:solidFill>
+                  <a:srgbClr val="000000"/>
+                </a:solidFill>
+              </a:rPr>
+              <a:t>19家未達75%，全數來自此群</a:t>
+            </a:r>
+            <a:endParaRPr lang="en-US" sz="1150" dirty="0"/>
+          </a:p>
+        </p:txBody>
+      </p:sp>
+      <p:sp>
+        <p:nvSpPr>
+          <p:cNvPr id="19" name="step 4"/>
+          <p:cNvSpPr/>
+          <p:nvPr/>
+        </p:nvSpPr>
+        <p:spPr>
+          <a:xfrm>
+            <a:off x="9015984" y="1508760"/>
+            <a:ext cx="2697480" cy="457200"/>
+          </a:xfrm>
+          <a:prstGeom prst="chevron">
+            <a:avLst/>
+          </a:prstGeom>
+          <a:solidFill>
+            <a:srgbClr val="960A14"/>
+          </a:solidFill>
+          <a:ln w="12700">
+            <a:solidFill>
+              <a:srgbClr val="960A14"/>
+            </a:solidFill>
+            <a:prstDash val="solid"/>
+          </a:ln>
+        </p:spPr>
+      </p:sp>
+      <p:sp>
+        <p:nvSpPr>
+          <p:cNvPr id="20" name="Text 18"/>
+          <p:cNvSpPr txBox="1"/>
+          <p:nvPr/>
+        </p:nvSpPr>
+        <p:spPr>
+          <a:xfrm>
+            <a:off x="9244584" y="1508760"/>
+            <a:ext cx="2240280" cy="457200"/>
+          </a:xfrm>
+          <a:prstGeom prst="rect">
+            <a:avLst/>
+          </a:prstGeom>
+          <a:noFill/>
+          <a:ln/>
+        </p:spPr>
+        <p:txBody>
+          <a:bodyPr wrap="square" lIns="0" tIns="0" rIns="0" bIns="0" rtlCol="0" anchor="ctr"/>
+          <a:lstStyle/>
+          <a:p>
+            <a:pPr indent="0" marL="0">
+              <a:buNone/>
+            </a:pPr>
+            <a:r>
+              <a:rPr lang="en-US" sz="1400" b="1" dirty="0">
+                <a:solidFill>
+                  <a:srgbClr val="FFFFFF"/>
+                </a:solidFill>
+              </a:rPr>
+              <a:t>4  缺口由他人填補</a:t>
+            </a:r>
+            <a:endParaRPr lang="en-US" sz="1400" dirty="0"/>
+          </a:p>
+        </p:txBody>
+      </p:sp>
+      <p:sp>
+        <p:nvSpPr>
+          <p:cNvPr id="21" name="card 4"/>
+          <p:cNvSpPr/>
+          <p:nvPr/>
+        </p:nvSpPr>
+        <p:spPr>
+          <a:xfrm>
+            <a:off x="9015984" y="2057400"/>
+            <a:ext cx="2697480" cy="1691640"/>
+          </a:xfrm>
+          <a:prstGeom prst="rect">
+            <a:avLst/>
+          </a:prstGeom>
+          <a:solidFill>
+            <a:srgbClr val="FDF1E9"/>
+          </a:solidFill>
+          <a:ln w="12700">
+            <a:solidFill>
+              <a:srgbClr val="FDF1E9"/>
+            </a:solidFill>
+            <a:prstDash val="solid"/>
+          </a:ln>
+        </p:spPr>
+      </p:sp>
+      <p:sp>
+        <p:nvSpPr>
+          <p:cNvPr id="22" name="Text 20"/>
+          <p:cNvSpPr txBox="1"/>
+          <p:nvPr/>
+        </p:nvSpPr>
+        <p:spPr>
+          <a:xfrm>
+            <a:off x="9107424" y="2103120"/>
+            <a:ext cx="2514600" cy="685800"/>
+          </a:xfrm>
+          <a:prstGeom prst="rect">
+            <a:avLst/>
+          </a:prstGeom>
+          <a:noFill/>
+          <a:ln/>
+        </p:spPr>
+        <p:txBody>
+          <a:bodyPr wrap="square" lIns="0" tIns="0" rIns="0" bIns="0" rtlCol="0" anchor="ctr"/>
+          <a:lstStyle/>
+          <a:p>
+            <a:pPr algn="ctr" indent="0" marL="0">
+              <a:buNone/>
+            </a:pPr>
+            <a:r>
+              <a:rPr lang="en-US" sz="3200" b="1" dirty="0">
+                <a:solidFill>
+                  <a:srgbClr val="C00000"/>
+                </a:solidFill>
+              </a:rPr>
+              <a:t>7.1億</a:t>
+            </a:r>
+            <a:endParaRPr lang="en-US" sz="3200" dirty="0"/>
+          </a:p>
+        </p:txBody>
+      </p:sp>
+      <p:sp>
+        <p:nvSpPr>
+          <p:cNvPr id="23" name="Text 21"/>
+          <p:cNvSpPr txBox="1"/>
+          <p:nvPr/>
+        </p:nvSpPr>
+        <p:spPr>
+          <a:xfrm>
+            <a:off x="9153144" y="2788920"/>
+            <a:ext cx="2423160" cy="914400"/>
+          </a:xfrm>
+          <a:prstGeom prst="rect">
+            <a:avLst/>
+          </a:prstGeom>
+          <a:noFill/>
+          <a:ln/>
+        </p:spPr>
+        <p:txBody>
+          <a:bodyPr wrap="square" lIns="0" tIns="0" rIns="0" bIns="0" rtlCol="0" anchor="t"/>
+          <a:lstStyle/>
+          <a:p>
+            <a:pPr algn="ctr" indent="0" marL="0">
+              <a:buNone/>
+            </a:pPr>
+            <a:r>
+              <a:rPr lang="en-US" sz="1150" dirty="0">
+                <a:solidFill>
+                  <a:srgbClr val="000000"/>
+                </a:solidFill>
+              </a:rPr>
+              <a:t>此群未達成缺口 7.1億（占全行缺口86%）</a:t>
+            </a:r>
+            <a:endParaRPr lang="en-US" sz="1150" dirty="0"/>
+          </a:p>
+          <a:p>
+            <a:pPr algn="ctr" indent="0" marL="0">
+              <a:buNone/>
+            </a:pPr>
+            <a:r>
+              <a:rPr lang="en-US" sz="1150" dirty="0">
+                <a:solidFill>
+                  <a:srgbClr val="000000"/>
+                </a:solidFill>
+              </a:rPr>
+              <a:t>由超額分行 15.2億 補足</a:t>
+            </a:r>
+            <a:endParaRPr lang="en-US" sz="1150" dirty="0"/>
+          </a:p>
+        </p:txBody>
+      </p:sp>
+      <p:sp>
+        <p:nvSpPr>
+          <p:cNvPr id="24" name="loop arrow"/>
+          <p:cNvSpPr/>
+          <p:nvPr/>
+        </p:nvSpPr>
+        <p:spPr>
+          <a:xfrm rot="5400000">
+            <a:off x="10881360" y="2011680"/>
+            <a:ext cx="822960" cy="457200"/>
+          </a:xfrm>
+          <a:prstGeom prst="uturnArrow">
+            <a:avLst/>
+          </a:prstGeom>
+          <a:solidFill>
+            <a:srgbClr val="C5C5C5"/>
+          </a:solidFill>
+          <a:ln w="12700">
+            <a:solidFill>
+              <a:srgbClr val="C5C5C5"/>
+            </a:solidFill>
+            <a:prstDash val="solid"/>
+          </a:ln>
+        </p:spPr>
+      </p:sp>
+      <p:sp>
+        <p:nvSpPr>
+          <p:cNvPr id="25" name="Text 23"/>
+          <p:cNvSpPr txBox="1"/>
+          <p:nvPr/>
+        </p:nvSpPr>
+        <p:spPr>
+          <a:xfrm>
+            <a:off x="457200" y="3840480"/>
+            <a:ext cx="11274552" cy="274320"/>
+          </a:xfrm>
+          <a:prstGeom prst="rect">
+            <a:avLst/>
+          </a:prstGeom>
+          <a:noFill/>
+          <a:ln/>
+        </p:spPr>
+        <p:txBody>
+          <a:bodyPr wrap="square" lIns="0" tIns="0" rIns="0" bIns="0" rtlCol="0" anchor="ctr"/>
+          <a:lstStyle/>
+          <a:p>
+            <a:pPr algn="r" indent="0" marL="0">
+              <a:buNone/>
+            </a:pPr>
+            <a:r>
+              <a:rPr lang="en-US" sz="1150" i="1" dirty="0">
+                <a:solidFill>
+                  <a:srgbClr val="7F7F7F"/>
+                </a:solidFill>
+              </a:rPr>
+              <a:t>116年若沿用相同規則，目標再×115%，循環持續</a:t>
+            </a:r>
+            <a:endParaRPr lang="en-US" sz="1150" dirty="0"/>
+          </a:p>
+        </p:txBody>
+      </p:sp>
+      <p:sp>
+        <p:nvSpPr>
+          <p:cNvPr id="26" name="chip 兩群對照"/>
+          <p:cNvSpPr txBox="1"/>
+          <p:nvPr/>
+        </p:nvSpPr>
+        <p:spPr>
+          <a:xfrm>
+            <a:off x="457200" y="4206240"/>
+            <a:ext cx="1371600" cy="384048"/>
+          </a:xfrm>
+          <a:prstGeom prst="roundRect">
+            <a:avLst>
+              <a:gd name="adj" fmla="val 19048"/>
+            </a:avLst>
+          </a:prstGeom>
+          <a:solidFill>
+            <a:srgbClr val="C00000"/>
+          </a:solidFill>
+          <a:ln/>
+        </p:spPr>
+        <p:txBody>
+          <a:bodyPr wrap="square" lIns="0" tIns="0" rIns="0" bIns="0" rtlCol="0" anchor="ctr"/>
+          <a:lstStyle/>
+          <a:p>
+            <a:pPr algn="ctr" indent="0" marL="0">
+              <a:buNone/>
+            </a:pPr>
+            <a:r>
+              <a:rPr lang="en-US" sz="1600" b="1" dirty="0">
+                <a:solidFill>
+                  <a:srgbClr val="FFFFFF"/>
+                </a:solidFill>
+              </a:rPr>
+              <a:t>兩群對照</a:t>
+            </a:r>
+            <a:endParaRPr lang="en-US" sz="1600" dirty="0"/>
+          </a:p>
+        </p:txBody>
+      </p:sp>
+      <p:graphicFrame>
+        <p:nvGraphicFramePr>
+          <p:cNvPr id="3" name="Table 0"/>
+          <p:cNvGraphicFramePr>
+            <a:graphicFrameLocks noGrp="1"/>
+          </p:cNvGraphicFramePr>
+          <p:nvPr>
+            <p:extLst>
+              <p:ext uri="{D42A27DB-BD31-4B8C-83A1-F6EECF244321}">
+                <p14:modId xmlns:p14="http://schemas.microsoft.com/office/powerpoint/2010/main" val="1579011935"/>
+              </p:ext>
+            </p:extLst>
+          </p:nvPr>
+        </p:nvGraphicFramePr>
+        <p:xfrm>
+          <a:off x="457200" y="4663440"/>
+          <a:ext cx="11274552" cy="914400"/>
+        </p:xfrm>
+        <a:graphic>
+          <a:graphicData uri="http://schemas.openxmlformats.org/drawingml/2006/table">
+            <a:tbl>
+              <a:tblPr/>
+              <a:tblGrid>
+                <a:gridCol w="3657600"/>
+                <a:gridCol w="3803904"/>
+                <a:gridCol w="3813048"/>
+              </a:tblGrid>
+              <a:tr h="292608">
+                <a:tc>
+                  <a:txBody>
+                    <a:bodyPr/>
+                    <a:lstStyle/>
+                    <a:p>
+                      <a:pPr algn="ctr" indent="0" marL="0">
+                        <a:buNone/>
+                      </a:pPr>
+                      <a:r>
+                        <a:rPr lang="en-US" sz="1400" b="1" dirty="0">
+                          <a:solidFill>
+                            <a:srgbClr val="FFFFFF"/>
+                          </a:solidFill>
+                        </a:rPr>
+                        <a:t>115年表現</a:t>
+                      </a:r>
+                      <a:endParaRPr lang="en-US" sz="1400" dirty="0"/>
+                    </a:p>
+                  </a:txBody>
+                  <a:tcPr marL="36576" marR="36576" marT="36576" marB="36576" anchor="ctr">
+                    <a:lnL w="9525" cap="flat" cmpd="sng" algn="ctr">
+                      <a:solidFill>
+                        <a:srgbClr val="FFFFFF"/>
+                      </a:solidFill>
+                      <a:prstDash val="solid"/>
+                      <a:round/>
+                      <a:headEnd type="none" w="med" len="med"/>
+                      <a:tailEnd type="none" w="med" len="med"/>
+                    </a:lnL>
+                    <a:lnR w="9525" cap="flat" cmpd="sng" algn="ctr">
+                      <a:solidFill>
+                        <a:srgbClr val="FFFFFF"/>
+                      </a:solidFill>
+                      <a:prstDash val="solid"/>
+                      <a:round/>
+                      <a:headEnd type="none" w="med" len="med"/>
+                      <a:tailEnd type="none" w="med" len="med"/>
+                    </a:lnR>
+                    <a:lnT w="9525" cap="flat" cmpd="sng" algn="ctr">
+                      <a:solidFill>
+                        <a:srgbClr val="FFFFFF"/>
+                      </a:solidFill>
+                      <a:prstDash val="solid"/>
+                      <a:round/>
+                      <a:headEnd type="none" w="med" len="med"/>
+                      <a:tailEnd type="none" w="med" len="med"/>
+                    </a:lnT>
+                    <a:lnB w="9525" cap="flat" cmpd="sng" algn="ctr">
+                      <a:solidFill>
+                        <a:srgbClr val="FFFFFF"/>
+                      </a:solidFill>
+                      <a:prstDash val="solid"/>
+                      <a:round/>
+                      <a:headEnd type="none" w="med" len="med"/>
+                      <a:tailEnd type="none" w="med" len="med"/>
+                    </a:lnB>
+                    <a:solidFill>
+                      <a:srgbClr val="7F7F7F"/>
+                    </a:solidFill>
+                  </a:tcPr>
+                </a:tc>
+                <a:tc>
+                  <a:txBody>
+                    <a:bodyPr/>
+                    <a:lstStyle/>
+                    <a:p>
+                      <a:pPr algn="ctr" indent="0" marL="0">
+                        <a:buNone/>
+                      </a:pPr>
+                      <a:r>
+                        <a:rPr lang="en-US" sz="1400" b="1" dirty="0">
+                          <a:solidFill>
+                            <a:srgbClr val="FFFFFF"/>
+                          </a:solidFill>
+                        </a:rPr>
+                        <a:t>114年達標群（70家）</a:t>
+                      </a:r>
+                      <a:endParaRPr lang="en-US" sz="1400" dirty="0"/>
+                    </a:p>
+                  </a:txBody>
+                  <a:tcPr marL="36576" marR="36576" marT="36576" marB="36576" anchor="ctr">
+                    <a:lnL w="9525" cap="flat" cmpd="sng" algn="ctr">
+                      <a:solidFill>
+                        <a:srgbClr val="FFFFFF"/>
+                      </a:solidFill>
+                      <a:prstDash val="solid"/>
+                      <a:round/>
+                      <a:headEnd type="none" w="med" len="med"/>
+                      <a:tailEnd type="none" w="med" len="med"/>
+                    </a:lnL>
+                    <a:lnR w="9525" cap="flat" cmpd="sng" algn="ctr">
+                      <a:solidFill>
+                        <a:srgbClr val="FFFFFF"/>
+                      </a:solidFill>
+                      <a:prstDash val="solid"/>
+                      <a:round/>
+                      <a:headEnd type="none" w="med" len="med"/>
+                      <a:tailEnd type="none" w="med" len="med"/>
+                    </a:lnR>
+                    <a:lnT w="9525" cap="flat" cmpd="sng" algn="ctr">
+                      <a:solidFill>
+                        <a:srgbClr val="FFFFFF"/>
+                      </a:solidFill>
+                      <a:prstDash val="solid"/>
+                      <a:round/>
+                      <a:headEnd type="none" w="med" len="med"/>
+                      <a:tailEnd type="none" w="med" len="med"/>
+                    </a:lnT>
+                    <a:lnB w="9525" cap="flat" cmpd="sng" algn="ctr">
+                      <a:solidFill>
+                        <a:srgbClr val="FFFFFF"/>
+                      </a:solidFill>
+                      <a:prstDash val="solid"/>
+                      <a:round/>
+                      <a:headEnd type="none" w="med" len="med"/>
+                      <a:tailEnd type="none" w="med" len="med"/>
+                    </a:lnB>
+                    <a:solidFill>
+                      <a:srgbClr val="2EA9B6"/>
+                    </a:solidFill>
+                  </a:tcPr>
+                </a:tc>
+                <a:tc>
+                  <a:txBody>
+                    <a:bodyPr/>
+                    <a:lstStyle/>
+                    <a:p>
+                      <a:pPr algn="ctr" indent="0" marL="0">
+                        <a:buNone/>
+                      </a:pPr>
+                      <a:r>
+                        <a:rPr lang="en-US" sz="1400" b="1" dirty="0">
+                          <a:solidFill>
+                            <a:srgbClr val="FFFFFF"/>
+                          </a:solidFill>
+                        </a:rPr>
+                        <a:t>114年未達標群（113家）</a:t>
+                      </a:r>
+                      <a:endParaRPr lang="en-US" sz="1400" dirty="0"/>
+                    </a:p>
+                  </a:txBody>
+                  <a:tcPr marL="36576" marR="36576" marT="36576" marB="36576" anchor="ctr">
+                    <a:lnL w="9525" cap="flat" cmpd="sng" algn="ctr">
+                      <a:solidFill>
+                        <a:srgbClr val="FFFFFF"/>
+                      </a:solidFill>
+                      <a:prstDash val="solid"/>
+                      <a:round/>
+                      <a:headEnd type="none" w="med" len="med"/>
+                      <a:tailEnd type="none" w="med" len="med"/>
+                    </a:lnL>
+                    <a:lnR w="9525" cap="flat" cmpd="sng" algn="ctr">
+                      <a:solidFill>
+                        <a:srgbClr val="FFFFFF"/>
+                      </a:solidFill>
+                      <a:prstDash val="solid"/>
+                      <a:round/>
+                      <a:headEnd type="none" w="med" len="med"/>
+                      <a:tailEnd type="none" w="med" len="med"/>
+                    </a:lnR>
+                    <a:lnT w="9525" cap="flat" cmpd="sng" algn="ctr">
+                      <a:solidFill>
+                        <a:srgbClr val="FFFFFF"/>
+                      </a:solidFill>
+                      <a:prstDash val="solid"/>
+                      <a:round/>
+                      <a:headEnd type="none" w="med" len="med"/>
+                      <a:tailEnd type="none" w="med" len="med"/>
+                    </a:lnT>
+                    <a:lnB w="9525" cap="flat" cmpd="sng" algn="ctr">
+                      <a:solidFill>
+                        <a:srgbClr val="FFFFFF"/>
+                      </a:solidFill>
+                      <a:prstDash val="solid"/>
+                      <a:round/>
+                      <a:headEnd type="none" w="med" len="med"/>
+                      <a:tailEnd type="none" w="med" len="med"/>
+                    </a:lnB>
+                    <a:solidFill>
+                      <a:srgbClr val="C00000"/>
+                    </a:solidFill>
+                  </a:tcPr>
+                </a:tc>
+              </a:tr>
+              <a:tr h="292608">
+                <a:tc>
+                  <a:txBody>
+                    <a:bodyPr/>
+                    <a:lstStyle/>
+                    <a:p>
+                      <a:pPr algn="ctr" indent="0" marL="0">
+                        <a:buNone/>
+                      </a:pPr>
+                      <a:r>
+                        <a:rPr lang="en-US" sz="1300" b="1" dirty="0">
+                          <a:solidFill>
+                            <a:srgbClr val="000000"/>
+                          </a:solidFill>
+                        </a:rPr>
+                        <a:t>115年目標 較114年實績</a:t>
+                      </a:r>
+                      <a:endParaRPr lang="en-US" sz="1300" dirty="0"/>
+                    </a:p>
+                  </a:txBody>
+                  <a:tcPr marL="36576" marR="36576" marT="36576" marB="36576" anchor="ctr">
+                    <a:lnL w="9525" cap="flat" cmpd="sng" algn="ctr">
+                      <a:solidFill>
+                        <a:srgbClr val="FFFFFF"/>
+                      </a:solidFill>
+                      <a:prstDash val="solid"/>
+                      <a:round/>
+                      <a:headEnd type="none" w="med" len="med"/>
+                      <a:tailEnd type="none" w="med" len="med"/>
+                    </a:lnL>
+                    <a:lnR w="9525" cap="flat" cmpd="sng" algn="ctr">
+                      <a:solidFill>
+                        <a:srgbClr val="FFFFFF"/>
+                      </a:solidFill>
+                      <a:prstDash val="solid"/>
+                      <a:round/>
+                      <a:headEnd type="none" w="med" len="med"/>
+                      <a:tailEnd type="none" w="med" len="med"/>
+                    </a:lnR>
+                    <a:lnT w="9525" cap="flat" cmpd="sng" algn="ctr">
+                      <a:solidFill>
+                        <a:srgbClr val="FFFFFF"/>
+                      </a:solidFill>
+                      <a:prstDash val="solid"/>
+                      <a:round/>
+                      <a:headEnd type="none" w="med" len="med"/>
+                      <a:tailEnd type="none" w="med" len="med"/>
+                    </a:lnT>
+                    <a:lnB w="9525" cap="flat" cmpd="sng" algn="ctr">
+                      <a:solidFill>
+                        <a:srgbClr val="FFFFFF"/>
+                      </a:solidFill>
+                      <a:prstDash val="solid"/>
+                      <a:round/>
+                      <a:headEnd type="none" w="med" len="med"/>
+                      <a:tailEnd type="none" w="med" len="med"/>
+                    </a:lnB>
+                    <a:solidFill>
+                      <a:srgbClr val="FFFFFF"/>
+                    </a:solidFill>
+                  </a:tcPr>
+                </a:tc>
+                <a:tc>
+                  <a:txBody>
+                    <a:bodyPr/>
+                    <a:lstStyle/>
+                    <a:p>
+                      <a:pPr algn="ctr" indent="0" marL="0">
+                        <a:buNone/>
+                      </a:pPr>
+                      <a:r>
+                        <a:rPr lang="en-US" sz="1600" b="1" dirty="0">
+                          <a:solidFill>
+                            <a:srgbClr val="2EA9B6"/>
+                          </a:solidFill>
+                        </a:rPr>
+                        <a:t>+2.2%</a:t>
+                      </a:r>
+                      <a:endParaRPr lang="en-US" sz="1600" dirty="0"/>
+                    </a:p>
+                  </a:txBody>
+                  <a:tcPr marL="36576" marR="36576" marT="36576" marB="36576" anchor="ctr">
+                    <a:lnL w="9525" cap="flat" cmpd="sng" algn="ctr">
+                      <a:solidFill>
+                        <a:srgbClr val="FFFFFF"/>
+                      </a:solidFill>
+                      <a:prstDash val="solid"/>
+                      <a:round/>
+                      <a:headEnd type="none" w="med" len="med"/>
+                      <a:tailEnd type="none" w="med" len="med"/>
+                    </a:lnL>
+                    <a:lnR w="9525" cap="flat" cmpd="sng" algn="ctr">
+                      <a:solidFill>
+                        <a:srgbClr val="FFFFFF"/>
+                      </a:solidFill>
+                      <a:prstDash val="solid"/>
+                      <a:round/>
+                      <a:headEnd type="none" w="med" len="med"/>
+                      <a:tailEnd type="none" w="med" len="med"/>
+                    </a:lnR>
+                    <a:lnT w="9525" cap="flat" cmpd="sng" algn="ctr">
+                      <a:solidFill>
+                        <a:srgbClr val="FFFFFF"/>
+                      </a:solidFill>
+                      <a:prstDash val="solid"/>
+                      <a:round/>
+                      <a:headEnd type="none" w="med" len="med"/>
+                      <a:tailEnd type="none" w="med" len="med"/>
+                    </a:lnT>
+                    <a:lnB w="9525" cap="flat" cmpd="sng" algn="ctr">
+                      <a:solidFill>
+                        <a:srgbClr val="FFFFFF"/>
+                      </a:solidFill>
+                      <a:prstDash val="solid"/>
+                      <a:round/>
+                      <a:headEnd type="none" w="med" len="med"/>
+                      <a:tailEnd type="none" w="med" len="med"/>
+                    </a:lnB>
+                    <a:solidFill>
+                      <a:srgbClr val="FFFFFF"/>
+                    </a:solidFill>
+                  </a:tcPr>
+                </a:tc>
+                <a:tc>
+                  <a:txBody>
+                    <a:bodyPr/>
+                    <a:lstStyle/>
+                    <a:p>
+                      <a:pPr algn="ctr" indent="0" marL="0">
+                        <a:buNone/>
+                      </a:pPr>
+                      <a:r>
+                        <a:rPr lang="en-US" sz="1600" b="1" dirty="0">
+                          <a:solidFill>
+                            <a:srgbClr val="C00000"/>
+                          </a:solidFill>
+                        </a:rPr>
+                        <a:t>+41.1%</a:t>
+                      </a:r>
+                      <a:endParaRPr lang="en-US" sz="1600" dirty="0"/>
+                    </a:p>
+                  </a:txBody>
+                  <a:tcPr marL="36576" marR="36576" marT="36576" marB="36576" anchor="ctr">
+                    <a:lnL w="9525" cap="flat" cmpd="sng" algn="ctr">
+                      <a:solidFill>
+                        <a:srgbClr val="FFFFFF"/>
+                      </a:solidFill>
+                      <a:prstDash val="solid"/>
+                      <a:round/>
+                      <a:headEnd type="none" w="med" len="med"/>
+                      <a:tailEnd type="none" w="med" len="med"/>
+                    </a:lnL>
+                    <a:lnR w="9525" cap="flat" cmpd="sng" algn="ctr">
+                      <a:solidFill>
+                        <a:srgbClr val="FFFFFF"/>
+                      </a:solidFill>
+                      <a:prstDash val="solid"/>
+                      <a:round/>
+                      <a:headEnd type="none" w="med" len="med"/>
+                      <a:tailEnd type="none" w="med" len="med"/>
+                    </a:lnR>
+                    <a:lnT w="9525" cap="flat" cmpd="sng" algn="ctr">
+                      <a:solidFill>
+                        <a:srgbClr val="FFFFFF"/>
+                      </a:solidFill>
+                      <a:prstDash val="solid"/>
+                      <a:round/>
+                      <a:headEnd type="none" w="med" len="med"/>
+                      <a:tailEnd type="none" w="med" len="med"/>
+                    </a:lnT>
+                    <a:lnB w="9525" cap="flat" cmpd="sng" algn="ctr">
+                      <a:solidFill>
+                        <a:srgbClr val="FFFFFF"/>
+                      </a:solidFill>
+                      <a:prstDash val="solid"/>
+                      <a:round/>
+                      <a:headEnd type="none" w="med" len="med"/>
+                      <a:tailEnd type="none" w="med" len="med"/>
+                    </a:lnB>
+                    <a:solidFill>
+                      <a:srgbClr val="FFFFFF"/>
+                    </a:solidFill>
+                  </a:tcPr>
+                </a:tc>
+              </a:tr>
+              <a:tr h="292608">
+                <a:tc>
+                  <a:txBody>
+                    <a:bodyPr/>
+                    <a:lstStyle/>
+                    <a:p>
+                      <a:pPr algn="ctr" indent="0" marL="0">
+                        <a:buNone/>
+                      </a:pPr>
+                      <a:r>
+                        <a:rPr lang="en-US" sz="1300" b="1" dirty="0">
+                          <a:solidFill>
+                            <a:srgbClr val="000000"/>
+                          </a:solidFill>
+                        </a:rPr>
+                        <a:t>115年達成率（群合計）</a:t>
+                      </a:r>
+                      <a:endParaRPr lang="en-US" sz="1300" dirty="0"/>
+                    </a:p>
+                  </a:txBody>
+                  <a:tcPr marL="36576" marR="36576" marT="36576" marB="36576" anchor="ctr">
+                    <a:lnL w="9525" cap="flat" cmpd="sng" algn="ctr">
+                      <a:solidFill>
+                        <a:srgbClr val="FFFFFF"/>
+                      </a:solidFill>
+                      <a:prstDash val="solid"/>
+                      <a:round/>
+                      <a:headEnd type="none" w="med" len="med"/>
+                      <a:tailEnd type="none" w="med" len="med"/>
+                    </a:lnL>
+                    <a:lnR w="9525" cap="flat" cmpd="sng" algn="ctr">
+                      <a:solidFill>
+                        <a:srgbClr val="FFFFFF"/>
+                      </a:solidFill>
+                      <a:prstDash val="solid"/>
+                      <a:round/>
+                      <a:headEnd type="none" w="med" len="med"/>
+                      <a:tailEnd type="none" w="med" len="med"/>
+                    </a:lnR>
+                    <a:lnT w="9525" cap="flat" cmpd="sng" algn="ctr">
+                      <a:solidFill>
+                        <a:srgbClr val="FFFFFF"/>
+                      </a:solidFill>
+                      <a:prstDash val="solid"/>
+                      <a:round/>
+                      <a:headEnd type="none" w="med" len="med"/>
+                      <a:tailEnd type="none" w="med" len="med"/>
+                    </a:lnT>
+                    <a:lnB w="9525" cap="flat" cmpd="sng" algn="ctr">
+                      <a:solidFill>
+                        <a:srgbClr val="FFFFFF"/>
+                      </a:solidFill>
+                      <a:prstDash val="solid"/>
+                      <a:round/>
+                      <a:headEnd type="none" w="med" len="med"/>
+                      <a:tailEnd type="none" w="med" len="med"/>
+                    </a:lnB>
+                    <a:solidFill>
+                      <a:srgbClr val="FDF1E9"/>
+                    </a:solidFill>
+                  </a:tcPr>
+                </a:tc>
+                <a:tc>
+                  <a:txBody>
+                    <a:bodyPr/>
+                    <a:lstStyle/>
+                    <a:p>
+                      <a:pPr algn="ctr" indent="0" marL="0">
+                        <a:buNone/>
+                      </a:pPr>
+                      <a:r>
+                        <a:rPr lang="en-US" sz="1600" b="1" dirty="0">
+                          <a:solidFill>
+                            <a:srgbClr val="2EA9B6"/>
+                          </a:solidFill>
+                        </a:rPr>
+                        <a:t>116.8%</a:t>
+                      </a:r>
+                      <a:endParaRPr lang="en-US" sz="1600" dirty="0"/>
+                    </a:p>
+                  </a:txBody>
+                  <a:tcPr marL="36576" marR="36576" marT="36576" marB="36576" anchor="ctr">
+                    <a:lnL w="9525" cap="flat" cmpd="sng" algn="ctr">
+                      <a:solidFill>
+                        <a:srgbClr val="FFFFFF"/>
+                      </a:solidFill>
+                      <a:prstDash val="solid"/>
+                      <a:round/>
+                      <a:headEnd type="none" w="med" len="med"/>
+                      <a:tailEnd type="none" w="med" len="med"/>
+                    </a:lnL>
+                    <a:lnR w="9525" cap="flat" cmpd="sng" algn="ctr">
+                      <a:solidFill>
+                        <a:srgbClr val="FFFFFF"/>
+                      </a:solidFill>
+                      <a:prstDash val="solid"/>
+                      <a:round/>
+                      <a:headEnd type="none" w="med" len="med"/>
+                      <a:tailEnd type="none" w="med" len="med"/>
+                    </a:lnR>
+                    <a:lnT w="9525" cap="flat" cmpd="sng" algn="ctr">
+                      <a:solidFill>
+                        <a:srgbClr val="FFFFFF"/>
+                      </a:solidFill>
+                      <a:prstDash val="solid"/>
+                      <a:round/>
+                      <a:headEnd type="none" w="med" len="med"/>
+                      <a:tailEnd type="none" w="med" len="med"/>
+                    </a:lnT>
+                    <a:lnB w="9525" cap="flat" cmpd="sng" algn="ctr">
+                      <a:solidFill>
+                        <a:srgbClr val="FFFFFF"/>
+                      </a:solidFill>
+                      <a:prstDash val="solid"/>
+                      <a:round/>
+                      <a:headEnd type="none" w="med" len="med"/>
+                      <a:tailEnd type="none" w="med" len="med"/>
+                    </a:lnB>
+                    <a:solidFill>
+                      <a:srgbClr val="FDF1E9"/>
+                    </a:solidFill>
+                  </a:tcPr>
+                </a:tc>
+                <a:tc>
+                  <a:txBody>
+                    <a:bodyPr/>
+                    <a:lstStyle/>
+                    <a:p>
+                      <a:pPr algn="ctr" indent="0" marL="0">
+                        <a:buNone/>
+                      </a:pPr>
+                      <a:r>
+                        <a:rPr lang="en-US" sz="1600" b="1" dirty="0">
+                          <a:solidFill>
+                            <a:srgbClr val="C00000"/>
+                          </a:solidFill>
+                        </a:rPr>
+                        <a:t>98.7%</a:t>
+                      </a:r>
+                      <a:endParaRPr lang="en-US" sz="1600" dirty="0"/>
+                    </a:p>
+                  </a:txBody>
+                  <a:tcPr marL="36576" marR="36576" marT="36576" marB="36576" anchor="ctr">
+                    <a:lnL w="9525" cap="flat" cmpd="sng" algn="ctr">
+                      <a:solidFill>
+                        <a:srgbClr val="FFFFFF"/>
+                      </a:solidFill>
+                      <a:prstDash val="solid"/>
+                      <a:round/>
+                      <a:headEnd type="none" w="med" len="med"/>
+                      <a:tailEnd type="none" w="med" len="med"/>
+                    </a:lnL>
+                    <a:lnR w="9525" cap="flat" cmpd="sng" algn="ctr">
+                      <a:solidFill>
+                        <a:srgbClr val="FFFFFF"/>
+                      </a:solidFill>
+                      <a:prstDash val="solid"/>
+                      <a:round/>
+                      <a:headEnd type="none" w="med" len="med"/>
+                      <a:tailEnd type="none" w="med" len="med"/>
+                    </a:lnR>
+                    <a:lnT w="9525" cap="flat" cmpd="sng" algn="ctr">
+                      <a:solidFill>
+                        <a:srgbClr val="FFFFFF"/>
+                      </a:solidFill>
+                      <a:prstDash val="solid"/>
+                      <a:round/>
+                      <a:headEnd type="none" w="med" len="med"/>
+                      <a:tailEnd type="none" w="med" len="med"/>
+                    </a:lnT>
+                    <a:lnB w="9525" cap="flat" cmpd="sng" algn="ctr">
+                      <a:solidFill>
+                        <a:srgbClr val="FFFFFF"/>
+                      </a:solidFill>
+                      <a:prstDash val="solid"/>
+                      <a:round/>
+                      <a:headEnd type="none" w="med" len="med"/>
+                      <a:tailEnd type="none" w="med" len="med"/>
+                    </a:lnB>
+                    <a:solidFill>
+                      <a:srgbClr val="FDF1E9"/>
+                    </a:solidFill>
+                  </a:tcPr>
+                </a:tc>
+              </a:tr>
+              <a:tr h="292608">
+                <a:tc>
+                  <a:txBody>
+                    <a:bodyPr/>
+                    <a:lstStyle/>
+                    <a:p>
+                      <a:pPr algn="ctr" indent="0" marL="0">
+                        <a:buNone/>
+                      </a:pPr>
+                      <a:r>
+                        <a:rPr lang="en-US" sz="1300" b="1" dirty="0">
+                          <a:solidFill>
+                            <a:srgbClr val="000000"/>
+                          </a:solidFill>
+                        </a:rPr>
+                        <a:t>115年仍未達標家數</a:t>
+                      </a:r>
+                      <a:endParaRPr lang="en-US" sz="1300" dirty="0"/>
+                    </a:p>
+                  </a:txBody>
+                  <a:tcPr marL="36576" marR="36576" marT="36576" marB="36576" anchor="ctr">
+                    <a:lnL w="9525" cap="flat" cmpd="sng" algn="ctr">
+                      <a:solidFill>
+                        <a:srgbClr val="FFFFFF"/>
+                      </a:solidFill>
+                      <a:prstDash val="solid"/>
+                      <a:round/>
+                      <a:headEnd type="none" w="med" len="med"/>
+                      <a:tailEnd type="none" w="med" len="med"/>
+                    </a:lnL>
+                    <a:lnR w="9525" cap="flat" cmpd="sng" algn="ctr">
+                      <a:solidFill>
+                        <a:srgbClr val="FFFFFF"/>
+                      </a:solidFill>
+                      <a:prstDash val="solid"/>
+                      <a:round/>
+                      <a:headEnd type="none" w="med" len="med"/>
+                      <a:tailEnd type="none" w="med" len="med"/>
+                    </a:lnR>
+                    <a:lnT w="9525" cap="flat" cmpd="sng" algn="ctr">
+                      <a:solidFill>
+                        <a:srgbClr val="FFFFFF"/>
+                      </a:solidFill>
+                      <a:prstDash val="solid"/>
+                      <a:round/>
+                      <a:headEnd type="none" w="med" len="med"/>
+                      <a:tailEnd type="none" w="med" len="med"/>
+                    </a:lnT>
+                    <a:lnB w="9525" cap="flat" cmpd="sng" algn="ctr">
+                      <a:solidFill>
+                        <a:srgbClr val="FFFFFF"/>
+                      </a:solidFill>
+                      <a:prstDash val="solid"/>
+                      <a:round/>
+                      <a:headEnd type="none" w="med" len="med"/>
+                      <a:tailEnd type="none" w="med" len="med"/>
+                    </a:lnB>
+                    <a:solidFill>
+                      <a:srgbClr val="FFFFFF"/>
+                    </a:solidFill>
+                  </a:tcPr>
+                </a:tc>
+                <a:tc>
+                  <a:txBody>
+                    <a:bodyPr/>
+                    <a:lstStyle/>
+                    <a:p>
+                      <a:pPr algn="ctr" indent="0" marL="0">
+                        <a:buNone/>
+                      </a:pPr>
+                      <a:r>
+                        <a:rPr lang="en-US" sz="1400" dirty="0">
+                          <a:solidFill>
+                            <a:srgbClr val="000000"/>
+                          </a:solidFill>
+                        </a:rPr>
+                        <a:t>18家（26%）</a:t>
+                      </a:r>
+                      <a:endParaRPr lang="en-US" sz="1400" dirty="0"/>
+                    </a:p>
+                  </a:txBody>
+                  <a:tcPr marL="36576" marR="36576" marT="36576" marB="36576" anchor="ctr">
+                    <a:lnL w="9525" cap="flat" cmpd="sng" algn="ctr">
+                      <a:solidFill>
+                        <a:srgbClr val="FFFFFF"/>
+                      </a:solidFill>
+                      <a:prstDash val="solid"/>
+                      <a:round/>
+                      <a:headEnd type="none" w="med" len="med"/>
+                      <a:tailEnd type="none" w="med" len="med"/>
+                    </a:lnL>
+                    <a:lnR w="9525" cap="flat" cmpd="sng" algn="ctr">
+                      <a:solidFill>
+                        <a:srgbClr val="FFFFFF"/>
+                      </a:solidFill>
+                      <a:prstDash val="solid"/>
+                      <a:round/>
+                      <a:headEnd type="none" w="med" len="med"/>
+                      <a:tailEnd type="none" w="med" len="med"/>
+                    </a:lnR>
+                    <a:lnT w="9525" cap="flat" cmpd="sng" algn="ctr">
+                      <a:solidFill>
+                        <a:srgbClr val="FFFFFF"/>
+                      </a:solidFill>
+                      <a:prstDash val="solid"/>
+                      <a:round/>
+                      <a:headEnd type="none" w="med" len="med"/>
+                      <a:tailEnd type="none" w="med" len="med"/>
+                    </a:lnT>
+                    <a:lnB w="9525" cap="flat" cmpd="sng" algn="ctr">
+                      <a:solidFill>
+                        <a:srgbClr val="FFFFFF"/>
+                      </a:solidFill>
+                      <a:prstDash val="solid"/>
+                      <a:round/>
+                      <a:headEnd type="none" w="med" len="med"/>
+                      <a:tailEnd type="none" w="med" len="med"/>
+                    </a:lnB>
+                    <a:solidFill>
+                      <a:srgbClr val="FFFFFF"/>
+                    </a:solidFill>
+                  </a:tcPr>
+                </a:tc>
+                <a:tc>
+                  <a:txBody>
+                    <a:bodyPr/>
+                    <a:lstStyle/>
+                    <a:p>
+                      <a:pPr algn="ctr" indent="0" marL="0">
+                        <a:buNone/>
+                      </a:pPr>
+                      <a:r>
+                        <a:rPr lang="en-US" sz="1400" b="1" dirty="0">
+                          <a:solidFill>
+                            <a:srgbClr val="C00000"/>
+                          </a:solidFill>
+                        </a:rPr>
+                        <a:t>66家（58%）</a:t>
+                      </a:r>
+                      <a:endParaRPr lang="en-US" sz="1400" dirty="0"/>
+                    </a:p>
+                  </a:txBody>
+                  <a:tcPr marL="36576" marR="36576" marT="36576" marB="36576" anchor="ctr">
+                    <a:lnL w="9525" cap="flat" cmpd="sng" algn="ctr">
+                      <a:solidFill>
+                        <a:srgbClr val="FFFFFF"/>
+                      </a:solidFill>
+                      <a:prstDash val="solid"/>
+                      <a:round/>
+                      <a:headEnd type="none" w="med" len="med"/>
+                      <a:tailEnd type="none" w="med" len="med"/>
+                    </a:lnL>
+                    <a:lnR w="9525" cap="flat" cmpd="sng" algn="ctr">
+                      <a:solidFill>
+                        <a:srgbClr val="FFFFFF"/>
+                      </a:solidFill>
+                      <a:prstDash val="solid"/>
+                      <a:round/>
+                      <a:headEnd type="none" w="med" len="med"/>
+                      <a:tailEnd type="none" w="med" len="med"/>
+                    </a:lnR>
+                    <a:lnT w="9525" cap="flat" cmpd="sng" algn="ctr">
+                      <a:solidFill>
+                        <a:srgbClr val="FFFFFF"/>
+                      </a:solidFill>
+                      <a:prstDash val="solid"/>
+                      <a:round/>
+                      <a:headEnd type="none" w="med" len="med"/>
+                      <a:tailEnd type="none" w="med" len="med"/>
+                    </a:lnT>
+                    <a:lnB w="9525" cap="flat" cmpd="sng" algn="ctr">
+                      <a:solidFill>
+                        <a:srgbClr val="FFFFFF"/>
+                      </a:solidFill>
+                      <a:prstDash val="solid"/>
+                      <a:round/>
+                      <a:headEnd type="none" w="med" len="med"/>
+                      <a:tailEnd type="none" w="med" len="med"/>
+                    </a:lnB>
+                    <a:solidFill>
+                      <a:srgbClr val="FFFFFF"/>
+                    </a:solidFill>
+                  </a:tcPr>
+                </a:tc>
+              </a:tr>
+              <a:tr h="292608">
+                <a:tc>
+                  <a:txBody>
+                    <a:bodyPr/>
+                    <a:lstStyle/>
+                    <a:p>
+                      <a:pPr algn="ctr" indent="0" marL="0">
+                        <a:buNone/>
+                      </a:pPr>
+                      <a:r>
+                        <a:rPr lang="en-US" sz="1300" b="1" dirty="0">
+                          <a:solidFill>
+                            <a:srgbClr val="000000"/>
+                          </a:solidFill>
+                        </a:rPr>
+                        <a:t>115年未達75%家數</a:t>
+                      </a:r>
+                      <a:endParaRPr lang="en-US" sz="1300" dirty="0"/>
+                    </a:p>
+                  </a:txBody>
+                  <a:tcPr marL="36576" marR="36576" marT="36576" marB="36576" anchor="ctr">
+                    <a:lnL w="9525" cap="flat" cmpd="sng" algn="ctr">
+                      <a:solidFill>
+                        <a:srgbClr val="FFFFFF"/>
+                      </a:solidFill>
+                      <a:prstDash val="solid"/>
+                      <a:round/>
+                      <a:headEnd type="none" w="med" len="med"/>
+                      <a:tailEnd type="none" w="med" len="med"/>
+                    </a:lnL>
+                    <a:lnR w="9525" cap="flat" cmpd="sng" algn="ctr">
+                      <a:solidFill>
+                        <a:srgbClr val="FFFFFF"/>
+                      </a:solidFill>
+                      <a:prstDash val="solid"/>
+                      <a:round/>
+                      <a:headEnd type="none" w="med" len="med"/>
+                      <a:tailEnd type="none" w="med" len="med"/>
+                    </a:lnR>
+                    <a:lnT w="9525" cap="flat" cmpd="sng" algn="ctr">
+                      <a:solidFill>
+                        <a:srgbClr val="FFFFFF"/>
+                      </a:solidFill>
+                      <a:prstDash val="solid"/>
+                      <a:round/>
+                      <a:headEnd type="none" w="med" len="med"/>
+                      <a:tailEnd type="none" w="med" len="med"/>
+                    </a:lnT>
+                    <a:lnB w="9525" cap="flat" cmpd="sng" algn="ctr">
+                      <a:solidFill>
+                        <a:srgbClr val="FFFFFF"/>
+                      </a:solidFill>
+                      <a:prstDash val="solid"/>
+                      <a:round/>
+                      <a:headEnd type="none" w="med" len="med"/>
+                      <a:tailEnd type="none" w="med" len="med"/>
+                    </a:lnB>
+                    <a:solidFill>
+                      <a:srgbClr val="FDF1E9"/>
+                    </a:solidFill>
+                  </a:tcPr>
+                </a:tc>
+                <a:tc>
+                  <a:txBody>
+                    <a:bodyPr/>
+                    <a:lstStyle/>
+                    <a:p>
+                      <a:pPr algn="ctr" indent="0" marL="0">
+                        <a:buNone/>
+                      </a:pPr>
+                      <a:r>
+                        <a:rPr lang="en-US" sz="1400" dirty="0">
+                          <a:solidFill>
+                            <a:srgbClr val="000000"/>
+                          </a:solidFill>
+                        </a:rPr>
+                        <a:t>0家</a:t>
+                      </a:r>
+                      <a:endParaRPr lang="en-US" sz="1400" dirty="0"/>
+                    </a:p>
+                  </a:txBody>
+                  <a:tcPr marL="36576" marR="36576" marT="36576" marB="36576" anchor="ctr">
+                    <a:lnL w="9525" cap="flat" cmpd="sng" algn="ctr">
+                      <a:solidFill>
+                        <a:srgbClr val="FFFFFF"/>
+                      </a:solidFill>
+                      <a:prstDash val="solid"/>
+                      <a:round/>
+                      <a:headEnd type="none" w="med" len="med"/>
+                      <a:tailEnd type="none" w="med" len="med"/>
+                    </a:lnL>
+                    <a:lnR w="9525" cap="flat" cmpd="sng" algn="ctr">
+                      <a:solidFill>
+                        <a:srgbClr val="FFFFFF"/>
+                      </a:solidFill>
+                      <a:prstDash val="solid"/>
+                      <a:round/>
+                      <a:headEnd type="none" w="med" len="med"/>
+                      <a:tailEnd type="none" w="med" len="med"/>
+                    </a:lnR>
+                    <a:lnT w="9525" cap="flat" cmpd="sng" algn="ctr">
+                      <a:solidFill>
+                        <a:srgbClr val="FFFFFF"/>
+                      </a:solidFill>
+                      <a:prstDash val="solid"/>
+                      <a:round/>
+                      <a:headEnd type="none" w="med" len="med"/>
+                      <a:tailEnd type="none" w="med" len="med"/>
+                    </a:lnT>
+                    <a:lnB w="9525" cap="flat" cmpd="sng" algn="ctr">
+                      <a:solidFill>
+                        <a:srgbClr val="FFFFFF"/>
+                      </a:solidFill>
+                      <a:prstDash val="solid"/>
+                      <a:round/>
+                      <a:headEnd type="none" w="med" len="med"/>
+                      <a:tailEnd type="none" w="med" len="med"/>
+                    </a:lnB>
+                    <a:solidFill>
+                      <a:srgbClr val="FDF1E9"/>
+                    </a:solidFill>
+                  </a:tcPr>
+                </a:tc>
+                <a:tc>
+                  <a:txBody>
+                    <a:bodyPr/>
+                    <a:lstStyle/>
+                    <a:p>
+                      <a:pPr algn="ctr" indent="0" marL="0">
+                        <a:buNone/>
+                      </a:pPr>
+                      <a:r>
+                        <a:rPr lang="en-US" sz="1400" b="1" dirty="0">
+                          <a:solidFill>
+                            <a:srgbClr val="C00000"/>
+                          </a:solidFill>
+                        </a:rPr>
+                        <a:t>19家（17%）</a:t>
+                      </a:r>
+                      <a:endParaRPr lang="en-US" sz="1400" dirty="0"/>
+                    </a:p>
+                  </a:txBody>
+                  <a:tcPr marL="36576" marR="36576" marT="36576" marB="36576" anchor="ctr">
+                    <a:lnL w="9525" cap="flat" cmpd="sng" algn="ctr">
+                      <a:solidFill>
+                        <a:srgbClr val="FFFFFF"/>
+                      </a:solidFill>
+                      <a:prstDash val="solid"/>
+                      <a:round/>
+                      <a:headEnd type="none" w="med" len="med"/>
+                      <a:tailEnd type="none" w="med" len="med"/>
+                    </a:lnL>
+                    <a:lnR w="9525" cap="flat" cmpd="sng" algn="ctr">
+                      <a:solidFill>
+                        <a:srgbClr val="FFFFFF"/>
+                      </a:solidFill>
+                      <a:prstDash val="solid"/>
+                      <a:round/>
+                      <a:headEnd type="none" w="med" len="med"/>
+                      <a:tailEnd type="none" w="med" len="med"/>
+                    </a:lnR>
+                    <a:lnT w="9525" cap="flat" cmpd="sng" algn="ctr">
+                      <a:solidFill>
+                        <a:srgbClr val="FFFFFF"/>
+                      </a:solidFill>
+                      <a:prstDash val="solid"/>
+                      <a:round/>
+                      <a:headEnd type="none" w="med" len="med"/>
+                      <a:tailEnd type="none" w="med" len="med"/>
+                    </a:lnT>
+                    <a:lnB w="9525" cap="flat" cmpd="sng" algn="ctr">
+                      <a:solidFill>
+                        <a:srgbClr val="FFFFFF"/>
+                      </a:solidFill>
+                      <a:prstDash val="solid"/>
+                      <a:round/>
+                      <a:headEnd type="none" w="med" len="med"/>
+                      <a:tailEnd type="none" w="med" len="med"/>
+                    </a:lnB>
+                    <a:solidFill>
+                      <a:srgbClr val="FDF1E9"/>
+                    </a:solidFill>
+                  </a:tcPr>
+                </a:tc>
+              </a:tr>
+            </a:tbl>
+          </a:graphicData>
+        </a:graphic>
+      </p:graphicFrame>
+      <p:sp>
+        <p:nvSpPr>
+          <p:cNvPr id="25" name="Slide Number Placeholder 0"/>
+          <p:cNvSpPr>
+            <a:spLocks noGrp="1"/>
+          </p:cNvSpPr>
+          <p:nvPr>
+            <p:ph type="sldNum" sz="quarter" idx="4294967295"/>
+          </p:nvPr>
+        </p:nvSpPr>
+        <p:spPr>
+          <a:xfrm>
+            <a:off x="10972800" y="6309360"/>
+            <a:ext cx="822960" cy="365760"/>
+          </a:xfrm>
+          <a:prstGeom prst="rect">
+            <a:avLst/>
+          </a:prstGeom>
+          <a:extLst>
+            <a:ext uri="{C572A759-6A51-4108-AA02-DFA0A04FC94B}">
+              <ma14:wrappingTextBoxFlag xmlns:ma14="http://schemas.microsoft.com/office/mac/drawingml/2011/main" val="0"/>
+            </a:ext>
+          </a:extLst>
+        </p:spPr>
+        <p:txBody>
+          <a:bodyPr/>
+          <a:lstStyle>
+            <a:lvl1pPr>
+              <a:defRPr sz="1400">
+                <a:solidFill>
+                  <a:schemeClr val="tx1"/>
+                </a:solidFill>
+              </a:defRPr>
+            </a:lvl1pPr>
+          </a:lstStyle>
+          <a:p>
+            <a:pPr algn="r"/>
+            <a:fld id="{F7021451-1387-4CA6-816F-3879F97B5CBC}" type="slidenum">
+              <a:rPr b="1" lang="en-US"/>
+              <a:t>2</a:t>
+            </a:fld>
+            <a:endParaRPr lang="en-US"/>
+          </a:p>
+        </p:txBody>
+      </p:sp>
+    </p:spTree>
+  </p:cSld>
+  <p:clrMapOvr>
+    <a:masterClrMapping/>
+  </p:clrMapOvr>
+</p:sld>
+</file>
+
+<file path=ppt/slides/slide11.xml><?xml version="1.0" encoding="utf-8"?>
+<p:sld xmlns:a="http://schemas.openxmlformats.org/drawingml/2006/main" xmlns:r="http://schemas.openxmlformats.org/officeDocument/2006/relationships" xmlns:p="http://schemas.openxmlformats.org/presentationml/2006/main">
+  <p:cSld name="Slide 3">
+    <p:spTree>
+      <p:nvGrpSpPr>
+        <p:cNvPr id="1" name=""/>
+        <p:cNvGrpSpPr/>
+        <p:nvPr/>
+      </p:nvGrpSpPr>
+      <p:grpSpPr>
+        <a:xfrm>
+          <a:off x="0" y="0"/>
+          <a:ext cx="0" cy="0"/>
+          <a:chOff x="0" y="0"/>
+          <a:chExt cx="0" cy="0"/>
+        </a:xfrm>
+      </p:grpSpPr>
+      <p:sp>
+        <p:nvSpPr>
+          <p:cNvPr id="2" name="Text 1"/>
+          <p:cNvSpPr/>
+          <p:nvPr>
+            <p:ph idx="102" type="title" hasCustomPrompt="1"/>
+          </p:nvPr>
+        </p:nvSpPr>
+        <p:spPr>
+          <a:xfrm>
+            <a:off x="1645920" y="274320"/>
+            <a:ext cx="8869680" cy="777240"/>
+          </a:xfrm>
+          <a:prstGeom prst="rect">
+            <a:avLst/>
+          </a:prstGeom>
+          <a:noFill/>
+          <a:ln/>
+        </p:spPr>
+        <p:txBody>
+          <a:bodyPr wrap="square" lIns="0" tIns="0" rIns="0" bIns="0" rtlCol="0" anchor="ctr"/>
+          <a:lstStyle/>
+          <a:p>
+            <a:pPr algn="ctr" indent="0" marL="0">
+              <a:buNone/>
+            </a:pPr>
+            <a:r>
+              <a:rPr lang="en-US" sz="3000" b="1" dirty="0">
+                <a:solidFill>
+                  <a:schemeClr val="tx1"/>
+                </a:solidFill>
+              </a:rPr>
               <a:t>115年整體達成率分布：183家分行</a:t>
             </a:r>
             <a:endParaRPr lang="en-US" sz="3000" dirty="0"/>
@@ -6799,7 +9177,7 @@
       </p:sp>
       <p:graphicFrame>
         <p:nvGraphicFramePr>
-          <p:cNvPr id="3" name="Table 0"/>
+          <p:cNvPr id="4" name="Table 0"/>
           <p:cNvGraphicFramePr>
             <a:graphicFrameLocks noGrp="1"/>
           </p:cNvGraphicFramePr>
@@ -10457,7 +12835,7 @@
             <a:pPr algn="r"/>
             <a:fld id="{F7021451-1387-4CA6-816F-3879F97B5CBC}" type="slidenum">
               <a:rPr b="1" lang="en-US"/>
-              <a:t>2</a:t>
+              <a:t>3</a:t>
             </a:fld>
             <a:endParaRPr lang="en-US"/>
           </a:p>
@@ -10471,9 +12849,9 @@
 </p:sld>
 </file>
 
-<file path=ppt/slides/slide11.xml><?xml version="1.0" encoding="utf-8"?>
+<file path=ppt/slides/slide12.xml><?xml version="1.0" encoding="utf-8"?>
 <p:sld xmlns:a="http://schemas.openxmlformats.org/drawingml/2006/main" xmlns:r="http://schemas.openxmlformats.org/officeDocument/2006/relationships" xmlns:p="http://schemas.openxmlformats.org/presentationml/2006/main">
-  <p:cSld name="Slide 3">
+  <p:cSld name="Slide 4">
     <p:spTree>
       <p:nvGrpSpPr>
         <p:cNvPr id="1" name=""/>
@@ -10564,7 +12942,7 @@
       </p:sp>
       <p:graphicFrame>
         <p:nvGraphicFramePr>
-          <p:cNvPr id="4" name="Table 0"/>
+          <p:cNvPr id="5" name="Table 0"/>
           <p:cNvGraphicFramePr>
             <a:graphicFrameLocks noGrp="1"/>
           </p:cNvGraphicFramePr>
@@ -16644,7 +19022,7 @@
             <a:pPr algn="r"/>
             <a:fld id="{F7021451-1387-4CA6-816F-3879F97B5CBC}" type="slidenum">
               <a:rPr b="1" lang="en-US"/>
-              <a:t>3</a:t>
+              <a:t>4</a:t>
             </a:fld>
             <a:endParaRPr lang="en-US"/>
           </a:p>
@@ -16658,9 +19036,9 @@
 </p:sld>
 </file>
 
-<file path=ppt/slides/slide12.xml><?xml version="1.0" encoding="utf-8"?>
+<file path=ppt/slides/slide13.xml><?xml version="1.0" encoding="utf-8"?>
 <p:sld xmlns:a="http://schemas.openxmlformats.org/drawingml/2006/main" xmlns:r="http://schemas.openxmlformats.org/officeDocument/2006/relationships" xmlns:p="http://schemas.openxmlformats.org/presentationml/2006/main">
-  <p:cSld name="Slide 4">
+  <p:cSld name="Slide 5">
     <p:spTree>
       <p:nvGrpSpPr>
         <p:cNvPr id="1" name=""/>
@@ -16997,7 +19375,7 @@
             <a:pPr algn="r"/>
             <a:fld id="{F7021451-1387-4CA6-816F-3879F97B5CBC}" type="slidenum">
               <a:rPr b="1" lang="en-US"/>
-              <a:t>4</a:t>
+              <a:t>5</a:t>
             </a:fld>
             <a:endParaRPr lang="en-US"/>
           </a:p>
@@ -17011,9 +19389,9 @@
 </p:sld>
 </file>
 
-<file path=ppt/slides/slide13.xml><?xml version="1.0" encoding="utf-8"?>
+<file path=ppt/slides/slide14.xml><?xml version="1.0" encoding="utf-8"?>
 <p:sld xmlns:a="http://schemas.openxmlformats.org/drawingml/2006/main" xmlns:r="http://schemas.openxmlformats.org/officeDocument/2006/relationships" xmlns:p="http://schemas.openxmlformats.org/presentationml/2006/main">
-  <p:cSld name="Slide 5">
+  <p:cSld name="Slide 6">
     <p:spTree>
       <p:nvGrpSpPr>
         <p:cNvPr id="1" name=""/>
@@ -17727,7 +20105,7 @@
       </p:sp>
       <p:graphicFrame>
         <p:nvGraphicFramePr>
-          <p:cNvPr id="6" name="Table 0"/>
+          <p:cNvPr id="7" name="Table 0"/>
           <p:cNvGraphicFramePr>
             <a:graphicFrameLocks noGrp="1"/>
           </p:cNvGraphicFramePr>
@@ -20027,7 +22405,7 @@
       </p:sp>
       <p:graphicFrame>
         <p:nvGraphicFramePr>
-          <p:cNvPr id="11" name="Table 1"/>
+          <p:cNvPr id="13" name="Table 1"/>
           <p:cNvGraphicFramePr>
             <a:graphicFrameLocks noGrp="1"/>
           </p:cNvGraphicFramePr>
@@ -21832,7 +24210,7 @@
             <a:pPr algn="r"/>
             <a:fld id="{F7021451-1387-4CA6-816F-3879F97B5CBC}" type="slidenum">
               <a:rPr b="1" lang="en-US"/>
-              <a:t>5</a:t>
+              <a:t>6</a:t>
             </a:fld>
             <a:endParaRPr lang="en-US"/>
           </a:p>
@@ -21846,9 +24224,9 @@
 </p:sld>
 </file>
 
-<file path=ppt/slides/slide14.xml><?xml version="1.0" encoding="utf-8"?>
+<file path=ppt/slides/slide15.xml><?xml version="1.0" encoding="utf-8"?>
 <p:sld xmlns:a="http://schemas.openxmlformats.org/drawingml/2006/main" xmlns:r="http://schemas.openxmlformats.org/officeDocument/2006/relationships" xmlns:p="http://schemas.openxmlformats.org/presentationml/2006/main">
-  <p:cSld name="Slide 6">
+  <p:cSld name="Slide 7">
     <p:spTree>
       <p:nvGrpSpPr>
         <p:cNvPr id="1" name=""/>
@@ -22352,7 +24730,7 @@
             <a:pPr algn="r"/>
             <a:fld id="{F7021451-1387-4CA6-816F-3879F97B5CBC}" type="slidenum">
               <a:rPr b="1" lang="en-US"/>
-              <a:t>6</a:t>
+              <a:t>7</a:t>
             </a:fld>
             <a:endParaRPr lang="en-US"/>
           </a:p>
@@ -38272,7 +40650,7 @@
                   <a:schemeClr val="tx1"/>
                 </a:solidFill>
               </a:rPr>
-              <a:t>114年未達標分行的「目標懲罰循環」</a:t>
+              <a:t>115年財富管理手續費收入達成說明</a:t>
             </a:r>
             <a:endParaRPr lang="en-US" sz="3000" dirty="0"/>
           </a:p>
@@ -38308,7 +40686,7 @@
                   <a:srgbClr val="7F7F7F"/>
                 </a:solidFill>
               </a:rPr>
-              <a:t>以 114 年達成率分群，追蹤 183 家分行在 115 年規則下的目標與實績（資料：COMPARE114／財管手收比較表）</a:t>
+              <a:t>115年1-9月實績 98.42億（目標進度 92.91億，達成 105.9%）；年化後 124.86億 對全年目標 117.85億。以下分析皆以年化數字為準</a:t>
             </a:r>
             <a:endParaRPr lang="en-US" sz="1300" dirty="0"/>
           </a:p>
@@ -38316,75 +40694,14 @@
       </p:sp>
       <p:sp>
         <p:nvSpPr>
-          <p:cNvPr id="4" name="step 1"/>
+          <p:cNvPr id="4" name="kpi 115年目標"/>
           <p:cNvSpPr/>
           <p:nvPr/>
         </p:nvSpPr>
         <p:spPr>
           <a:xfrm>
-            <a:off x="457200" y="1508760"/>
-            <a:ext cx="2697480" cy="457200"/>
-          </a:xfrm>
-          <a:prstGeom prst="homePlate">
-            <a:avLst/>
-          </a:prstGeom>
-          <a:solidFill>
-            <a:srgbClr val="7F7F7F"/>
-          </a:solidFill>
-          <a:ln w="12700">
-            <a:solidFill>
-              <a:srgbClr val="7F7F7F"/>
-            </a:solidFill>
-            <a:prstDash val="solid"/>
-          </a:ln>
-        </p:spPr>
-      </p:sp>
-      <p:sp>
-        <p:nvSpPr>
-          <p:cNvPr id="5" name="Text 3"/>
-          <p:cNvSpPr txBox="1"/>
-          <p:nvPr/>
-        </p:nvSpPr>
-        <p:spPr>
-          <a:xfrm>
-            <a:off x="685800" y="1508760"/>
-            <a:ext cx="2240280" cy="457200"/>
-          </a:xfrm>
-          <a:prstGeom prst="rect">
-            <a:avLst/>
-          </a:prstGeom>
-          <a:noFill/>
-          <a:ln/>
-        </p:spPr>
-        <p:txBody>
-          <a:bodyPr wrap="square" lIns="0" tIns="0" rIns="0" bIns="0" rtlCol="0" anchor="ctr"/>
-          <a:lstStyle/>
-          <a:p>
-            <a:pPr indent="0" marL="0">
-              <a:buNone/>
-            </a:pPr>
-            <a:r>
-              <a:rPr lang="en-US" sz="1400" b="1" dirty="0">
-                <a:solidFill>
-                  <a:srgbClr val="FFFFFF"/>
-                </a:solidFill>
-              </a:rPr>
-              <a:t>1  114年未達標</a:t>
-            </a:r>
-            <a:endParaRPr lang="en-US" sz="1400" dirty="0"/>
-          </a:p>
-        </p:txBody>
-      </p:sp>
-      <p:sp>
-        <p:nvSpPr>
-          <p:cNvPr id="6" name="card 1"/>
-          <p:cNvSpPr/>
-          <p:nvPr/>
-        </p:nvSpPr>
-        <p:spPr>
-          <a:xfrm>
-            <a:off x="457200" y="2057400"/>
-            <a:ext cx="2697480" cy="1691640"/>
+            <a:off x="457200" y="1463040"/>
+            <a:ext cx="2130552" cy="1234440"/>
           </a:xfrm>
           <a:prstGeom prst="rect">
             <a:avLst/>
@@ -38402,14 +40719,14 @@
       </p:sp>
       <p:sp>
         <p:nvSpPr>
-          <p:cNvPr id="7" name="Text 5"/>
+          <p:cNvPr id="5" name="Text 3"/>
           <p:cNvSpPr txBox="1"/>
           <p:nvPr/>
         </p:nvSpPr>
         <p:spPr>
           <a:xfrm>
-            <a:off x="548640" y="2103120"/>
-            <a:ext cx="2514600" cy="685800"/>
+            <a:off x="548640" y="1508760"/>
+            <a:ext cx="1947672" cy="274320"/>
           </a:xfrm>
           <a:prstGeom prst="rect">
             <a:avLst/>
@@ -38425,62 +40742,12 @@
               <a:buNone/>
             </a:pPr>
             <a:r>
-              <a:rPr lang="en-US" sz="3200" b="1" dirty="0">
+              <a:rPr lang="en-US" sz="1150" dirty="0">
                 <a:solidFill>
                   <a:srgbClr val="7F7F7F"/>
                 </a:solidFill>
               </a:rPr>
-              <a:t>113家</a:t>
-            </a:r>
-            <a:endParaRPr lang="en-US" sz="3200" dirty="0"/>
-          </a:p>
-        </p:txBody>
-      </p:sp>
-      <p:sp>
-        <p:nvSpPr>
-          <p:cNvPr id="8" name="Text 6"/>
-          <p:cNvSpPr txBox="1"/>
-          <p:nvPr/>
-        </p:nvSpPr>
-        <p:spPr>
-          <a:xfrm>
-            <a:off x="594360" y="2788920"/>
-            <a:ext cx="2423160" cy="914400"/>
-          </a:xfrm>
-          <a:prstGeom prst="rect">
-            <a:avLst/>
-          </a:prstGeom>
-          <a:noFill/>
-          <a:ln/>
-        </p:spPr>
-        <p:txBody>
-          <a:bodyPr wrap="square" lIns="0" tIns="0" rIns="0" bIns="0" rtlCol="0" anchor="t"/>
-          <a:lstStyle/>
-          <a:p>
-            <a:pPr algn="ctr" indent="0" marL="0">
-              <a:buNone/>
-            </a:pPr>
-            <a:r>
-              <a:rPr lang="en-US" sz="1150" dirty="0">
-                <a:solidFill>
-                  <a:srgbClr val="000000"/>
-                </a:solidFill>
-              </a:rPr>
-              <a:t>達成率未達100%</a:t>
-            </a:r>
-            <a:endParaRPr lang="en-US" sz="1150" dirty="0"/>
-          </a:p>
-          <a:p>
-            <a:pPr algn="ctr" indent="0" marL="0">
-              <a:buNone/>
-            </a:pPr>
-            <a:r>
-              <a:rPr lang="en-US" sz="1150" dirty="0">
-                <a:solidFill>
-                  <a:srgbClr val="000000"/>
-                </a:solidFill>
-              </a:rPr>
-              <a:t>占全行 62%</a:t>
+              <a:t>115年目標</a:t>
             </a:r>
             <a:endParaRPr lang="en-US" sz="1150" dirty="0"/>
           </a:p>
@@ -38488,39 +40755,14 @@
       </p:sp>
       <p:sp>
         <p:nvSpPr>
-          <p:cNvPr id="9" name="step 2"/>
-          <p:cNvSpPr/>
-          <p:nvPr/>
-        </p:nvSpPr>
-        <p:spPr>
-          <a:xfrm>
-            <a:off x="3310128" y="1508760"/>
-            <a:ext cx="2697480" cy="457200"/>
-          </a:xfrm>
-          <a:prstGeom prst="chevron">
-            <a:avLst/>
-          </a:prstGeom>
-          <a:solidFill>
-            <a:srgbClr val="D96C6C"/>
-          </a:solidFill>
-          <a:ln w="12700">
-            <a:solidFill>
-              <a:srgbClr val="D96C6C"/>
-            </a:solidFill>
-            <a:prstDash val="solid"/>
-          </a:ln>
-        </p:spPr>
-      </p:sp>
-      <p:sp>
-        <p:nvSpPr>
-          <p:cNvPr id="10" name="Text 8"/>
+          <p:cNvPr id="6" name="Text 4"/>
           <p:cNvSpPr txBox="1"/>
           <p:nvPr/>
         </p:nvSpPr>
         <p:spPr>
           <a:xfrm>
-            <a:off x="3538728" y="1508760"/>
-            <a:ext cx="2240280" cy="457200"/>
+            <a:off x="548640" y="1764792"/>
+            <a:ext cx="1947672" cy="548640"/>
           </a:xfrm>
           <a:prstGeom prst="rect">
             <a:avLst/>
@@ -38532,31 +40774,67 @@
           <a:bodyPr wrap="square" lIns="0" tIns="0" rIns="0" bIns="0" rtlCol="0" anchor="ctr"/>
           <a:lstStyle/>
           <a:p>
-            <a:pPr indent="0" marL="0">
+            <a:pPr algn="ctr" indent="0" marL="0">
               <a:buNone/>
             </a:pPr>
             <a:r>
-              <a:rPr lang="en-US" sz="1400" b="1" dirty="0">
+              <a:rPr lang="en-US" sz="2400" b="1" dirty="0">
                 <a:solidFill>
-                  <a:srgbClr val="FFFFFF"/>
+                  <a:srgbClr val="7F7F7F"/>
                 </a:solidFill>
               </a:rPr>
-              <a:t>2  115年目標被拉高</a:t>
+              <a:t>117.85億</a:t>
             </a:r>
-            <a:endParaRPr lang="en-US" sz="1400" dirty="0"/>
+            <a:endParaRPr lang="en-US" sz="2400" dirty="0"/>
           </a:p>
         </p:txBody>
       </p:sp>
       <p:sp>
         <p:nvSpPr>
-          <p:cNvPr id="11" name="card 2"/>
+          <p:cNvPr id="7" name="Text 5"/>
+          <p:cNvSpPr txBox="1"/>
+          <p:nvPr/>
+        </p:nvSpPr>
+        <p:spPr>
+          <a:xfrm>
+            <a:off x="548640" y="2331720"/>
+            <a:ext cx="1947672" cy="274320"/>
+          </a:xfrm>
+          <a:prstGeom prst="rect">
+            <a:avLst/>
+          </a:prstGeom>
+          <a:noFill/>
+          <a:ln/>
+        </p:spPr>
+        <p:txBody>
+          <a:bodyPr wrap="square" lIns="0" tIns="0" rIns="0" bIns="0" rtlCol="0" anchor="ctr"/>
+          <a:lstStyle/>
+          <a:p>
+            <a:pPr algn="ctr" indent="0" marL="0">
+              <a:buNone/>
+            </a:pPr>
+            <a:r>
+              <a:rPr lang="en-US" sz="1000" dirty="0">
+                <a:solidFill>
+                  <a:srgbClr val="7F7F7F"/>
+                </a:solidFill>
+              </a:rPr>
+              <a:t>較114年目標 +19.3%</a:t>
+            </a:r>
+            <a:endParaRPr lang="en-US" sz="1000" dirty="0"/>
+          </a:p>
+        </p:txBody>
+      </p:sp>
+      <p:sp>
+        <p:nvSpPr>
+          <p:cNvPr id="8" name="kpi 115年年化實績"/>
           <p:cNvSpPr/>
           <p:nvPr/>
         </p:nvSpPr>
         <p:spPr>
           <a:xfrm>
-            <a:off x="3310128" y="2057400"/>
-            <a:ext cx="2697480" cy="1691640"/>
+            <a:off x="2743200" y="1463040"/>
+            <a:ext cx="2130552" cy="1234440"/>
           </a:xfrm>
           <a:prstGeom prst="rect">
             <a:avLst/>
@@ -38574,14 +40852,14 @@
       </p:sp>
       <p:sp>
         <p:nvSpPr>
-          <p:cNvPr id="12" name="Text 10"/>
+          <p:cNvPr id="9" name="Text 7"/>
           <p:cNvSpPr txBox="1"/>
           <p:nvPr/>
         </p:nvSpPr>
         <p:spPr>
           <a:xfrm>
-            <a:off x="3401568" y="2103120"/>
-            <a:ext cx="2514600" cy="685800"/>
+            <a:off x="2834640" y="1508760"/>
+            <a:ext cx="1947672" cy="274320"/>
           </a:xfrm>
           <a:prstGeom prst="rect">
             <a:avLst/>
@@ -38597,62 +40875,12 @@
               <a:buNone/>
             </a:pPr>
             <a:r>
-              <a:rPr lang="en-US" sz="3200" b="1" dirty="0">
+              <a:rPr lang="en-US" sz="1150" dirty="0">
                 <a:solidFill>
-                  <a:srgbClr val="C00000"/>
+                  <a:srgbClr val="7F7F7F"/>
                 </a:solidFill>
               </a:rPr>
-              <a:t>+41%</a:t>
-            </a:r>
-            <a:endParaRPr lang="en-US" sz="3200" dirty="0"/>
-          </a:p>
-        </p:txBody>
-      </p:sp>
-      <p:sp>
-        <p:nvSpPr>
-          <p:cNvPr id="13" name="Text 11"/>
-          <p:cNvSpPr txBox="1"/>
-          <p:nvPr/>
-        </p:nvSpPr>
-        <p:spPr>
-          <a:xfrm>
-            <a:off x="3447288" y="2788920"/>
-            <a:ext cx="2423160" cy="914400"/>
-          </a:xfrm>
-          <a:prstGeom prst="rect">
-            <a:avLst/>
-          </a:prstGeom>
-          <a:noFill/>
-          <a:ln/>
-        </p:spPr>
-        <p:txBody>
-          <a:bodyPr wrap="square" lIns="0" tIns="0" rIns="0" bIns="0" rtlCol="0" anchor="t"/>
-          <a:lstStyle/>
-          <a:p>
-            <a:pPr algn="ctr" indent="0" marL="0">
-              <a:buNone/>
-            </a:pPr>
-            <a:r>
-              <a:rPr lang="en-US" sz="1150" dirty="0">
-                <a:solidFill>
-                  <a:srgbClr val="000000"/>
-                </a:solidFill>
-              </a:rPr>
-              <a:t>115目標＝114分行目標×105～115%</a:t>
-            </a:r>
-            <a:endParaRPr lang="en-US" sz="1150" dirty="0"/>
-          </a:p>
-          <a:p>
-            <a:pPr algn="ctr" indent="0" marL="0">
-              <a:buNone/>
-            </a:pPr>
-            <a:r>
-              <a:rPr lang="en-US" sz="1150" dirty="0">
-                <a:solidFill>
-                  <a:srgbClr val="000000"/>
-                </a:solidFill>
-              </a:rPr>
-              <a:t>較114年實績平均拉高41%</a:t>
+              <a:t>115年年化實績</a:t>
             </a:r>
             <a:endParaRPr lang="en-US" sz="1150" dirty="0"/>
           </a:p>
@@ -38660,39 +40888,14 @@
       </p:sp>
       <p:sp>
         <p:nvSpPr>
-          <p:cNvPr id="14" name="step 3"/>
-          <p:cNvSpPr/>
-          <p:nvPr/>
-        </p:nvSpPr>
-        <p:spPr>
-          <a:xfrm>
-            <a:off x="6163056" y="1508760"/>
-            <a:ext cx="2697480" cy="457200"/>
-          </a:xfrm>
-          <a:prstGeom prst="chevron">
-            <a:avLst/>
-          </a:prstGeom>
-          <a:solidFill>
-            <a:srgbClr val="C00000"/>
-          </a:solidFill>
-          <a:ln w="12700">
-            <a:solidFill>
-              <a:srgbClr val="C00000"/>
-            </a:solidFill>
-            <a:prstDash val="solid"/>
-          </a:ln>
-        </p:spPr>
-      </p:sp>
-      <p:sp>
-        <p:nvSpPr>
-          <p:cNvPr id="15" name="Text 13"/>
+          <p:cNvPr id="10" name="Text 8"/>
           <p:cNvSpPr txBox="1"/>
           <p:nvPr/>
         </p:nvSpPr>
         <p:spPr>
           <a:xfrm>
-            <a:off x="6391656" y="1508760"/>
-            <a:ext cx="2240280" cy="457200"/>
+            <a:off x="2834640" y="1764792"/>
+            <a:ext cx="1947672" cy="548640"/>
           </a:xfrm>
           <a:prstGeom prst="rect">
             <a:avLst/>
@@ -38704,31 +40907,200 @@
           <a:bodyPr wrap="square" lIns="0" tIns="0" rIns="0" bIns="0" rtlCol="0" anchor="ctr"/>
           <a:lstStyle/>
           <a:p>
-            <a:pPr indent="0" marL="0">
+            <a:pPr algn="ctr" indent="0" marL="0">
               <a:buNone/>
             </a:pPr>
             <a:r>
-              <a:rPr lang="en-US" sz="1400" b="1" dirty="0">
+              <a:rPr lang="en-US" sz="2400" b="1" dirty="0">
                 <a:solidFill>
-                  <a:srgbClr val="FFFFFF"/>
+                  <a:srgbClr val="960A14"/>
                 </a:solidFill>
               </a:rPr>
-              <a:t>3  115年持續未達標</a:t>
+              <a:t>124.86億</a:t>
             </a:r>
-            <a:endParaRPr lang="en-US" sz="1400" dirty="0"/>
+            <a:endParaRPr lang="en-US" sz="2400" dirty="0"/>
           </a:p>
         </p:txBody>
       </p:sp>
       <p:sp>
         <p:nvSpPr>
-          <p:cNvPr id="16" name="card 3"/>
+          <p:cNvPr id="11" name="Text 9"/>
+          <p:cNvSpPr txBox="1"/>
+          <p:nvPr/>
+        </p:nvSpPr>
+        <p:spPr>
+          <a:xfrm>
+            <a:off x="2834640" y="2331720"/>
+            <a:ext cx="1947672" cy="274320"/>
+          </a:xfrm>
+          <a:prstGeom prst="rect">
+            <a:avLst/>
+          </a:prstGeom>
+          <a:noFill/>
+          <a:ln/>
+        </p:spPr>
+        <p:txBody>
+          <a:bodyPr wrap="square" lIns="0" tIns="0" rIns="0" bIns="0" rtlCol="0" anchor="ctr"/>
+          <a:lstStyle/>
+          <a:p>
+            <a:pPr algn="ctr" indent="0" marL="0">
+              <a:buNone/>
+            </a:pPr>
+            <a:r>
+              <a:rPr lang="en-US" sz="1000" dirty="0">
+                <a:solidFill>
+                  <a:srgbClr val="7F7F7F"/>
+                </a:solidFill>
+              </a:rPr>
+              <a:t>較114年實績 +29.7%</a:t>
+            </a:r>
+            <a:endParaRPr lang="en-US" sz="1000" dirty="0"/>
+          </a:p>
+        </p:txBody>
+      </p:sp>
+      <p:sp>
+        <p:nvSpPr>
+          <p:cNvPr id="12" name="kpi 115年達成率"/>
           <p:cNvSpPr/>
           <p:nvPr/>
         </p:nvSpPr>
         <p:spPr>
           <a:xfrm>
-            <a:off x="6163056" y="2057400"/>
-            <a:ext cx="2697480" cy="1691640"/>
+            <a:off x="5029200" y="1463040"/>
+            <a:ext cx="2130552" cy="1234440"/>
+          </a:xfrm>
+          <a:prstGeom prst="rect">
+            <a:avLst/>
+          </a:prstGeom>
+          <a:solidFill>
+            <a:srgbClr val="FDF1E9"/>
+          </a:solidFill>
+          <a:ln w="12700">
+            <a:solidFill>
+              <a:srgbClr val="FDF1E9"/>
+            </a:solidFill>
+            <a:prstDash val="solid"/>
+          </a:ln>
+        </p:spPr>
+      </p:sp>
+      <p:sp>
+        <p:nvSpPr>
+          <p:cNvPr id="13" name="Text 11"/>
+          <p:cNvSpPr txBox="1"/>
+          <p:nvPr/>
+        </p:nvSpPr>
+        <p:spPr>
+          <a:xfrm>
+            <a:off x="5120640" y="1508760"/>
+            <a:ext cx="1947672" cy="274320"/>
+          </a:xfrm>
+          <a:prstGeom prst="rect">
+            <a:avLst/>
+          </a:prstGeom>
+          <a:noFill/>
+          <a:ln/>
+        </p:spPr>
+        <p:txBody>
+          <a:bodyPr wrap="square" lIns="0" tIns="0" rIns="0" bIns="0" rtlCol="0" anchor="ctr"/>
+          <a:lstStyle/>
+          <a:p>
+            <a:pPr algn="ctr" indent="0" marL="0">
+              <a:buNone/>
+            </a:pPr>
+            <a:r>
+              <a:rPr lang="en-US" sz="1150" dirty="0">
+                <a:solidFill>
+                  <a:srgbClr val="7F7F7F"/>
+                </a:solidFill>
+              </a:rPr>
+              <a:t>115年達成率</a:t>
+            </a:r>
+            <a:endParaRPr lang="en-US" sz="1150" dirty="0"/>
+          </a:p>
+        </p:txBody>
+      </p:sp>
+      <p:sp>
+        <p:nvSpPr>
+          <p:cNvPr id="14" name="Text 12"/>
+          <p:cNvSpPr txBox="1"/>
+          <p:nvPr/>
+        </p:nvSpPr>
+        <p:spPr>
+          <a:xfrm>
+            <a:off x="5120640" y="1764792"/>
+            <a:ext cx="1947672" cy="548640"/>
+          </a:xfrm>
+          <a:prstGeom prst="rect">
+            <a:avLst/>
+          </a:prstGeom>
+          <a:noFill/>
+          <a:ln/>
+        </p:spPr>
+        <p:txBody>
+          <a:bodyPr wrap="square" lIns="0" tIns="0" rIns="0" bIns="0" rtlCol="0" anchor="ctr"/>
+          <a:lstStyle/>
+          <a:p>
+            <a:pPr algn="ctr" indent="0" marL="0">
+              <a:buNone/>
+            </a:pPr>
+            <a:r>
+              <a:rPr lang="en-US" sz="2400" b="1" dirty="0">
+                <a:solidFill>
+                  <a:srgbClr val="C00000"/>
+                </a:solidFill>
+              </a:rPr>
+              <a:t>105.9%</a:t>
+            </a:r>
+            <a:endParaRPr lang="en-US" sz="2400" dirty="0"/>
+          </a:p>
+        </p:txBody>
+      </p:sp>
+      <p:sp>
+        <p:nvSpPr>
+          <p:cNvPr id="15" name="Text 13"/>
+          <p:cNvSpPr txBox="1"/>
+          <p:nvPr/>
+        </p:nvSpPr>
+        <p:spPr>
+          <a:xfrm>
+            <a:off x="5120640" y="2331720"/>
+            <a:ext cx="1947672" cy="274320"/>
+          </a:xfrm>
+          <a:prstGeom prst="rect">
+            <a:avLst/>
+          </a:prstGeom>
+          <a:noFill/>
+          <a:ln/>
+        </p:spPr>
+        <p:txBody>
+          <a:bodyPr wrap="square" lIns="0" tIns="0" rIns="0" bIns="0" rtlCol="0" anchor="ctr"/>
+          <a:lstStyle/>
+          <a:p>
+            <a:pPr algn="ctr" indent="0" marL="0">
+              <a:buNone/>
+            </a:pPr>
+            <a:r>
+              <a:rPr lang="en-US" sz="1000" dirty="0">
+                <a:solidFill>
+                  <a:srgbClr val="7F7F7F"/>
+                </a:solidFill>
+              </a:rPr>
+              <a:t>114年為 97.5%</a:t>
+            </a:r>
+            <a:endParaRPr lang="en-US" sz="1000" dirty="0"/>
+          </a:p>
+        </p:txBody>
+      </p:sp>
+      <p:sp>
+        <p:nvSpPr>
+          <p:cNvPr id="16" name="kpi 達標分行"/>
+          <p:cNvSpPr/>
+          <p:nvPr/>
+        </p:nvSpPr>
+        <p:spPr>
+          <a:xfrm>
+            <a:off x="7315200" y="1463040"/>
+            <a:ext cx="2130552" cy="1234440"/>
           </a:xfrm>
           <a:prstGeom prst="rect">
             <a:avLst/>
@@ -38752,8 +41124,8 @@
         </p:nvSpPr>
         <p:spPr>
           <a:xfrm>
-            <a:off x="6254496" y="2103120"/>
-            <a:ext cx="2514600" cy="685800"/>
+            <a:off x="7406640" y="1508760"/>
+            <a:ext cx="1947672" cy="274320"/>
           </a:xfrm>
           <a:prstGeom prst="rect">
             <a:avLst/>
@@ -38769,14 +41141,14 @@
               <a:buNone/>
             </a:pPr>
             <a:r>
-              <a:rPr lang="en-US" sz="3200" b="1" dirty="0">
+              <a:rPr lang="en-US" sz="1150" dirty="0">
                 <a:solidFill>
-                  <a:srgbClr val="C00000"/>
+                  <a:srgbClr val="7F7F7F"/>
                 </a:solidFill>
               </a:rPr>
-              <a:t>66家</a:t>
+              <a:t>達標分行</a:t>
             </a:r>
-            <a:endParaRPr lang="en-US" sz="3200" dirty="0"/>
+            <a:endParaRPr lang="en-US" sz="1150" dirty="0"/>
           </a:p>
         </p:txBody>
       </p:sp>
@@ -38788,83 +41160,8 @@
         </p:nvSpPr>
         <p:spPr>
           <a:xfrm>
-            <a:off x="6300216" y="2788920"/>
-            <a:ext cx="2423160" cy="914400"/>
-          </a:xfrm>
-          <a:prstGeom prst="rect">
-            <a:avLst/>
-          </a:prstGeom>
-          <a:noFill/>
-          <a:ln/>
-        </p:spPr>
-        <p:txBody>
-          <a:bodyPr wrap="square" lIns="0" tIns="0" rIns="0" bIns="0" rtlCol="0" anchor="t"/>
-          <a:lstStyle/>
-          <a:p>
-            <a:pPr algn="ctr" indent="0" marL="0">
-              <a:buNone/>
-            </a:pPr>
-            <a:r>
-              <a:rPr lang="en-US" sz="1150" dirty="0">
-                <a:solidFill>
-                  <a:srgbClr val="000000"/>
-                </a:solidFill>
-              </a:rPr>
-              <a:t>達成率 98.7%；66家（58%）仍未達標</a:t>
-            </a:r>
-            <a:endParaRPr lang="en-US" sz="1150" dirty="0"/>
-          </a:p>
-          <a:p>
-            <a:pPr algn="ctr" indent="0" marL="0">
-              <a:buNone/>
-            </a:pPr>
-            <a:r>
-              <a:rPr lang="en-US" sz="1150" dirty="0">
-                <a:solidFill>
-                  <a:srgbClr val="000000"/>
-                </a:solidFill>
-              </a:rPr>
-              <a:t>19家未達75%，全數來自此群</a:t>
-            </a:r>
-            <a:endParaRPr lang="en-US" sz="1150" dirty="0"/>
-          </a:p>
-        </p:txBody>
-      </p:sp>
-      <p:sp>
-        <p:nvSpPr>
-          <p:cNvPr id="19" name="step 4"/>
-          <p:cNvSpPr/>
-          <p:nvPr/>
-        </p:nvSpPr>
-        <p:spPr>
-          <a:xfrm>
-            <a:off x="9015984" y="1508760"/>
-            <a:ext cx="2697480" cy="457200"/>
-          </a:xfrm>
-          <a:prstGeom prst="chevron">
-            <a:avLst/>
-          </a:prstGeom>
-          <a:solidFill>
-            <a:srgbClr val="960A14"/>
-          </a:solidFill>
-          <a:ln w="12700">
-            <a:solidFill>
-              <a:srgbClr val="960A14"/>
-            </a:solidFill>
-            <a:prstDash val="solid"/>
-          </a:ln>
-        </p:spPr>
-      </p:sp>
-      <p:sp>
-        <p:nvSpPr>
-          <p:cNvPr id="20" name="Text 18"/>
-          <p:cNvSpPr txBox="1"/>
-          <p:nvPr/>
-        </p:nvSpPr>
-        <p:spPr>
-          <a:xfrm>
-            <a:off x="9244584" y="1508760"/>
-            <a:ext cx="2240280" cy="457200"/>
+            <a:off x="7406640" y="1764792"/>
+            <a:ext cx="1947672" cy="548640"/>
           </a:xfrm>
           <a:prstGeom prst="rect">
             <a:avLst/>
@@ -38876,31 +41173,67 @@
           <a:bodyPr wrap="square" lIns="0" tIns="0" rIns="0" bIns="0" rtlCol="0" anchor="ctr"/>
           <a:lstStyle/>
           <a:p>
-            <a:pPr indent="0" marL="0">
+            <a:pPr algn="ctr" indent="0" marL="0">
               <a:buNone/>
             </a:pPr>
             <a:r>
-              <a:rPr lang="en-US" sz="1400" b="1" dirty="0">
+              <a:rPr lang="en-US" sz="2400" b="1" dirty="0">
                 <a:solidFill>
-                  <a:srgbClr val="FFFFFF"/>
+                  <a:srgbClr val="2EA9B6"/>
                 </a:solidFill>
               </a:rPr>
-              <a:t>4  缺口由他人填補</a:t>
+              <a:t>99 / 183</a:t>
             </a:r>
-            <a:endParaRPr lang="en-US" sz="1400" dirty="0"/>
+            <a:endParaRPr lang="en-US" sz="2400" dirty="0"/>
           </a:p>
         </p:txBody>
       </p:sp>
       <p:sp>
         <p:nvSpPr>
-          <p:cNvPr id="21" name="card 4"/>
+          <p:cNvPr id="19" name="Text 17"/>
+          <p:cNvSpPr txBox="1"/>
+          <p:nvPr/>
+        </p:nvSpPr>
+        <p:spPr>
+          <a:xfrm>
+            <a:off x="7406640" y="2331720"/>
+            <a:ext cx="1947672" cy="274320"/>
+          </a:xfrm>
+          <a:prstGeom prst="rect">
+            <a:avLst/>
+          </a:prstGeom>
+          <a:noFill/>
+          <a:ln/>
+        </p:spPr>
+        <p:txBody>
+          <a:bodyPr wrap="square" lIns="0" tIns="0" rIns="0" bIns="0" rtlCol="0" anchor="ctr"/>
+          <a:lstStyle/>
+          <a:p>
+            <a:pPr algn="ctr" indent="0" marL="0">
+              <a:buNone/>
+            </a:pPr>
+            <a:r>
+              <a:rPr lang="en-US" sz="1000" dirty="0">
+                <a:solidFill>
+                  <a:srgbClr val="7F7F7F"/>
+                </a:solidFill>
+              </a:rPr>
+              <a:t>占54%（114年 70家、38%）</a:t>
+            </a:r>
+            <a:endParaRPr lang="en-US" sz="1000" dirty="0"/>
+          </a:p>
+        </p:txBody>
+      </p:sp>
+      <p:sp>
+        <p:nvSpPr>
+          <p:cNvPr id="20" name="kpi 淨超額"/>
           <p:cNvSpPr/>
           <p:nvPr/>
         </p:nvSpPr>
         <p:spPr>
           <a:xfrm>
-            <a:off x="9015984" y="2057400"/>
-            <a:ext cx="2697480" cy="1691640"/>
+            <a:off x="9601200" y="1463040"/>
+            <a:ext cx="2130552" cy="1234440"/>
           </a:xfrm>
           <a:prstGeom prst="rect">
             <a:avLst/>
@@ -38918,14 +41251,14 @@
       </p:sp>
       <p:sp>
         <p:nvSpPr>
-          <p:cNvPr id="22" name="Text 20"/>
+          <p:cNvPr id="21" name="Text 19"/>
           <p:cNvSpPr txBox="1"/>
           <p:nvPr/>
         </p:nvSpPr>
         <p:spPr>
           <a:xfrm>
-            <a:off x="9107424" y="2103120"/>
-            <a:ext cx="2514600" cy="685800"/>
+            <a:off x="9692640" y="1508760"/>
+            <a:ext cx="1947672" cy="274320"/>
           </a:xfrm>
           <a:prstGeom prst="rect">
             <a:avLst/>
@@ -38941,14 +41274,50 @@
               <a:buNone/>
             </a:pPr>
             <a:r>
-              <a:rPr lang="en-US" sz="3200" b="1" dirty="0">
+              <a:rPr lang="en-US" sz="1150" dirty="0">
                 <a:solidFill>
-                  <a:srgbClr val="C00000"/>
+                  <a:srgbClr val="7F7F7F"/>
                 </a:solidFill>
               </a:rPr>
-              <a:t>7.1億</a:t>
+              <a:t>淨超額</a:t>
             </a:r>
-            <a:endParaRPr lang="en-US" sz="3200" dirty="0"/>
+            <a:endParaRPr lang="en-US" sz="1150" dirty="0"/>
+          </a:p>
+        </p:txBody>
+      </p:sp>
+      <p:sp>
+        <p:nvSpPr>
+          <p:cNvPr id="22" name="Text 20"/>
+          <p:cNvSpPr txBox="1"/>
+          <p:nvPr/>
+        </p:nvSpPr>
+        <p:spPr>
+          <a:xfrm>
+            <a:off x="9692640" y="1764792"/>
+            <a:ext cx="1947672" cy="548640"/>
+          </a:xfrm>
+          <a:prstGeom prst="rect">
+            <a:avLst/>
+          </a:prstGeom>
+          <a:noFill/>
+          <a:ln/>
+        </p:spPr>
+        <p:txBody>
+          <a:bodyPr wrap="square" lIns="0" tIns="0" rIns="0" bIns="0" rtlCol="0" anchor="ctr"/>
+          <a:lstStyle/>
+          <a:p>
+            <a:pPr algn="ctr" indent="0" marL="0">
+              <a:buNone/>
+            </a:pPr>
+            <a:r>
+              <a:rPr lang="en-US" sz="2400" b="1" dirty="0">
+                <a:solidFill>
+                  <a:srgbClr val="2EA9B6"/>
+                </a:solidFill>
+              </a:rPr>
+              <a:t>+7.00億</a:t>
+            </a:r>
+            <a:endParaRPr lang="en-US" sz="2400" dirty="0"/>
           </a:p>
         </p:txBody>
       </p:sp>
@@ -38960,83 +41329,8 @@
         </p:nvSpPr>
         <p:spPr>
           <a:xfrm>
-            <a:off x="9153144" y="2788920"/>
-            <a:ext cx="2423160" cy="914400"/>
-          </a:xfrm>
-          <a:prstGeom prst="rect">
-            <a:avLst/>
-          </a:prstGeom>
-          <a:noFill/>
-          <a:ln/>
-        </p:spPr>
-        <p:txBody>
-          <a:bodyPr wrap="square" lIns="0" tIns="0" rIns="0" bIns="0" rtlCol="0" anchor="t"/>
-          <a:lstStyle/>
-          <a:p>
-            <a:pPr algn="ctr" indent="0" marL="0">
-              <a:buNone/>
-            </a:pPr>
-            <a:r>
-              <a:rPr lang="en-US" sz="1150" dirty="0">
-                <a:solidFill>
-                  <a:srgbClr val="000000"/>
-                </a:solidFill>
-              </a:rPr>
-              <a:t>此群未達成缺口 7.1億（占全行缺口86%）</a:t>
-            </a:r>
-            <a:endParaRPr lang="en-US" sz="1150" dirty="0"/>
-          </a:p>
-          <a:p>
-            <a:pPr algn="ctr" indent="0" marL="0">
-              <a:buNone/>
-            </a:pPr>
-            <a:r>
-              <a:rPr lang="en-US" sz="1150" dirty="0">
-                <a:solidFill>
-                  <a:srgbClr val="000000"/>
-                </a:solidFill>
-              </a:rPr>
-              <a:t>由超額分行 15.2億 補足</a:t>
-            </a:r>
-            <a:endParaRPr lang="en-US" sz="1150" dirty="0"/>
-          </a:p>
-        </p:txBody>
-      </p:sp>
-      <p:sp>
-        <p:nvSpPr>
-          <p:cNvPr id="24" name="loop arrow"/>
-          <p:cNvSpPr/>
-          <p:nvPr/>
-        </p:nvSpPr>
-        <p:spPr>
-          <a:xfrm rot="5400000">
-            <a:off x="10881360" y="2011680"/>
-            <a:ext cx="822960" cy="457200"/>
-          </a:xfrm>
-          <a:prstGeom prst="uturnArrow">
-            <a:avLst/>
-          </a:prstGeom>
-          <a:solidFill>
-            <a:srgbClr val="C5C5C5"/>
-          </a:solidFill>
-          <a:ln w="12700">
-            <a:solidFill>
-              <a:srgbClr val="C5C5C5"/>
-            </a:solidFill>
-            <a:prstDash val="solid"/>
-          </a:ln>
-        </p:spPr>
-      </p:sp>
-      <p:sp>
-        <p:nvSpPr>
-          <p:cNvPr id="25" name="Text 23"/>
-          <p:cNvSpPr txBox="1"/>
-          <p:nvPr/>
-        </p:nvSpPr>
-        <p:spPr>
-          <a:xfrm>
-            <a:off x="457200" y="3840480"/>
-            <a:ext cx="11274552" cy="274320"/>
+            <a:off x="9692640" y="2331720"/>
+            <a:ext cx="1947672" cy="274320"/>
           </a:xfrm>
           <a:prstGeom prst="rect">
             <a:avLst/>
@@ -39048,35 +41342,35 @@
           <a:bodyPr wrap="square" lIns="0" tIns="0" rIns="0" bIns="0" rtlCol="0" anchor="ctr"/>
           <a:lstStyle/>
           <a:p>
-            <a:pPr algn="r" indent="0" marL="0">
+            <a:pPr algn="ctr" indent="0" marL="0">
               <a:buNone/>
             </a:pPr>
             <a:r>
-              <a:rPr lang="en-US" sz="1150" i="1" dirty="0">
+              <a:rPr lang="en-US" sz="1000" dirty="0">
                 <a:solidFill>
                   <a:srgbClr val="7F7F7F"/>
                 </a:solidFill>
               </a:rPr>
-              <a:t>116年若沿用相同規則，目標再×115%，循環持續</a:t>
+              <a:t>超額15.23億 − 缺口8.23億</a:t>
             </a:r>
-            <a:endParaRPr lang="en-US" sz="1150" dirty="0"/>
+            <a:endParaRPr lang="en-US" sz="1000" dirty="0"/>
           </a:p>
         </p:txBody>
       </p:sp>
       <p:sp>
         <p:nvSpPr>
-          <p:cNvPr id="26" name="chip 兩群對照"/>
+          <p:cNvPr id="24" name="chip 各通路區達成情形"/>
           <p:cNvSpPr txBox="1"/>
           <p:nvPr/>
         </p:nvSpPr>
         <p:spPr>
           <a:xfrm>
-            <a:off x="457200" y="4206240"/>
-            <a:ext cx="1371600" cy="384048"/>
+            <a:off x="457200" y="2880360"/>
+            <a:ext cx="2011680" cy="347472"/>
           </a:xfrm>
           <a:prstGeom prst="roundRect">
             <a:avLst>
-              <a:gd name="adj" fmla="val 19048"/>
+              <a:gd name="adj" fmla="val 21053"/>
             </a:avLst>
           </a:prstGeom>
           <a:solidFill>
@@ -39097,7 +41391,7 @@
                   <a:srgbClr val="FFFFFF"/>
                 </a:solidFill>
               </a:rPr>
-              <a:t>兩群對照</a:t>
+              <a:t>各通路區達成情形</a:t>
             </a:r>
             <a:endParaRPr lang="en-US" sz="1600" dirty="0"/>
           </a:p>
@@ -39118,19 +41412,24 @@
           </p:nvPr>
         </p:nvGraphicFramePr>
         <p:xfrm>
-          <a:off x="457200" y="4663440"/>
-          <a:ext cx="11274552" cy="914400"/>
+          <a:off x="457200" y="3291840"/>
+          <a:ext cx="6675120" cy="914400"/>
         </p:xfrm>
         <a:graphic>
           <a:graphicData uri="http://schemas.openxmlformats.org/drawingml/2006/table">
             <a:tbl>
               <a:tblPr/>
               <a:tblGrid>
-                <a:gridCol w="3657600"/>
-                <a:gridCol w="3803904"/>
-                <a:gridCol w="3813048"/>
+                <a:gridCol w="822960"/>
+                <a:gridCol w="640080"/>
+                <a:gridCol w="868680"/>
+                <a:gridCol w="868680"/>
+                <a:gridCol w="914400"/>
+                <a:gridCol w="868680"/>
+                <a:gridCol w="868680"/>
+                <a:gridCol w="822960"/>
               </a:tblGrid>
-              <a:tr h="292608">
+              <a:tr h="329184">
                 <a:tc>
                   <a:txBody>
                     <a:bodyPr/>
@@ -39140,14 +41439,14 @@
                         <a:buNone/>
                       </a:pPr>
                       <a:r>
-                        <a:rPr lang="en-US" sz="1400" b="1" dirty="0">
+                        <a:rPr lang="en-US" sz="1050" b="1" dirty="0">
                           <a:solidFill>
                             <a:srgbClr val="FFFFFF"/>
                           </a:solidFill>
                         </a:rPr>
-                        <a:t>115年表現</a:t>
-                      </a:r>
-                      <a:endParaRPr lang="en-US" sz="1400" dirty="0"/>
+                        <a:t>通路區</a:t>
+                      </a:r>
+                      <a:endParaRPr lang="en-US" sz="1050" dirty="0"/>
                     </a:p>
                   </a:txBody>
                   <a:tcPr marL="36576" marR="36576" marT="36576" marB="36576" anchor="ctr">
@@ -39201,55 +41500,55 @@
                         <a:buNone/>
                       </a:pPr>
                       <a:r>
-                        <a:rPr lang="en-US" sz="1400" b="1" dirty="0">
+                        <a:rPr lang="en-US" sz="1050" b="1" dirty="0">
                           <a:solidFill>
                             <a:srgbClr val="FFFFFF"/>
                           </a:solidFill>
                         </a:rPr>
-                        <a:t>114年達標群（70家）</a:t>
-                      </a:r>
-                      <a:endParaRPr lang="en-US" sz="1400" dirty="0"/>
-                    </a:p>
-                  </a:txBody>
-                  <a:tcPr marL="36576" marR="36576" marT="36576" marB="36576" anchor="ctr">
-                    <a:lnL w="9525" cap="flat" cmpd="sng" algn="ctr">
-                      <a:solidFill>
-                        <a:srgbClr val="FFFFFF"/>
-                      </a:solidFill>
-                      <a:prstDash val="solid"/>
-                      <a:round/>
-                      <a:headEnd type="none" w="med" len="med"/>
-                      <a:tailEnd type="none" w="med" len="med"/>
-                    </a:lnL>
-                    <a:lnR w="9525" cap="flat" cmpd="sng" algn="ctr">
-                      <a:solidFill>
-                        <a:srgbClr val="FFFFFF"/>
-                      </a:solidFill>
-                      <a:prstDash val="solid"/>
-                      <a:round/>
-                      <a:headEnd type="none" w="med" len="med"/>
-                      <a:tailEnd type="none" w="med" len="med"/>
-                    </a:lnR>
-                    <a:lnT w="9525" cap="flat" cmpd="sng" algn="ctr">
-                      <a:solidFill>
-                        <a:srgbClr val="FFFFFF"/>
-                      </a:solidFill>
-                      <a:prstDash val="solid"/>
-                      <a:round/>
-                      <a:headEnd type="none" w="med" len="med"/>
-                      <a:tailEnd type="none" w="med" len="med"/>
-                    </a:lnT>
-                    <a:lnB w="9525" cap="flat" cmpd="sng" algn="ctr">
-                      <a:solidFill>
-                        <a:srgbClr val="FFFFFF"/>
-                      </a:solidFill>
-                      <a:prstDash val="solid"/>
-                      <a:round/>
-                      <a:headEnd type="none" w="med" len="med"/>
-                      <a:tailEnd type="none" w="med" len="med"/>
-                    </a:lnB>
-                    <a:solidFill>
-                      <a:srgbClr val="2EA9B6"/>
+                        <a:t>家數</a:t>
+                      </a:r>
+                      <a:endParaRPr lang="en-US" sz="1050" dirty="0"/>
+                    </a:p>
+                  </a:txBody>
+                  <a:tcPr marL="36576" marR="36576" marT="36576" marB="36576" anchor="ctr">
+                    <a:lnL w="9525" cap="flat" cmpd="sng" algn="ctr">
+                      <a:solidFill>
+                        <a:srgbClr val="FFFFFF"/>
+                      </a:solidFill>
+                      <a:prstDash val="solid"/>
+                      <a:round/>
+                      <a:headEnd type="none" w="med" len="med"/>
+                      <a:tailEnd type="none" w="med" len="med"/>
+                    </a:lnL>
+                    <a:lnR w="9525" cap="flat" cmpd="sng" algn="ctr">
+                      <a:solidFill>
+                        <a:srgbClr val="FFFFFF"/>
+                      </a:solidFill>
+                      <a:prstDash val="solid"/>
+                      <a:round/>
+                      <a:headEnd type="none" w="med" len="med"/>
+                      <a:tailEnd type="none" w="med" len="med"/>
+                    </a:lnR>
+                    <a:lnT w="9525" cap="flat" cmpd="sng" algn="ctr">
+                      <a:solidFill>
+                        <a:srgbClr val="FFFFFF"/>
+                      </a:solidFill>
+                      <a:prstDash val="solid"/>
+                      <a:round/>
+                      <a:headEnd type="none" w="med" len="med"/>
+                      <a:tailEnd type="none" w="med" len="med"/>
+                    </a:lnT>
+                    <a:lnB w="9525" cap="flat" cmpd="sng" algn="ctr">
+                      <a:solidFill>
+                        <a:srgbClr val="FFFFFF"/>
+                      </a:solidFill>
+                      <a:prstDash val="solid"/>
+                      <a:round/>
+                      <a:headEnd type="none" w="med" len="med"/>
+                      <a:tailEnd type="none" w="med" len="med"/>
+                    </a:lnB>
+                    <a:solidFill>
+                      <a:srgbClr val="7F7F7F"/>
                     </a:solidFill>
                   </a:tcPr>
                 </a:tc>
@@ -39262,14 +41561,136 @@
                         <a:buNone/>
                       </a:pPr>
                       <a:r>
-                        <a:rPr lang="en-US" sz="1400" b="1" dirty="0">
+                        <a:rPr lang="en-US" sz="1050" b="1" dirty="0">
                           <a:solidFill>
                             <a:srgbClr val="FFFFFF"/>
                           </a:solidFill>
                         </a:rPr>
-                        <a:t>114年未達標群（113家）</a:t>
-                      </a:r>
-                      <a:endParaRPr lang="en-US" sz="1400" dirty="0"/>
+                        <a:t>115目標</a:t>
+                      </a:r>
+                      <a:endParaRPr lang="en-US" sz="1050" dirty="0"/>
+                    </a:p>
+                  </a:txBody>
+                  <a:tcPr marL="36576" marR="36576" marT="36576" marB="36576" anchor="ctr">
+                    <a:lnL w="9525" cap="flat" cmpd="sng" algn="ctr">
+                      <a:solidFill>
+                        <a:srgbClr val="FFFFFF"/>
+                      </a:solidFill>
+                      <a:prstDash val="solid"/>
+                      <a:round/>
+                      <a:headEnd type="none" w="med" len="med"/>
+                      <a:tailEnd type="none" w="med" len="med"/>
+                    </a:lnL>
+                    <a:lnR w="9525" cap="flat" cmpd="sng" algn="ctr">
+                      <a:solidFill>
+                        <a:srgbClr val="FFFFFF"/>
+                      </a:solidFill>
+                      <a:prstDash val="solid"/>
+                      <a:round/>
+                      <a:headEnd type="none" w="med" len="med"/>
+                      <a:tailEnd type="none" w="med" len="med"/>
+                    </a:lnR>
+                    <a:lnT w="9525" cap="flat" cmpd="sng" algn="ctr">
+                      <a:solidFill>
+                        <a:srgbClr val="FFFFFF"/>
+                      </a:solidFill>
+                      <a:prstDash val="solid"/>
+                      <a:round/>
+                      <a:headEnd type="none" w="med" len="med"/>
+                      <a:tailEnd type="none" w="med" len="med"/>
+                    </a:lnT>
+                    <a:lnB w="9525" cap="flat" cmpd="sng" algn="ctr">
+                      <a:solidFill>
+                        <a:srgbClr val="FFFFFF"/>
+                      </a:solidFill>
+                      <a:prstDash val="solid"/>
+                      <a:round/>
+                      <a:headEnd type="none" w="med" len="med"/>
+                      <a:tailEnd type="none" w="med" len="med"/>
+                    </a:lnB>
+                    <a:solidFill>
+                      <a:srgbClr val="7F7F7F"/>
+                    </a:solidFill>
+                  </a:tcPr>
+                </a:tc>
+                <a:tc>
+                  <a:txBody>
+                    <a:bodyPr/>
+                    <a:lstStyle/>
+                    <a:p>
+                      <a:pPr algn="ctr" indent="0" marL="0">
+                        <a:buNone/>
+                      </a:pPr>
+                      <a:r>
+                        <a:rPr lang="en-US" sz="1050" b="1" dirty="0">
+                          <a:solidFill>
+                            <a:srgbClr val="FFFFFF"/>
+                          </a:solidFill>
+                        </a:rPr>
+                        <a:t>115實績</a:t>
+                      </a:r>
+                      <a:endParaRPr lang="en-US" sz="1050" dirty="0"/>
+                    </a:p>
+                  </a:txBody>
+                  <a:tcPr marL="36576" marR="36576" marT="36576" marB="36576" anchor="ctr">
+                    <a:lnL w="9525" cap="flat" cmpd="sng" algn="ctr">
+                      <a:solidFill>
+                        <a:srgbClr val="FFFFFF"/>
+                      </a:solidFill>
+                      <a:prstDash val="solid"/>
+                      <a:round/>
+                      <a:headEnd type="none" w="med" len="med"/>
+                      <a:tailEnd type="none" w="med" len="med"/>
+                    </a:lnL>
+                    <a:lnR w="9525" cap="flat" cmpd="sng" algn="ctr">
+                      <a:solidFill>
+                        <a:srgbClr val="FFFFFF"/>
+                      </a:solidFill>
+                      <a:prstDash val="solid"/>
+                      <a:round/>
+                      <a:headEnd type="none" w="med" len="med"/>
+                      <a:tailEnd type="none" w="med" len="med"/>
+                    </a:lnR>
+                    <a:lnT w="9525" cap="flat" cmpd="sng" algn="ctr">
+                      <a:solidFill>
+                        <a:srgbClr val="FFFFFF"/>
+                      </a:solidFill>
+                      <a:prstDash val="solid"/>
+                      <a:round/>
+                      <a:headEnd type="none" w="med" len="med"/>
+                      <a:tailEnd type="none" w="med" len="med"/>
+                    </a:lnT>
+                    <a:lnB w="9525" cap="flat" cmpd="sng" algn="ctr">
+                      <a:solidFill>
+                        <a:srgbClr val="FFFFFF"/>
+                      </a:solidFill>
+                      <a:prstDash val="solid"/>
+                      <a:round/>
+                      <a:headEnd type="none" w="med" len="med"/>
+                      <a:tailEnd type="none" w="med" len="med"/>
+                    </a:lnB>
+                    <a:solidFill>
+                      <a:srgbClr val="7F7F7F"/>
+                    </a:solidFill>
+                  </a:tcPr>
+                </a:tc>
+                <a:tc>
+                  <a:txBody>
+                    <a:bodyPr/>
+                    <a:lstStyle/>
+                    <a:p>
+                      <a:pPr algn="ctr" indent="0" marL="0">
+                        <a:buNone/>
+                      </a:pPr>
+                      <a:r>
+                        <a:rPr lang="en-US" sz="1050" b="1" dirty="0">
+                          <a:solidFill>
+                            <a:srgbClr val="FFFFFF"/>
+                          </a:solidFill>
+                        </a:rPr>
+                        <a:t>115達成率</a:t>
+                      </a:r>
+                      <a:endParaRPr lang="en-US" sz="1050" dirty="0"/>
                     </a:p>
                   </a:txBody>
                   <a:tcPr marL="36576" marR="36576" marT="36576" marB="36576" anchor="ctr">
@@ -39314,8 +41735,191 @@
                     </a:solidFill>
                   </a:tcPr>
                 </a:tc>
+                <a:tc>
+                  <a:txBody>
+                    <a:bodyPr/>
+                    <a:lstStyle/>
+                    <a:p>
+                      <a:pPr algn="ctr" indent="0" marL="0">
+                        <a:buNone/>
+                      </a:pPr>
+                      <a:r>
+                        <a:rPr lang="en-US" sz="1050" b="1" dirty="0">
+                          <a:solidFill>
+                            <a:srgbClr val="FFFFFF"/>
+                          </a:solidFill>
+                        </a:rPr>
+                        <a:t>超額/缺口</a:t>
+                      </a:r>
+                      <a:endParaRPr lang="en-US" sz="1050" dirty="0"/>
+                    </a:p>
+                  </a:txBody>
+                  <a:tcPr marL="36576" marR="36576" marT="36576" marB="36576" anchor="ctr">
+                    <a:lnL w="9525" cap="flat" cmpd="sng" algn="ctr">
+                      <a:solidFill>
+                        <a:srgbClr val="FFFFFF"/>
+                      </a:solidFill>
+                      <a:prstDash val="solid"/>
+                      <a:round/>
+                      <a:headEnd type="none" w="med" len="med"/>
+                      <a:tailEnd type="none" w="med" len="med"/>
+                    </a:lnL>
+                    <a:lnR w="9525" cap="flat" cmpd="sng" algn="ctr">
+                      <a:solidFill>
+                        <a:srgbClr val="FFFFFF"/>
+                      </a:solidFill>
+                      <a:prstDash val="solid"/>
+                      <a:round/>
+                      <a:headEnd type="none" w="med" len="med"/>
+                      <a:tailEnd type="none" w="med" len="med"/>
+                    </a:lnR>
+                    <a:lnT w="9525" cap="flat" cmpd="sng" algn="ctr">
+                      <a:solidFill>
+                        <a:srgbClr val="FFFFFF"/>
+                      </a:solidFill>
+                      <a:prstDash val="solid"/>
+                      <a:round/>
+                      <a:headEnd type="none" w="med" len="med"/>
+                      <a:tailEnd type="none" w="med" len="med"/>
+                    </a:lnT>
+                    <a:lnB w="9525" cap="flat" cmpd="sng" algn="ctr">
+                      <a:solidFill>
+                        <a:srgbClr val="FFFFFF"/>
+                      </a:solidFill>
+                      <a:prstDash val="solid"/>
+                      <a:round/>
+                      <a:headEnd type="none" w="med" len="med"/>
+                      <a:tailEnd type="none" w="med" len="med"/>
+                    </a:lnB>
+                    <a:solidFill>
+                      <a:srgbClr val="7F7F7F"/>
+                    </a:solidFill>
+                  </a:tcPr>
+                </a:tc>
+                <a:tc>
+                  <a:txBody>
+                    <a:bodyPr/>
+                    <a:lstStyle/>
+                    <a:p>
+                      <a:pPr algn="ctr" indent="0" marL="0">
+                        <a:buNone/>
+                      </a:pPr>
+                      <a:r>
+                        <a:rPr lang="en-US" sz="1050" b="1" dirty="0">
+                          <a:solidFill>
+                            <a:srgbClr val="FFFFFF"/>
+                          </a:solidFill>
+                        </a:rPr>
+                        <a:t>達標家數</a:t>
+                      </a:r>
+                      <a:endParaRPr lang="en-US" sz="1050" dirty="0"/>
+                    </a:p>
+                  </a:txBody>
+                  <a:tcPr marL="36576" marR="36576" marT="36576" marB="36576" anchor="ctr">
+                    <a:lnL w="9525" cap="flat" cmpd="sng" algn="ctr">
+                      <a:solidFill>
+                        <a:srgbClr val="FFFFFF"/>
+                      </a:solidFill>
+                      <a:prstDash val="solid"/>
+                      <a:round/>
+                      <a:headEnd type="none" w="med" len="med"/>
+                      <a:tailEnd type="none" w="med" len="med"/>
+                    </a:lnL>
+                    <a:lnR w="9525" cap="flat" cmpd="sng" algn="ctr">
+                      <a:solidFill>
+                        <a:srgbClr val="FFFFFF"/>
+                      </a:solidFill>
+                      <a:prstDash val="solid"/>
+                      <a:round/>
+                      <a:headEnd type="none" w="med" len="med"/>
+                      <a:tailEnd type="none" w="med" len="med"/>
+                    </a:lnR>
+                    <a:lnT w="9525" cap="flat" cmpd="sng" algn="ctr">
+                      <a:solidFill>
+                        <a:srgbClr val="FFFFFF"/>
+                      </a:solidFill>
+                      <a:prstDash val="solid"/>
+                      <a:round/>
+                      <a:headEnd type="none" w="med" len="med"/>
+                      <a:tailEnd type="none" w="med" len="med"/>
+                    </a:lnT>
+                    <a:lnB w="9525" cap="flat" cmpd="sng" algn="ctr">
+                      <a:solidFill>
+                        <a:srgbClr val="FFFFFF"/>
+                      </a:solidFill>
+                      <a:prstDash val="solid"/>
+                      <a:round/>
+                      <a:headEnd type="none" w="med" len="med"/>
+                      <a:tailEnd type="none" w="med" len="med"/>
+                    </a:lnB>
+                    <a:solidFill>
+                      <a:srgbClr val="7F7F7F"/>
+                    </a:solidFill>
+                  </a:tcPr>
+                </a:tc>
+                <a:tc>
+                  <a:txBody>
+                    <a:bodyPr/>
+                    <a:lstStyle/>
+                    <a:p>
+                      <a:pPr algn="ctr" indent="0" marL="0">
+                        <a:buNone/>
+                      </a:pPr>
+                      <a:r>
+                        <a:rPr lang="en-US" sz="1050" b="1" dirty="0">
+                          <a:solidFill>
+                            <a:srgbClr val="FFFFFF"/>
+                          </a:solidFill>
+                        </a:rPr>
+                        <a:t>114達成率</a:t>
+                      </a:r>
+                      <a:endParaRPr lang="en-US" sz="1050" dirty="0"/>
+                    </a:p>
+                  </a:txBody>
+                  <a:tcPr marL="36576" marR="36576" marT="36576" marB="36576" anchor="ctr">
+                    <a:lnL w="9525" cap="flat" cmpd="sng" algn="ctr">
+                      <a:solidFill>
+                        <a:srgbClr val="FFFFFF"/>
+                      </a:solidFill>
+                      <a:prstDash val="solid"/>
+                      <a:round/>
+                      <a:headEnd type="none" w="med" len="med"/>
+                      <a:tailEnd type="none" w="med" len="med"/>
+                    </a:lnL>
+                    <a:lnR w="9525" cap="flat" cmpd="sng" algn="ctr">
+                      <a:solidFill>
+                        <a:srgbClr val="FFFFFF"/>
+                      </a:solidFill>
+                      <a:prstDash val="solid"/>
+                      <a:round/>
+                      <a:headEnd type="none" w="med" len="med"/>
+                      <a:tailEnd type="none" w="med" len="med"/>
+                    </a:lnR>
+                    <a:lnT w="9525" cap="flat" cmpd="sng" algn="ctr">
+                      <a:solidFill>
+                        <a:srgbClr val="FFFFFF"/>
+                      </a:solidFill>
+                      <a:prstDash val="solid"/>
+                      <a:round/>
+                      <a:headEnd type="none" w="med" len="med"/>
+                      <a:tailEnd type="none" w="med" len="med"/>
+                    </a:lnT>
+                    <a:lnB w="9525" cap="flat" cmpd="sng" algn="ctr">
+                      <a:solidFill>
+                        <a:srgbClr val="FFFFFF"/>
+                      </a:solidFill>
+                      <a:prstDash val="solid"/>
+                      <a:round/>
+                      <a:headEnd type="none" w="med" len="med"/>
+                      <a:tailEnd type="none" w="med" len="med"/>
+                    </a:lnB>
+                    <a:solidFill>
+                      <a:srgbClr val="7F7F7F"/>
+                    </a:solidFill>
+                  </a:tcPr>
+                </a:tc>
               </a:tr>
-              <a:tr h="292608">
+              <a:tr h="329184">
                 <a:tc>
                   <a:txBody>
                     <a:bodyPr/>
@@ -39325,14 +41929,14 @@
                         <a:buNone/>
                       </a:pPr>
                       <a:r>
-                        <a:rPr lang="en-US" sz="1300" b="1" dirty="0">
+                        <a:rPr lang="en-US" sz="1050" b="1" dirty="0">
                           <a:solidFill>
                             <a:srgbClr val="000000"/>
                           </a:solidFill>
                         </a:rPr>
-                        <a:t>115年目標 較114年實績</a:t>
-                      </a:r>
-                      <a:endParaRPr lang="en-US" sz="1300" dirty="0"/>
+                        <a:t>北二區</a:t>
+                      </a:r>
+                      <a:endParaRPr lang="en-US" sz="1050" dirty="0"/>
                     </a:p>
                   </a:txBody>
                   <a:tcPr marL="36576" marR="36576" marT="36576" marB="36576" anchor="ctr">
@@ -39386,14 +41990,258 @@
                         <a:buNone/>
                       </a:pPr>
                       <a:r>
-                        <a:rPr lang="en-US" sz="1600" b="1" dirty="0">
+                        <a:rPr lang="en-US" sz="1050" dirty="0">
+                          <a:solidFill>
+                            <a:srgbClr val="000000"/>
+                          </a:solidFill>
+                        </a:rPr>
+                        <a:t>36</a:t>
+                      </a:r>
+                      <a:endParaRPr lang="en-US" sz="1050" dirty="0"/>
+                    </a:p>
+                  </a:txBody>
+                  <a:tcPr marL="36576" marR="36576" marT="36576" marB="36576" anchor="ctr">
+                    <a:lnL w="9525" cap="flat" cmpd="sng" algn="ctr">
+                      <a:solidFill>
+                        <a:srgbClr val="FFFFFF"/>
+                      </a:solidFill>
+                      <a:prstDash val="solid"/>
+                      <a:round/>
+                      <a:headEnd type="none" w="med" len="med"/>
+                      <a:tailEnd type="none" w="med" len="med"/>
+                    </a:lnL>
+                    <a:lnR w="9525" cap="flat" cmpd="sng" algn="ctr">
+                      <a:solidFill>
+                        <a:srgbClr val="FFFFFF"/>
+                      </a:solidFill>
+                      <a:prstDash val="solid"/>
+                      <a:round/>
+                      <a:headEnd type="none" w="med" len="med"/>
+                      <a:tailEnd type="none" w="med" len="med"/>
+                    </a:lnR>
+                    <a:lnT w="9525" cap="flat" cmpd="sng" algn="ctr">
+                      <a:solidFill>
+                        <a:srgbClr val="FFFFFF"/>
+                      </a:solidFill>
+                      <a:prstDash val="solid"/>
+                      <a:round/>
+                      <a:headEnd type="none" w="med" len="med"/>
+                      <a:tailEnd type="none" w="med" len="med"/>
+                    </a:lnT>
+                    <a:lnB w="9525" cap="flat" cmpd="sng" algn="ctr">
+                      <a:solidFill>
+                        <a:srgbClr val="FFFFFF"/>
+                      </a:solidFill>
+                      <a:prstDash val="solid"/>
+                      <a:round/>
+                      <a:headEnd type="none" w="med" len="med"/>
+                      <a:tailEnd type="none" w="med" len="med"/>
+                    </a:lnB>
+                    <a:solidFill>
+                      <a:srgbClr val="FFFFFF"/>
+                    </a:solidFill>
+                  </a:tcPr>
+                </a:tc>
+                <a:tc>
+                  <a:txBody>
+                    <a:bodyPr/>
+                    <a:lstStyle/>
+                    <a:p>
+                      <a:pPr algn="ctr" indent="0" marL="0">
+                        <a:buNone/>
+                      </a:pPr>
+                      <a:r>
+                        <a:rPr lang="en-US" sz="1050" dirty="0">
+                          <a:solidFill>
+                            <a:srgbClr val="000000"/>
+                          </a:solidFill>
+                        </a:rPr>
+                        <a:t>24.25</a:t>
+                      </a:r>
+                      <a:endParaRPr lang="en-US" sz="1050" dirty="0"/>
+                    </a:p>
+                  </a:txBody>
+                  <a:tcPr marL="36576" marR="36576" marT="36576" marB="36576" anchor="ctr">
+                    <a:lnL w="9525" cap="flat" cmpd="sng" algn="ctr">
+                      <a:solidFill>
+                        <a:srgbClr val="FFFFFF"/>
+                      </a:solidFill>
+                      <a:prstDash val="solid"/>
+                      <a:round/>
+                      <a:headEnd type="none" w="med" len="med"/>
+                      <a:tailEnd type="none" w="med" len="med"/>
+                    </a:lnL>
+                    <a:lnR w="9525" cap="flat" cmpd="sng" algn="ctr">
+                      <a:solidFill>
+                        <a:srgbClr val="FFFFFF"/>
+                      </a:solidFill>
+                      <a:prstDash val="solid"/>
+                      <a:round/>
+                      <a:headEnd type="none" w="med" len="med"/>
+                      <a:tailEnd type="none" w="med" len="med"/>
+                    </a:lnR>
+                    <a:lnT w="9525" cap="flat" cmpd="sng" algn="ctr">
+                      <a:solidFill>
+                        <a:srgbClr val="FFFFFF"/>
+                      </a:solidFill>
+                      <a:prstDash val="solid"/>
+                      <a:round/>
+                      <a:headEnd type="none" w="med" len="med"/>
+                      <a:tailEnd type="none" w="med" len="med"/>
+                    </a:lnT>
+                    <a:lnB w="9525" cap="flat" cmpd="sng" algn="ctr">
+                      <a:solidFill>
+                        <a:srgbClr val="FFFFFF"/>
+                      </a:solidFill>
+                      <a:prstDash val="solid"/>
+                      <a:round/>
+                      <a:headEnd type="none" w="med" len="med"/>
+                      <a:tailEnd type="none" w="med" len="med"/>
+                    </a:lnB>
+                    <a:solidFill>
+                      <a:srgbClr val="FFFFFF"/>
+                    </a:solidFill>
+                  </a:tcPr>
+                </a:tc>
+                <a:tc>
+                  <a:txBody>
+                    <a:bodyPr/>
+                    <a:lstStyle/>
+                    <a:p>
+                      <a:pPr algn="ctr" indent="0" marL="0">
+                        <a:buNone/>
+                      </a:pPr>
+                      <a:r>
+                        <a:rPr lang="en-US" sz="1050" dirty="0">
+                          <a:solidFill>
+                            <a:srgbClr val="000000"/>
+                          </a:solidFill>
+                        </a:rPr>
+                        <a:t>27.62</a:t>
+                      </a:r>
+                      <a:endParaRPr lang="en-US" sz="1050" dirty="0"/>
+                    </a:p>
+                  </a:txBody>
+                  <a:tcPr marL="36576" marR="36576" marT="36576" marB="36576" anchor="ctr">
+                    <a:lnL w="9525" cap="flat" cmpd="sng" algn="ctr">
+                      <a:solidFill>
+                        <a:srgbClr val="FFFFFF"/>
+                      </a:solidFill>
+                      <a:prstDash val="solid"/>
+                      <a:round/>
+                      <a:headEnd type="none" w="med" len="med"/>
+                      <a:tailEnd type="none" w="med" len="med"/>
+                    </a:lnL>
+                    <a:lnR w="9525" cap="flat" cmpd="sng" algn="ctr">
+                      <a:solidFill>
+                        <a:srgbClr val="FFFFFF"/>
+                      </a:solidFill>
+                      <a:prstDash val="solid"/>
+                      <a:round/>
+                      <a:headEnd type="none" w="med" len="med"/>
+                      <a:tailEnd type="none" w="med" len="med"/>
+                    </a:lnR>
+                    <a:lnT w="9525" cap="flat" cmpd="sng" algn="ctr">
+                      <a:solidFill>
+                        <a:srgbClr val="FFFFFF"/>
+                      </a:solidFill>
+                      <a:prstDash val="solid"/>
+                      <a:round/>
+                      <a:headEnd type="none" w="med" len="med"/>
+                      <a:tailEnd type="none" w="med" len="med"/>
+                    </a:lnT>
+                    <a:lnB w="9525" cap="flat" cmpd="sng" algn="ctr">
+                      <a:solidFill>
+                        <a:srgbClr val="FFFFFF"/>
+                      </a:solidFill>
+                      <a:prstDash val="solid"/>
+                      <a:round/>
+                      <a:headEnd type="none" w="med" len="med"/>
+                      <a:tailEnd type="none" w="med" len="med"/>
+                    </a:lnB>
+                    <a:solidFill>
+                      <a:srgbClr val="FFFFFF"/>
+                    </a:solidFill>
+                  </a:tcPr>
+                </a:tc>
+                <a:tc>
+                  <a:txBody>
+                    <a:bodyPr/>
+                    <a:lstStyle/>
+                    <a:p>
+                      <a:pPr algn="ctr" indent="0" marL="0">
+                        <a:buNone/>
+                      </a:pPr>
+                      <a:r>
+                        <a:rPr lang="en-US" sz="1050" b="1" dirty="0">
+                          <a:solidFill>
+                            <a:srgbClr val="C00000"/>
+                          </a:solidFill>
+                        </a:rPr>
+                        <a:t>113.9%</a:t>
+                      </a:r>
+                      <a:endParaRPr lang="en-US" sz="1050" dirty="0"/>
+                    </a:p>
+                  </a:txBody>
+                  <a:tcPr marL="36576" marR="36576" marT="36576" marB="36576" anchor="ctr">
+                    <a:lnL w="9525" cap="flat" cmpd="sng" algn="ctr">
+                      <a:solidFill>
+                        <a:srgbClr val="FFFFFF"/>
+                      </a:solidFill>
+                      <a:prstDash val="solid"/>
+                      <a:round/>
+                      <a:headEnd type="none" w="med" len="med"/>
+                      <a:tailEnd type="none" w="med" len="med"/>
+                    </a:lnL>
+                    <a:lnR w="9525" cap="flat" cmpd="sng" algn="ctr">
+                      <a:solidFill>
+                        <a:srgbClr val="FFFFFF"/>
+                      </a:solidFill>
+                      <a:prstDash val="solid"/>
+                      <a:round/>
+                      <a:headEnd type="none" w="med" len="med"/>
+                      <a:tailEnd type="none" w="med" len="med"/>
+                    </a:lnR>
+                    <a:lnT w="9525" cap="flat" cmpd="sng" algn="ctr">
+                      <a:solidFill>
+                        <a:srgbClr val="FFFFFF"/>
+                      </a:solidFill>
+                      <a:prstDash val="solid"/>
+                      <a:round/>
+                      <a:headEnd type="none" w="med" len="med"/>
+                      <a:tailEnd type="none" w="med" len="med"/>
+                    </a:lnT>
+                    <a:lnB w="9525" cap="flat" cmpd="sng" algn="ctr">
+                      <a:solidFill>
+                        <a:srgbClr val="FFFFFF"/>
+                      </a:solidFill>
+                      <a:prstDash val="solid"/>
+                      <a:round/>
+                      <a:headEnd type="none" w="med" len="med"/>
+                      <a:tailEnd type="none" w="med" len="med"/>
+                    </a:lnB>
+                    <a:solidFill>
+                      <a:srgbClr val="FFFFFF"/>
+                    </a:solidFill>
+                  </a:tcPr>
+                </a:tc>
+                <a:tc>
+                  <a:txBody>
+                    <a:bodyPr/>
+                    <a:lstStyle/>
+                    <a:p>
+                      <a:pPr algn="ctr" indent="0" marL="0">
+                        <a:buNone/>
+                      </a:pPr>
+                      <a:r>
+                        <a:rPr lang="en-US" sz="1050" b="1" dirty="0">
                           <a:solidFill>
                             <a:srgbClr val="2EA9B6"/>
                           </a:solidFill>
                         </a:rPr>
-                        <a:t>+2.2%</a:t>
-                      </a:r>
-                      <a:endParaRPr lang="en-US" sz="1600" dirty="0"/>
+                        <a:t>+3.36</a:t>
+                      </a:r>
+                      <a:endParaRPr lang="en-US" sz="1050" dirty="0"/>
                     </a:p>
                   </a:txBody>
                   <a:tcPr marL="36576" marR="36576" marT="36576" marB="36576" anchor="ctr">
@@ -39447,14 +42295,628 @@
                         <a:buNone/>
                       </a:pPr>
                       <a:r>
-                        <a:rPr lang="en-US" sz="1600" b="1" dirty="0">
+                        <a:rPr lang="en-US" sz="1050" dirty="0">
+                          <a:solidFill>
+                            <a:srgbClr val="000000"/>
+                          </a:solidFill>
+                        </a:rPr>
+                        <a:t>23 / 36</a:t>
+                      </a:r>
+                      <a:endParaRPr lang="en-US" sz="1050" dirty="0"/>
+                    </a:p>
+                  </a:txBody>
+                  <a:tcPr marL="36576" marR="36576" marT="36576" marB="36576" anchor="ctr">
+                    <a:lnL w="9525" cap="flat" cmpd="sng" algn="ctr">
+                      <a:solidFill>
+                        <a:srgbClr val="FFFFFF"/>
+                      </a:solidFill>
+                      <a:prstDash val="solid"/>
+                      <a:round/>
+                      <a:headEnd type="none" w="med" len="med"/>
+                      <a:tailEnd type="none" w="med" len="med"/>
+                    </a:lnL>
+                    <a:lnR w="9525" cap="flat" cmpd="sng" algn="ctr">
+                      <a:solidFill>
+                        <a:srgbClr val="FFFFFF"/>
+                      </a:solidFill>
+                      <a:prstDash val="solid"/>
+                      <a:round/>
+                      <a:headEnd type="none" w="med" len="med"/>
+                      <a:tailEnd type="none" w="med" len="med"/>
+                    </a:lnR>
+                    <a:lnT w="9525" cap="flat" cmpd="sng" algn="ctr">
+                      <a:solidFill>
+                        <a:srgbClr val="FFFFFF"/>
+                      </a:solidFill>
+                      <a:prstDash val="solid"/>
+                      <a:round/>
+                      <a:headEnd type="none" w="med" len="med"/>
+                      <a:tailEnd type="none" w="med" len="med"/>
+                    </a:lnT>
+                    <a:lnB w="9525" cap="flat" cmpd="sng" algn="ctr">
+                      <a:solidFill>
+                        <a:srgbClr val="FFFFFF"/>
+                      </a:solidFill>
+                      <a:prstDash val="solid"/>
+                      <a:round/>
+                      <a:headEnd type="none" w="med" len="med"/>
+                      <a:tailEnd type="none" w="med" len="med"/>
+                    </a:lnB>
+                    <a:solidFill>
+                      <a:srgbClr val="FFFFFF"/>
+                    </a:solidFill>
+                  </a:tcPr>
+                </a:tc>
+                <a:tc>
+                  <a:txBody>
+                    <a:bodyPr/>
+                    <a:lstStyle/>
+                    <a:p>
+                      <a:pPr algn="ctr" indent="0" marL="0">
+                        <a:buNone/>
+                      </a:pPr>
+                      <a:r>
+                        <a:rPr lang="en-US" sz="1050" dirty="0">
+                          <a:solidFill>
+                            <a:srgbClr val="7F7F7F"/>
+                          </a:solidFill>
+                        </a:rPr>
+                        <a:t>97.5%</a:t>
+                      </a:r>
+                      <a:endParaRPr lang="en-US" sz="1050" dirty="0"/>
+                    </a:p>
+                  </a:txBody>
+                  <a:tcPr marL="36576" marR="36576" marT="36576" marB="36576" anchor="ctr">
+                    <a:lnL w="9525" cap="flat" cmpd="sng" algn="ctr">
+                      <a:solidFill>
+                        <a:srgbClr val="FFFFFF"/>
+                      </a:solidFill>
+                      <a:prstDash val="solid"/>
+                      <a:round/>
+                      <a:headEnd type="none" w="med" len="med"/>
+                      <a:tailEnd type="none" w="med" len="med"/>
+                    </a:lnL>
+                    <a:lnR w="9525" cap="flat" cmpd="sng" algn="ctr">
+                      <a:solidFill>
+                        <a:srgbClr val="FFFFFF"/>
+                      </a:solidFill>
+                      <a:prstDash val="solid"/>
+                      <a:round/>
+                      <a:headEnd type="none" w="med" len="med"/>
+                      <a:tailEnd type="none" w="med" len="med"/>
+                    </a:lnR>
+                    <a:lnT w="9525" cap="flat" cmpd="sng" algn="ctr">
+                      <a:solidFill>
+                        <a:srgbClr val="FFFFFF"/>
+                      </a:solidFill>
+                      <a:prstDash val="solid"/>
+                      <a:round/>
+                      <a:headEnd type="none" w="med" len="med"/>
+                      <a:tailEnd type="none" w="med" len="med"/>
+                    </a:lnT>
+                    <a:lnB w="9525" cap="flat" cmpd="sng" algn="ctr">
+                      <a:solidFill>
+                        <a:srgbClr val="FFFFFF"/>
+                      </a:solidFill>
+                      <a:prstDash val="solid"/>
+                      <a:round/>
+                      <a:headEnd type="none" w="med" len="med"/>
+                      <a:tailEnd type="none" w="med" len="med"/>
+                    </a:lnB>
+                    <a:solidFill>
+                      <a:srgbClr val="FFFFFF"/>
+                    </a:solidFill>
+                  </a:tcPr>
+                </a:tc>
+              </a:tr>
+              <a:tr h="329184">
+                <a:tc>
+                  <a:txBody>
+                    <a:bodyPr/>
+                    <a:lstStyle/>
+                    <a:p>
+                      <a:pPr algn="ctr" indent="0" marL="0">
+                        <a:buNone/>
+                      </a:pPr>
+                      <a:r>
+                        <a:rPr lang="en-US" sz="1050" b="1" dirty="0">
+                          <a:solidFill>
+                            <a:srgbClr val="000000"/>
+                          </a:solidFill>
+                        </a:rPr>
+                        <a:t>北一區</a:t>
+                      </a:r>
+                      <a:endParaRPr lang="en-US" sz="1050" dirty="0"/>
+                    </a:p>
+                  </a:txBody>
+                  <a:tcPr marL="36576" marR="36576" marT="36576" marB="36576" anchor="ctr">
+                    <a:lnL w="9525" cap="flat" cmpd="sng" algn="ctr">
+                      <a:solidFill>
+                        <a:srgbClr val="FFFFFF"/>
+                      </a:solidFill>
+                      <a:prstDash val="solid"/>
+                      <a:round/>
+                      <a:headEnd type="none" w="med" len="med"/>
+                      <a:tailEnd type="none" w="med" len="med"/>
+                    </a:lnL>
+                    <a:lnR w="9525" cap="flat" cmpd="sng" algn="ctr">
+                      <a:solidFill>
+                        <a:srgbClr val="FFFFFF"/>
+                      </a:solidFill>
+                      <a:prstDash val="solid"/>
+                      <a:round/>
+                      <a:headEnd type="none" w="med" len="med"/>
+                      <a:tailEnd type="none" w="med" len="med"/>
+                    </a:lnR>
+                    <a:lnT w="9525" cap="flat" cmpd="sng" algn="ctr">
+                      <a:solidFill>
+                        <a:srgbClr val="FFFFFF"/>
+                      </a:solidFill>
+                      <a:prstDash val="solid"/>
+                      <a:round/>
+                      <a:headEnd type="none" w="med" len="med"/>
+                      <a:tailEnd type="none" w="med" len="med"/>
+                    </a:lnT>
+                    <a:lnB w="9525" cap="flat" cmpd="sng" algn="ctr">
+                      <a:solidFill>
+                        <a:srgbClr val="FFFFFF"/>
+                      </a:solidFill>
+                      <a:prstDash val="solid"/>
+                      <a:round/>
+                      <a:headEnd type="none" w="med" len="med"/>
+                      <a:tailEnd type="none" w="med" len="med"/>
+                    </a:lnB>
+                    <a:solidFill>
+                      <a:srgbClr val="FDF1E9"/>
+                    </a:solidFill>
+                  </a:tcPr>
+                </a:tc>
+                <a:tc>
+                  <a:txBody>
+                    <a:bodyPr/>
+                    <a:lstStyle/>
+                    <a:p>
+                      <a:pPr algn="ctr" indent="0" marL="0">
+                        <a:buNone/>
+                      </a:pPr>
+                      <a:r>
+                        <a:rPr lang="en-US" sz="1050" dirty="0">
+                          <a:solidFill>
+                            <a:srgbClr val="000000"/>
+                          </a:solidFill>
+                        </a:rPr>
+                        <a:t>46</a:t>
+                      </a:r>
+                      <a:endParaRPr lang="en-US" sz="1050" dirty="0"/>
+                    </a:p>
+                  </a:txBody>
+                  <a:tcPr marL="36576" marR="36576" marT="36576" marB="36576" anchor="ctr">
+                    <a:lnL w="9525" cap="flat" cmpd="sng" algn="ctr">
+                      <a:solidFill>
+                        <a:srgbClr val="FFFFFF"/>
+                      </a:solidFill>
+                      <a:prstDash val="solid"/>
+                      <a:round/>
+                      <a:headEnd type="none" w="med" len="med"/>
+                      <a:tailEnd type="none" w="med" len="med"/>
+                    </a:lnL>
+                    <a:lnR w="9525" cap="flat" cmpd="sng" algn="ctr">
+                      <a:solidFill>
+                        <a:srgbClr val="FFFFFF"/>
+                      </a:solidFill>
+                      <a:prstDash val="solid"/>
+                      <a:round/>
+                      <a:headEnd type="none" w="med" len="med"/>
+                      <a:tailEnd type="none" w="med" len="med"/>
+                    </a:lnR>
+                    <a:lnT w="9525" cap="flat" cmpd="sng" algn="ctr">
+                      <a:solidFill>
+                        <a:srgbClr val="FFFFFF"/>
+                      </a:solidFill>
+                      <a:prstDash val="solid"/>
+                      <a:round/>
+                      <a:headEnd type="none" w="med" len="med"/>
+                      <a:tailEnd type="none" w="med" len="med"/>
+                    </a:lnT>
+                    <a:lnB w="9525" cap="flat" cmpd="sng" algn="ctr">
+                      <a:solidFill>
+                        <a:srgbClr val="FFFFFF"/>
+                      </a:solidFill>
+                      <a:prstDash val="solid"/>
+                      <a:round/>
+                      <a:headEnd type="none" w="med" len="med"/>
+                      <a:tailEnd type="none" w="med" len="med"/>
+                    </a:lnB>
+                    <a:solidFill>
+                      <a:srgbClr val="FDF1E9"/>
+                    </a:solidFill>
+                  </a:tcPr>
+                </a:tc>
+                <a:tc>
+                  <a:txBody>
+                    <a:bodyPr/>
+                    <a:lstStyle/>
+                    <a:p>
+                      <a:pPr algn="ctr" indent="0" marL="0">
+                        <a:buNone/>
+                      </a:pPr>
+                      <a:r>
+                        <a:rPr lang="en-US" sz="1050" dirty="0">
+                          <a:solidFill>
+                            <a:srgbClr val="000000"/>
+                          </a:solidFill>
+                        </a:rPr>
+                        <a:t>29.63</a:t>
+                      </a:r>
+                      <a:endParaRPr lang="en-US" sz="1050" dirty="0"/>
+                    </a:p>
+                  </a:txBody>
+                  <a:tcPr marL="36576" marR="36576" marT="36576" marB="36576" anchor="ctr">
+                    <a:lnL w="9525" cap="flat" cmpd="sng" algn="ctr">
+                      <a:solidFill>
+                        <a:srgbClr val="FFFFFF"/>
+                      </a:solidFill>
+                      <a:prstDash val="solid"/>
+                      <a:round/>
+                      <a:headEnd type="none" w="med" len="med"/>
+                      <a:tailEnd type="none" w="med" len="med"/>
+                    </a:lnL>
+                    <a:lnR w="9525" cap="flat" cmpd="sng" algn="ctr">
+                      <a:solidFill>
+                        <a:srgbClr val="FFFFFF"/>
+                      </a:solidFill>
+                      <a:prstDash val="solid"/>
+                      <a:round/>
+                      <a:headEnd type="none" w="med" len="med"/>
+                      <a:tailEnd type="none" w="med" len="med"/>
+                    </a:lnR>
+                    <a:lnT w="9525" cap="flat" cmpd="sng" algn="ctr">
+                      <a:solidFill>
+                        <a:srgbClr val="FFFFFF"/>
+                      </a:solidFill>
+                      <a:prstDash val="solid"/>
+                      <a:round/>
+                      <a:headEnd type="none" w="med" len="med"/>
+                      <a:tailEnd type="none" w="med" len="med"/>
+                    </a:lnT>
+                    <a:lnB w="9525" cap="flat" cmpd="sng" algn="ctr">
+                      <a:solidFill>
+                        <a:srgbClr val="FFFFFF"/>
+                      </a:solidFill>
+                      <a:prstDash val="solid"/>
+                      <a:round/>
+                      <a:headEnd type="none" w="med" len="med"/>
+                      <a:tailEnd type="none" w="med" len="med"/>
+                    </a:lnB>
+                    <a:solidFill>
+                      <a:srgbClr val="FDF1E9"/>
+                    </a:solidFill>
+                  </a:tcPr>
+                </a:tc>
+                <a:tc>
+                  <a:txBody>
+                    <a:bodyPr/>
+                    <a:lstStyle/>
+                    <a:p>
+                      <a:pPr algn="ctr" indent="0" marL="0">
+                        <a:buNone/>
+                      </a:pPr>
+                      <a:r>
+                        <a:rPr lang="en-US" sz="1050" dirty="0">
+                          <a:solidFill>
+                            <a:srgbClr val="000000"/>
+                          </a:solidFill>
+                        </a:rPr>
+                        <a:t>31.71</a:t>
+                      </a:r>
+                      <a:endParaRPr lang="en-US" sz="1050" dirty="0"/>
+                    </a:p>
+                  </a:txBody>
+                  <a:tcPr marL="36576" marR="36576" marT="36576" marB="36576" anchor="ctr">
+                    <a:lnL w="9525" cap="flat" cmpd="sng" algn="ctr">
+                      <a:solidFill>
+                        <a:srgbClr val="FFFFFF"/>
+                      </a:solidFill>
+                      <a:prstDash val="solid"/>
+                      <a:round/>
+                      <a:headEnd type="none" w="med" len="med"/>
+                      <a:tailEnd type="none" w="med" len="med"/>
+                    </a:lnL>
+                    <a:lnR w="9525" cap="flat" cmpd="sng" algn="ctr">
+                      <a:solidFill>
+                        <a:srgbClr val="FFFFFF"/>
+                      </a:solidFill>
+                      <a:prstDash val="solid"/>
+                      <a:round/>
+                      <a:headEnd type="none" w="med" len="med"/>
+                      <a:tailEnd type="none" w="med" len="med"/>
+                    </a:lnR>
+                    <a:lnT w="9525" cap="flat" cmpd="sng" algn="ctr">
+                      <a:solidFill>
+                        <a:srgbClr val="FFFFFF"/>
+                      </a:solidFill>
+                      <a:prstDash val="solid"/>
+                      <a:round/>
+                      <a:headEnd type="none" w="med" len="med"/>
+                      <a:tailEnd type="none" w="med" len="med"/>
+                    </a:lnT>
+                    <a:lnB w="9525" cap="flat" cmpd="sng" algn="ctr">
+                      <a:solidFill>
+                        <a:srgbClr val="FFFFFF"/>
+                      </a:solidFill>
+                      <a:prstDash val="solid"/>
+                      <a:round/>
+                      <a:headEnd type="none" w="med" len="med"/>
+                      <a:tailEnd type="none" w="med" len="med"/>
+                    </a:lnB>
+                    <a:solidFill>
+                      <a:srgbClr val="FDF1E9"/>
+                    </a:solidFill>
+                  </a:tcPr>
+                </a:tc>
+                <a:tc>
+                  <a:txBody>
+                    <a:bodyPr/>
+                    <a:lstStyle/>
+                    <a:p>
+                      <a:pPr algn="ctr" indent="0" marL="0">
+                        <a:buNone/>
+                      </a:pPr>
+                      <a:r>
+                        <a:rPr lang="en-US" sz="1050" b="1" dirty="0">
                           <a:solidFill>
                             <a:srgbClr val="C00000"/>
                           </a:solidFill>
                         </a:rPr>
-                        <a:t>+41.1%</a:t>
-                      </a:r>
-                      <a:endParaRPr lang="en-US" sz="1600" dirty="0"/>
+                        <a:t>107.0%</a:t>
+                      </a:r>
+                      <a:endParaRPr lang="en-US" sz="1050" dirty="0"/>
+                    </a:p>
+                  </a:txBody>
+                  <a:tcPr marL="36576" marR="36576" marT="36576" marB="36576" anchor="ctr">
+                    <a:lnL w="9525" cap="flat" cmpd="sng" algn="ctr">
+                      <a:solidFill>
+                        <a:srgbClr val="FFFFFF"/>
+                      </a:solidFill>
+                      <a:prstDash val="solid"/>
+                      <a:round/>
+                      <a:headEnd type="none" w="med" len="med"/>
+                      <a:tailEnd type="none" w="med" len="med"/>
+                    </a:lnL>
+                    <a:lnR w="9525" cap="flat" cmpd="sng" algn="ctr">
+                      <a:solidFill>
+                        <a:srgbClr val="FFFFFF"/>
+                      </a:solidFill>
+                      <a:prstDash val="solid"/>
+                      <a:round/>
+                      <a:headEnd type="none" w="med" len="med"/>
+                      <a:tailEnd type="none" w="med" len="med"/>
+                    </a:lnR>
+                    <a:lnT w="9525" cap="flat" cmpd="sng" algn="ctr">
+                      <a:solidFill>
+                        <a:srgbClr val="FFFFFF"/>
+                      </a:solidFill>
+                      <a:prstDash val="solid"/>
+                      <a:round/>
+                      <a:headEnd type="none" w="med" len="med"/>
+                      <a:tailEnd type="none" w="med" len="med"/>
+                    </a:lnT>
+                    <a:lnB w="9525" cap="flat" cmpd="sng" algn="ctr">
+                      <a:solidFill>
+                        <a:srgbClr val="FFFFFF"/>
+                      </a:solidFill>
+                      <a:prstDash val="solid"/>
+                      <a:round/>
+                      <a:headEnd type="none" w="med" len="med"/>
+                      <a:tailEnd type="none" w="med" len="med"/>
+                    </a:lnB>
+                    <a:solidFill>
+                      <a:srgbClr val="FDF1E9"/>
+                    </a:solidFill>
+                  </a:tcPr>
+                </a:tc>
+                <a:tc>
+                  <a:txBody>
+                    <a:bodyPr/>
+                    <a:lstStyle/>
+                    <a:p>
+                      <a:pPr algn="ctr" indent="0" marL="0">
+                        <a:buNone/>
+                      </a:pPr>
+                      <a:r>
+                        <a:rPr lang="en-US" sz="1050" b="1" dirty="0">
+                          <a:solidFill>
+                            <a:srgbClr val="2EA9B6"/>
+                          </a:solidFill>
+                        </a:rPr>
+                        <a:t>+2.08</a:t>
+                      </a:r>
+                      <a:endParaRPr lang="en-US" sz="1050" dirty="0"/>
+                    </a:p>
+                  </a:txBody>
+                  <a:tcPr marL="36576" marR="36576" marT="36576" marB="36576" anchor="ctr">
+                    <a:lnL w="9525" cap="flat" cmpd="sng" algn="ctr">
+                      <a:solidFill>
+                        <a:srgbClr val="FFFFFF"/>
+                      </a:solidFill>
+                      <a:prstDash val="solid"/>
+                      <a:round/>
+                      <a:headEnd type="none" w="med" len="med"/>
+                      <a:tailEnd type="none" w="med" len="med"/>
+                    </a:lnL>
+                    <a:lnR w="9525" cap="flat" cmpd="sng" algn="ctr">
+                      <a:solidFill>
+                        <a:srgbClr val="FFFFFF"/>
+                      </a:solidFill>
+                      <a:prstDash val="solid"/>
+                      <a:round/>
+                      <a:headEnd type="none" w="med" len="med"/>
+                      <a:tailEnd type="none" w="med" len="med"/>
+                    </a:lnR>
+                    <a:lnT w="9525" cap="flat" cmpd="sng" algn="ctr">
+                      <a:solidFill>
+                        <a:srgbClr val="FFFFFF"/>
+                      </a:solidFill>
+                      <a:prstDash val="solid"/>
+                      <a:round/>
+                      <a:headEnd type="none" w="med" len="med"/>
+                      <a:tailEnd type="none" w="med" len="med"/>
+                    </a:lnT>
+                    <a:lnB w="9525" cap="flat" cmpd="sng" algn="ctr">
+                      <a:solidFill>
+                        <a:srgbClr val="FFFFFF"/>
+                      </a:solidFill>
+                      <a:prstDash val="solid"/>
+                      <a:round/>
+                      <a:headEnd type="none" w="med" len="med"/>
+                      <a:tailEnd type="none" w="med" len="med"/>
+                    </a:lnB>
+                    <a:solidFill>
+                      <a:srgbClr val="FDF1E9"/>
+                    </a:solidFill>
+                  </a:tcPr>
+                </a:tc>
+                <a:tc>
+                  <a:txBody>
+                    <a:bodyPr/>
+                    <a:lstStyle/>
+                    <a:p>
+                      <a:pPr algn="ctr" indent="0" marL="0">
+                        <a:buNone/>
+                      </a:pPr>
+                      <a:r>
+                        <a:rPr lang="en-US" sz="1050" dirty="0">
+                          <a:solidFill>
+                            <a:srgbClr val="000000"/>
+                          </a:solidFill>
+                        </a:rPr>
+                        <a:t>23 / 46</a:t>
+                      </a:r>
+                      <a:endParaRPr lang="en-US" sz="1050" dirty="0"/>
+                    </a:p>
+                  </a:txBody>
+                  <a:tcPr marL="36576" marR="36576" marT="36576" marB="36576" anchor="ctr">
+                    <a:lnL w="9525" cap="flat" cmpd="sng" algn="ctr">
+                      <a:solidFill>
+                        <a:srgbClr val="FFFFFF"/>
+                      </a:solidFill>
+                      <a:prstDash val="solid"/>
+                      <a:round/>
+                      <a:headEnd type="none" w="med" len="med"/>
+                      <a:tailEnd type="none" w="med" len="med"/>
+                    </a:lnL>
+                    <a:lnR w="9525" cap="flat" cmpd="sng" algn="ctr">
+                      <a:solidFill>
+                        <a:srgbClr val="FFFFFF"/>
+                      </a:solidFill>
+                      <a:prstDash val="solid"/>
+                      <a:round/>
+                      <a:headEnd type="none" w="med" len="med"/>
+                      <a:tailEnd type="none" w="med" len="med"/>
+                    </a:lnR>
+                    <a:lnT w="9525" cap="flat" cmpd="sng" algn="ctr">
+                      <a:solidFill>
+                        <a:srgbClr val="FFFFFF"/>
+                      </a:solidFill>
+                      <a:prstDash val="solid"/>
+                      <a:round/>
+                      <a:headEnd type="none" w="med" len="med"/>
+                      <a:tailEnd type="none" w="med" len="med"/>
+                    </a:lnT>
+                    <a:lnB w="9525" cap="flat" cmpd="sng" algn="ctr">
+                      <a:solidFill>
+                        <a:srgbClr val="FFFFFF"/>
+                      </a:solidFill>
+                      <a:prstDash val="solid"/>
+                      <a:round/>
+                      <a:headEnd type="none" w="med" len="med"/>
+                      <a:tailEnd type="none" w="med" len="med"/>
+                    </a:lnB>
+                    <a:solidFill>
+                      <a:srgbClr val="FDF1E9"/>
+                    </a:solidFill>
+                  </a:tcPr>
+                </a:tc>
+                <a:tc>
+                  <a:txBody>
+                    <a:bodyPr/>
+                    <a:lstStyle/>
+                    <a:p>
+                      <a:pPr algn="ctr" indent="0" marL="0">
+                        <a:buNone/>
+                      </a:pPr>
+                      <a:r>
+                        <a:rPr lang="en-US" sz="1050" dirty="0">
+                          <a:solidFill>
+                            <a:srgbClr val="7F7F7F"/>
+                          </a:solidFill>
+                        </a:rPr>
+                        <a:t>88.9%</a:t>
+                      </a:r>
+                      <a:endParaRPr lang="en-US" sz="1050" dirty="0"/>
+                    </a:p>
+                  </a:txBody>
+                  <a:tcPr marL="36576" marR="36576" marT="36576" marB="36576" anchor="ctr">
+                    <a:lnL w="9525" cap="flat" cmpd="sng" algn="ctr">
+                      <a:solidFill>
+                        <a:srgbClr val="FFFFFF"/>
+                      </a:solidFill>
+                      <a:prstDash val="solid"/>
+                      <a:round/>
+                      <a:headEnd type="none" w="med" len="med"/>
+                      <a:tailEnd type="none" w="med" len="med"/>
+                    </a:lnL>
+                    <a:lnR w="9525" cap="flat" cmpd="sng" algn="ctr">
+                      <a:solidFill>
+                        <a:srgbClr val="FFFFFF"/>
+                      </a:solidFill>
+                      <a:prstDash val="solid"/>
+                      <a:round/>
+                      <a:headEnd type="none" w="med" len="med"/>
+                      <a:tailEnd type="none" w="med" len="med"/>
+                    </a:lnR>
+                    <a:lnT w="9525" cap="flat" cmpd="sng" algn="ctr">
+                      <a:solidFill>
+                        <a:srgbClr val="FFFFFF"/>
+                      </a:solidFill>
+                      <a:prstDash val="solid"/>
+                      <a:round/>
+                      <a:headEnd type="none" w="med" len="med"/>
+                      <a:tailEnd type="none" w="med" len="med"/>
+                    </a:lnT>
+                    <a:lnB w="9525" cap="flat" cmpd="sng" algn="ctr">
+                      <a:solidFill>
+                        <a:srgbClr val="FFFFFF"/>
+                      </a:solidFill>
+                      <a:prstDash val="solid"/>
+                      <a:round/>
+                      <a:headEnd type="none" w="med" len="med"/>
+                      <a:tailEnd type="none" w="med" len="med"/>
+                    </a:lnB>
+                    <a:solidFill>
+                      <a:srgbClr val="FDF1E9"/>
+                    </a:solidFill>
+                  </a:tcPr>
+                </a:tc>
+              </a:tr>
+              <a:tr h="329184">
+                <a:tc>
+                  <a:txBody>
+                    <a:bodyPr/>
+                    <a:lstStyle/>
+                    <a:p>
+                      <a:pPr algn="ctr" indent="0" marL="0">
+                        <a:buNone/>
+                      </a:pPr>
+                      <a:r>
+                        <a:rPr lang="en-US" sz="1050" b="1" dirty="0">
+                          <a:solidFill>
+                            <a:srgbClr val="000000"/>
+                          </a:solidFill>
+                        </a:rPr>
+                        <a:t>北三區</a:t>
+                      </a:r>
+                      <a:endParaRPr lang="en-US" sz="1050" dirty="0"/>
                     </a:p>
                   </a:txBody>
                   <a:tcPr marL="36576" marR="36576" marT="36576" marB="36576" anchor="ctr">
@@ -39499,8 +42961,435 @@
                     </a:solidFill>
                   </a:tcPr>
                 </a:tc>
+                <a:tc>
+                  <a:txBody>
+                    <a:bodyPr/>
+                    <a:lstStyle/>
+                    <a:p>
+                      <a:pPr algn="ctr" indent="0" marL="0">
+                        <a:buNone/>
+                      </a:pPr>
+                      <a:r>
+                        <a:rPr lang="en-US" sz="1050" dirty="0">
+                          <a:solidFill>
+                            <a:srgbClr val="000000"/>
+                          </a:solidFill>
+                        </a:rPr>
+                        <a:t>33</a:t>
+                      </a:r>
+                      <a:endParaRPr lang="en-US" sz="1050" dirty="0"/>
+                    </a:p>
+                  </a:txBody>
+                  <a:tcPr marL="36576" marR="36576" marT="36576" marB="36576" anchor="ctr">
+                    <a:lnL w="9525" cap="flat" cmpd="sng" algn="ctr">
+                      <a:solidFill>
+                        <a:srgbClr val="FFFFFF"/>
+                      </a:solidFill>
+                      <a:prstDash val="solid"/>
+                      <a:round/>
+                      <a:headEnd type="none" w="med" len="med"/>
+                      <a:tailEnd type="none" w="med" len="med"/>
+                    </a:lnL>
+                    <a:lnR w="9525" cap="flat" cmpd="sng" algn="ctr">
+                      <a:solidFill>
+                        <a:srgbClr val="FFFFFF"/>
+                      </a:solidFill>
+                      <a:prstDash val="solid"/>
+                      <a:round/>
+                      <a:headEnd type="none" w="med" len="med"/>
+                      <a:tailEnd type="none" w="med" len="med"/>
+                    </a:lnR>
+                    <a:lnT w="9525" cap="flat" cmpd="sng" algn="ctr">
+                      <a:solidFill>
+                        <a:srgbClr val="FFFFFF"/>
+                      </a:solidFill>
+                      <a:prstDash val="solid"/>
+                      <a:round/>
+                      <a:headEnd type="none" w="med" len="med"/>
+                      <a:tailEnd type="none" w="med" len="med"/>
+                    </a:lnT>
+                    <a:lnB w="9525" cap="flat" cmpd="sng" algn="ctr">
+                      <a:solidFill>
+                        <a:srgbClr val="FFFFFF"/>
+                      </a:solidFill>
+                      <a:prstDash val="solid"/>
+                      <a:round/>
+                      <a:headEnd type="none" w="med" len="med"/>
+                      <a:tailEnd type="none" w="med" len="med"/>
+                    </a:lnB>
+                    <a:solidFill>
+                      <a:srgbClr val="FFFFFF"/>
+                    </a:solidFill>
+                  </a:tcPr>
+                </a:tc>
+                <a:tc>
+                  <a:txBody>
+                    <a:bodyPr/>
+                    <a:lstStyle/>
+                    <a:p>
+                      <a:pPr algn="ctr" indent="0" marL="0">
+                        <a:buNone/>
+                      </a:pPr>
+                      <a:r>
+                        <a:rPr lang="en-US" sz="1050" dirty="0">
+                          <a:solidFill>
+                            <a:srgbClr val="000000"/>
+                          </a:solidFill>
+                        </a:rPr>
+                        <a:t>19.19</a:t>
+                      </a:r>
+                      <a:endParaRPr lang="en-US" sz="1050" dirty="0"/>
+                    </a:p>
+                  </a:txBody>
+                  <a:tcPr marL="36576" marR="36576" marT="36576" marB="36576" anchor="ctr">
+                    <a:lnL w="9525" cap="flat" cmpd="sng" algn="ctr">
+                      <a:solidFill>
+                        <a:srgbClr val="FFFFFF"/>
+                      </a:solidFill>
+                      <a:prstDash val="solid"/>
+                      <a:round/>
+                      <a:headEnd type="none" w="med" len="med"/>
+                      <a:tailEnd type="none" w="med" len="med"/>
+                    </a:lnL>
+                    <a:lnR w="9525" cap="flat" cmpd="sng" algn="ctr">
+                      <a:solidFill>
+                        <a:srgbClr val="FFFFFF"/>
+                      </a:solidFill>
+                      <a:prstDash val="solid"/>
+                      <a:round/>
+                      <a:headEnd type="none" w="med" len="med"/>
+                      <a:tailEnd type="none" w="med" len="med"/>
+                    </a:lnR>
+                    <a:lnT w="9525" cap="flat" cmpd="sng" algn="ctr">
+                      <a:solidFill>
+                        <a:srgbClr val="FFFFFF"/>
+                      </a:solidFill>
+                      <a:prstDash val="solid"/>
+                      <a:round/>
+                      <a:headEnd type="none" w="med" len="med"/>
+                      <a:tailEnd type="none" w="med" len="med"/>
+                    </a:lnT>
+                    <a:lnB w="9525" cap="flat" cmpd="sng" algn="ctr">
+                      <a:solidFill>
+                        <a:srgbClr val="FFFFFF"/>
+                      </a:solidFill>
+                      <a:prstDash val="solid"/>
+                      <a:round/>
+                      <a:headEnd type="none" w="med" len="med"/>
+                      <a:tailEnd type="none" w="med" len="med"/>
+                    </a:lnB>
+                    <a:solidFill>
+                      <a:srgbClr val="FFFFFF"/>
+                    </a:solidFill>
+                  </a:tcPr>
+                </a:tc>
+                <a:tc>
+                  <a:txBody>
+                    <a:bodyPr/>
+                    <a:lstStyle/>
+                    <a:p>
+                      <a:pPr algn="ctr" indent="0" marL="0">
+                        <a:buNone/>
+                      </a:pPr>
+                      <a:r>
+                        <a:rPr lang="en-US" sz="1050" dirty="0">
+                          <a:solidFill>
+                            <a:srgbClr val="000000"/>
+                          </a:solidFill>
+                        </a:rPr>
+                        <a:t>19.73</a:t>
+                      </a:r>
+                      <a:endParaRPr lang="en-US" sz="1050" dirty="0"/>
+                    </a:p>
+                  </a:txBody>
+                  <a:tcPr marL="36576" marR="36576" marT="36576" marB="36576" anchor="ctr">
+                    <a:lnL w="9525" cap="flat" cmpd="sng" algn="ctr">
+                      <a:solidFill>
+                        <a:srgbClr val="FFFFFF"/>
+                      </a:solidFill>
+                      <a:prstDash val="solid"/>
+                      <a:round/>
+                      <a:headEnd type="none" w="med" len="med"/>
+                      <a:tailEnd type="none" w="med" len="med"/>
+                    </a:lnL>
+                    <a:lnR w="9525" cap="flat" cmpd="sng" algn="ctr">
+                      <a:solidFill>
+                        <a:srgbClr val="FFFFFF"/>
+                      </a:solidFill>
+                      <a:prstDash val="solid"/>
+                      <a:round/>
+                      <a:headEnd type="none" w="med" len="med"/>
+                      <a:tailEnd type="none" w="med" len="med"/>
+                    </a:lnR>
+                    <a:lnT w="9525" cap="flat" cmpd="sng" algn="ctr">
+                      <a:solidFill>
+                        <a:srgbClr val="FFFFFF"/>
+                      </a:solidFill>
+                      <a:prstDash val="solid"/>
+                      <a:round/>
+                      <a:headEnd type="none" w="med" len="med"/>
+                      <a:tailEnd type="none" w="med" len="med"/>
+                    </a:lnT>
+                    <a:lnB w="9525" cap="flat" cmpd="sng" algn="ctr">
+                      <a:solidFill>
+                        <a:srgbClr val="FFFFFF"/>
+                      </a:solidFill>
+                      <a:prstDash val="solid"/>
+                      <a:round/>
+                      <a:headEnd type="none" w="med" len="med"/>
+                      <a:tailEnd type="none" w="med" len="med"/>
+                    </a:lnB>
+                    <a:solidFill>
+                      <a:srgbClr val="FFFFFF"/>
+                    </a:solidFill>
+                  </a:tcPr>
+                </a:tc>
+                <a:tc>
+                  <a:txBody>
+                    <a:bodyPr/>
+                    <a:lstStyle/>
+                    <a:p>
+                      <a:pPr algn="ctr" indent="0" marL="0">
+                        <a:buNone/>
+                      </a:pPr>
+                      <a:r>
+                        <a:rPr lang="en-US" sz="1050" b="1" dirty="0">
+                          <a:solidFill>
+                            <a:srgbClr val="C00000"/>
+                          </a:solidFill>
+                        </a:rPr>
+                        <a:t>102.8%</a:t>
+                      </a:r>
+                      <a:endParaRPr lang="en-US" sz="1050" dirty="0"/>
+                    </a:p>
+                  </a:txBody>
+                  <a:tcPr marL="36576" marR="36576" marT="36576" marB="36576" anchor="ctr">
+                    <a:lnL w="9525" cap="flat" cmpd="sng" algn="ctr">
+                      <a:solidFill>
+                        <a:srgbClr val="FFFFFF"/>
+                      </a:solidFill>
+                      <a:prstDash val="solid"/>
+                      <a:round/>
+                      <a:headEnd type="none" w="med" len="med"/>
+                      <a:tailEnd type="none" w="med" len="med"/>
+                    </a:lnL>
+                    <a:lnR w="9525" cap="flat" cmpd="sng" algn="ctr">
+                      <a:solidFill>
+                        <a:srgbClr val="FFFFFF"/>
+                      </a:solidFill>
+                      <a:prstDash val="solid"/>
+                      <a:round/>
+                      <a:headEnd type="none" w="med" len="med"/>
+                      <a:tailEnd type="none" w="med" len="med"/>
+                    </a:lnR>
+                    <a:lnT w="9525" cap="flat" cmpd="sng" algn="ctr">
+                      <a:solidFill>
+                        <a:srgbClr val="FFFFFF"/>
+                      </a:solidFill>
+                      <a:prstDash val="solid"/>
+                      <a:round/>
+                      <a:headEnd type="none" w="med" len="med"/>
+                      <a:tailEnd type="none" w="med" len="med"/>
+                    </a:lnT>
+                    <a:lnB w="9525" cap="flat" cmpd="sng" algn="ctr">
+                      <a:solidFill>
+                        <a:srgbClr val="FFFFFF"/>
+                      </a:solidFill>
+                      <a:prstDash val="solid"/>
+                      <a:round/>
+                      <a:headEnd type="none" w="med" len="med"/>
+                      <a:tailEnd type="none" w="med" len="med"/>
+                    </a:lnB>
+                    <a:solidFill>
+                      <a:srgbClr val="FFFFFF"/>
+                    </a:solidFill>
+                  </a:tcPr>
+                </a:tc>
+                <a:tc>
+                  <a:txBody>
+                    <a:bodyPr/>
+                    <a:lstStyle/>
+                    <a:p>
+                      <a:pPr algn="ctr" indent="0" marL="0">
+                        <a:buNone/>
+                      </a:pPr>
+                      <a:r>
+                        <a:rPr lang="en-US" sz="1050" b="1" dirty="0">
+                          <a:solidFill>
+                            <a:srgbClr val="2EA9B6"/>
+                          </a:solidFill>
+                        </a:rPr>
+                        <a:t>+0.54</a:t>
+                      </a:r>
+                      <a:endParaRPr lang="en-US" sz="1050" dirty="0"/>
+                    </a:p>
+                  </a:txBody>
+                  <a:tcPr marL="36576" marR="36576" marT="36576" marB="36576" anchor="ctr">
+                    <a:lnL w="9525" cap="flat" cmpd="sng" algn="ctr">
+                      <a:solidFill>
+                        <a:srgbClr val="FFFFFF"/>
+                      </a:solidFill>
+                      <a:prstDash val="solid"/>
+                      <a:round/>
+                      <a:headEnd type="none" w="med" len="med"/>
+                      <a:tailEnd type="none" w="med" len="med"/>
+                    </a:lnL>
+                    <a:lnR w="9525" cap="flat" cmpd="sng" algn="ctr">
+                      <a:solidFill>
+                        <a:srgbClr val="FFFFFF"/>
+                      </a:solidFill>
+                      <a:prstDash val="solid"/>
+                      <a:round/>
+                      <a:headEnd type="none" w="med" len="med"/>
+                      <a:tailEnd type="none" w="med" len="med"/>
+                    </a:lnR>
+                    <a:lnT w="9525" cap="flat" cmpd="sng" algn="ctr">
+                      <a:solidFill>
+                        <a:srgbClr val="FFFFFF"/>
+                      </a:solidFill>
+                      <a:prstDash val="solid"/>
+                      <a:round/>
+                      <a:headEnd type="none" w="med" len="med"/>
+                      <a:tailEnd type="none" w="med" len="med"/>
+                    </a:lnT>
+                    <a:lnB w="9525" cap="flat" cmpd="sng" algn="ctr">
+                      <a:solidFill>
+                        <a:srgbClr val="FFFFFF"/>
+                      </a:solidFill>
+                      <a:prstDash val="solid"/>
+                      <a:round/>
+                      <a:headEnd type="none" w="med" len="med"/>
+                      <a:tailEnd type="none" w="med" len="med"/>
+                    </a:lnB>
+                    <a:solidFill>
+                      <a:srgbClr val="FFFFFF"/>
+                    </a:solidFill>
+                  </a:tcPr>
+                </a:tc>
+                <a:tc>
+                  <a:txBody>
+                    <a:bodyPr/>
+                    <a:lstStyle/>
+                    <a:p>
+                      <a:pPr algn="ctr" indent="0" marL="0">
+                        <a:buNone/>
+                      </a:pPr>
+                      <a:r>
+                        <a:rPr lang="en-US" sz="1050" dirty="0">
+                          <a:solidFill>
+                            <a:srgbClr val="000000"/>
+                          </a:solidFill>
+                        </a:rPr>
+                        <a:t>18 / 33</a:t>
+                      </a:r>
+                      <a:endParaRPr lang="en-US" sz="1050" dirty="0"/>
+                    </a:p>
+                  </a:txBody>
+                  <a:tcPr marL="36576" marR="36576" marT="36576" marB="36576" anchor="ctr">
+                    <a:lnL w="9525" cap="flat" cmpd="sng" algn="ctr">
+                      <a:solidFill>
+                        <a:srgbClr val="FFFFFF"/>
+                      </a:solidFill>
+                      <a:prstDash val="solid"/>
+                      <a:round/>
+                      <a:headEnd type="none" w="med" len="med"/>
+                      <a:tailEnd type="none" w="med" len="med"/>
+                    </a:lnL>
+                    <a:lnR w="9525" cap="flat" cmpd="sng" algn="ctr">
+                      <a:solidFill>
+                        <a:srgbClr val="FFFFFF"/>
+                      </a:solidFill>
+                      <a:prstDash val="solid"/>
+                      <a:round/>
+                      <a:headEnd type="none" w="med" len="med"/>
+                      <a:tailEnd type="none" w="med" len="med"/>
+                    </a:lnR>
+                    <a:lnT w="9525" cap="flat" cmpd="sng" algn="ctr">
+                      <a:solidFill>
+                        <a:srgbClr val="FFFFFF"/>
+                      </a:solidFill>
+                      <a:prstDash val="solid"/>
+                      <a:round/>
+                      <a:headEnd type="none" w="med" len="med"/>
+                      <a:tailEnd type="none" w="med" len="med"/>
+                    </a:lnT>
+                    <a:lnB w="9525" cap="flat" cmpd="sng" algn="ctr">
+                      <a:solidFill>
+                        <a:srgbClr val="FFFFFF"/>
+                      </a:solidFill>
+                      <a:prstDash val="solid"/>
+                      <a:round/>
+                      <a:headEnd type="none" w="med" len="med"/>
+                      <a:tailEnd type="none" w="med" len="med"/>
+                    </a:lnB>
+                    <a:solidFill>
+                      <a:srgbClr val="FFFFFF"/>
+                    </a:solidFill>
+                  </a:tcPr>
+                </a:tc>
+                <a:tc>
+                  <a:txBody>
+                    <a:bodyPr/>
+                    <a:lstStyle/>
+                    <a:p>
+                      <a:pPr algn="ctr" indent="0" marL="0">
+                        <a:buNone/>
+                      </a:pPr>
+                      <a:r>
+                        <a:rPr lang="en-US" sz="1050" dirty="0">
+                          <a:solidFill>
+                            <a:srgbClr val="7F7F7F"/>
+                          </a:solidFill>
+                        </a:rPr>
+                        <a:t>96.4%</a:t>
+                      </a:r>
+                      <a:endParaRPr lang="en-US" sz="1050" dirty="0"/>
+                    </a:p>
+                  </a:txBody>
+                  <a:tcPr marL="36576" marR="36576" marT="36576" marB="36576" anchor="ctr">
+                    <a:lnL w="9525" cap="flat" cmpd="sng" algn="ctr">
+                      <a:solidFill>
+                        <a:srgbClr val="FFFFFF"/>
+                      </a:solidFill>
+                      <a:prstDash val="solid"/>
+                      <a:round/>
+                      <a:headEnd type="none" w="med" len="med"/>
+                      <a:tailEnd type="none" w="med" len="med"/>
+                    </a:lnL>
+                    <a:lnR w="9525" cap="flat" cmpd="sng" algn="ctr">
+                      <a:solidFill>
+                        <a:srgbClr val="FFFFFF"/>
+                      </a:solidFill>
+                      <a:prstDash val="solid"/>
+                      <a:round/>
+                      <a:headEnd type="none" w="med" len="med"/>
+                      <a:tailEnd type="none" w="med" len="med"/>
+                    </a:lnR>
+                    <a:lnT w="9525" cap="flat" cmpd="sng" algn="ctr">
+                      <a:solidFill>
+                        <a:srgbClr val="FFFFFF"/>
+                      </a:solidFill>
+                      <a:prstDash val="solid"/>
+                      <a:round/>
+                      <a:headEnd type="none" w="med" len="med"/>
+                      <a:tailEnd type="none" w="med" len="med"/>
+                    </a:lnT>
+                    <a:lnB w="9525" cap="flat" cmpd="sng" algn="ctr">
+                      <a:solidFill>
+                        <a:srgbClr val="FFFFFF"/>
+                      </a:solidFill>
+                      <a:prstDash val="solid"/>
+                      <a:round/>
+                      <a:headEnd type="none" w="med" len="med"/>
+                      <a:tailEnd type="none" w="med" len="med"/>
+                    </a:lnB>
+                    <a:solidFill>
+                      <a:srgbClr val="FFFFFF"/>
+                    </a:solidFill>
+                  </a:tcPr>
+                </a:tc>
               </a:tr>
-              <a:tr h="292608">
+              <a:tr h="329184">
                 <a:tc>
                   <a:txBody>
                     <a:bodyPr/>
@@ -39510,14 +43399,14 @@
                         <a:buNone/>
                       </a:pPr>
                       <a:r>
-                        <a:rPr lang="en-US" sz="1300" b="1" dirty="0">
+                        <a:rPr lang="en-US" sz="1050" b="1" dirty="0">
                           <a:solidFill>
                             <a:srgbClr val="000000"/>
                           </a:solidFill>
                         </a:rPr>
-                        <a:t>115年達成率（群合計）</a:t>
-                      </a:r>
-                      <a:endParaRPr lang="en-US" sz="1300" dirty="0"/>
+                        <a:t>中區</a:t>
+                      </a:r>
+                      <a:endParaRPr lang="en-US" sz="1050" dirty="0"/>
                     </a:p>
                   </a:txBody>
                   <a:tcPr marL="36576" marR="36576" marT="36576" marB="36576" anchor="ctr">
@@ -39571,14 +43460,258 @@
                         <a:buNone/>
                       </a:pPr>
                       <a:r>
-                        <a:rPr lang="en-US" sz="1600" b="1" dirty="0">
+                        <a:rPr lang="en-US" sz="1050" dirty="0">
+                          <a:solidFill>
+                            <a:srgbClr val="000000"/>
+                          </a:solidFill>
+                        </a:rPr>
+                        <a:t>31</a:t>
+                      </a:r>
+                      <a:endParaRPr lang="en-US" sz="1050" dirty="0"/>
+                    </a:p>
+                  </a:txBody>
+                  <a:tcPr marL="36576" marR="36576" marT="36576" marB="36576" anchor="ctr">
+                    <a:lnL w="9525" cap="flat" cmpd="sng" algn="ctr">
+                      <a:solidFill>
+                        <a:srgbClr val="FFFFFF"/>
+                      </a:solidFill>
+                      <a:prstDash val="solid"/>
+                      <a:round/>
+                      <a:headEnd type="none" w="med" len="med"/>
+                      <a:tailEnd type="none" w="med" len="med"/>
+                    </a:lnL>
+                    <a:lnR w="9525" cap="flat" cmpd="sng" algn="ctr">
+                      <a:solidFill>
+                        <a:srgbClr val="FFFFFF"/>
+                      </a:solidFill>
+                      <a:prstDash val="solid"/>
+                      <a:round/>
+                      <a:headEnd type="none" w="med" len="med"/>
+                      <a:tailEnd type="none" w="med" len="med"/>
+                    </a:lnR>
+                    <a:lnT w="9525" cap="flat" cmpd="sng" algn="ctr">
+                      <a:solidFill>
+                        <a:srgbClr val="FFFFFF"/>
+                      </a:solidFill>
+                      <a:prstDash val="solid"/>
+                      <a:round/>
+                      <a:headEnd type="none" w="med" len="med"/>
+                      <a:tailEnd type="none" w="med" len="med"/>
+                    </a:lnT>
+                    <a:lnB w="9525" cap="flat" cmpd="sng" algn="ctr">
+                      <a:solidFill>
+                        <a:srgbClr val="FFFFFF"/>
+                      </a:solidFill>
+                      <a:prstDash val="solid"/>
+                      <a:round/>
+                      <a:headEnd type="none" w="med" len="med"/>
+                      <a:tailEnd type="none" w="med" len="med"/>
+                    </a:lnB>
+                    <a:solidFill>
+                      <a:srgbClr val="FDF1E9"/>
+                    </a:solidFill>
+                  </a:tcPr>
+                </a:tc>
+                <a:tc>
+                  <a:txBody>
+                    <a:bodyPr/>
+                    <a:lstStyle/>
+                    <a:p>
+                      <a:pPr algn="ctr" indent="0" marL="0">
+                        <a:buNone/>
+                      </a:pPr>
+                      <a:r>
+                        <a:rPr lang="en-US" sz="1050" dirty="0">
+                          <a:solidFill>
+                            <a:srgbClr val="000000"/>
+                          </a:solidFill>
+                        </a:rPr>
+                        <a:t>21.97</a:t>
+                      </a:r>
+                      <a:endParaRPr lang="en-US" sz="1050" dirty="0"/>
+                    </a:p>
+                  </a:txBody>
+                  <a:tcPr marL="36576" marR="36576" marT="36576" marB="36576" anchor="ctr">
+                    <a:lnL w="9525" cap="flat" cmpd="sng" algn="ctr">
+                      <a:solidFill>
+                        <a:srgbClr val="FFFFFF"/>
+                      </a:solidFill>
+                      <a:prstDash val="solid"/>
+                      <a:round/>
+                      <a:headEnd type="none" w="med" len="med"/>
+                      <a:tailEnd type="none" w="med" len="med"/>
+                    </a:lnL>
+                    <a:lnR w="9525" cap="flat" cmpd="sng" algn="ctr">
+                      <a:solidFill>
+                        <a:srgbClr val="FFFFFF"/>
+                      </a:solidFill>
+                      <a:prstDash val="solid"/>
+                      <a:round/>
+                      <a:headEnd type="none" w="med" len="med"/>
+                      <a:tailEnd type="none" w="med" len="med"/>
+                    </a:lnR>
+                    <a:lnT w="9525" cap="flat" cmpd="sng" algn="ctr">
+                      <a:solidFill>
+                        <a:srgbClr val="FFFFFF"/>
+                      </a:solidFill>
+                      <a:prstDash val="solid"/>
+                      <a:round/>
+                      <a:headEnd type="none" w="med" len="med"/>
+                      <a:tailEnd type="none" w="med" len="med"/>
+                    </a:lnT>
+                    <a:lnB w="9525" cap="flat" cmpd="sng" algn="ctr">
+                      <a:solidFill>
+                        <a:srgbClr val="FFFFFF"/>
+                      </a:solidFill>
+                      <a:prstDash val="solid"/>
+                      <a:round/>
+                      <a:headEnd type="none" w="med" len="med"/>
+                      <a:tailEnd type="none" w="med" len="med"/>
+                    </a:lnB>
+                    <a:solidFill>
+                      <a:srgbClr val="FDF1E9"/>
+                    </a:solidFill>
+                  </a:tcPr>
+                </a:tc>
+                <a:tc>
+                  <a:txBody>
+                    <a:bodyPr/>
+                    <a:lstStyle/>
+                    <a:p>
+                      <a:pPr algn="ctr" indent="0" marL="0">
+                        <a:buNone/>
+                      </a:pPr>
+                      <a:r>
+                        <a:rPr lang="en-US" sz="1050" dirty="0">
+                          <a:solidFill>
+                            <a:srgbClr val="000000"/>
+                          </a:solidFill>
+                        </a:rPr>
+                        <a:t>22.57</a:t>
+                      </a:r>
+                      <a:endParaRPr lang="en-US" sz="1050" dirty="0"/>
+                    </a:p>
+                  </a:txBody>
+                  <a:tcPr marL="36576" marR="36576" marT="36576" marB="36576" anchor="ctr">
+                    <a:lnL w="9525" cap="flat" cmpd="sng" algn="ctr">
+                      <a:solidFill>
+                        <a:srgbClr val="FFFFFF"/>
+                      </a:solidFill>
+                      <a:prstDash val="solid"/>
+                      <a:round/>
+                      <a:headEnd type="none" w="med" len="med"/>
+                      <a:tailEnd type="none" w="med" len="med"/>
+                    </a:lnL>
+                    <a:lnR w="9525" cap="flat" cmpd="sng" algn="ctr">
+                      <a:solidFill>
+                        <a:srgbClr val="FFFFFF"/>
+                      </a:solidFill>
+                      <a:prstDash val="solid"/>
+                      <a:round/>
+                      <a:headEnd type="none" w="med" len="med"/>
+                      <a:tailEnd type="none" w="med" len="med"/>
+                    </a:lnR>
+                    <a:lnT w="9525" cap="flat" cmpd="sng" algn="ctr">
+                      <a:solidFill>
+                        <a:srgbClr val="FFFFFF"/>
+                      </a:solidFill>
+                      <a:prstDash val="solid"/>
+                      <a:round/>
+                      <a:headEnd type="none" w="med" len="med"/>
+                      <a:tailEnd type="none" w="med" len="med"/>
+                    </a:lnT>
+                    <a:lnB w="9525" cap="flat" cmpd="sng" algn="ctr">
+                      <a:solidFill>
+                        <a:srgbClr val="FFFFFF"/>
+                      </a:solidFill>
+                      <a:prstDash val="solid"/>
+                      <a:round/>
+                      <a:headEnd type="none" w="med" len="med"/>
+                      <a:tailEnd type="none" w="med" len="med"/>
+                    </a:lnB>
+                    <a:solidFill>
+                      <a:srgbClr val="FDF1E9"/>
+                    </a:solidFill>
+                  </a:tcPr>
+                </a:tc>
+                <a:tc>
+                  <a:txBody>
+                    <a:bodyPr/>
+                    <a:lstStyle/>
+                    <a:p>
+                      <a:pPr algn="ctr" indent="0" marL="0">
+                        <a:buNone/>
+                      </a:pPr>
+                      <a:r>
+                        <a:rPr lang="en-US" sz="1050" b="1" dirty="0">
+                          <a:solidFill>
+                            <a:srgbClr val="C00000"/>
+                          </a:solidFill>
+                        </a:rPr>
+                        <a:t>102.7%</a:t>
+                      </a:r>
+                      <a:endParaRPr lang="en-US" sz="1050" dirty="0"/>
+                    </a:p>
+                  </a:txBody>
+                  <a:tcPr marL="36576" marR="36576" marT="36576" marB="36576" anchor="ctr">
+                    <a:lnL w="9525" cap="flat" cmpd="sng" algn="ctr">
+                      <a:solidFill>
+                        <a:srgbClr val="FFFFFF"/>
+                      </a:solidFill>
+                      <a:prstDash val="solid"/>
+                      <a:round/>
+                      <a:headEnd type="none" w="med" len="med"/>
+                      <a:tailEnd type="none" w="med" len="med"/>
+                    </a:lnL>
+                    <a:lnR w="9525" cap="flat" cmpd="sng" algn="ctr">
+                      <a:solidFill>
+                        <a:srgbClr val="FFFFFF"/>
+                      </a:solidFill>
+                      <a:prstDash val="solid"/>
+                      <a:round/>
+                      <a:headEnd type="none" w="med" len="med"/>
+                      <a:tailEnd type="none" w="med" len="med"/>
+                    </a:lnR>
+                    <a:lnT w="9525" cap="flat" cmpd="sng" algn="ctr">
+                      <a:solidFill>
+                        <a:srgbClr val="FFFFFF"/>
+                      </a:solidFill>
+                      <a:prstDash val="solid"/>
+                      <a:round/>
+                      <a:headEnd type="none" w="med" len="med"/>
+                      <a:tailEnd type="none" w="med" len="med"/>
+                    </a:lnT>
+                    <a:lnB w="9525" cap="flat" cmpd="sng" algn="ctr">
+                      <a:solidFill>
+                        <a:srgbClr val="FFFFFF"/>
+                      </a:solidFill>
+                      <a:prstDash val="solid"/>
+                      <a:round/>
+                      <a:headEnd type="none" w="med" len="med"/>
+                      <a:tailEnd type="none" w="med" len="med"/>
+                    </a:lnB>
+                    <a:solidFill>
+                      <a:srgbClr val="FDF1E9"/>
+                    </a:solidFill>
+                  </a:tcPr>
+                </a:tc>
+                <a:tc>
+                  <a:txBody>
+                    <a:bodyPr/>
+                    <a:lstStyle/>
+                    <a:p>
+                      <a:pPr algn="ctr" indent="0" marL="0">
+                        <a:buNone/>
+                      </a:pPr>
+                      <a:r>
+                        <a:rPr lang="en-US" sz="1050" b="1" dirty="0">
                           <a:solidFill>
                             <a:srgbClr val="2EA9B6"/>
                           </a:solidFill>
                         </a:rPr>
-                        <a:t>116.8%</a:t>
-                      </a:r>
-                      <a:endParaRPr lang="en-US" sz="1600" dirty="0"/>
+                        <a:t>+0.60</a:t>
+                      </a:r>
+                      <a:endParaRPr lang="en-US" sz="1050" dirty="0"/>
                     </a:p>
                   </a:txBody>
                   <a:tcPr marL="36576" marR="36576" marT="36576" marB="36576" anchor="ctr">
@@ -39632,60 +43765,611 @@
                         <a:buNone/>
                       </a:pPr>
                       <a:r>
-                        <a:rPr lang="en-US" sz="1600" b="1" dirty="0">
+                        <a:rPr lang="en-US" sz="1050" dirty="0">
+                          <a:solidFill>
+                            <a:srgbClr val="000000"/>
+                          </a:solidFill>
+                        </a:rPr>
+                        <a:t>15 / 31</a:t>
+                      </a:r>
+                      <a:endParaRPr lang="en-US" sz="1050" dirty="0"/>
+                    </a:p>
+                  </a:txBody>
+                  <a:tcPr marL="36576" marR="36576" marT="36576" marB="36576" anchor="ctr">
+                    <a:lnL w="9525" cap="flat" cmpd="sng" algn="ctr">
+                      <a:solidFill>
+                        <a:srgbClr val="FFFFFF"/>
+                      </a:solidFill>
+                      <a:prstDash val="solid"/>
+                      <a:round/>
+                      <a:headEnd type="none" w="med" len="med"/>
+                      <a:tailEnd type="none" w="med" len="med"/>
+                    </a:lnL>
+                    <a:lnR w="9525" cap="flat" cmpd="sng" algn="ctr">
+                      <a:solidFill>
+                        <a:srgbClr val="FFFFFF"/>
+                      </a:solidFill>
+                      <a:prstDash val="solid"/>
+                      <a:round/>
+                      <a:headEnd type="none" w="med" len="med"/>
+                      <a:tailEnd type="none" w="med" len="med"/>
+                    </a:lnR>
+                    <a:lnT w="9525" cap="flat" cmpd="sng" algn="ctr">
+                      <a:solidFill>
+                        <a:srgbClr val="FFFFFF"/>
+                      </a:solidFill>
+                      <a:prstDash val="solid"/>
+                      <a:round/>
+                      <a:headEnd type="none" w="med" len="med"/>
+                      <a:tailEnd type="none" w="med" len="med"/>
+                    </a:lnT>
+                    <a:lnB w="9525" cap="flat" cmpd="sng" algn="ctr">
+                      <a:solidFill>
+                        <a:srgbClr val="FFFFFF"/>
+                      </a:solidFill>
+                      <a:prstDash val="solid"/>
+                      <a:round/>
+                      <a:headEnd type="none" w="med" len="med"/>
+                      <a:tailEnd type="none" w="med" len="med"/>
+                    </a:lnB>
+                    <a:solidFill>
+                      <a:srgbClr val="FDF1E9"/>
+                    </a:solidFill>
+                  </a:tcPr>
+                </a:tc>
+                <a:tc>
+                  <a:txBody>
+                    <a:bodyPr/>
+                    <a:lstStyle/>
+                    <a:p>
+                      <a:pPr algn="ctr" indent="0" marL="0">
+                        <a:buNone/>
+                      </a:pPr>
+                      <a:r>
+                        <a:rPr lang="en-US" sz="1050" dirty="0">
+                          <a:solidFill>
+                            <a:srgbClr val="7F7F7F"/>
+                          </a:solidFill>
+                        </a:rPr>
+                        <a:t>105.3%</a:t>
+                      </a:r>
+                      <a:endParaRPr lang="en-US" sz="1050" dirty="0"/>
+                    </a:p>
+                  </a:txBody>
+                  <a:tcPr marL="36576" marR="36576" marT="36576" marB="36576" anchor="ctr">
+                    <a:lnL w="9525" cap="flat" cmpd="sng" algn="ctr">
+                      <a:solidFill>
+                        <a:srgbClr val="FFFFFF"/>
+                      </a:solidFill>
+                      <a:prstDash val="solid"/>
+                      <a:round/>
+                      <a:headEnd type="none" w="med" len="med"/>
+                      <a:tailEnd type="none" w="med" len="med"/>
+                    </a:lnL>
+                    <a:lnR w="9525" cap="flat" cmpd="sng" algn="ctr">
+                      <a:solidFill>
+                        <a:srgbClr val="FFFFFF"/>
+                      </a:solidFill>
+                      <a:prstDash val="solid"/>
+                      <a:round/>
+                      <a:headEnd type="none" w="med" len="med"/>
+                      <a:tailEnd type="none" w="med" len="med"/>
+                    </a:lnR>
+                    <a:lnT w="9525" cap="flat" cmpd="sng" algn="ctr">
+                      <a:solidFill>
+                        <a:srgbClr val="FFFFFF"/>
+                      </a:solidFill>
+                      <a:prstDash val="solid"/>
+                      <a:round/>
+                      <a:headEnd type="none" w="med" len="med"/>
+                      <a:tailEnd type="none" w="med" len="med"/>
+                    </a:lnT>
+                    <a:lnB w="9525" cap="flat" cmpd="sng" algn="ctr">
+                      <a:solidFill>
+                        <a:srgbClr val="FFFFFF"/>
+                      </a:solidFill>
+                      <a:prstDash val="solid"/>
+                      <a:round/>
+                      <a:headEnd type="none" w="med" len="med"/>
+                      <a:tailEnd type="none" w="med" len="med"/>
+                    </a:lnB>
+                    <a:solidFill>
+                      <a:srgbClr val="FDF1E9"/>
+                    </a:solidFill>
+                  </a:tcPr>
+                </a:tc>
+              </a:tr>
+              <a:tr h="329184">
+                <a:tc>
+                  <a:txBody>
+                    <a:bodyPr/>
+                    <a:lstStyle/>
+                    <a:p>
+                      <a:pPr algn="ctr" indent="0" marL="0">
+                        <a:buNone/>
+                      </a:pPr>
+                      <a:r>
+                        <a:rPr lang="en-US" sz="1050" b="1" dirty="0">
+                          <a:solidFill>
+                            <a:srgbClr val="000000"/>
+                          </a:solidFill>
+                        </a:rPr>
+                        <a:t>南區</a:t>
+                      </a:r>
+                      <a:endParaRPr lang="en-US" sz="1050" dirty="0"/>
+                    </a:p>
+                  </a:txBody>
+                  <a:tcPr marL="36576" marR="36576" marT="36576" marB="36576" anchor="ctr">
+                    <a:lnL w="9525" cap="flat" cmpd="sng" algn="ctr">
+                      <a:solidFill>
+                        <a:srgbClr val="FFFFFF"/>
+                      </a:solidFill>
+                      <a:prstDash val="solid"/>
+                      <a:round/>
+                      <a:headEnd type="none" w="med" len="med"/>
+                      <a:tailEnd type="none" w="med" len="med"/>
+                    </a:lnL>
+                    <a:lnR w="9525" cap="flat" cmpd="sng" algn="ctr">
+                      <a:solidFill>
+                        <a:srgbClr val="FFFFFF"/>
+                      </a:solidFill>
+                      <a:prstDash val="solid"/>
+                      <a:round/>
+                      <a:headEnd type="none" w="med" len="med"/>
+                      <a:tailEnd type="none" w="med" len="med"/>
+                    </a:lnR>
+                    <a:lnT w="9525" cap="flat" cmpd="sng" algn="ctr">
+                      <a:solidFill>
+                        <a:srgbClr val="FFFFFF"/>
+                      </a:solidFill>
+                      <a:prstDash val="solid"/>
+                      <a:round/>
+                      <a:headEnd type="none" w="med" len="med"/>
+                      <a:tailEnd type="none" w="med" len="med"/>
+                    </a:lnT>
+                    <a:lnB w="9525" cap="flat" cmpd="sng" algn="ctr">
+                      <a:solidFill>
+                        <a:srgbClr val="FFFFFF"/>
+                      </a:solidFill>
+                      <a:prstDash val="solid"/>
+                      <a:round/>
+                      <a:headEnd type="none" w="med" len="med"/>
+                      <a:tailEnd type="none" w="med" len="med"/>
+                    </a:lnB>
+                    <a:solidFill>
+                      <a:srgbClr val="FFFFFF"/>
+                    </a:solidFill>
+                  </a:tcPr>
+                </a:tc>
+                <a:tc>
+                  <a:txBody>
+                    <a:bodyPr/>
+                    <a:lstStyle/>
+                    <a:p>
+                      <a:pPr algn="ctr" indent="0" marL="0">
+                        <a:buNone/>
+                      </a:pPr>
+                      <a:r>
+                        <a:rPr lang="en-US" sz="1050" dirty="0">
+                          <a:solidFill>
+                            <a:srgbClr val="000000"/>
+                          </a:solidFill>
+                        </a:rPr>
+                        <a:t>37</a:t>
+                      </a:r>
+                      <a:endParaRPr lang="en-US" sz="1050" dirty="0"/>
+                    </a:p>
+                  </a:txBody>
+                  <a:tcPr marL="36576" marR="36576" marT="36576" marB="36576" anchor="ctr">
+                    <a:lnL w="9525" cap="flat" cmpd="sng" algn="ctr">
+                      <a:solidFill>
+                        <a:srgbClr val="FFFFFF"/>
+                      </a:solidFill>
+                      <a:prstDash val="solid"/>
+                      <a:round/>
+                      <a:headEnd type="none" w="med" len="med"/>
+                      <a:tailEnd type="none" w="med" len="med"/>
+                    </a:lnL>
+                    <a:lnR w="9525" cap="flat" cmpd="sng" algn="ctr">
+                      <a:solidFill>
+                        <a:srgbClr val="FFFFFF"/>
+                      </a:solidFill>
+                      <a:prstDash val="solid"/>
+                      <a:round/>
+                      <a:headEnd type="none" w="med" len="med"/>
+                      <a:tailEnd type="none" w="med" len="med"/>
+                    </a:lnR>
+                    <a:lnT w="9525" cap="flat" cmpd="sng" algn="ctr">
+                      <a:solidFill>
+                        <a:srgbClr val="FFFFFF"/>
+                      </a:solidFill>
+                      <a:prstDash val="solid"/>
+                      <a:round/>
+                      <a:headEnd type="none" w="med" len="med"/>
+                      <a:tailEnd type="none" w="med" len="med"/>
+                    </a:lnT>
+                    <a:lnB w="9525" cap="flat" cmpd="sng" algn="ctr">
+                      <a:solidFill>
+                        <a:srgbClr val="FFFFFF"/>
+                      </a:solidFill>
+                      <a:prstDash val="solid"/>
+                      <a:round/>
+                      <a:headEnd type="none" w="med" len="med"/>
+                      <a:tailEnd type="none" w="med" len="med"/>
+                    </a:lnB>
+                    <a:solidFill>
+                      <a:srgbClr val="FFFFFF"/>
+                    </a:solidFill>
+                  </a:tcPr>
+                </a:tc>
+                <a:tc>
+                  <a:txBody>
+                    <a:bodyPr/>
+                    <a:lstStyle/>
+                    <a:p>
+                      <a:pPr algn="ctr" indent="0" marL="0">
+                        <a:buNone/>
+                      </a:pPr>
+                      <a:r>
+                        <a:rPr lang="en-US" sz="1050" dirty="0">
+                          <a:solidFill>
+                            <a:srgbClr val="000000"/>
+                          </a:solidFill>
+                        </a:rPr>
+                        <a:t>22.82</a:t>
+                      </a:r>
+                      <a:endParaRPr lang="en-US" sz="1050" dirty="0"/>
+                    </a:p>
+                  </a:txBody>
+                  <a:tcPr marL="36576" marR="36576" marT="36576" marB="36576" anchor="ctr">
+                    <a:lnL w="9525" cap="flat" cmpd="sng" algn="ctr">
+                      <a:solidFill>
+                        <a:srgbClr val="FFFFFF"/>
+                      </a:solidFill>
+                      <a:prstDash val="solid"/>
+                      <a:round/>
+                      <a:headEnd type="none" w="med" len="med"/>
+                      <a:tailEnd type="none" w="med" len="med"/>
+                    </a:lnL>
+                    <a:lnR w="9525" cap="flat" cmpd="sng" algn="ctr">
+                      <a:solidFill>
+                        <a:srgbClr val="FFFFFF"/>
+                      </a:solidFill>
+                      <a:prstDash val="solid"/>
+                      <a:round/>
+                      <a:headEnd type="none" w="med" len="med"/>
+                      <a:tailEnd type="none" w="med" len="med"/>
+                    </a:lnR>
+                    <a:lnT w="9525" cap="flat" cmpd="sng" algn="ctr">
+                      <a:solidFill>
+                        <a:srgbClr val="FFFFFF"/>
+                      </a:solidFill>
+                      <a:prstDash val="solid"/>
+                      <a:round/>
+                      <a:headEnd type="none" w="med" len="med"/>
+                      <a:tailEnd type="none" w="med" len="med"/>
+                    </a:lnT>
+                    <a:lnB w="9525" cap="flat" cmpd="sng" algn="ctr">
+                      <a:solidFill>
+                        <a:srgbClr val="FFFFFF"/>
+                      </a:solidFill>
+                      <a:prstDash val="solid"/>
+                      <a:round/>
+                      <a:headEnd type="none" w="med" len="med"/>
+                      <a:tailEnd type="none" w="med" len="med"/>
+                    </a:lnB>
+                    <a:solidFill>
+                      <a:srgbClr val="FFFFFF"/>
+                    </a:solidFill>
+                  </a:tcPr>
+                </a:tc>
+                <a:tc>
+                  <a:txBody>
+                    <a:bodyPr/>
+                    <a:lstStyle/>
+                    <a:p>
+                      <a:pPr algn="ctr" indent="0" marL="0">
+                        <a:buNone/>
+                      </a:pPr>
+                      <a:r>
+                        <a:rPr lang="en-US" sz="1050" dirty="0">
+                          <a:solidFill>
+                            <a:srgbClr val="000000"/>
+                          </a:solidFill>
+                        </a:rPr>
+                        <a:t>23.24</a:t>
+                      </a:r>
+                      <a:endParaRPr lang="en-US" sz="1050" dirty="0"/>
+                    </a:p>
+                  </a:txBody>
+                  <a:tcPr marL="36576" marR="36576" marT="36576" marB="36576" anchor="ctr">
+                    <a:lnL w="9525" cap="flat" cmpd="sng" algn="ctr">
+                      <a:solidFill>
+                        <a:srgbClr val="FFFFFF"/>
+                      </a:solidFill>
+                      <a:prstDash val="solid"/>
+                      <a:round/>
+                      <a:headEnd type="none" w="med" len="med"/>
+                      <a:tailEnd type="none" w="med" len="med"/>
+                    </a:lnL>
+                    <a:lnR w="9525" cap="flat" cmpd="sng" algn="ctr">
+                      <a:solidFill>
+                        <a:srgbClr val="FFFFFF"/>
+                      </a:solidFill>
+                      <a:prstDash val="solid"/>
+                      <a:round/>
+                      <a:headEnd type="none" w="med" len="med"/>
+                      <a:tailEnd type="none" w="med" len="med"/>
+                    </a:lnR>
+                    <a:lnT w="9525" cap="flat" cmpd="sng" algn="ctr">
+                      <a:solidFill>
+                        <a:srgbClr val="FFFFFF"/>
+                      </a:solidFill>
+                      <a:prstDash val="solid"/>
+                      <a:round/>
+                      <a:headEnd type="none" w="med" len="med"/>
+                      <a:tailEnd type="none" w="med" len="med"/>
+                    </a:lnT>
+                    <a:lnB w="9525" cap="flat" cmpd="sng" algn="ctr">
+                      <a:solidFill>
+                        <a:srgbClr val="FFFFFF"/>
+                      </a:solidFill>
+                      <a:prstDash val="solid"/>
+                      <a:round/>
+                      <a:headEnd type="none" w="med" len="med"/>
+                      <a:tailEnd type="none" w="med" len="med"/>
+                    </a:lnB>
+                    <a:solidFill>
+                      <a:srgbClr val="FFFFFF"/>
+                    </a:solidFill>
+                  </a:tcPr>
+                </a:tc>
+                <a:tc>
+                  <a:txBody>
+                    <a:bodyPr/>
+                    <a:lstStyle/>
+                    <a:p>
+                      <a:pPr algn="ctr" indent="0" marL="0">
+                        <a:buNone/>
+                      </a:pPr>
+                      <a:r>
+                        <a:rPr lang="en-US" sz="1050" b="1" dirty="0">
                           <a:solidFill>
                             <a:srgbClr val="C00000"/>
                           </a:solidFill>
                         </a:rPr>
-                        <a:t>98.7%</a:t>
-                      </a:r>
-                      <a:endParaRPr lang="en-US" sz="1600" dirty="0"/>
-                    </a:p>
-                  </a:txBody>
-                  <a:tcPr marL="36576" marR="36576" marT="36576" marB="36576" anchor="ctr">
-                    <a:lnL w="9525" cap="flat" cmpd="sng" algn="ctr">
-                      <a:solidFill>
-                        <a:srgbClr val="FFFFFF"/>
-                      </a:solidFill>
-                      <a:prstDash val="solid"/>
-                      <a:round/>
-                      <a:headEnd type="none" w="med" len="med"/>
-                      <a:tailEnd type="none" w="med" len="med"/>
-                    </a:lnL>
-                    <a:lnR w="9525" cap="flat" cmpd="sng" algn="ctr">
-                      <a:solidFill>
-                        <a:srgbClr val="FFFFFF"/>
-                      </a:solidFill>
-                      <a:prstDash val="solid"/>
-                      <a:round/>
-                      <a:headEnd type="none" w="med" len="med"/>
-                      <a:tailEnd type="none" w="med" len="med"/>
-                    </a:lnR>
-                    <a:lnT w="9525" cap="flat" cmpd="sng" algn="ctr">
-                      <a:solidFill>
-                        <a:srgbClr val="FFFFFF"/>
-                      </a:solidFill>
-                      <a:prstDash val="solid"/>
-                      <a:round/>
-                      <a:headEnd type="none" w="med" len="med"/>
-                      <a:tailEnd type="none" w="med" len="med"/>
-                    </a:lnT>
-                    <a:lnB w="9525" cap="flat" cmpd="sng" algn="ctr">
-                      <a:solidFill>
-                        <a:srgbClr val="FFFFFF"/>
-                      </a:solidFill>
-                      <a:prstDash val="solid"/>
-                      <a:round/>
-                      <a:headEnd type="none" w="med" len="med"/>
-                      <a:tailEnd type="none" w="med" len="med"/>
-                    </a:lnB>
-                    <a:solidFill>
-                      <a:srgbClr val="FDF1E9"/>
+                        <a:t>101.8%</a:t>
+                      </a:r>
+                      <a:endParaRPr lang="en-US" sz="1050" dirty="0"/>
+                    </a:p>
+                  </a:txBody>
+                  <a:tcPr marL="36576" marR="36576" marT="36576" marB="36576" anchor="ctr">
+                    <a:lnL w="9525" cap="flat" cmpd="sng" algn="ctr">
+                      <a:solidFill>
+                        <a:srgbClr val="FFFFFF"/>
+                      </a:solidFill>
+                      <a:prstDash val="solid"/>
+                      <a:round/>
+                      <a:headEnd type="none" w="med" len="med"/>
+                      <a:tailEnd type="none" w="med" len="med"/>
+                    </a:lnL>
+                    <a:lnR w="9525" cap="flat" cmpd="sng" algn="ctr">
+                      <a:solidFill>
+                        <a:srgbClr val="FFFFFF"/>
+                      </a:solidFill>
+                      <a:prstDash val="solid"/>
+                      <a:round/>
+                      <a:headEnd type="none" w="med" len="med"/>
+                      <a:tailEnd type="none" w="med" len="med"/>
+                    </a:lnR>
+                    <a:lnT w="9525" cap="flat" cmpd="sng" algn="ctr">
+                      <a:solidFill>
+                        <a:srgbClr val="FFFFFF"/>
+                      </a:solidFill>
+                      <a:prstDash val="solid"/>
+                      <a:round/>
+                      <a:headEnd type="none" w="med" len="med"/>
+                      <a:tailEnd type="none" w="med" len="med"/>
+                    </a:lnT>
+                    <a:lnB w="9525" cap="flat" cmpd="sng" algn="ctr">
+                      <a:solidFill>
+                        <a:srgbClr val="FFFFFF"/>
+                      </a:solidFill>
+                      <a:prstDash val="solid"/>
+                      <a:round/>
+                      <a:headEnd type="none" w="med" len="med"/>
+                      <a:tailEnd type="none" w="med" len="med"/>
+                    </a:lnB>
+                    <a:solidFill>
+                      <a:srgbClr val="FFFFFF"/>
+                    </a:solidFill>
+                  </a:tcPr>
+                </a:tc>
+                <a:tc>
+                  <a:txBody>
+                    <a:bodyPr/>
+                    <a:lstStyle/>
+                    <a:p>
+                      <a:pPr algn="ctr" indent="0" marL="0">
+                        <a:buNone/>
+                      </a:pPr>
+                      <a:r>
+                        <a:rPr lang="en-US" sz="1050" b="1" dirty="0">
+                          <a:solidFill>
+                            <a:srgbClr val="2EA9B6"/>
+                          </a:solidFill>
+                        </a:rPr>
+                        <a:t>+0.42</a:t>
+                      </a:r>
+                      <a:endParaRPr lang="en-US" sz="1050" dirty="0"/>
+                    </a:p>
+                  </a:txBody>
+                  <a:tcPr marL="36576" marR="36576" marT="36576" marB="36576" anchor="ctr">
+                    <a:lnL w="9525" cap="flat" cmpd="sng" algn="ctr">
+                      <a:solidFill>
+                        <a:srgbClr val="FFFFFF"/>
+                      </a:solidFill>
+                      <a:prstDash val="solid"/>
+                      <a:round/>
+                      <a:headEnd type="none" w="med" len="med"/>
+                      <a:tailEnd type="none" w="med" len="med"/>
+                    </a:lnL>
+                    <a:lnR w="9525" cap="flat" cmpd="sng" algn="ctr">
+                      <a:solidFill>
+                        <a:srgbClr val="FFFFFF"/>
+                      </a:solidFill>
+                      <a:prstDash val="solid"/>
+                      <a:round/>
+                      <a:headEnd type="none" w="med" len="med"/>
+                      <a:tailEnd type="none" w="med" len="med"/>
+                    </a:lnR>
+                    <a:lnT w="9525" cap="flat" cmpd="sng" algn="ctr">
+                      <a:solidFill>
+                        <a:srgbClr val="FFFFFF"/>
+                      </a:solidFill>
+                      <a:prstDash val="solid"/>
+                      <a:round/>
+                      <a:headEnd type="none" w="med" len="med"/>
+                      <a:tailEnd type="none" w="med" len="med"/>
+                    </a:lnT>
+                    <a:lnB w="9525" cap="flat" cmpd="sng" algn="ctr">
+                      <a:solidFill>
+                        <a:srgbClr val="FFFFFF"/>
+                      </a:solidFill>
+                      <a:prstDash val="solid"/>
+                      <a:round/>
+                      <a:headEnd type="none" w="med" len="med"/>
+                      <a:tailEnd type="none" w="med" len="med"/>
+                    </a:lnB>
+                    <a:solidFill>
+                      <a:srgbClr val="FFFFFF"/>
+                    </a:solidFill>
+                  </a:tcPr>
+                </a:tc>
+                <a:tc>
+                  <a:txBody>
+                    <a:bodyPr/>
+                    <a:lstStyle/>
+                    <a:p>
+                      <a:pPr algn="ctr" indent="0" marL="0">
+                        <a:buNone/>
+                      </a:pPr>
+                      <a:r>
+                        <a:rPr lang="en-US" sz="1050" dirty="0">
+                          <a:solidFill>
+                            <a:srgbClr val="000000"/>
+                          </a:solidFill>
+                        </a:rPr>
+                        <a:t>20 / 37</a:t>
+                      </a:r>
+                      <a:endParaRPr lang="en-US" sz="1050" dirty="0"/>
+                    </a:p>
+                  </a:txBody>
+                  <a:tcPr marL="36576" marR="36576" marT="36576" marB="36576" anchor="ctr">
+                    <a:lnL w="9525" cap="flat" cmpd="sng" algn="ctr">
+                      <a:solidFill>
+                        <a:srgbClr val="FFFFFF"/>
+                      </a:solidFill>
+                      <a:prstDash val="solid"/>
+                      <a:round/>
+                      <a:headEnd type="none" w="med" len="med"/>
+                      <a:tailEnd type="none" w="med" len="med"/>
+                    </a:lnL>
+                    <a:lnR w="9525" cap="flat" cmpd="sng" algn="ctr">
+                      <a:solidFill>
+                        <a:srgbClr val="FFFFFF"/>
+                      </a:solidFill>
+                      <a:prstDash val="solid"/>
+                      <a:round/>
+                      <a:headEnd type="none" w="med" len="med"/>
+                      <a:tailEnd type="none" w="med" len="med"/>
+                    </a:lnR>
+                    <a:lnT w="9525" cap="flat" cmpd="sng" algn="ctr">
+                      <a:solidFill>
+                        <a:srgbClr val="FFFFFF"/>
+                      </a:solidFill>
+                      <a:prstDash val="solid"/>
+                      <a:round/>
+                      <a:headEnd type="none" w="med" len="med"/>
+                      <a:tailEnd type="none" w="med" len="med"/>
+                    </a:lnT>
+                    <a:lnB w="9525" cap="flat" cmpd="sng" algn="ctr">
+                      <a:solidFill>
+                        <a:srgbClr val="FFFFFF"/>
+                      </a:solidFill>
+                      <a:prstDash val="solid"/>
+                      <a:round/>
+                      <a:headEnd type="none" w="med" len="med"/>
+                      <a:tailEnd type="none" w="med" len="med"/>
+                    </a:lnB>
+                    <a:solidFill>
+                      <a:srgbClr val="FFFFFF"/>
+                    </a:solidFill>
+                  </a:tcPr>
+                </a:tc>
+                <a:tc>
+                  <a:txBody>
+                    <a:bodyPr/>
+                    <a:lstStyle/>
+                    <a:p>
+                      <a:pPr algn="ctr" indent="0" marL="0">
+                        <a:buNone/>
+                      </a:pPr>
+                      <a:r>
+                        <a:rPr lang="en-US" sz="1050" dirty="0">
+                          <a:solidFill>
+                            <a:srgbClr val="7F7F7F"/>
+                          </a:solidFill>
+                        </a:rPr>
+                        <a:t>102.4%</a:t>
+                      </a:r>
+                      <a:endParaRPr lang="en-US" sz="1050" dirty="0"/>
+                    </a:p>
+                  </a:txBody>
+                  <a:tcPr marL="36576" marR="36576" marT="36576" marB="36576" anchor="ctr">
+                    <a:lnL w="9525" cap="flat" cmpd="sng" algn="ctr">
+                      <a:solidFill>
+                        <a:srgbClr val="FFFFFF"/>
+                      </a:solidFill>
+                      <a:prstDash val="solid"/>
+                      <a:round/>
+                      <a:headEnd type="none" w="med" len="med"/>
+                      <a:tailEnd type="none" w="med" len="med"/>
+                    </a:lnL>
+                    <a:lnR w="9525" cap="flat" cmpd="sng" algn="ctr">
+                      <a:solidFill>
+                        <a:srgbClr val="FFFFFF"/>
+                      </a:solidFill>
+                      <a:prstDash val="solid"/>
+                      <a:round/>
+                      <a:headEnd type="none" w="med" len="med"/>
+                      <a:tailEnd type="none" w="med" len="med"/>
+                    </a:lnR>
+                    <a:lnT w="9525" cap="flat" cmpd="sng" algn="ctr">
+                      <a:solidFill>
+                        <a:srgbClr val="FFFFFF"/>
+                      </a:solidFill>
+                      <a:prstDash val="solid"/>
+                      <a:round/>
+                      <a:headEnd type="none" w="med" len="med"/>
+                      <a:tailEnd type="none" w="med" len="med"/>
+                    </a:lnT>
+                    <a:lnB w="9525" cap="flat" cmpd="sng" algn="ctr">
+                      <a:solidFill>
+                        <a:srgbClr val="FFFFFF"/>
+                      </a:solidFill>
+                      <a:prstDash val="solid"/>
+                      <a:round/>
+                      <a:headEnd type="none" w="med" len="med"/>
+                      <a:tailEnd type="none" w="med" len="med"/>
+                    </a:lnB>
+                    <a:solidFill>
+                      <a:srgbClr val="FFFFFF"/>
                     </a:solidFill>
                   </a:tcPr>
                 </a:tc>
               </a:tr>
-              <a:tr h="292608">
+              <a:tr h="329184">
                 <a:tc>
                   <a:txBody>
                     <a:bodyPr/>
@@ -39695,55 +44379,55 @@
                         <a:buNone/>
                       </a:pPr>
                       <a:r>
-                        <a:rPr lang="en-US" sz="1300" b="1" dirty="0">
+                        <a:rPr lang="en-US" sz="1050" b="1" dirty="0">
                           <a:solidFill>
                             <a:srgbClr val="000000"/>
                           </a:solidFill>
                         </a:rPr>
-                        <a:t>115年仍未達標家數</a:t>
-                      </a:r>
-                      <a:endParaRPr lang="en-US" sz="1300" dirty="0"/>
-                    </a:p>
-                  </a:txBody>
-                  <a:tcPr marL="36576" marR="36576" marT="36576" marB="36576" anchor="ctr">
-                    <a:lnL w="9525" cap="flat" cmpd="sng" algn="ctr">
-                      <a:solidFill>
-                        <a:srgbClr val="FFFFFF"/>
-                      </a:solidFill>
-                      <a:prstDash val="solid"/>
-                      <a:round/>
-                      <a:headEnd type="none" w="med" len="med"/>
-                      <a:tailEnd type="none" w="med" len="med"/>
-                    </a:lnL>
-                    <a:lnR w="9525" cap="flat" cmpd="sng" algn="ctr">
-                      <a:solidFill>
-                        <a:srgbClr val="FFFFFF"/>
-                      </a:solidFill>
-                      <a:prstDash val="solid"/>
-                      <a:round/>
-                      <a:headEnd type="none" w="med" len="med"/>
-                      <a:tailEnd type="none" w="med" len="med"/>
-                    </a:lnR>
-                    <a:lnT w="9525" cap="flat" cmpd="sng" algn="ctr">
-                      <a:solidFill>
-                        <a:srgbClr val="FFFFFF"/>
-                      </a:solidFill>
-                      <a:prstDash val="solid"/>
-                      <a:round/>
-                      <a:headEnd type="none" w="med" len="med"/>
-                      <a:tailEnd type="none" w="med" len="med"/>
-                    </a:lnT>
-                    <a:lnB w="9525" cap="flat" cmpd="sng" algn="ctr">
-                      <a:solidFill>
-                        <a:srgbClr val="FFFFFF"/>
-                      </a:solidFill>
-                      <a:prstDash val="solid"/>
-                      <a:round/>
-                      <a:headEnd type="none" w="med" len="med"/>
-                      <a:tailEnd type="none" w="med" len="med"/>
-                    </a:lnB>
-                    <a:solidFill>
-                      <a:srgbClr val="FFFFFF"/>
+                        <a:t>全行</a:t>
+                      </a:r>
+                      <a:endParaRPr lang="en-US" sz="1050" dirty="0"/>
+                    </a:p>
+                  </a:txBody>
+                  <a:tcPr marL="36576" marR="36576" marT="36576" marB="36576" anchor="ctr">
+                    <a:lnL w="9525" cap="flat" cmpd="sng" algn="ctr">
+                      <a:solidFill>
+                        <a:srgbClr val="FFFFFF"/>
+                      </a:solidFill>
+                      <a:prstDash val="solid"/>
+                      <a:round/>
+                      <a:headEnd type="none" w="med" len="med"/>
+                      <a:tailEnd type="none" w="med" len="med"/>
+                    </a:lnL>
+                    <a:lnR w="9525" cap="flat" cmpd="sng" algn="ctr">
+                      <a:solidFill>
+                        <a:srgbClr val="FFFFFF"/>
+                      </a:solidFill>
+                      <a:prstDash val="solid"/>
+                      <a:round/>
+                      <a:headEnd type="none" w="med" len="med"/>
+                      <a:tailEnd type="none" w="med" len="med"/>
+                    </a:lnR>
+                    <a:lnT w="9525" cap="flat" cmpd="sng" algn="ctr">
+                      <a:solidFill>
+                        <a:srgbClr val="FFFFFF"/>
+                      </a:solidFill>
+                      <a:prstDash val="solid"/>
+                      <a:round/>
+                      <a:headEnd type="none" w="med" len="med"/>
+                      <a:tailEnd type="none" w="med" len="med"/>
+                    </a:lnT>
+                    <a:lnB w="9525" cap="flat" cmpd="sng" algn="ctr">
+                      <a:solidFill>
+                        <a:srgbClr val="FFFFFF"/>
+                      </a:solidFill>
+                      <a:prstDash val="solid"/>
+                      <a:round/>
+                      <a:headEnd type="none" w="med" len="med"/>
+                      <a:tailEnd type="none" w="med" len="med"/>
+                    </a:lnB>
+                    <a:solidFill>
+                      <a:srgbClr val="F2F2F2"/>
                     </a:solidFill>
                   </a:tcPr>
                 </a:tc>
@@ -39756,55 +44440,55 @@
                         <a:buNone/>
                       </a:pPr>
                       <a:r>
-                        <a:rPr lang="en-US" sz="1400" dirty="0">
+                        <a:rPr lang="en-US" sz="1050" b="1" dirty="0">
                           <a:solidFill>
                             <a:srgbClr val="000000"/>
                           </a:solidFill>
                         </a:rPr>
-                        <a:t>18家（26%）</a:t>
-                      </a:r>
-                      <a:endParaRPr lang="en-US" sz="1400" dirty="0"/>
-                    </a:p>
-                  </a:txBody>
-                  <a:tcPr marL="36576" marR="36576" marT="36576" marB="36576" anchor="ctr">
-                    <a:lnL w="9525" cap="flat" cmpd="sng" algn="ctr">
-                      <a:solidFill>
-                        <a:srgbClr val="FFFFFF"/>
-                      </a:solidFill>
-                      <a:prstDash val="solid"/>
-                      <a:round/>
-                      <a:headEnd type="none" w="med" len="med"/>
-                      <a:tailEnd type="none" w="med" len="med"/>
-                    </a:lnL>
-                    <a:lnR w="9525" cap="flat" cmpd="sng" algn="ctr">
-                      <a:solidFill>
-                        <a:srgbClr val="FFFFFF"/>
-                      </a:solidFill>
-                      <a:prstDash val="solid"/>
-                      <a:round/>
-                      <a:headEnd type="none" w="med" len="med"/>
-                      <a:tailEnd type="none" w="med" len="med"/>
-                    </a:lnR>
-                    <a:lnT w="9525" cap="flat" cmpd="sng" algn="ctr">
-                      <a:solidFill>
-                        <a:srgbClr val="FFFFFF"/>
-                      </a:solidFill>
-                      <a:prstDash val="solid"/>
-                      <a:round/>
-                      <a:headEnd type="none" w="med" len="med"/>
-                      <a:tailEnd type="none" w="med" len="med"/>
-                    </a:lnT>
-                    <a:lnB w="9525" cap="flat" cmpd="sng" algn="ctr">
-                      <a:solidFill>
-                        <a:srgbClr val="FFFFFF"/>
-                      </a:solidFill>
-                      <a:prstDash val="solid"/>
-                      <a:round/>
-                      <a:headEnd type="none" w="med" len="med"/>
-                      <a:tailEnd type="none" w="med" len="med"/>
-                    </a:lnB>
-                    <a:solidFill>
-                      <a:srgbClr val="FFFFFF"/>
+                        <a:t>183</a:t>
+                      </a:r>
+                      <a:endParaRPr lang="en-US" sz="1050" dirty="0"/>
+                    </a:p>
+                  </a:txBody>
+                  <a:tcPr marL="36576" marR="36576" marT="36576" marB="36576" anchor="ctr">
+                    <a:lnL w="9525" cap="flat" cmpd="sng" algn="ctr">
+                      <a:solidFill>
+                        <a:srgbClr val="FFFFFF"/>
+                      </a:solidFill>
+                      <a:prstDash val="solid"/>
+                      <a:round/>
+                      <a:headEnd type="none" w="med" len="med"/>
+                      <a:tailEnd type="none" w="med" len="med"/>
+                    </a:lnL>
+                    <a:lnR w="9525" cap="flat" cmpd="sng" algn="ctr">
+                      <a:solidFill>
+                        <a:srgbClr val="FFFFFF"/>
+                      </a:solidFill>
+                      <a:prstDash val="solid"/>
+                      <a:round/>
+                      <a:headEnd type="none" w="med" len="med"/>
+                      <a:tailEnd type="none" w="med" len="med"/>
+                    </a:lnR>
+                    <a:lnT w="9525" cap="flat" cmpd="sng" algn="ctr">
+                      <a:solidFill>
+                        <a:srgbClr val="FFFFFF"/>
+                      </a:solidFill>
+                      <a:prstDash val="solid"/>
+                      <a:round/>
+                      <a:headEnd type="none" w="med" len="med"/>
+                      <a:tailEnd type="none" w="med" len="med"/>
+                    </a:lnT>
+                    <a:lnB w="9525" cap="flat" cmpd="sng" algn="ctr">
+                      <a:solidFill>
+                        <a:srgbClr val="FFFFFF"/>
+                      </a:solidFill>
+                      <a:prstDash val="solid"/>
+                      <a:round/>
+                      <a:headEnd type="none" w="med" len="med"/>
+                      <a:tailEnd type="none" w="med" len="med"/>
+                    </a:lnB>
+                    <a:solidFill>
+                      <a:srgbClr val="F2F2F2"/>
                     </a:solidFill>
                   </a:tcPr>
                 </a:tc>
@@ -39817,60 +44501,180 @@
                         <a:buNone/>
                       </a:pPr>
                       <a:r>
-                        <a:rPr lang="en-US" sz="1400" b="1" dirty="0">
+                        <a:rPr lang="en-US" sz="1050" b="1" dirty="0">
+                          <a:solidFill>
+                            <a:srgbClr val="000000"/>
+                          </a:solidFill>
+                        </a:rPr>
+                        <a:t>117.85</a:t>
+                      </a:r>
+                      <a:endParaRPr lang="en-US" sz="1050" dirty="0"/>
+                    </a:p>
+                  </a:txBody>
+                  <a:tcPr marL="36576" marR="36576" marT="36576" marB="36576" anchor="ctr">
+                    <a:lnL w="9525" cap="flat" cmpd="sng" algn="ctr">
+                      <a:solidFill>
+                        <a:srgbClr val="FFFFFF"/>
+                      </a:solidFill>
+                      <a:prstDash val="solid"/>
+                      <a:round/>
+                      <a:headEnd type="none" w="med" len="med"/>
+                      <a:tailEnd type="none" w="med" len="med"/>
+                    </a:lnL>
+                    <a:lnR w="9525" cap="flat" cmpd="sng" algn="ctr">
+                      <a:solidFill>
+                        <a:srgbClr val="FFFFFF"/>
+                      </a:solidFill>
+                      <a:prstDash val="solid"/>
+                      <a:round/>
+                      <a:headEnd type="none" w="med" len="med"/>
+                      <a:tailEnd type="none" w="med" len="med"/>
+                    </a:lnR>
+                    <a:lnT w="9525" cap="flat" cmpd="sng" algn="ctr">
+                      <a:solidFill>
+                        <a:srgbClr val="FFFFFF"/>
+                      </a:solidFill>
+                      <a:prstDash val="solid"/>
+                      <a:round/>
+                      <a:headEnd type="none" w="med" len="med"/>
+                      <a:tailEnd type="none" w="med" len="med"/>
+                    </a:lnT>
+                    <a:lnB w="9525" cap="flat" cmpd="sng" algn="ctr">
+                      <a:solidFill>
+                        <a:srgbClr val="FFFFFF"/>
+                      </a:solidFill>
+                      <a:prstDash val="solid"/>
+                      <a:round/>
+                      <a:headEnd type="none" w="med" len="med"/>
+                      <a:tailEnd type="none" w="med" len="med"/>
+                    </a:lnB>
+                    <a:solidFill>
+                      <a:srgbClr val="F2F2F2"/>
+                    </a:solidFill>
+                  </a:tcPr>
+                </a:tc>
+                <a:tc>
+                  <a:txBody>
+                    <a:bodyPr/>
+                    <a:lstStyle/>
+                    <a:p>
+                      <a:pPr algn="ctr" indent="0" marL="0">
+                        <a:buNone/>
+                      </a:pPr>
+                      <a:r>
+                        <a:rPr lang="en-US" sz="1050" b="1" dirty="0">
+                          <a:solidFill>
+                            <a:srgbClr val="000000"/>
+                          </a:solidFill>
+                        </a:rPr>
+                        <a:t>124.86</a:t>
+                      </a:r>
+                      <a:endParaRPr lang="en-US" sz="1050" dirty="0"/>
+                    </a:p>
+                  </a:txBody>
+                  <a:tcPr marL="36576" marR="36576" marT="36576" marB="36576" anchor="ctr">
+                    <a:lnL w="9525" cap="flat" cmpd="sng" algn="ctr">
+                      <a:solidFill>
+                        <a:srgbClr val="FFFFFF"/>
+                      </a:solidFill>
+                      <a:prstDash val="solid"/>
+                      <a:round/>
+                      <a:headEnd type="none" w="med" len="med"/>
+                      <a:tailEnd type="none" w="med" len="med"/>
+                    </a:lnL>
+                    <a:lnR w="9525" cap="flat" cmpd="sng" algn="ctr">
+                      <a:solidFill>
+                        <a:srgbClr val="FFFFFF"/>
+                      </a:solidFill>
+                      <a:prstDash val="solid"/>
+                      <a:round/>
+                      <a:headEnd type="none" w="med" len="med"/>
+                      <a:tailEnd type="none" w="med" len="med"/>
+                    </a:lnR>
+                    <a:lnT w="9525" cap="flat" cmpd="sng" algn="ctr">
+                      <a:solidFill>
+                        <a:srgbClr val="FFFFFF"/>
+                      </a:solidFill>
+                      <a:prstDash val="solid"/>
+                      <a:round/>
+                      <a:headEnd type="none" w="med" len="med"/>
+                      <a:tailEnd type="none" w="med" len="med"/>
+                    </a:lnT>
+                    <a:lnB w="9525" cap="flat" cmpd="sng" algn="ctr">
+                      <a:solidFill>
+                        <a:srgbClr val="FFFFFF"/>
+                      </a:solidFill>
+                      <a:prstDash val="solid"/>
+                      <a:round/>
+                      <a:headEnd type="none" w="med" len="med"/>
+                      <a:tailEnd type="none" w="med" len="med"/>
+                    </a:lnB>
+                    <a:solidFill>
+                      <a:srgbClr val="F2F2F2"/>
+                    </a:solidFill>
+                  </a:tcPr>
+                </a:tc>
+                <a:tc>
+                  <a:txBody>
+                    <a:bodyPr/>
+                    <a:lstStyle/>
+                    <a:p>
+                      <a:pPr algn="ctr" indent="0" marL="0">
+                        <a:buNone/>
+                      </a:pPr>
+                      <a:r>
+                        <a:rPr lang="en-US" sz="1050" b="1" dirty="0">
                           <a:solidFill>
                             <a:srgbClr val="C00000"/>
                           </a:solidFill>
                         </a:rPr>
-                        <a:t>66家（58%）</a:t>
-                      </a:r>
-                      <a:endParaRPr lang="en-US" sz="1400" dirty="0"/>
-                    </a:p>
-                  </a:txBody>
-                  <a:tcPr marL="36576" marR="36576" marT="36576" marB="36576" anchor="ctr">
-                    <a:lnL w="9525" cap="flat" cmpd="sng" algn="ctr">
-                      <a:solidFill>
-                        <a:srgbClr val="FFFFFF"/>
-                      </a:solidFill>
-                      <a:prstDash val="solid"/>
-                      <a:round/>
-                      <a:headEnd type="none" w="med" len="med"/>
-                      <a:tailEnd type="none" w="med" len="med"/>
-                    </a:lnL>
-                    <a:lnR w="9525" cap="flat" cmpd="sng" algn="ctr">
-                      <a:solidFill>
-                        <a:srgbClr val="FFFFFF"/>
-                      </a:solidFill>
-                      <a:prstDash val="solid"/>
-                      <a:round/>
-                      <a:headEnd type="none" w="med" len="med"/>
-                      <a:tailEnd type="none" w="med" len="med"/>
-                    </a:lnR>
-                    <a:lnT w="9525" cap="flat" cmpd="sng" algn="ctr">
-                      <a:solidFill>
-                        <a:srgbClr val="FFFFFF"/>
-                      </a:solidFill>
-                      <a:prstDash val="solid"/>
-                      <a:round/>
-                      <a:headEnd type="none" w="med" len="med"/>
-                      <a:tailEnd type="none" w="med" len="med"/>
-                    </a:lnT>
-                    <a:lnB w="9525" cap="flat" cmpd="sng" algn="ctr">
-                      <a:solidFill>
-                        <a:srgbClr val="FFFFFF"/>
-                      </a:solidFill>
-                      <a:prstDash val="solid"/>
-                      <a:round/>
-                      <a:headEnd type="none" w="med" len="med"/>
-                      <a:tailEnd type="none" w="med" len="med"/>
-                    </a:lnB>
-                    <a:solidFill>
-                      <a:srgbClr val="FFFFFF"/>
-                    </a:solidFill>
-                  </a:tcPr>
-                </a:tc>
-              </a:tr>
-              <a:tr h="292608">
+                        <a:t>105.9%</a:t>
+                      </a:r>
+                      <a:endParaRPr lang="en-US" sz="1050" dirty="0"/>
+                    </a:p>
+                  </a:txBody>
+                  <a:tcPr marL="36576" marR="36576" marT="36576" marB="36576" anchor="ctr">
+                    <a:lnL w="9525" cap="flat" cmpd="sng" algn="ctr">
+                      <a:solidFill>
+                        <a:srgbClr val="FFFFFF"/>
+                      </a:solidFill>
+                      <a:prstDash val="solid"/>
+                      <a:round/>
+                      <a:headEnd type="none" w="med" len="med"/>
+                      <a:tailEnd type="none" w="med" len="med"/>
+                    </a:lnL>
+                    <a:lnR w="9525" cap="flat" cmpd="sng" algn="ctr">
+                      <a:solidFill>
+                        <a:srgbClr val="FFFFFF"/>
+                      </a:solidFill>
+                      <a:prstDash val="solid"/>
+                      <a:round/>
+                      <a:headEnd type="none" w="med" len="med"/>
+                      <a:tailEnd type="none" w="med" len="med"/>
+                    </a:lnR>
+                    <a:lnT w="9525" cap="flat" cmpd="sng" algn="ctr">
+                      <a:solidFill>
+                        <a:srgbClr val="FFFFFF"/>
+                      </a:solidFill>
+                      <a:prstDash val="solid"/>
+                      <a:round/>
+                      <a:headEnd type="none" w="med" len="med"/>
+                      <a:tailEnd type="none" w="med" len="med"/>
+                    </a:lnT>
+                    <a:lnB w="9525" cap="flat" cmpd="sng" algn="ctr">
+                      <a:solidFill>
+                        <a:srgbClr val="FFFFFF"/>
+                      </a:solidFill>
+                      <a:prstDash val="solid"/>
+                      <a:round/>
+                      <a:headEnd type="none" w="med" len="med"/>
+                      <a:tailEnd type="none" w="med" len="med"/>
+                    </a:lnB>
+                    <a:solidFill>
+                      <a:srgbClr val="F2F2F2"/>
+                    </a:solidFill>
+                  </a:tcPr>
+                </a:tc>
                 <a:tc>
                   <a:txBody>
                     <a:bodyPr/>
@@ -39880,55 +44684,116 @@
                         <a:buNone/>
                       </a:pPr>
                       <a:r>
-                        <a:rPr lang="en-US" sz="1300" b="1" dirty="0">
+                        <a:rPr lang="en-US" sz="1050" b="1" dirty="0">
+                          <a:solidFill>
+                            <a:srgbClr val="2EA9B6"/>
+                          </a:solidFill>
+                        </a:rPr>
+                        <a:t>+7.00</a:t>
+                      </a:r>
+                      <a:endParaRPr lang="en-US" sz="1050" dirty="0"/>
+                    </a:p>
+                  </a:txBody>
+                  <a:tcPr marL="36576" marR="36576" marT="36576" marB="36576" anchor="ctr">
+                    <a:lnL w="9525" cap="flat" cmpd="sng" algn="ctr">
+                      <a:solidFill>
+                        <a:srgbClr val="FFFFFF"/>
+                      </a:solidFill>
+                      <a:prstDash val="solid"/>
+                      <a:round/>
+                      <a:headEnd type="none" w="med" len="med"/>
+                      <a:tailEnd type="none" w="med" len="med"/>
+                    </a:lnL>
+                    <a:lnR w="9525" cap="flat" cmpd="sng" algn="ctr">
+                      <a:solidFill>
+                        <a:srgbClr val="FFFFFF"/>
+                      </a:solidFill>
+                      <a:prstDash val="solid"/>
+                      <a:round/>
+                      <a:headEnd type="none" w="med" len="med"/>
+                      <a:tailEnd type="none" w="med" len="med"/>
+                    </a:lnR>
+                    <a:lnT w="9525" cap="flat" cmpd="sng" algn="ctr">
+                      <a:solidFill>
+                        <a:srgbClr val="FFFFFF"/>
+                      </a:solidFill>
+                      <a:prstDash val="solid"/>
+                      <a:round/>
+                      <a:headEnd type="none" w="med" len="med"/>
+                      <a:tailEnd type="none" w="med" len="med"/>
+                    </a:lnT>
+                    <a:lnB w="9525" cap="flat" cmpd="sng" algn="ctr">
+                      <a:solidFill>
+                        <a:srgbClr val="FFFFFF"/>
+                      </a:solidFill>
+                      <a:prstDash val="solid"/>
+                      <a:round/>
+                      <a:headEnd type="none" w="med" len="med"/>
+                      <a:tailEnd type="none" w="med" len="med"/>
+                    </a:lnB>
+                    <a:solidFill>
+                      <a:srgbClr val="F2F2F2"/>
+                    </a:solidFill>
+                  </a:tcPr>
+                </a:tc>
+                <a:tc>
+                  <a:txBody>
+                    <a:bodyPr/>
+                    <a:lstStyle/>
+                    <a:p>
+                      <a:pPr algn="ctr" indent="0" marL="0">
+                        <a:buNone/>
+                      </a:pPr>
+                      <a:r>
+                        <a:rPr lang="en-US" sz="1050" b="1" dirty="0">
                           <a:solidFill>
                             <a:srgbClr val="000000"/>
                           </a:solidFill>
                         </a:rPr>
-                        <a:t>115年未達75%家數</a:t>
-                      </a:r>
-                      <a:endParaRPr lang="en-US" sz="1300" dirty="0"/>
-                    </a:p>
-                  </a:txBody>
-                  <a:tcPr marL="36576" marR="36576" marT="36576" marB="36576" anchor="ctr">
-                    <a:lnL w="9525" cap="flat" cmpd="sng" algn="ctr">
-                      <a:solidFill>
-                        <a:srgbClr val="FFFFFF"/>
-                      </a:solidFill>
-                      <a:prstDash val="solid"/>
-                      <a:round/>
-                      <a:headEnd type="none" w="med" len="med"/>
-                      <a:tailEnd type="none" w="med" len="med"/>
-                    </a:lnL>
-                    <a:lnR w="9525" cap="flat" cmpd="sng" algn="ctr">
-                      <a:solidFill>
-                        <a:srgbClr val="FFFFFF"/>
-                      </a:solidFill>
-                      <a:prstDash val="solid"/>
-                      <a:round/>
-                      <a:headEnd type="none" w="med" len="med"/>
-                      <a:tailEnd type="none" w="med" len="med"/>
-                    </a:lnR>
-                    <a:lnT w="9525" cap="flat" cmpd="sng" algn="ctr">
-                      <a:solidFill>
-                        <a:srgbClr val="FFFFFF"/>
-                      </a:solidFill>
-                      <a:prstDash val="solid"/>
-                      <a:round/>
-                      <a:headEnd type="none" w="med" len="med"/>
-                      <a:tailEnd type="none" w="med" len="med"/>
-                    </a:lnT>
-                    <a:lnB w="9525" cap="flat" cmpd="sng" algn="ctr">
-                      <a:solidFill>
-                        <a:srgbClr val="FFFFFF"/>
-                      </a:solidFill>
-                      <a:prstDash val="solid"/>
-                      <a:round/>
-                      <a:headEnd type="none" w="med" len="med"/>
-                      <a:tailEnd type="none" w="med" len="med"/>
-                    </a:lnB>
-                    <a:solidFill>
-                      <a:srgbClr val="FDF1E9"/>
+                        <a:t>99 / 183</a:t>
+                      </a:r>
+                      <a:endParaRPr lang="en-US" sz="1050" dirty="0"/>
+                    </a:p>
+                  </a:txBody>
+                  <a:tcPr marL="36576" marR="36576" marT="36576" marB="36576" anchor="ctr">
+                    <a:lnL w="9525" cap="flat" cmpd="sng" algn="ctr">
+                      <a:solidFill>
+                        <a:srgbClr val="FFFFFF"/>
+                      </a:solidFill>
+                      <a:prstDash val="solid"/>
+                      <a:round/>
+                      <a:headEnd type="none" w="med" len="med"/>
+                      <a:tailEnd type="none" w="med" len="med"/>
+                    </a:lnL>
+                    <a:lnR w="9525" cap="flat" cmpd="sng" algn="ctr">
+                      <a:solidFill>
+                        <a:srgbClr val="FFFFFF"/>
+                      </a:solidFill>
+                      <a:prstDash val="solid"/>
+                      <a:round/>
+                      <a:headEnd type="none" w="med" len="med"/>
+                      <a:tailEnd type="none" w="med" len="med"/>
+                    </a:lnR>
+                    <a:lnT w="9525" cap="flat" cmpd="sng" algn="ctr">
+                      <a:solidFill>
+                        <a:srgbClr val="FFFFFF"/>
+                      </a:solidFill>
+                      <a:prstDash val="solid"/>
+                      <a:round/>
+                      <a:headEnd type="none" w="med" len="med"/>
+                      <a:tailEnd type="none" w="med" len="med"/>
+                    </a:lnT>
+                    <a:lnB w="9525" cap="flat" cmpd="sng" algn="ctr">
+                      <a:solidFill>
+                        <a:srgbClr val="FFFFFF"/>
+                      </a:solidFill>
+                      <a:prstDash val="solid"/>
+                      <a:round/>
+                      <a:headEnd type="none" w="med" len="med"/>
+                      <a:tailEnd type="none" w="med" len="med"/>
+                    </a:lnB>
+                    <a:solidFill>
+                      <a:srgbClr val="F2F2F2"/>
                     </a:solidFill>
                   </a:tcPr>
                 </a:tc>
@@ -39941,116 +44806,55 @@
                         <a:buNone/>
                       </a:pPr>
                       <a:r>
-                        <a:rPr lang="en-US" sz="1400" dirty="0">
-                          <a:solidFill>
-                            <a:srgbClr val="000000"/>
-                          </a:solidFill>
-                        </a:rPr>
-                        <a:t>0家</a:t>
-                      </a:r>
-                      <a:endParaRPr lang="en-US" sz="1400" dirty="0"/>
-                    </a:p>
-                  </a:txBody>
-                  <a:tcPr marL="36576" marR="36576" marT="36576" marB="36576" anchor="ctr">
-                    <a:lnL w="9525" cap="flat" cmpd="sng" algn="ctr">
-                      <a:solidFill>
-                        <a:srgbClr val="FFFFFF"/>
-                      </a:solidFill>
-                      <a:prstDash val="solid"/>
-                      <a:round/>
-                      <a:headEnd type="none" w="med" len="med"/>
-                      <a:tailEnd type="none" w="med" len="med"/>
-                    </a:lnL>
-                    <a:lnR w="9525" cap="flat" cmpd="sng" algn="ctr">
-                      <a:solidFill>
-                        <a:srgbClr val="FFFFFF"/>
-                      </a:solidFill>
-                      <a:prstDash val="solid"/>
-                      <a:round/>
-                      <a:headEnd type="none" w="med" len="med"/>
-                      <a:tailEnd type="none" w="med" len="med"/>
-                    </a:lnR>
-                    <a:lnT w="9525" cap="flat" cmpd="sng" algn="ctr">
-                      <a:solidFill>
-                        <a:srgbClr val="FFFFFF"/>
-                      </a:solidFill>
-                      <a:prstDash val="solid"/>
-                      <a:round/>
-                      <a:headEnd type="none" w="med" len="med"/>
-                      <a:tailEnd type="none" w="med" len="med"/>
-                    </a:lnT>
-                    <a:lnB w="9525" cap="flat" cmpd="sng" algn="ctr">
-                      <a:solidFill>
-                        <a:srgbClr val="FFFFFF"/>
-                      </a:solidFill>
-                      <a:prstDash val="solid"/>
-                      <a:round/>
-                      <a:headEnd type="none" w="med" len="med"/>
-                      <a:tailEnd type="none" w="med" len="med"/>
-                    </a:lnB>
-                    <a:solidFill>
-                      <a:srgbClr val="FDF1E9"/>
-                    </a:solidFill>
-                  </a:tcPr>
-                </a:tc>
-                <a:tc>
-                  <a:txBody>
-                    <a:bodyPr/>
-                    <a:lstStyle/>
-                    <a:p>
-                      <a:pPr algn="ctr" indent="0" marL="0">
-                        <a:buNone/>
-                      </a:pPr>
-                      <a:r>
-                        <a:rPr lang="en-US" sz="1400" b="1" dirty="0">
-                          <a:solidFill>
-                            <a:srgbClr val="C00000"/>
-                          </a:solidFill>
-                        </a:rPr>
-                        <a:t>19家（17%）</a:t>
-                      </a:r>
-                      <a:endParaRPr lang="en-US" sz="1400" dirty="0"/>
-                    </a:p>
-                  </a:txBody>
-                  <a:tcPr marL="36576" marR="36576" marT="36576" marB="36576" anchor="ctr">
-                    <a:lnL w="9525" cap="flat" cmpd="sng" algn="ctr">
-                      <a:solidFill>
-                        <a:srgbClr val="FFFFFF"/>
-                      </a:solidFill>
-                      <a:prstDash val="solid"/>
-                      <a:round/>
-                      <a:headEnd type="none" w="med" len="med"/>
-                      <a:tailEnd type="none" w="med" len="med"/>
-                    </a:lnL>
-                    <a:lnR w="9525" cap="flat" cmpd="sng" algn="ctr">
-                      <a:solidFill>
-                        <a:srgbClr val="FFFFFF"/>
-                      </a:solidFill>
-                      <a:prstDash val="solid"/>
-                      <a:round/>
-                      <a:headEnd type="none" w="med" len="med"/>
-                      <a:tailEnd type="none" w="med" len="med"/>
-                    </a:lnR>
-                    <a:lnT w="9525" cap="flat" cmpd="sng" algn="ctr">
-                      <a:solidFill>
-                        <a:srgbClr val="FFFFFF"/>
-                      </a:solidFill>
-                      <a:prstDash val="solid"/>
-                      <a:round/>
-                      <a:headEnd type="none" w="med" len="med"/>
-                      <a:tailEnd type="none" w="med" len="med"/>
-                    </a:lnT>
-                    <a:lnB w="9525" cap="flat" cmpd="sng" algn="ctr">
-                      <a:solidFill>
-                        <a:srgbClr val="FFFFFF"/>
-                      </a:solidFill>
-                      <a:prstDash val="solid"/>
-                      <a:round/>
-                      <a:headEnd type="none" w="med" len="med"/>
-                      <a:tailEnd type="none" w="med" len="med"/>
-                    </a:lnB>
-                    <a:solidFill>
-                      <a:srgbClr val="FDF1E9"/>
+                        <a:rPr lang="en-US" sz="1050" b="1" dirty="0">
+                          <a:solidFill>
+                            <a:srgbClr val="7F7F7F"/>
+                          </a:solidFill>
+                        </a:rPr>
+                        <a:t>97.5%</a:t>
+                      </a:r>
+                      <a:endParaRPr lang="en-US" sz="1050" dirty="0"/>
+                    </a:p>
+                  </a:txBody>
+                  <a:tcPr marL="36576" marR="36576" marT="36576" marB="36576" anchor="ctr">
+                    <a:lnL w="9525" cap="flat" cmpd="sng" algn="ctr">
+                      <a:solidFill>
+                        <a:srgbClr val="FFFFFF"/>
+                      </a:solidFill>
+                      <a:prstDash val="solid"/>
+                      <a:round/>
+                      <a:headEnd type="none" w="med" len="med"/>
+                      <a:tailEnd type="none" w="med" len="med"/>
+                    </a:lnL>
+                    <a:lnR w="9525" cap="flat" cmpd="sng" algn="ctr">
+                      <a:solidFill>
+                        <a:srgbClr val="FFFFFF"/>
+                      </a:solidFill>
+                      <a:prstDash val="solid"/>
+                      <a:round/>
+                      <a:headEnd type="none" w="med" len="med"/>
+                      <a:tailEnd type="none" w="med" len="med"/>
+                    </a:lnR>
+                    <a:lnT w="9525" cap="flat" cmpd="sng" algn="ctr">
+                      <a:solidFill>
+                        <a:srgbClr val="FFFFFF"/>
+                      </a:solidFill>
+                      <a:prstDash val="solid"/>
+                      <a:round/>
+                      <a:headEnd type="none" w="med" len="med"/>
+                      <a:tailEnd type="none" w="med" len="med"/>
+                    </a:lnT>
+                    <a:lnB w="9525" cap="flat" cmpd="sng" algn="ctr">
+                      <a:solidFill>
+                        <a:srgbClr val="FFFFFF"/>
+                      </a:solidFill>
+                      <a:prstDash val="solid"/>
+                      <a:round/>
+                      <a:headEnd type="none" w="med" len="med"/>
+                      <a:tailEnd type="none" w="med" len="med"/>
+                    </a:lnB>
+                    <a:solidFill>
+                      <a:srgbClr val="F2F2F2"/>
                     </a:solidFill>
                   </a:tcPr>
                 </a:tc>
@@ -40059,6 +44863,130 @@
           </a:graphicData>
         </a:graphic>
       </p:graphicFrame>
+      <p:sp>
+        <p:nvSpPr>
+          <p:cNvPr id="26" name="Text 23"/>
+          <p:cNvSpPr txBox="1"/>
+          <p:nvPr/>
+        </p:nvSpPr>
+        <p:spPr>
+          <a:xfrm>
+            <a:off x="457200" y="5623560"/>
+            <a:ext cx="6675120" cy="228600"/>
+          </a:xfrm>
+          <a:prstGeom prst="rect">
+            <a:avLst/>
+          </a:prstGeom>
+          <a:noFill/>
+          <a:ln/>
+        </p:spPr>
+        <p:txBody>
+          <a:bodyPr wrap="square" lIns="0" tIns="0" rIns="0" bIns="0" rtlCol="0" anchor="ctr"/>
+          <a:lstStyle/>
+          <a:p>
+            <a:pPr indent="0" marL="0">
+              <a:buNone/>
+            </a:pPr>
+            <a:r>
+              <a:rPr lang="en-US" sz="900" dirty="0">
+                <a:solidFill>
+                  <a:srgbClr val="7F7F7F"/>
+                </a:solidFill>
+              </a:rPr>
+              <a:t>單位：億元；達成率＝年化實績÷目標</a:t>
+            </a:r>
+            <a:endParaRPr lang="en-US" sz="900" dirty="0"/>
+          </a:p>
+        </p:txBody>
+      </p:sp>
+      <p:graphicFrame>
+        <p:nvGraphicFramePr>
+          <p:cNvPr id="27" name="Chart 0" descr=""/>
+          <p:cNvGraphicFramePr/>
+          <p:nvPr/>
+        </p:nvGraphicFramePr>
+        <p:xfrm>
+          <a:off x="7315200" y="2880360"/>
+          <a:ext cx="4434840" cy="2377440"/>
+        </p:xfrm>
+        <a:graphic xmlns:a="http://schemas.openxmlformats.org/drawingml/2006/main">
+          <a:graphicData uri="http://schemas.openxmlformats.org/drawingml/2006/chart">
+            <c:chart xmlns:c="http://schemas.openxmlformats.org/drawingml/2006/chart" r:id="rId1"/>
+          </a:graphicData>
+        </a:graphic>
+      </p:graphicFrame>
+      <p:sp>
+        <p:nvSpPr>
+          <p:cNvPr id="28" name="insight box"/>
+          <p:cNvSpPr/>
+          <p:nvPr/>
+        </p:nvSpPr>
+        <p:spPr>
+          <a:xfrm>
+            <a:off x="7315200" y="5349240"/>
+            <a:ext cx="4434840" cy="822960"/>
+          </a:xfrm>
+          <a:prstGeom prst="rect">
+            <a:avLst/>
+          </a:prstGeom>
+          <a:solidFill>
+            <a:srgbClr val="FFFFFF"/>
+          </a:solidFill>
+          <a:ln w="19050">
+            <a:solidFill>
+              <a:srgbClr val="C00000"/>
+            </a:solidFill>
+            <a:prstDash val="solid"/>
+          </a:ln>
+        </p:spPr>
+      </p:sp>
+      <p:sp>
+        <p:nvSpPr>
+          <p:cNvPr id="29" name="Text 25"/>
+          <p:cNvSpPr txBox="1"/>
+          <p:nvPr/>
+        </p:nvSpPr>
+        <p:spPr>
+          <a:xfrm>
+            <a:off x="7406640" y="5376672"/>
+            <a:ext cx="4251960" cy="777240"/>
+          </a:xfrm>
+          <a:prstGeom prst="rect">
+            <a:avLst/>
+          </a:prstGeom>
+          <a:noFill/>
+          <a:ln/>
+        </p:spPr>
+        <p:txBody>
+          <a:bodyPr wrap="square" lIns="381" tIns="381" rIns="381" bIns="381" rtlCol="0" anchor="ctr"/>
+          <a:lstStyle/>
+          <a:p>
+            <a:pPr indent="0" marL="0">
+              <a:buNone/>
+            </a:pPr>
+            <a:r>
+              <a:rPr lang="en-US" sz="1050" b="1" dirty="0">
+                <a:solidFill>
+                  <a:srgbClr val="C00000"/>
+                </a:solidFill>
+              </a:rPr>
+              <a:t>重點：</a:t>
+            </a:r>
+            <a:pPr indent="0" marL="0">
+              <a:buNone/>
+            </a:pPr>
+            <a:r>
+              <a:rPr lang="en-US" sz="1050" dirty="0">
+                <a:solidFill>
+                  <a:srgbClr val="000000"/>
+                </a:solidFill>
+              </a:rPr>
+              <a:t>全行105.9%由北二區、北一區貢獻（超額5.44億，占淨超額78%）；中區、南區114年達標、115年降至約102%；達標分行僅54%，近半數分行未達目標。</a:t>
+            </a:r>
+            <a:endParaRPr lang="en-US" sz="1050" dirty="0"/>
+          </a:p>
+        </p:txBody>
+      </p:sp>
       <p:sp>
         <p:nvSpPr>
           <p:cNvPr id="25" name="Slide Number Placeholder 0"/>
